--- a/docs/ativo/material_reuniao_orientador_2026-06-15.pptx
+++ b/docs/ativo/material_reuniao_orientador_2026-06-15.pptx
@@ -3280,19 +3280,7 @@
               </a:defRPr>
             </a:pPr>
             <a:r>
-              <a:t>Reuniao:  15 de junho de 2026 (7 dias apos reuniao anterior)</a:t>
-            </a:r>
-          </a:p>
-          <a:p>
-            <a:pPr>
-              <a:defRPr sz="1500">
-                <a:solidFill>
-                  <a:srgbClr val="3D424E"/>
-                </a:solidFill>
-              </a:defRPr>
-            </a:pPr>
-            <a:r>
-              <a:t>Status:  30 dias restantes ate qualificacao (15/jul/2026)</a:t>
+              <a:t>Reuniao:  15 de junho de 2026</a:t>
             </a:r>
           </a:p>
         </p:txBody>
@@ -3577,41 +3565,6 @@
           </a:p>
         </p:txBody>
       </p:sp>
-      <p:sp>
-        <p:nvSpPr>
-          <p:cNvPr id="5" name="TextBox 4"/>
-          <p:cNvSpPr txBox="1"/>
-          <p:nvPr/>
-        </p:nvSpPr>
-        <p:spPr>
-          <a:xfrm>
-            <a:off x="457200" y="6446520"/>
-            <a:ext cx="11430000" cy="365760"/>
-          </a:xfrm>
-          <a:prstGeom prst="rect">
-            <a:avLst/>
-          </a:prstGeom>
-          <a:noFill/>
-        </p:spPr>
-        <p:txBody>
-          <a:bodyPr wrap="none">
-            <a:spAutoFit/>
-          </a:bodyPr>
-          <a:lstStyle/>
-          <a:p>
-            <a:pPr>
-              <a:defRPr sz="1000" i="1">
-                <a:solidFill>
-                  <a:srgbClr val="707682"/>
-                </a:solidFill>
-              </a:defRPr>
-            </a:pPr>
-            <a:r>
-              <a:t>Detalhamento completo em _revisao_critica_corpus_v2.md</a:t>
-            </a:r>
-          </a:p>
-        </p:txBody>
-      </p:sp>
     </p:spTree>
   </p:cSld>
   <p:clrMapOvr>
@@ -4118,7 +4071,7 @@
               </a:defRPr>
             </a:pPr>
             <a:r>
-              <a:t>Pedido 1: estudos de CLIP em fairness no corpus (Track I)</a:t>
+              <a:t>Estudos de CLIP em fairness no corpus (Track I)</a:t>
             </a:r>
           </a:p>
         </p:txBody>
@@ -4988,7 +4941,7 @@
               </a:defRPr>
             </a:pPr>
             <a:r>
-              <a:t>14 fichas no total na Track I + paper original CLIP (Radford 2021). Detalhes na Tabela completa em _revisao_critica_corpus_v2.md</a:t>
+              <a:t>14 fichas no total na Track I + paper original CLIP (Radford 2021).</a:t>
             </a:r>
           </a:p>
         </p:txBody>
@@ -5184,7 +5137,7 @@
               </a:defRPr>
             </a:pPr>
             <a:r>
-              <a:t>Pedido 1 (parte 2): estudos de FiLM em fairness</a:t>
+              <a:t>Estudos de FiLM em fairness</a:t>
             </a:r>
           </a:p>
         </p:txBody>
@@ -5492,7 +5445,7 @@
               </a:defRPr>
             </a:pPr>
             <a:r>
-              <a:t>Documentado em perez_2018.md Secao 11 - 'Aplicar a fairness: NAO mencionado pelos autores - direcao original'</a:t>
+              <a:t>Perez et al. 2018 (AAAI) - paper original nao discute fairness nem na Future Work.</a:t>
             </a:r>
           </a:p>
         </p:txBody>
@@ -5800,41 +5753,6 @@
           </a:p>
         </p:txBody>
       </p:sp>
-      <p:sp>
-        <p:nvSpPr>
-          <p:cNvPr id="5" name="TextBox 4"/>
-          <p:cNvSpPr txBox="1"/>
-          <p:nvPr/>
-        </p:nvSpPr>
-        <p:spPr>
-          <a:xfrm>
-            <a:off x="457200" y="6446520"/>
-            <a:ext cx="11430000" cy="365760"/>
-          </a:xfrm>
-          <a:prstGeom prst="rect">
-            <a:avLst/>
-          </a:prstGeom>
-          <a:noFill/>
-        </p:spPr>
-        <p:txBody>
-          <a:bodyPr wrap="none">
-            <a:spAutoFit/>
-          </a:bodyPr>
-          <a:lstStyle/>
-          <a:p>
-            <a:pPr>
-              <a:defRPr sz="1000" i="1">
-                <a:solidFill>
-                  <a:srgbClr val="707682"/>
-                </a:solidFill>
-              </a:defRPr>
-            </a:pPr>
-            <a:r>
-              <a:t>Detalhes em _revisao_critica_corpus_v2.md Secao 3</a:t>
-            </a:r>
-          </a:p>
-        </p:txBody>
-      </p:sp>
     </p:spTree>
   </p:cSld>
   <p:clrMapOvr>
@@ -7580,7 +7498,7 @@
                             <a:srgbClr val="FFFFFF"/>
                           </a:solidFill>
                         </a:rPr>
-                        <a:t>Base</a:t>
+                        <a:t>Observacoes</a:t>
                       </a:r>
                     </a:p>
                   </a:txBody>
@@ -7666,7 +7584,7 @@
                             <a:srgbClr val="3D424E"/>
                           </a:solidFill>
                         </a:rPr>
-                        <a:t>_pre_qualificacao_narrativa.md</a:t>
+                        <a:t>Narrativa pre-qualificacao consolidada</a:t>
                       </a:r>
                     </a:p>
                   </a:txBody>
@@ -7740,7 +7658,7 @@
                             <a:srgbClr val="3D424E"/>
                           </a:solidFill>
                         </a:rPr>
-                        <a:t>_revisao_critica_corpus_v2.md + 101 fichas</a:t>
+                        <a:t>Pente fino do corpus + 101 fichas</a:t>
                       </a:r>
                     </a:p>
                   </a:txBody>
@@ -7961,41 +7879,6 @@
           </a:graphicData>
         </a:graphic>
       </p:graphicFrame>
-      <p:sp>
-        <p:nvSpPr>
-          <p:cNvPr id="5" name="TextBox 4"/>
-          <p:cNvSpPr txBox="1"/>
-          <p:nvPr/>
-        </p:nvSpPr>
-        <p:spPr>
-          <a:xfrm>
-            <a:off x="457200" y="6446520"/>
-            <a:ext cx="11430000" cy="365760"/>
-          </a:xfrm>
-          <a:prstGeom prst="rect">
-            <a:avLst/>
-          </a:prstGeom>
-          <a:noFill/>
-        </p:spPr>
-        <p:txBody>
-          <a:bodyPr wrap="none">
-            <a:spAutoFit/>
-          </a:bodyPr>
-          <a:lstStyle/>
-          <a:p>
-            <a:pPr>
-              <a:defRPr sz="1000" i="1">
-                <a:solidFill>
-                  <a:srgbClr val="707682"/>
-                </a:solidFill>
-              </a:defRPr>
-            </a:pPr>
-            <a:r>
-              <a:t>Roadmap detalhado em _reuniao_2026-06-15_evolucao.md secao 4.3</a:t>
-            </a:r>
-          </a:p>
-        </p:txBody>
-      </p:sp>
     </p:spTree>
   </p:cSld>
   <p:clrMapOvr>
@@ -8396,41 +8279,6 @@
           </a:p>
         </p:txBody>
       </p:sp>
-      <p:sp>
-        <p:nvSpPr>
-          <p:cNvPr id="5" name="TextBox 4"/>
-          <p:cNvSpPr txBox="1"/>
-          <p:nvPr/>
-        </p:nvSpPr>
-        <p:spPr>
-          <a:xfrm>
-            <a:off x="457200" y="6446520"/>
-            <a:ext cx="11430000" cy="365760"/>
-          </a:xfrm>
-          <a:prstGeom prst="rect">
-            <a:avLst/>
-          </a:prstGeom>
-          <a:noFill/>
-        </p:spPr>
-        <p:txBody>
-          <a:bodyPr wrap="none">
-            <a:spAutoFit/>
-          </a:bodyPr>
-          <a:lstStyle/>
-          <a:p>
-            <a:pPr>
-              <a:defRPr sz="1000" i="1">
-                <a:solidFill>
-                  <a:srgbClr val="707682"/>
-                </a:solidFill>
-              </a:defRPr>
-            </a:pPr>
-            <a:r>
-              <a:t>Cola de bolso completa em _reuniao_2026-06-15_cola.md</a:t>
-            </a:r>
-          </a:p>
-        </p:txBody>
-      </p:sp>
     </p:spTree>
   </p:cSld>
   <p:clrMapOvr>
@@ -9077,7 +8925,7 @@
               </a:defRPr>
             </a:pPr>
             <a:r>
-              <a:t>8 decisoes da reuniao anterior - status</a:t>
+              <a:t>Decisoes da reuniao anterior - status</a:t>
             </a:r>
           </a:p>
         </p:txBody>
@@ -9149,7 +8997,7 @@
                 <a:gridCol w="1645920"/>
                 <a:gridCol w="4937760"/>
               </a:tblGrid>
-              <a:tr h="528320">
+              <a:tr h="679268">
                 <a:tc>
                   <a:txBody>
                     <a:bodyPr/>
@@ -9224,7 +9072,7 @@
                             <a:srgbClr val="FFFFFF"/>
                           </a:solidFill>
                         </a:rPr>
-                        <a:t>Evidencia</a:t>
+                        <a:t>Observacoes</a:t>
                       </a:r>
                     </a:p>
                   </a:txBody>
@@ -9235,7 +9083,7 @@
                   </a:tcPr>
                 </a:tc>
               </a:tr>
-              <a:tr h="528320">
+              <a:tr h="679268">
                 <a:tc>
                   <a:txBody>
                     <a:bodyPr/>
@@ -9298,14 +9146,14 @@
                             <a:srgbClr val="3D424E"/>
                           </a:solidFill>
                         </a:rPr>
-                        <a:t>_validacao_cientifica_pipeline.md</a:t>
+                        <a:t>Validado e detalhado por etapa</a:t>
                       </a:r>
                     </a:p>
                   </a:txBody>
                   <a:tcPr/>
                 </a:tc>
               </a:tr>
-              <a:tr h="528320">
+              <a:tr h="679268">
                 <a:tc>
                   <a:txBody>
                     <a:bodyPr/>
@@ -9368,14 +9216,14 @@
                             <a:srgbClr val="3D424E"/>
                           </a:solidFill>
                         </a:rPr>
-                        <a:t>pereira_2026.md (VERIFIED)</a:t>
+                        <a:t>Leitura integral concluida</a:t>
                       </a:r>
                     </a:p>
                   </a:txBody>
                   <a:tcPr/>
                 </a:tc>
               </a:tr>
-              <a:tr h="528320">
+              <a:tr h="679268">
                 <a:tc>
                   <a:txBody>
                     <a:bodyPr/>
@@ -9438,14 +9286,14 @@
                             <a:srgbClr val="3D424E"/>
                           </a:solidFill>
                         </a:rPr>
-                        <a:t>+46 fichas na R7</a:t>
+                        <a:t>+46 fichas na ultima rodada</a:t>
                       </a:r>
                     </a:p>
                   </a:txBody>
                   <a:tcPr/>
                 </a:tc>
               </a:tr>
-              <a:tr h="528320">
+              <a:tr h="679268">
                 <a:tc>
                   <a:txBody>
                     <a:bodyPr/>
@@ -9508,14 +9356,14 @@
                             <a:srgbClr val="3D424E"/>
                           </a:solidFill>
                         </a:rPr>
-                        <a:t>_corpus_distribuicao_ano.md</a:t>
+                        <a:t>Meta superada</a:t>
                       </a:r>
                     </a:p>
                   </a:txBody>
                   <a:tcPr/>
                 </a:tc>
               </a:tr>
-              <a:tr h="528320">
+              <a:tr h="679268">
                 <a:tc>
                   <a:txBody>
                     <a:bodyPr/>
@@ -9544,7 +9392,7 @@
                             <a:srgbClr val="3D424E"/>
                           </a:solidFill>
                         </a:rPr>
-                        <a:t>Adicionar CLIP/BLIP conditioning</a:t>
+                        <a:t>Adicionar CLIP conditioning</a:t>
                       </a:r>
                     </a:p>
                   </a:txBody>
@@ -9585,7 +9433,7 @@
                   <a:tcPr/>
                 </a:tc>
               </a:tr>
-              <a:tr h="528320">
+              <a:tr h="679272">
                 <a:tc>
                   <a:txBody>
                     <a:bodyPr/>
@@ -9660,7 +9508,7 @@
                             <a:srgbClr val="3D424E"/>
                           </a:solidFill>
                         </a:rPr>
-                        <a:t>30 dias restantes</a:t>
+                        <a:t>LaTeX em andamento</a:t>
                       </a:r>
                     </a:p>
                   </a:txBody>
@@ -9669,162 +9517,6 @@
                       <a:srgbClr val="E8EAED"/>
                     </a:solidFill>
                   </a:tcPr>
-                </a:tc>
-              </a:tr>
-              <a:tr h="528320">
-                <a:tc>
-                  <a:txBody>
-                    <a:bodyPr/>
-                    <a:lstStyle/>
-                    <a:p>
-                      <a:r>
-                        <a:rPr sz="1100">
-                          <a:solidFill>
-                            <a:srgbClr val="3D424E"/>
-                          </a:solidFill>
-                        </a:rPr>
-                        <a:t>7</a:t>
-                      </a:r>
-                    </a:p>
-                  </a:txBody>
-                  <a:tcPr>
-                    <a:solidFill>
-                      <a:srgbClr val="E8EAED"/>
-                    </a:solidFill>
-                  </a:tcPr>
-                </a:tc>
-                <a:tc>
-                  <a:txBody>
-                    <a:bodyPr/>
-                    <a:lstStyle/>
-                    <a:p>
-                      <a:r>
-                        <a:rPr sz="1100">
-                          <a:solidFill>
-                            <a:srgbClr val="3D424E"/>
-                          </a:solidFill>
-                        </a:rPr>
-                        <a:t>Usar LaTeX em Overleaf</a:t>
-                      </a:r>
-                    </a:p>
-                  </a:txBody>
-                  <a:tcPr>
-                    <a:solidFill>
-                      <a:srgbClr val="E8EAED"/>
-                    </a:solidFill>
-                  </a:tcPr>
-                </a:tc>
-                <a:tc>
-                  <a:txBody>
-                    <a:bodyPr/>
-                    <a:lstStyle/>
-                    <a:p>
-                      <a:r>
-                        <a:rPr sz="1100">
-                          <a:solidFill>
-                            <a:srgbClr val="3D424E"/>
-                          </a:solidFill>
-                        </a:rPr>
-                        <a:t>Skeleton OK</a:t>
-                      </a:r>
-                    </a:p>
-                  </a:txBody>
-                  <a:tcPr>
-                    <a:solidFill>
-                      <a:srgbClr val="E8EAED"/>
-                    </a:solidFill>
-                  </a:tcPr>
-                </a:tc>
-                <a:tc>
-                  <a:txBody>
-                    <a:bodyPr/>
-                    <a:lstStyle/>
-                    <a:p>
-                      <a:r>
-                        <a:rPr sz="1100">
-                          <a:solidFill>
-                            <a:srgbClr val="3D424E"/>
-                          </a:solidFill>
-                        </a:rPr>
-                        <a:t>docs/tese/ pronto</a:t>
-                      </a:r>
-                    </a:p>
-                  </a:txBody>
-                  <a:tcPr>
-                    <a:solidFill>
-                      <a:srgbClr val="E8EAED"/>
-                    </a:solidFill>
-                  </a:tcPr>
-                </a:tc>
-              </a:tr>
-              <a:tr h="528320">
-                <a:tc>
-                  <a:txBody>
-                    <a:bodyPr/>
-                    <a:lstStyle/>
-                    <a:p>
-                      <a:r>
-                        <a:rPr sz="1100">
-                          <a:solidFill>
-                            <a:srgbClr val="3D424E"/>
-                          </a:solidFill>
-                        </a:rPr>
-                        <a:t>8</a:t>
-                      </a:r>
-                    </a:p>
-                  </a:txBody>
-                  <a:tcPr/>
-                </a:tc>
-                <a:tc>
-                  <a:txBody>
-                    <a:bodyPr/>
-                    <a:lstStyle/>
-                    <a:p>
-                      <a:r>
-                        <a:rPr sz="1100">
-                          <a:solidFill>
-                            <a:srgbClr val="3D424E"/>
-                          </a:solidFill>
-                        </a:rPr>
-                        <a:t>Storytelling Contexto -&gt; Metodo</a:t>
-                      </a:r>
-                    </a:p>
-                  </a:txBody>
-                  <a:tcPr/>
-                </a:tc>
-                <a:tc>
-                  <a:txBody>
-                    <a:bodyPr/>
-                    <a:lstStyle/>
-                    <a:p>
-                      <a:r>
-                        <a:rPr sz="1100">
-                          <a:solidFill>
-                            <a:srgbClr val="3D424E"/>
-                          </a:solidFill>
-                        </a:rPr>
-                        <a:t>OK</a:t>
-                      </a:r>
-                    </a:p>
-                  </a:txBody>
-                  <a:tcPr/>
-                </a:tc>
-                <a:tc>
-                  <a:txBody>
-                    <a:bodyPr/>
-                    <a:lstStyle/>
-                    <a:p>
-                      <a:r>
-                        <a:rPr sz="1100">
-                          <a:solidFill>
-                            <a:srgbClr val="3D424E"/>
-                          </a:solidFill>
-                        </a:rPr>
-                        <a:t>_pre_qualificacao_narrativa.md ~5500 palavras</a:t>
-                      </a:r>
-                    </a:p>
-                  </a:txBody>
-                  <a:tcPr/>
                 </a:tc>
               </a:tr>
             </a:tbl>
@@ -9861,7 +9553,7 @@
               </a:defRPr>
             </a:pPr>
             <a:r>
-              <a:t>6 itens fechados + 2 em execucao conforme planejado</a:t>
+              <a:t>4 itens fechados + 1 com track dedicada + 1 em execucao conforme planejado</a:t>
             </a:r>
           </a:p>
         </p:txBody>
@@ -10238,7 +9930,7 @@
                   <a:srgbClr val="3D424E"/>
                 </a:solidFill>
               </a:rPr>
-              <a:t>VLM/CLIP/BLIP fairness (14 fichas) - resposta direta ao orientador</a:t>
+              <a:t>VLM/CLIP fairness (14 fichas) - resposta direta ao orientador</a:t>
             </a:r>
           </a:p>
           <a:p>
@@ -10285,41 +9977,6 @@
                 </a:solidFill>
               </a:rPr>
               <a:t>FR fundadores ArcFace/FaceNet/AdaFace (6 fichas) - gap fix</a:t>
-            </a:r>
-          </a:p>
-        </p:txBody>
-      </p:sp>
-      <p:sp>
-        <p:nvSpPr>
-          <p:cNvPr id="5" name="TextBox 4"/>
-          <p:cNvSpPr txBox="1"/>
-          <p:nvPr/>
-        </p:nvSpPr>
-        <p:spPr>
-          <a:xfrm>
-            <a:off x="457200" y="6446520"/>
-            <a:ext cx="11430000" cy="365760"/>
-          </a:xfrm>
-          <a:prstGeom prst="rect">
-            <a:avLst/>
-          </a:prstGeom>
-          <a:noFill/>
-        </p:spPr>
-        <p:txBody>
-          <a:bodyPr wrap="none">
-            <a:spAutoFit/>
-          </a:bodyPr>
-          <a:lstStyle/>
-          <a:p>
-            <a:pPr>
-              <a:defRPr sz="1000" i="1">
-                <a:solidFill>
-                  <a:srgbClr val="707682"/>
-                </a:solidFill>
-              </a:defRPr>
-            </a:pPr>
-            <a:r>
-              <a:t>Detalhes em _corpus_analise_consolidada.md e _corpus_distribuicao_ano.md</a:t>
             </a:r>
           </a:p>
         </p:txBody>
@@ -11053,7 +10710,7 @@
                             <a:srgbClr val="3D424E"/>
                           </a:solidFill>
                         </a:rPr>
-                        <a:t>VLM/CLIP/BLIP fairness</a:t>
+                        <a:t>VLM/CLIP fairness</a:t>
                       </a:r>
                     </a:p>
                   </a:txBody>

--- a/docs/ativo/material_reuniao_orientador_2026-06-15.pptx
+++ b/docs/ativo/material_reuniao_orientador_2026-06-15.pptx
@@ -29,7 +29,6 @@
     <p:sldId id="277" r:id="rId28"/>
     <p:sldId id="278" r:id="rId29"/>
     <p:sldId id="279" r:id="rId30"/>
-    <p:sldId id="280" r:id="rId31"/>
   </p:sldIdLst>
   <p:sldSz cx="12188952" cy="6858000" type="screen4x3"/>
   <p:notesSz cx="6858000" cy="9144000"/>
@@ -3185,7 +3184,7 @@
               </a:defRPr>
             </a:pPr>
             <a:r>
-              <a:t>Evolucao da Semana</a:t>
+              <a:t>Evolução da semana</a:t>
             </a:r>
           </a:p>
           <a:p>
@@ -3197,7 +3196,7 @@
               </a:defRPr>
             </a:pPr>
             <a:r>
-              <a:t>Corpus consolidado (101 fichas) + analise CLIP vs FiLM</a:t>
+              <a:t>Corpus consolidado (101 fichas) e análise CLIP vs FiLM</a:t>
             </a:r>
           </a:p>
           <a:p>
@@ -3209,7 +3208,7 @@
               </a:defRPr>
             </a:pPr>
             <a:r>
-              <a:t>Pos pente fino critico do corpus e resposta a sugestao do orientador</a:t>
+              <a:t>Pente fino crítico do corpus e resposta à sugestão do orientador</a:t>
             </a:r>
           </a:p>
         </p:txBody>
@@ -3268,7 +3267,7 @@
               </a:defRPr>
             </a:pPr>
             <a:r>
-              <a:t>Programa:  Mestrado em Ciencia da Computacao - Unifesp / ICT</a:t>
+              <a:t>Programa:  Mestrado em Ciência da Computação — Unifesp / ICT</a:t>
             </a:r>
           </a:p>
           <a:p>
@@ -3280,7 +3279,7 @@
               </a:defRPr>
             </a:pPr>
             <a:r>
-              <a:t>Reuniao:  15 de junho de 2026</a:t>
+              <a:t>Reunião:  15 de junho de 2026</a:t>
             </a:r>
           </a:p>
         </p:txBody>
@@ -3333,7 +3332,7 @@
               </a:defRPr>
             </a:pPr>
             <a:r>
-              <a:t>Conclusao do pente fino</a:t>
+              <a:t>Conclusão do pente fino</a:t>
             </a:r>
           </a:p>
         </p:txBody>
@@ -3422,7 +3421,7 @@
                   <a:srgbClr val="3D424E"/>
                 </a:solidFill>
               </a:rPr>
-              <a:t>68 fichas (67.3%) alinhadas ou neutras / 26 caminho alternativo / 7 conflitos</a:t>
+              <a:t>68 fichas (67,3%) alinhadas ou neutras / 26 caminho alternativo / 7 conflitos</a:t>
             </a:r>
           </a:p>
           <a:p>
@@ -3445,7 +3444,7 @@
                   <a:srgbClr val="3D424E"/>
                 </a:solidFill>
               </a:rPr>
-              <a:t>Pangelinan 2023 - 'pixel info' explica disparidades -&gt; endereçado via Hipotese H6</a:t>
+              <a:t>Pangelinan 2023 — 'pixel info' explica disparidades, endereçado pela Hipótese H6</a:t>
             </a:r>
           </a:p>
           <a:p>
@@ -3468,7 +3467,7 @@
                   <a:srgbClr val="3D424E"/>
                 </a:solidFill>
               </a:rPr>
-              <a:t>Neto 2025 - balanceamento nao basta -&gt; reconhecido como limitacao + parte do framing</a:t>
+              <a:t>Neto 2025 — balanceamento não basta, reconhecido como limitação e parte do framing</a:t>
             </a:r>
           </a:p>
           <a:p>
@@ -3491,7 +3490,7 @@
                   <a:srgbClr val="3D424E"/>
                 </a:solidFill>
               </a:rPr>
-              <a:t>26 fichas (VLM, CLIP) cobertos via C7 - ablation arquitetural</a:t>
+              <a:t>26 fichas (VLM, CLIP) cobertas pela Contribuição C7 (ablation arquitetural)</a:t>
             </a:r>
           </a:p>
           <a:p>
@@ -3514,7 +3513,7 @@
                   <a:srgbClr val="3D424E"/>
                 </a:solidFill>
               </a:rPr>
-              <a:t>12 fichas forte favoravel fundamentam etapas 1-5 do pipeline</a:t>
+              <a:t>12 fichas forte favorável fundamentam as etapas 1-5 do pipeline</a:t>
             </a:r>
           </a:p>
           <a:p>
@@ -3552,7 +3551,7 @@
                   <a:srgbClr val="1F2A4E"/>
                 </a:solidFill>
               </a:rPr>
-              <a:t>Decisao:  </a:t>
+              <a:t>Decisão:  </a:t>
             </a:r>
             <a:r>
               <a:rPr sz="1600">
@@ -3560,7 +3559,7 @@
                   <a:srgbClr val="3D424E"/>
                 </a:solidFill>
               </a:rPr>
-              <a:t>Corpus esta solido para sustentar a qualificacao</a:t>
+              <a:t>Corpus está sólido para sustentar a qualificação</a:t>
             </a:r>
           </a:p>
         </p:txBody>
@@ -3756,7 +3755,7 @@
               </a:defRPr>
             </a:pPr>
             <a:r>
-              <a:t>O que e o CLIP - confirmando referencia</a:t>
+              <a:t>O que é o CLIP — confirmando a referência</a:t>
             </a:r>
           </a:p>
         </p:txBody>
@@ -3845,7 +3844,7 @@
                   <a:srgbClr val="3D424E"/>
                 </a:solidFill>
               </a:rPr>
-              <a:t>Radford et al. - 'Learning Transferable Visual Models From Natural Language Supervision' ICML 2021</a:t>
+              <a:t>Radford et al. — 'Learning Transferable Visual Models From Natural Language Supervision', ICML 2021</a:t>
             </a:r>
           </a:p>
           <a:p>
@@ -3868,7 +3867,7 @@
                   <a:srgbClr val="3D424E"/>
                 </a:solidFill>
               </a:rPr>
-              <a:t>Dois encoders (vision + text) treinados via contrastive loss em 400M pares (imagem, texto)</a:t>
+              <a:t>Dois encoders (visão e texto) treinados via contrastive loss em 400M pares (imagem, texto)</a:t>
             </a:r>
           </a:p>
           <a:p>
@@ -3891,7 +3890,7 @@
                   <a:srgbClr val="3D424E"/>
                 </a:solidFill>
               </a:rPr>
-              <a:t>Espaco de embedding compartilhado - imagens e textos relacionados ficam proximos</a:t>
+              <a:t>Espaço de embedding compartilhado — imagens e textos relacionados ficam próximos</a:t>
             </a:r>
           </a:p>
           <a:p>
@@ -3914,7 +3913,7 @@
                   <a:srgbClr val="3D424E"/>
                 </a:solidFill>
               </a:rPr>
-              <a:t>Zero-shot classification - basta descricao textual, sem fine-tuning</a:t>
+              <a:t>Classificação zero-shot — basta uma descrição textual, sem fine-tuning</a:t>
             </a:r>
           </a:p>
           <a:p>
@@ -3929,7 +3928,7 @@
                   <a:srgbClr val="1F2A4E"/>
                 </a:solidFill>
               </a:rPr>
-              <a:t>Adocao em fairness:  </a:t>
+              <a:t>Adoção em fairness:  </a:t>
             </a:r>
             <a:r>
               <a:rPr sz="1600">
@@ -3983,7 +3982,7 @@
                   <a:srgbClr val="3D424E"/>
                 </a:solidFill>
               </a:rPr>
-              <a:t>CLIP produz EMBEDDINGS; FiLM e MECANISMO de injecao - sao complementares, nao substitutos</a:t>
+              <a:t>CLIP produz EMBEDDINGS; FiLM é MECANISMO de injeção — são complementares, não substitutos</a:t>
             </a:r>
           </a:p>
         </p:txBody>
@@ -4018,7 +4017,7 @@
               </a:defRPr>
             </a:pPr>
             <a:r>
-              <a:t>Radford et al. 2021 - arxiv.org/abs/2103.00020 - &gt;10k citacoes</a:t>
+              <a:t>Radford et al., ICML 2021 — arxiv.org/abs/2103.00020 — mais de 10 mil citações</a:t>
             </a:r>
           </a:p>
         </p:txBody>
@@ -4218,7 +4217,7 @@
                             <a:srgbClr val="FFFFFF"/>
                           </a:solidFill>
                         </a:rPr>
-                        <a:t>Aplicacao na tese</a:t>
+                        <a:t>Aplicação na tese</a:t>
                       </a:r>
                     </a:p>
                   </a:txBody>
@@ -4241,7 +4240,7 @@
                             <a:srgbClr val="3D424E"/>
                           </a:solidFill>
                         </a:rPr>
-                        <a:t>FairCLIP (Luo 2024)</a:t>
+                        <a:t>FairCLIP (Luo, 2024)</a:t>
                       </a:r>
                     </a:p>
                   </a:txBody>
@@ -4304,7 +4303,7 @@
                             <a:srgbClr val="3D424E"/>
                           </a:solidFill>
                         </a:rPr>
-                        <a:t>Baseline principal C7</a:t>
+                        <a:t>Baseline principal da C7</a:t>
                       </a:r>
                     </a:p>
                   </a:txBody>
@@ -4327,7 +4326,7 @@
                             <a:srgbClr val="3D424E"/>
                           </a:solidFill>
                         </a:rPr>
-                        <a:t>FairerCLIP (Dehdashtian 2024)</a:t>
+                        <a:t>FairerCLIP (Dehdashtian, 2024)</a:t>
                       </a:r>
                     </a:p>
                   </a:txBody>
@@ -4390,7 +4389,7 @@
                             <a:srgbClr val="3D424E"/>
                           </a:solidFill>
                         </a:rPr>
-                        <a:t>Baseline leve C7</a:t>
+                        <a:t>Baseline leve da C7</a:t>
                       </a:r>
                     </a:p>
                   </a:txBody>
@@ -4447,7 +4446,7 @@
                             <a:srgbClr val="3D424E"/>
                           </a:solidFill>
                         </a:rPr>
-                        <a:t>Test-time debiasing</a:t>
+                        <a:t>Debiasing em test-time</a:t>
                       </a:r>
                     </a:p>
                   </a:txBody>
@@ -4483,7 +4482,7 @@
                             <a:srgbClr val="3D424E"/>
                           </a:solidFill>
                         </a:rPr>
-                        <a:t>LoRA-FAIR (Bian 2025)</a:t>
+                        <a:t>LoRA-FAIR (Bian, 2025)</a:t>
                       </a:r>
                     </a:p>
                   </a:txBody>
@@ -4517,24 +4516,24 @@
                             <a:srgbClr val="3D424E"/>
                           </a:solidFill>
                         </a:rPr>
-                        <a:t>LoRA + fairness aggregation</a:t>
-                      </a:r>
-                    </a:p>
-                  </a:txBody>
-                  <a:tcPr/>
-                </a:tc>
-                <a:tc>
-                  <a:txBody>
-                    <a:bodyPr/>
-                    <a:lstStyle/>
-                    <a:p>
-                      <a:r>
-                        <a:rPr sz="1100">
-                          <a:solidFill>
-                            <a:srgbClr val="3D424E"/>
-                          </a:solidFill>
-                        </a:rPr>
-                        <a:t>Track J - C7 ablation</a:t>
+                        <a:t>LoRA + agregação fair</a:t>
+                      </a:r>
+                    </a:p>
+                  </a:txBody>
+                  <a:tcPr/>
+                </a:tc>
+                <a:tc>
+                  <a:txBody>
+                    <a:bodyPr/>
+                    <a:lstStyle/>
+                    <a:p>
+                      <a:r>
+                        <a:rPr sz="1100">
+                          <a:solidFill>
+                            <a:srgbClr val="3D424E"/>
+                          </a:solidFill>
+                        </a:rPr>
+                        <a:t>Track J — ablation da C7</a:t>
                       </a:r>
                     </a:p>
                   </a:txBody>
@@ -4553,7 +4552,7 @@
                             <a:srgbClr val="3D424E"/>
                           </a:solidFill>
                         </a:rPr>
-                        <a:t>FaceScanPaliGemma (AlDahoul 2024)</a:t>
+                        <a:t>FaceScanPaliGemma (AlDahoul, 2024)</a:t>
                       </a:r>
                     </a:p>
                   </a:txBody>
@@ -4595,7 +4594,7 @@
                             <a:srgbClr val="3D424E"/>
                           </a:solidFill>
                         </a:rPr>
-                        <a:t>VLM fine-tuned FairFace</a:t>
+                        <a:t>VLM fine-tuned no FairFace</a:t>
                       </a:r>
                     </a:p>
                   </a:txBody>
@@ -4616,7 +4615,7 @@
                             <a:srgbClr val="3D424E"/>
                           </a:solidFill>
                         </a:rPr>
-                        <a:t>Baseline SOTA 7-class 75.7%</a:t>
+                        <a:t>Baseline SOTA 7-class (75,7%)</a:t>
                       </a:r>
                     </a:p>
                   </a:txBody>
@@ -4639,7 +4638,7 @@
                             <a:srgbClr val="3D424E"/>
                           </a:solidFill>
                         </a:rPr>
-                        <a:t>FairViT (Tian 2024)</a:t>
+                        <a:t>FairViT (Tian, 2024)</a:t>
                       </a:r>
                     </a:p>
                   </a:txBody>
@@ -4743,7 +4742,7 @@
                             <a:srgbClr val="3D424E"/>
                           </a:solidFill>
                         </a:rPr>
-                        <a:t>Analitico</a:t>
+                        <a:t>Solução analítica</a:t>
                       </a:r>
                     </a:p>
                   </a:txBody>
@@ -4813,7 +4812,7 @@
                             <a:srgbClr val="3D424E"/>
                           </a:solidFill>
                         </a:rPr>
-                        <a:t>Projecao subspace</a:t>
+                        <a:t>Projeção em subespaço</a:t>
                       </a:r>
                     </a:p>
                   </a:txBody>
@@ -4900,7 +4899,7 @@
                             <a:srgbClr val="3D424E"/>
                           </a:solidFill>
                         </a:rPr>
-                        <a:t>Contexto Cap 2</a:t>
+                        <a:t>Contexto para o Capítulo 2</a:t>
                       </a:r>
                     </a:p>
                   </a:txBody>
@@ -4941,7 +4940,7 @@
               </a:defRPr>
             </a:pPr>
             <a:r>
-              <a:t>14 fichas no total na Track I + paper original CLIP (Radford 2021).</a:t>
+              <a:t>14 fichas no total na Track I, além do paper original de CLIP (Radford 2021).</a:t>
             </a:r>
           </a:p>
         </p:txBody>
@@ -5084,7 +5083,7 @@
               </a:defRPr>
             </a:pPr>
             <a:r>
-              <a:t>Achado critico: gap na literatura = contribuicao original</a:t>
+              <a:t>Achado crítico: lacuna na literatura = contribuição original</a:t>
             </a:r>
           </a:p>
         </p:txBody>
@@ -5226,7 +5225,7 @@
                   <a:srgbClr val="3D424E"/>
                 </a:solidFill>
               </a:rPr>
-              <a:t>Perez et al. 2018 (AAAI) - VERIFIED no corpus</a:t>
+              <a:t>Perez et al., AAAI 2018 — verificado no corpus</a:t>
             </a:r>
           </a:p>
           <a:p>
@@ -5241,7 +5240,7 @@
                   <a:srgbClr val="1F2A4E"/>
                 </a:solidFill>
               </a:rPr>
-              <a:t>Aplicacao em fairness pelos autores:  </a:t>
+              <a:t>Aplicação em fairness pelos autores:  </a:t>
             </a:r>
             <a:r>
               <a:rPr sz="1600">
@@ -5249,7 +5248,7 @@
                   <a:srgbClr val="3D424E"/>
                 </a:solidFill>
               </a:rPr>
-              <a:t>ZERO - paper nao aborda fairness</a:t>
+              <a:t>Nenhuma — paper não aborda fairness</a:t>
             </a:r>
           </a:p>
           <a:p>
@@ -5264,7 +5263,7 @@
                   <a:srgbClr val="1F2A4E"/>
                 </a:solidFill>
               </a:rPr>
-              <a:t>Adocao em fairness na literatura:  </a:t>
+              <a:t>Adoção em fairness na literatura:  </a:t>
             </a:r>
             <a:r>
               <a:rPr sz="1600">
@@ -5272,7 +5271,7 @@
                   <a:srgbClr val="3D424E"/>
                 </a:solidFill>
               </a:rPr>
-              <a:t>RARA - busca extensiva confirma escassez</a:t>
+              <a:t>Rara — busca extensiva confirma a escassez</a:t>
             </a:r>
           </a:p>
           <a:p>
@@ -5287,7 +5286,7 @@
                   <a:srgbClr val="1F2A4E"/>
                 </a:solidFill>
               </a:rPr>
-              <a:t>Mecanismos analogos no corpus:  </a:t>
+              <a:t>Mecanismos análogos no corpus:  </a:t>
             </a:r>
             <a:r>
               <a:rPr sz="1600">
@@ -5310,7 +5309,7 @@
                   <a:srgbClr val="1F2A4E"/>
                 </a:solidFill>
               </a:rPr>
-              <a:t>  - LAFTR (Madras 2018)  </a:t>
+              <a:t>  — LAFTR (Madras, 2018)  </a:t>
             </a:r>
             <a:r>
               <a:rPr sz="1600">
@@ -5318,7 +5317,7 @@
                   <a:srgbClr val="3D424E"/>
                 </a:solidFill>
               </a:rPr>
-              <a:t>adversarial conditioning (nao FiLM)</a:t>
+              <a:t>adversarial conditioning (não é FiLM)</a:t>
             </a:r>
           </a:p>
           <a:p>
@@ -5333,7 +5332,7 @@
                   <a:srgbClr val="1F2A4E"/>
                 </a:solidFill>
               </a:rPr>
-              <a:t>  - FairViT (Tian 2024)  </a:t>
+              <a:t>  — FairViT (Tian, 2024)  </a:t>
             </a:r>
             <a:r>
               <a:rPr sz="1600">
@@ -5356,7 +5355,7 @@
                   <a:srgbClr val="1F2A4E"/>
                 </a:solidFill>
               </a:rPr>
-              <a:t>  - LoRA-FAIR (Bian 2025)  </a:t>
+              <a:t>  — LoRA-FAIR (Bian, 2025)  </a:t>
             </a:r>
             <a:r>
               <a:rPr sz="1600">
@@ -5402,7 +5401,7 @@
                   <a:srgbClr val="1F2A4E"/>
                 </a:solidFill>
               </a:rPr>
-              <a:t>Implicacao:  </a:t>
+              <a:t>Implicação:  </a:t>
             </a:r>
             <a:r>
               <a:rPr sz="1600">
@@ -5410,7 +5409,7 @@
                   <a:srgbClr val="3D424E"/>
                 </a:solidFill>
               </a:rPr>
-              <a:t>FiLM aplicado a fairness em race classification e DIRECAO ORIGINAL</a:t>
+              <a:t>FiLM aplicado a fairness em classificação racial é uma direção original</a:t>
             </a:r>
           </a:p>
         </p:txBody>
@@ -5445,7 +5444,7 @@
               </a:defRPr>
             </a:pPr>
             <a:r>
-              <a:t>Perez et al. 2018 (AAAI) - paper original nao discute fairness nem na Future Work.</a:t>
+              <a:t>Perez et al., AAAI 2018 — paper original não discute fairness nem na seção de Future Work.</a:t>
             </a:r>
           </a:p>
         </p:txBody>
@@ -5498,7 +5497,7 @@
               </a:defRPr>
             </a:pPr>
             <a:r>
-              <a:t>FiLM vs CLIP - esclarecimento conceitual</a:t>
+              <a:t>FiLM vs CLIP — esclarecimento conceitual</a:t>
             </a:r>
           </a:p>
         </p:txBody>
@@ -5579,7 +5578,7 @@
                   <a:srgbClr val="1F2A4E"/>
                 </a:solidFill>
               </a:rPr>
-              <a:t>Confusao categorial:  </a:t>
+              <a:t>Confusão categorial:  </a:t>
             </a:r>
             <a:r>
               <a:rPr sz="1600">
@@ -5587,7 +5586,7 @@
                   <a:srgbClr val="3D424E"/>
                 </a:solidFill>
               </a:rPr>
-              <a:t>FiLM e CLIP NAO sao objetos comparaveis no mesmo nivel</a:t>
+              <a:t>FiLM e CLIP não são objetos comparáveis no mesmo nível</a:t>
             </a:r>
           </a:p>
           <a:p>
@@ -5602,7 +5601,7 @@
                   <a:srgbClr val="1F2A4E"/>
                 </a:solidFill>
               </a:rPr>
-              <a:t>FiLM (Perez 2018):  </a:t>
+              <a:t>FiLM (Perez, 2018):  </a:t>
             </a:r>
             <a:r>
               <a:rPr sz="1600">
@@ -5610,7 +5609,7 @@
                   <a:srgbClr val="3D424E"/>
                 </a:solidFill>
               </a:rPr>
-              <a:t>MECANISMO / camada que modula features via gamma*x + beta</a:t>
+              <a:t>MECANISMO / camada que modula features via γ·x + β</a:t>
             </a:r>
           </a:p>
           <a:p>
@@ -5625,7 +5624,7 @@
                   <a:srgbClr val="1F2A4E"/>
                 </a:solidFill>
               </a:rPr>
-              <a:t>CLIP (Radford 2021):  </a:t>
+              <a:t>CLIP (Radford, 2021):  </a:t>
             </a:r>
             <a:r>
               <a:rPr sz="1600">
@@ -5648,7 +5647,7 @@
                   <a:srgbClr val="1F2A4E"/>
                 </a:solidFill>
               </a:rPr>
-              <a:t>Relacao real:  </a:t>
+              <a:t>Relação real:  </a:t>
             </a:r>
             <a:r>
               <a:rPr sz="1600">
@@ -5656,7 +5655,7 @@
                   <a:srgbClr val="3D424E"/>
                 </a:solidFill>
               </a:rPr>
-              <a:t>CLIP fornece o SINAL; FiLM (ou cross-attn) e UMA forma de injetar esse sinal</a:t>
+              <a:t>CLIP fornece o SINAL; FiLM (ou cross-attention) é uma forma de injetar esse sinal</a:t>
             </a:r>
           </a:p>
           <a:p>
@@ -5694,7 +5693,7 @@
                   <a:srgbClr val="1F2A4E"/>
                 </a:solidFill>
               </a:rPr>
-              <a:t>Status 2024-2026:  </a:t>
+              <a:t>Status em 2024-2026:  </a:t>
             </a:r>
             <a:r>
               <a:rPr sz="1600">
@@ -5702,7 +5701,7 @@
                   <a:srgbClr val="3D424E"/>
                 </a:solidFill>
               </a:rPr>
-              <a:t>TODOS continuam padrao na literatura - idade nao implica obsolescencia</a:t>
+              <a:t>Todos continuam padrão na literatura — idade não implica obsolescência</a:t>
             </a:r>
           </a:p>
           <a:p>
@@ -5740,7 +5739,7 @@
                   <a:srgbClr val="1F2A4E"/>
                 </a:solidFill>
               </a:rPr>
-              <a:t>Combinacao valida:  </a:t>
+              <a:t>Combinação válida:  </a:t>
             </a:r>
             <a:r>
               <a:rPr sz="1600">
@@ -5748,7 +5747,7 @@
                   <a:srgbClr val="3D424E"/>
                 </a:solidFill>
               </a:rPr>
-              <a:t>Stable Diffusion = CLIP embeddings + cross-attention. Analogo: CLIP + FiLM e possivel</a:t>
+              <a:t>Stable Diffusion = CLIP embeddings + cross-attention. Análogo: CLIP + FiLM é possível</a:t>
             </a:r>
           </a:p>
         </p:txBody>
@@ -5891,7 +5890,7 @@
               </a:defRPr>
             </a:pPr>
             <a:r>
-              <a:t>Contribuicao C7 - ablation arquitetural no Cap 2</a:t>
+              <a:t>Contribuição C7 — ablation arquitetural no Capítulo 2</a:t>
             </a:r>
           </a:p>
         </p:txBody>
@@ -5944,7 +5943,7 @@
               </a:defRPr>
             </a:pPr>
             <a:r>
-              <a:t>C7 - 5 configuracoes comparadas</a:t>
+              <a:t>C7 — 5 configurações comparadas</a:t>
             </a:r>
           </a:p>
         </p:txBody>
@@ -6226,7 +6225,7 @@
                             <a:srgbClr val="3D424E"/>
                           </a:solidFill>
                         </a:rPr>
-                        <a:t>MST 10-dim -&gt; gamma, beta</a:t>
+                        <a:t>MST 10-dim → γ, β</a:t>
                       </a:r>
                     </a:p>
                   </a:txBody>
@@ -6247,7 +6246,7 @@
                             <a:srgbClr val="3D424E"/>
                           </a:solidFill>
                         </a:rPr>
-                        <a:t>Nossa contribuicao central</a:t>
+                        <a:t>Nossa contribuição central</a:t>
                       </a:r>
                     </a:p>
                   </a:txBody>
@@ -6304,24 +6303,24 @@
                             <a:srgbClr val="3D424E"/>
                           </a:solidFill>
                         </a:rPr>
-                        <a:t>CLIP-text embedding -&gt; gamma, beta</a:t>
-                      </a:r>
-                    </a:p>
-                  </a:txBody>
-                  <a:tcPr/>
-                </a:tc>
-                <a:tc>
-                  <a:txBody>
-                    <a:bodyPr/>
-                    <a:lstStyle/>
-                    <a:p>
-                      <a:r>
-                        <a:rPr sz="1100">
-                          <a:solidFill>
-                            <a:srgbClr val="3D424E"/>
-                          </a:solidFill>
-                        </a:rPr>
-                        <a:t>Hibrido CLIP+FiLM</a:t>
+                        <a:t>Embedding CLIP-text → γ, β</a:t>
+                      </a:r>
+                    </a:p>
+                  </a:txBody>
+                  <a:tcPr/>
+                </a:tc>
+                <a:tc>
+                  <a:txBody>
+                    <a:bodyPr/>
+                    <a:lstStyle/>
+                    <a:p>
+                      <a:r>
+                        <a:rPr sz="1100">
+                          <a:solidFill>
+                            <a:srgbClr val="3D424E"/>
+                          </a:solidFill>
+                        </a:rPr>
+                        <a:t>Híbrido CLIP + FiLM</a:t>
                       </a:r>
                     </a:p>
                   </a:txBody>
@@ -6357,41 +6356,41 @@
                             <a:srgbClr val="3D424E"/>
                           </a:solidFill>
                         </a:rPr>
-                        <a:t>ConvNeXt-T + cross-attn</a:t>
-                      </a:r>
-                    </a:p>
-                  </a:txBody>
-                  <a:tcPr/>
-                </a:tc>
-                <a:tc>
-                  <a:txBody>
-                    <a:bodyPr/>
-                    <a:lstStyle/>
-                    <a:p>
-                      <a:r>
-                        <a:rPr sz="1100">
-                          <a:solidFill>
-                            <a:srgbClr val="3D424E"/>
-                          </a:solidFill>
-                        </a:rPr>
-                        <a:t>CLIP-text embedding via attention</a:t>
-                      </a:r>
-                    </a:p>
-                  </a:txBody>
-                  <a:tcPr/>
-                </a:tc>
-                <a:tc>
-                  <a:txBody>
-                    <a:bodyPr/>
-                    <a:lstStyle/>
-                    <a:p>
-                      <a:r>
-                        <a:rPr sz="1100">
-                          <a:solidFill>
-                            <a:srgbClr val="3D424E"/>
-                          </a:solidFill>
-                        </a:rPr>
-                        <a:t>FairCLIP-style</a:t>
+                        <a:t>ConvNeXt-T + cross-attention</a:t>
+                      </a:r>
+                    </a:p>
+                  </a:txBody>
+                  <a:tcPr/>
+                </a:tc>
+                <a:tc>
+                  <a:txBody>
+                    <a:bodyPr/>
+                    <a:lstStyle/>
+                    <a:p>
+                      <a:r>
+                        <a:rPr sz="1100">
+                          <a:solidFill>
+                            <a:srgbClr val="3D424E"/>
+                          </a:solidFill>
+                        </a:rPr>
+                        <a:t>Embedding CLIP-text via attention</a:t>
+                      </a:r>
+                    </a:p>
+                  </a:txBody>
+                  <a:tcPr/>
+                </a:tc>
+                <a:tc>
+                  <a:txBody>
+                    <a:bodyPr/>
+                    <a:lstStyle/>
+                    <a:p>
+                      <a:r>
+                        <a:rPr sz="1100">
+                          <a:solidFill>
+                            <a:srgbClr val="3D424E"/>
+                          </a:solidFill>
+                        </a:rPr>
+                        <a:t>Estilo FairCLIP</a:t>
                       </a:r>
                     </a:p>
                   </a:txBody>
@@ -6461,7 +6460,7 @@
                             <a:srgbClr val="3D424E"/>
                           </a:solidFill>
                         </a:rPr>
-                        <a:t>LoRA-FAIR (Bian 2025)</a:t>
+                        <a:t>LoRA-FAIR (Bian, 2025)</a:t>
                       </a:r>
                     </a:p>
                   </a:txBody>
@@ -6502,7 +6501,7 @@
               </a:defRPr>
             </a:pPr>
             <a:r>
-              <a:t>Se CLIP superar FiLM -&gt; reportamos como informacao util (nao invalidacao). Honra recomendacao do orientador.</a:t>
+              <a:t>Se CLIP superar FiLM, reportamos como informação útil — não como invalidação. Honra a recomendação do orientador.</a:t>
             </a:r>
           </a:p>
         </p:txBody>
@@ -6636,7 +6635,7 @@
                   <a:srgbClr val="1F2A4E"/>
                 </a:solidFill>
               </a:rPr>
-              <a:t>Adequacao a baixa-dim:  </a:t>
+              <a:t>Adequação a baixa dimensão:  </a:t>
             </a:r>
             <a:r>
               <a:rPr sz="1600">
@@ -6644,7 +6643,7 @@
                   <a:srgbClr val="3D424E"/>
                 </a:solidFill>
               </a:rPr>
-              <a:t>MST e vetor 10-dim - FiLM e o sweet spot</a:t>
+              <a:t>MST é vetor 10-dim — FiLM é o ponto ótimo</a:t>
             </a:r>
           </a:p>
           <a:p>
@@ -6659,7 +6658,7 @@
                   <a:srgbClr val="1F2A4E"/>
                 </a:solidFill>
               </a:rPr>
-              <a:t>Custo parametrico:  </a:t>
+              <a:t>Custo paramétrico:  </a:t>
             </a:r>
             <a:r>
               <a:rPr sz="1600">
@@ -6667,7 +6666,7 @@
                   <a:srgbClr val="3D424E"/>
                 </a:solidFill>
               </a:rPr>
-              <a:t>~1% sobre backbone (vs ~3% cross-attention equivalente)</a:t>
+              <a:t>~1% sobre o backbone (vs. ~3% de cross-attention equivalente)</a:t>
             </a:r>
           </a:p>
           <a:p>
@@ -6690,7 +6689,7 @@
                   <a:srgbClr val="3D424E"/>
                 </a:solidFill>
               </a:rPr>
-              <a:t>gamma e beta sao por canal e visualizaveis</a:t>
+              <a:t>γ e β são por canal e podem ser visualizados</a:t>
             </a:r>
           </a:p>
           <a:p>
@@ -6713,7 +6712,7 @@
                   <a:srgbClr val="3D424E"/>
                 </a:solidFill>
               </a:rPr>
-              <a:t>Substitui parametros do BatchNorm - 'conditional BatchNorm'</a:t>
+              <a:t>Substitui parâmetros do BatchNorm — 'conditional BatchNorm'</a:t>
             </a:r>
           </a:p>
           <a:p>
@@ -6728,7 +6727,7 @@
                   <a:srgbClr val="1F2A4E"/>
                 </a:solidFill>
               </a:rPr>
-              <a:t>Compatibilidade C7:  </a:t>
+              <a:t>Compatibilidade com a C7:  </a:t>
             </a:r>
             <a:r>
               <a:rPr sz="1600">
@@ -6736,7 +6735,7 @@
                   <a:srgbClr val="3D424E"/>
                 </a:solidFill>
               </a:rPr>
-              <a:t>Ablation limpa - liga/desliga FiLM mantendo backbone fixo</a:t>
+              <a:t>Ablation limpa — liga ou desliga o FiLM mantendo o backbone fixo</a:t>
             </a:r>
           </a:p>
           <a:p>
@@ -6782,7 +6781,7 @@
                   <a:srgbClr val="3D424E"/>
                 </a:solidFill>
               </a:rPr>
-              <a:t>FiLM em fairness e direcao nao explorada - vira contribuicao</a:t>
+              <a:t>FiLM em fairness é direção pouco explorada — vira contribuição</a:t>
             </a:r>
           </a:p>
         </p:txBody>
@@ -6817,7 +6816,7 @@
               </a:defRPr>
             </a:pPr>
             <a:r>
-              <a:t>Perez et al. 2018 (AAAI) + Schumann 2023 (MST) + Pereira 2026 (SkinToneNet) ancoragem direta</a:t>
+              <a:t>Perez et al. (AAAI 2018) + Schumann (2023, MST) + Pereira (2026, SkinToneNet) — ancoragem direta</a:t>
             </a:r>
           </a:p>
         </p:txBody>
@@ -6870,7 +6869,7 @@
               </a:defRPr>
             </a:pPr>
             <a:r>
-              <a:t>Agenda da reuniao</a:t>
+              <a:t>Agenda da reunião</a:t>
             </a:r>
           </a:p>
         </p:txBody>
@@ -6959,7 +6958,7 @@
                   <a:srgbClr val="3D424E"/>
                 </a:solidFill>
               </a:rPr>
-              <a:t>Status das 8 decisoes da reuniao anterior (08/jun)</a:t>
+              <a:t>Status das decisões da reunião anterior (08/jun)</a:t>
             </a:r>
           </a:p>
           <a:p>
@@ -6982,7 +6981,7 @@
                   <a:srgbClr val="3D424E"/>
                 </a:solidFill>
               </a:rPr>
-              <a:t>Corpus consolidado: 101 fichas em 11 tracks tematicos</a:t>
+              <a:t>Corpus consolidado: 101 fichas em 11 tracks temáticos</a:t>
             </a:r>
           </a:p>
           <a:p>
@@ -7005,7 +7004,7 @@
                   <a:srgbClr val="3D424E"/>
                 </a:solidFill>
               </a:rPr>
-              <a:t>Pente fino critico do corpus (classificacao por impacto)</a:t>
+              <a:t>Pente fino crítico do corpus (classificação por impacto)</a:t>
             </a:r>
           </a:p>
           <a:p>
@@ -7028,7 +7027,7 @@
                   <a:srgbClr val="3D424E"/>
                 </a:solidFill>
               </a:rPr>
-              <a:t>Resposta a sugestao do orientador: CLIP (Contrastive Language-Image Pre-training)</a:t>
+              <a:t>Resposta à sugestão do orientador: CLIP (Contrastive Language-Image Pre-training)</a:t>
             </a:r>
           </a:p>
           <a:p>
@@ -7051,7 +7050,7 @@
                   <a:srgbClr val="3D424E"/>
                 </a:solidFill>
               </a:rPr>
-              <a:t>FiLM em fairness: gap na literatura como contribuicao original</a:t>
+              <a:t>FiLM em fairness: lacuna na literatura como contribuição original</a:t>
             </a:r>
           </a:p>
           <a:p>
@@ -7074,7 +7073,7 @@
                   <a:srgbClr val="3D424E"/>
                 </a:solidFill>
               </a:rPr>
-              <a:t>Proposta: Contribuicao C7 - ablation arquitetural</a:t>
+              <a:t>Proposta: Contribuição C7 — ablation arquitetural</a:t>
             </a:r>
           </a:p>
           <a:p>
@@ -7097,30 +7096,7 @@
                   <a:srgbClr val="3D424E"/>
                 </a:solidFill>
               </a:rPr>
-              <a:t>Roadmap LaTeX 30 dias ate qualificacao</a:t>
-            </a:r>
-          </a:p>
-          <a:p>
-            <a:pPr>
-              <a:spcAft>
-                <a:spcPts val="800"/>
-              </a:spcAft>
-            </a:pPr>
-            <a:r>
-              <a:rPr sz="1600" b="1">
-                <a:solidFill>
-                  <a:srgbClr val="1F2A4E"/>
-                </a:solidFill>
-              </a:rPr>
-              <a:t>8.  </a:t>
-            </a:r>
-            <a:r>
-              <a:rPr sz="1600">
-                <a:solidFill>
-                  <a:srgbClr val="3D424E"/>
-                </a:solidFill>
-              </a:rPr>
-              <a:t>Discussao e proximos passos</a:t>
+              <a:t>Plano de escrita e decisões a alinhar</a:t>
             </a:r>
           </a:p>
         </p:txBody>
@@ -7155,7 +7131,7 @@
               </a:defRPr>
             </a:pPr>
             <a:r>
-              <a:t>Tempo estimado: 12-15 min de apresentacao + Q&amp;A</a:t>
+              <a:t>Tempo estimado: 12-15 min de apresentação + discussão</a:t>
             </a:r>
           </a:p>
         </p:txBody>
@@ -7286,7 +7262,7 @@
               </a:defRPr>
             </a:pPr>
             <a:r>
-              <a:t>Roadmap LaTeX</a:t>
+              <a:t>Plano de escrita e decisões</a:t>
             </a:r>
           </a:p>
           <a:p>
@@ -7298,7 +7274,7 @@
               </a:defRPr>
             </a:pPr>
             <a:r>
-              <a:t>30 dias ate 15/jul/2026</a:t>
+              <a:t>Cronograma das 4 semanas e pontos a alinhar</a:t>
             </a:r>
           </a:p>
         </p:txBody>
@@ -7351,7 +7327,7 @@
               </a:defRPr>
             </a:pPr>
             <a:r>
-              <a:t>Cronograma de execucao - 4 semanas</a:t>
+              <a:t>Plano de escrita — 4 semanas até 15/jul/2026</a:t>
             </a:r>
           </a:p>
         </p:txBody>
@@ -7456,7 +7432,7 @@
                             <a:srgbClr val="FFFFFF"/>
                           </a:solidFill>
                         </a:rPr>
-                        <a:t>Periodo</a:t>
+                        <a:t>Período</a:t>
                       </a:r>
                     </a:p>
                   </a:txBody>
@@ -7477,7 +7453,7 @@
                             <a:srgbClr val="FFFFFF"/>
                           </a:solidFill>
                         </a:rPr>
-                        <a:t>Entregavel</a:t>
+                        <a:t>Entregável</a:t>
                       </a:r>
                     </a:p>
                   </a:txBody>
@@ -7498,7 +7474,7 @@
                             <a:srgbClr val="FFFFFF"/>
                           </a:solidFill>
                         </a:rPr>
-                        <a:t>Observacoes</a:t>
+                        <a:t>Observações</a:t>
                       </a:r>
                     </a:p>
                   </a:txBody>
@@ -7563,7 +7539,7 @@
                             <a:srgbClr val="3D424E"/>
                           </a:solidFill>
                         </a:rPr>
-                        <a:t>Setup Overleaf + Cap 1 (Introducao)</a:t>
+                        <a:t>Setup do ambiente + Capítulo 1 (Introdução)</a:t>
                       </a:r>
                     </a:p>
                   </a:txBody>
@@ -7584,7 +7560,7 @@
                             <a:srgbClr val="3D424E"/>
                           </a:solidFill>
                         </a:rPr>
-                        <a:t>Narrativa pre-qualificacao consolidada</a:t>
+                        <a:t>Narrativa pré-qualificação consolidada</a:t>
                       </a:r>
                     </a:p>
                   </a:txBody>
@@ -7641,24 +7617,24 @@
                             <a:srgbClr val="3D424E"/>
                           </a:solidFill>
                         </a:rPr>
-                        <a:t>Cap 2 (Revisao - 11 tracks)</a:t>
-                      </a:r>
-                    </a:p>
-                  </a:txBody>
-                  <a:tcPr/>
-                </a:tc>
-                <a:tc>
-                  <a:txBody>
-                    <a:bodyPr/>
-                    <a:lstStyle/>
-                    <a:p>
-                      <a:r>
-                        <a:rPr sz="1100">
-                          <a:solidFill>
-                            <a:srgbClr val="3D424E"/>
-                          </a:solidFill>
-                        </a:rPr>
-                        <a:t>Pente fino do corpus + 101 fichas</a:t>
+                        <a:t>Capítulo 2 (Revisão — 11 tracks)</a:t>
+                      </a:r>
+                    </a:p>
+                  </a:txBody>
+                  <a:tcPr/>
+                </a:tc>
+                <a:tc>
+                  <a:txBody>
+                    <a:bodyPr/>
+                    <a:lstStyle/>
+                    <a:p>
+                      <a:r>
+                        <a:rPr sz="1100">
+                          <a:solidFill>
+                            <a:srgbClr val="3D424E"/>
+                          </a:solidFill>
+                        </a:rPr>
+                        <a:t>Pente fino do corpus e 101 fichas</a:t>
                       </a:r>
                     </a:p>
                   </a:txBody>
@@ -7711,24 +7687,24 @@
                             <a:srgbClr val="3D424E"/>
                           </a:solidFill>
                         </a:rPr>
-                        <a:t>Cap 3 (Objetivos) + Cap 4 (Metodologia)</a:t>
-                      </a:r>
-                    </a:p>
-                  </a:txBody>
-                  <a:tcPr/>
-                </a:tc>
-                <a:tc>
-                  <a:txBody>
-                    <a:bodyPr/>
-                    <a:lstStyle/>
-                    <a:p>
-                      <a:r>
-                        <a:rPr sz="1100">
-                          <a:solidFill>
-                            <a:srgbClr val="3D424E"/>
-                          </a:solidFill>
-                        </a:rPr>
-                        <a:t>Pipeline 6 etapas validado</a:t>
+                        <a:t>Capítulo 3 (Objetivos) e Capítulo 4 (Metodologia)</a:t>
+                      </a:r>
+                    </a:p>
+                  </a:txBody>
+                  <a:tcPr/>
+                </a:tc>
+                <a:tc>
+                  <a:txBody>
+                    <a:bodyPr/>
+                    <a:lstStyle/>
+                    <a:p>
+                      <a:r>
+                        <a:rPr sz="1100">
+                          <a:solidFill>
+                            <a:srgbClr val="3D424E"/>
+                          </a:solidFill>
+                        </a:rPr>
+                        <a:t>Pipeline de 6 etapas validado</a:t>
                       </a:r>
                     </a:p>
                   </a:txBody>
@@ -7781,24 +7757,24 @@
                             <a:srgbClr val="3D424E"/>
                           </a:solidFill>
                         </a:rPr>
-                        <a:t>Cap 5 (Cronograma) + revisao final</a:t>
-                      </a:r>
-                    </a:p>
-                  </a:txBody>
-                  <a:tcPr/>
-                </a:tc>
-                <a:tc>
-                  <a:txBody>
-                    <a:bodyPr/>
-                    <a:lstStyle/>
-                    <a:p>
-                      <a:r>
-                        <a:rPr sz="1100">
-                          <a:solidFill>
-                            <a:srgbClr val="3D424E"/>
-                          </a:solidFill>
-                        </a:rPr>
-                        <a:t>Integracao + ABNT</a:t>
+                        <a:t>Capítulo 5 (Cronograma) e revisão final</a:t>
+                      </a:r>
+                    </a:p>
+                  </a:txBody>
+                  <a:tcPr/>
+                </a:tc>
+                <a:tc>
+                  <a:txBody>
+                    <a:bodyPr/>
+                    <a:lstStyle/>
+                    <a:p>
+                      <a:r>
+                        <a:rPr sz="1100">
+                          <a:solidFill>
+                            <a:srgbClr val="3D424E"/>
+                          </a:solidFill>
+                        </a:rPr>
+                        <a:t>Integração e ABNT</a:t>
                       </a:r>
                     </a:p>
                   </a:txBody>
@@ -7817,7 +7793,7 @@
                             <a:srgbClr val="3D424E"/>
                           </a:solidFill>
                         </a:rPr>
-                        <a:t>Buffer</a:t>
+                        <a:t>Folga</a:t>
                       </a:r>
                     </a:p>
                   </a:txBody>
@@ -7851,24 +7827,24 @@
                             <a:srgbClr val="3D424E"/>
                           </a:solidFill>
                         </a:rPr>
-                        <a:t>Ajustes finais + submissao</a:t>
-                      </a:r>
-                    </a:p>
-                  </a:txBody>
-                  <a:tcPr/>
-                </a:tc>
-                <a:tc>
-                  <a:txBody>
-                    <a:bodyPr/>
-                    <a:lstStyle/>
-                    <a:p>
-                      <a:r>
-                        <a:rPr sz="1100">
-                          <a:solidFill>
-                            <a:srgbClr val="3D424E"/>
-                          </a:solidFill>
-                        </a:rPr>
-                        <a:t>-</a:t>
+                        <a:t>Ajustes finais e submissão</a:t>
+                      </a:r>
+                    </a:p>
+                  </a:txBody>
+                  <a:tcPr/>
+                </a:tc>
+                <a:tc>
+                  <a:txBody>
+                    <a:bodyPr/>
+                    <a:lstStyle/>
+                    <a:p>
+                      <a:r>
+                        <a:rPr sz="1100">
+                          <a:solidFill>
+                            <a:srgbClr val="3D424E"/>
+                          </a:solidFill>
+                        </a:rPr>
+                        <a:t>—</a:t>
                       </a:r>
                     </a:p>
                   </a:txBody>
@@ -7888,6 +7864,543 @@
 </file>
 
 <file path=ppt/slides/slide22.xml><?xml version="1.0" encoding="utf-8"?>
+<p:sld xmlns:a="http://schemas.openxmlformats.org/drawingml/2006/main" xmlns:p="http://schemas.openxmlformats.org/presentationml/2006/main" xmlns:r="http://schemas.openxmlformats.org/officeDocument/2006/relationships">
+  <p:cSld>
+    <p:spTree>
+      <p:nvGrpSpPr>
+        <p:cNvPr id="1" name=""/>
+        <p:cNvGrpSpPr/>
+        <p:nvPr/>
+      </p:nvGrpSpPr>
+      <p:grpSpPr/>
+      <p:sp>
+        <p:nvSpPr>
+          <p:cNvPr id="2" name="TextBox 1"/>
+          <p:cNvSpPr txBox="1"/>
+          <p:nvPr/>
+        </p:nvSpPr>
+        <p:spPr>
+          <a:xfrm>
+            <a:off x="457200" y="365760"/>
+            <a:ext cx="11430000" cy="822960"/>
+          </a:xfrm>
+          <a:prstGeom prst="rect">
+            <a:avLst/>
+          </a:prstGeom>
+          <a:noFill/>
+        </p:spPr>
+        <p:txBody>
+          <a:bodyPr wrap="square">
+            <a:spAutoFit/>
+          </a:bodyPr>
+          <a:lstStyle/>
+          <a:p>
+            <a:pPr>
+              <a:defRPr sz="2600" b="1">
+                <a:solidFill>
+                  <a:srgbClr val="1F2A4E"/>
+                </a:solidFill>
+              </a:defRPr>
+            </a:pPr>
+            <a:r>
+              <a:t>Decisões a alinhar hoje</a:t>
+            </a:r>
+          </a:p>
+        </p:txBody>
+      </p:sp>
+      <p:sp>
+        <p:nvSpPr>
+          <p:cNvPr id="3" name="Rectangle 2"/>
+          <p:cNvSpPr/>
+          <p:nvPr/>
+        </p:nvSpPr>
+        <p:spPr>
+          <a:xfrm>
+            <a:off x="457200" y="1143000"/>
+            <a:ext cx="11430000" cy="36576"/>
+          </a:xfrm>
+          <a:prstGeom prst="rect">
+            <a:avLst/>
+          </a:prstGeom>
+          <a:solidFill>
+            <a:srgbClr val="1F2A4E"/>
+          </a:solidFill>
+          <a:ln>
+            <a:noFill/>
+          </a:ln>
+        </p:spPr>
+        <p:style>
+          <a:lnRef idx="1">
+            <a:schemeClr val="accent1"/>
+          </a:lnRef>
+          <a:fillRef idx="3">
+            <a:schemeClr val="accent1"/>
+          </a:fillRef>
+          <a:effectRef idx="2">
+            <a:schemeClr val="accent1"/>
+          </a:effectRef>
+          <a:fontRef idx="minor">
+            <a:schemeClr val="lt1"/>
+          </a:fontRef>
+        </p:style>
+        <p:txBody>
+          <a:bodyPr rtlCol="0" anchor="ctr"/>
+          <a:lstStyle/>
+          <a:p>
+            <a:pPr algn="ctr"/>
+          </a:p>
+        </p:txBody>
+      </p:sp>
+      <p:sp>
+        <p:nvSpPr>
+          <p:cNvPr id="4" name="TextBox 3"/>
+          <p:cNvSpPr txBox="1"/>
+          <p:nvPr/>
+        </p:nvSpPr>
+        <p:spPr>
+          <a:xfrm>
+            <a:off x="457200" y="1371600"/>
+            <a:ext cx="11430000" cy="4937760"/>
+          </a:xfrm>
+          <a:prstGeom prst="rect">
+            <a:avLst/>
+          </a:prstGeom>
+          <a:noFill/>
+        </p:spPr>
+        <p:txBody>
+          <a:bodyPr wrap="square">
+            <a:spAutoFit/>
+          </a:bodyPr>
+          <a:lstStyle/>
+          <a:p>
+            <a:pPr>
+              <a:spcAft>
+                <a:spcPts val="800"/>
+              </a:spcAft>
+            </a:pPr>
+            <a:r>
+              <a:rPr sz="1600" b="1">
+                <a:solidFill>
+                  <a:srgbClr val="1F2A4E"/>
+                </a:solidFill>
+              </a:rPr>
+              <a:t>1.  </a:t>
+            </a:r>
+            <a:r>
+              <a:rPr sz="1600">
+                <a:solidFill>
+                  <a:srgbClr val="3D424E"/>
+                </a:solidFill>
+              </a:rPr>
+              <a:t>Concorda em manter FiLM como mecanismo central e CLIP-conditioning como C7 (ablation)?</a:t>
+            </a:r>
+          </a:p>
+          <a:p>
+            <a:pPr>
+              <a:spcAft>
+                <a:spcPts val="800"/>
+              </a:spcAft>
+            </a:pPr>
+            <a:r>
+              <a:rPr sz="1600" b="1">
+                <a:solidFill>
+                  <a:srgbClr val="1F2A4E"/>
+                </a:solidFill>
+              </a:rPr>
+              <a:t>2.  </a:t>
+            </a:r>
+            <a:r>
+              <a:rPr sz="1600">
+                <a:solidFill>
+                  <a:srgbClr val="3D424E"/>
+                </a:solidFill>
+              </a:rPr>
+              <a:t>Os 11 tracks estão bem cobertos? Algum precisa de mais fichas?</a:t>
+            </a:r>
+          </a:p>
+          <a:p>
+            <a:pPr>
+              <a:spcAft>
+                <a:spcPts val="800"/>
+              </a:spcAft>
+            </a:pPr>
+            <a:r>
+              <a:rPr sz="1600" b="1">
+                <a:solidFill>
+                  <a:srgbClr val="1F2A4E"/>
+                </a:solidFill>
+              </a:rPr>
+              <a:t>3.  </a:t>
+            </a:r>
+            <a:r>
+              <a:rPr sz="1600">
+                <a:solidFill>
+                  <a:srgbClr val="3D424E"/>
+                </a:solidFill>
+              </a:rPr>
+              <a:t>O esclarecimento conceitual CLIP (modelo) vs FiLM (mecanismo) faz sentido?</a:t>
+            </a:r>
+          </a:p>
+          <a:p>
+            <a:pPr>
+              <a:spcAft>
+                <a:spcPts val="800"/>
+              </a:spcAft>
+            </a:pPr>
+            <a:r>
+              <a:rPr sz="1600" b="1">
+                <a:solidFill>
+                  <a:srgbClr val="1F2A4E"/>
+                </a:solidFill>
+              </a:rPr>
+              <a:t>4.  </a:t>
+            </a:r>
+            <a:r>
+              <a:rPr sz="1600">
+                <a:solidFill>
+                  <a:srgbClr val="3D424E"/>
+                </a:solidFill>
+              </a:rPr>
+              <a:t>Há template institucional para a escrita ou seguimos com o padrão?</a:t>
+            </a:r>
+          </a:p>
+          <a:p>
+            <a:pPr>
+              <a:spcAft>
+                <a:spcPts val="800"/>
+              </a:spcAft>
+            </a:pPr>
+            <a:r>
+              <a:rPr sz="1600" b="1">
+                <a:solidFill>
+                  <a:srgbClr val="1F2A4E"/>
+                </a:solidFill>
+              </a:rPr>
+              <a:t>5.  </a:t>
+            </a:r>
+            <a:r>
+              <a:rPr sz="1600">
+                <a:solidFill>
+                  <a:srgbClr val="3D424E"/>
+                </a:solidFill>
+              </a:rPr>
+              <a:t>Co-orientador — já podemos formalizar?</a:t>
+            </a:r>
+          </a:p>
+          <a:p>
+            <a:pPr>
+              <a:spcAft>
+                <a:spcPts val="800"/>
+              </a:spcAft>
+            </a:pPr>
+            <a:r>
+              <a:rPr sz="1600" b="1">
+                <a:solidFill>
+                  <a:srgbClr val="1F2A4E"/>
+                </a:solidFill>
+              </a:rPr>
+              <a:t>6.  </a:t>
+            </a:r>
+            <a:r>
+              <a:rPr sz="1600">
+                <a:solidFill>
+                  <a:srgbClr val="3D424E"/>
+                </a:solidFill>
+              </a:rPr>
+              <a:t>Sugestões para a banca preliminar?</a:t>
+            </a:r>
+          </a:p>
+        </p:txBody>
+      </p:sp>
+    </p:spTree>
+  </p:cSld>
+  <p:clrMapOvr>
+    <a:masterClrMapping/>
+  </p:clrMapOvr>
+</p:sld>
+</file>
+
+<file path=ppt/slides/slide23.xml><?xml version="1.0" encoding="utf-8"?>
+<p:sld xmlns:a="http://schemas.openxmlformats.org/drawingml/2006/main" xmlns:p="http://schemas.openxmlformats.org/presentationml/2006/main" xmlns:r="http://schemas.openxmlformats.org/officeDocument/2006/relationships">
+  <p:cSld>
+    <p:spTree>
+      <p:nvGrpSpPr>
+        <p:cNvPr id="1" name=""/>
+        <p:cNvGrpSpPr/>
+        <p:nvPr/>
+      </p:nvGrpSpPr>
+      <p:grpSpPr/>
+      <p:sp>
+        <p:nvSpPr>
+          <p:cNvPr id="2" name="TextBox 1"/>
+          <p:cNvSpPr txBox="1"/>
+          <p:nvPr/>
+        </p:nvSpPr>
+        <p:spPr>
+          <a:xfrm>
+            <a:off x="457200" y="365760"/>
+            <a:ext cx="11430000" cy="822960"/>
+          </a:xfrm>
+          <a:prstGeom prst="rect">
+            <a:avLst/>
+          </a:prstGeom>
+          <a:noFill/>
+        </p:spPr>
+        <p:txBody>
+          <a:bodyPr wrap="square">
+            <a:spAutoFit/>
+          </a:bodyPr>
+          <a:lstStyle/>
+          <a:p>
+            <a:pPr>
+              <a:defRPr sz="2600" b="1">
+                <a:solidFill>
+                  <a:srgbClr val="1F2A4E"/>
+                </a:solidFill>
+              </a:defRPr>
+            </a:pPr>
+            <a:r>
+              <a:t>Próximos passos imediatos</a:t>
+            </a:r>
+          </a:p>
+        </p:txBody>
+      </p:sp>
+      <p:sp>
+        <p:nvSpPr>
+          <p:cNvPr id="3" name="Rectangle 2"/>
+          <p:cNvSpPr/>
+          <p:nvPr/>
+        </p:nvSpPr>
+        <p:spPr>
+          <a:xfrm>
+            <a:off x="457200" y="1143000"/>
+            <a:ext cx="11430000" cy="36576"/>
+          </a:xfrm>
+          <a:prstGeom prst="rect">
+            <a:avLst/>
+          </a:prstGeom>
+          <a:solidFill>
+            <a:srgbClr val="1F2A4E"/>
+          </a:solidFill>
+          <a:ln>
+            <a:noFill/>
+          </a:ln>
+        </p:spPr>
+        <p:style>
+          <a:lnRef idx="1">
+            <a:schemeClr val="accent1"/>
+          </a:lnRef>
+          <a:fillRef idx="3">
+            <a:schemeClr val="accent1"/>
+          </a:fillRef>
+          <a:effectRef idx="2">
+            <a:schemeClr val="accent1"/>
+          </a:effectRef>
+          <a:fontRef idx="minor">
+            <a:schemeClr val="lt1"/>
+          </a:fontRef>
+        </p:style>
+        <p:txBody>
+          <a:bodyPr rtlCol="0" anchor="ctr"/>
+          <a:lstStyle/>
+          <a:p>
+            <a:pPr algn="ctr"/>
+          </a:p>
+        </p:txBody>
+      </p:sp>
+      <p:sp>
+        <p:nvSpPr>
+          <p:cNvPr id="4" name="TextBox 3"/>
+          <p:cNvSpPr txBox="1"/>
+          <p:nvPr/>
+        </p:nvSpPr>
+        <p:spPr>
+          <a:xfrm>
+            <a:off x="457200" y="1371600"/>
+            <a:ext cx="11430000" cy="4937760"/>
+          </a:xfrm>
+          <a:prstGeom prst="rect">
+            <a:avLst/>
+          </a:prstGeom>
+          <a:noFill/>
+        </p:spPr>
+        <p:txBody>
+          <a:bodyPr wrap="square">
+            <a:spAutoFit/>
+          </a:bodyPr>
+          <a:lstStyle/>
+          <a:p>
+            <a:pPr>
+              <a:spcAft>
+                <a:spcPts val="800"/>
+              </a:spcAft>
+            </a:pPr>
+            <a:r>
+              <a:rPr sz="1600" b="1">
+                <a:solidFill>
+                  <a:srgbClr val="1F2A4E"/>
+                </a:solidFill>
+              </a:rPr>
+              <a:t>1.  </a:t>
+            </a:r>
+            <a:r>
+              <a:rPr sz="1600">
+                <a:solidFill>
+                  <a:srgbClr val="3D424E"/>
+                </a:solidFill>
+              </a:rPr>
+              <a:t>Setup do ambiente de escrita com template institucional</a:t>
+            </a:r>
+          </a:p>
+          <a:p>
+            <a:pPr>
+              <a:spcAft>
+                <a:spcPts val="800"/>
+              </a:spcAft>
+            </a:pPr>
+            <a:r>
+              <a:rPr sz="1600" b="1">
+                <a:solidFill>
+                  <a:srgbClr val="1F2A4E"/>
+                </a:solidFill>
+              </a:rPr>
+              <a:t>2.  </a:t>
+            </a:r>
+            <a:r>
+              <a:rPr sz="1600">
+                <a:solidFill>
+                  <a:srgbClr val="3D424E"/>
+                </a:solidFill>
+              </a:rPr>
+              <a:t>Consolidar bibliografia a partir das 101 fichas</a:t>
+            </a:r>
+          </a:p>
+          <a:p>
+            <a:pPr>
+              <a:spcAft>
+                <a:spcPts val="800"/>
+              </a:spcAft>
+            </a:pPr>
+            <a:r>
+              <a:rPr sz="1600" b="1">
+                <a:solidFill>
+                  <a:srgbClr val="1F2A4E"/>
+                </a:solidFill>
+              </a:rPr>
+              <a:t>3.  </a:t>
+            </a:r>
+            <a:r>
+              <a:rPr sz="1600">
+                <a:solidFill>
+                  <a:srgbClr val="3D424E"/>
+                </a:solidFill>
+              </a:rPr>
+              <a:t>Escrever Capítulo 1 (Introdução) usando a narrativa pré-qualificação</a:t>
+            </a:r>
+          </a:p>
+          <a:p>
+            <a:pPr>
+              <a:spcAft>
+                <a:spcPts val="800"/>
+              </a:spcAft>
+            </a:pPr>
+            <a:r>
+              <a:rPr sz="1600" b="1">
+                <a:solidFill>
+                  <a:srgbClr val="1F2A4E"/>
+                </a:solidFill>
+              </a:rPr>
+              <a:t>4.  </a:t>
+            </a:r>
+            <a:r>
+              <a:rPr sz="1600">
+                <a:solidFill>
+                  <a:srgbClr val="3D424E"/>
+                </a:solidFill>
+              </a:rPr>
+              <a:t>Incorporar as imagens já produzidas (pipeline FiLM, ConvNeXt-T, métricas de Hardt)</a:t>
+            </a:r>
+          </a:p>
+          <a:p>
+            <a:pPr>
+              <a:spcAft>
+                <a:spcPts val="800"/>
+              </a:spcAft>
+            </a:pPr>
+            <a:r>
+              <a:rPr sz="1600" b="1">
+                <a:solidFill>
+                  <a:srgbClr val="1F2A4E"/>
+                </a:solidFill>
+              </a:rPr>
+              <a:t>5.  </a:t>
+            </a:r>
+            <a:r>
+              <a:rPr sz="1600">
+                <a:solidFill>
+                  <a:srgbClr val="3D424E"/>
+                </a:solidFill>
+              </a:rPr>
+              <a:t>Aprofundar a leitura das 12 fichas forte favorável</a:t>
+            </a:r>
+          </a:p>
+          <a:p>
+            <a:pPr>
+              <a:spcAft>
+                <a:spcPts val="800"/>
+              </a:spcAft>
+            </a:pPr>
+            <a:r>
+              <a:rPr sz="1600" b="1">
+                <a:solidFill>
+                  <a:srgbClr val="1F2A4E"/>
+                </a:solidFill>
+              </a:rPr>
+              <a:t>  </a:t>
+            </a:r>
+            <a:r>
+              <a:rPr sz="1600">
+                <a:solidFill>
+                  <a:srgbClr val="3D424E"/>
+                </a:solidFill>
+              </a:rPr>
+              <a:t/>
+            </a:r>
+          </a:p>
+          <a:p>
+            <a:pPr>
+              <a:spcAft>
+                <a:spcPts val="800"/>
+              </a:spcAft>
+            </a:pPr>
+            <a:r>
+              <a:rPr sz="1600" b="1">
+                <a:solidFill>
+                  <a:srgbClr val="1F2A4E"/>
+                </a:solidFill>
+              </a:rPr>
+              <a:t>Entrega para a próxima reunião:  </a:t>
+            </a:r>
+            <a:r>
+              <a:rPr sz="1600">
+                <a:solidFill>
+                  <a:srgbClr val="3D424E"/>
+                </a:solidFill>
+              </a:rPr>
+              <a:t>Capítulo 1 escrito e bibliografia consolidada</a:t>
+            </a:r>
+          </a:p>
+        </p:txBody>
+      </p:sp>
+    </p:spTree>
+  </p:cSld>
+  <p:clrMapOvr>
+    <a:masterClrMapping/>
+  </p:clrMapOvr>
+</p:sld>
+</file>
+
+<file path=ppt/slides/slide24.xml><?xml version="1.0" encoding="utf-8"?>
 <p:sld xmlns:a="http://schemas.openxmlformats.org/drawingml/2006/main" xmlns:p="http://schemas.openxmlformats.org/presentationml/2006/main" xmlns:r="http://schemas.openxmlformats.org/officeDocument/2006/relationships">
   <p:cSld>
     <p:spTree>
@@ -7969,9 +8482,6 @@
                 </a:solidFill>
               </a:defRPr>
             </a:pPr>
-            <a:r>
-              <a:t>8</a:t>
-            </a:r>
           </a:p>
         </p:txBody>
       </p:sp>
@@ -8005,7 +8515,7 @@
               </a:defRPr>
             </a:pPr>
             <a:r>
-              <a:t>Discussao</a:t>
+              <a:t>Obrigado</a:t>
             </a:r>
           </a:p>
           <a:p>
@@ -8017,7 +8527,7 @@
               </a:defRPr>
             </a:pPr>
             <a:r>
-              <a:t>Pontos para alinhamento hoje</a:t>
+              <a:t>Discussão livre — dúvidas e ajustes antes da escrita</a:t>
             </a:r>
           </a:p>
         </p:txBody>
@@ -8030,7 +8540,150 @@
 </p:sld>
 </file>
 
-<file path=ppt/slides/slide23.xml><?xml version="1.0" encoding="utf-8"?>
+<file path=ppt/slides/slide3.xml><?xml version="1.0" encoding="utf-8"?>
+<p:sld xmlns:a="http://schemas.openxmlformats.org/drawingml/2006/main" xmlns:p="http://schemas.openxmlformats.org/presentationml/2006/main" xmlns:r="http://schemas.openxmlformats.org/officeDocument/2006/relationships">
+  <p:cSld>
+    <p:spTree>
+      <p:nvGrpSpPr>
+        <p:cNvPr id="1" name=""/>
+        <p:cNvGrpSpPr/>
+        <p:nvPr/>
+      </p:nvGrpSpPr>
+      <p:grpSpPr/>
+      <p:sp>
+        <p:nvSpPr>
+          <p:cNvPr id="2" name="Rectangle 1"/>
+          <p:cNvSpPr/>
+          <p:nvPr/>
+        </p:nvSpPr>
+        <p:spPr>
+          <a:xfrm>
+            <a:off x="0" y="0"/>
+            <a:ext cx="12188952" cy="6858000"/>
+          </a:xfrm>
+          <a:prstGeom prst="rect">
+            <a:avLst/>
+          </a:prstGeom>
+          <a:solidFill>
+            <a:srgbClr val="1F2A4E"/>
+          </a:solidFill>
+          <a:ln>
+            <a:noFill/>
+          </a:ln>
+        </p:spPr>
+        <p:style>
+          <a:lnRef idx="1">
+            <a:schemeClr val="accent1"/>
+          </a:lnRef>
+          <a:fillRef idx="3">
+            <a:schemeClr val="accent1"/>
+          </a:fillRef>
+          <a:effectRef idx="2">
+            <a:schemeClr val="accent1"/>
+          </a:effectRef>
+          <a:fontRef idx="minor">
+            <a:schemeClr val="lt1"/>
+          </a:fontRef>
+        </p:style>
+        <p:txBody>
+          <a:bodyPr rtlCol="0" anchor="ctr"/>
+          <a:lstStyle/>
+          <a:p>
+            <a:pPr algn="ctr"/>
+          </a:p>
+        </p:txBody>
+      </p:sp>
+      <p:sp>
+        <p:nvSpPr>
+          <p:cNvPr id="3" name="TextBox 2"/>
+          <p:cNvSpPr txBox="1"/>
+          <p:nvPr/>
+        </p:nvSpPr>
+        <p:spPr>
+          <a:xfrm>
+            <a:off x="731520" y="1371600"/>
+            <a:ext cx="2743200" cy="2743200"/>
+          </a:xfrm>
+          <a:prstGeom prst="rect">
+            <a:avLst/>
+          </a:prstGeom>
+          <a:noFill/>
+        </p:spPr>
+        <p:txBody>
+          <a:bodyPr wrap="none">
+            <a:spAutoFit/>
+          </a:bodyPr>
+          <a:lstStyle/>
+          <a:p>
+            <a:pPr>
+              <a:defRPr sz="14000" b="1">
+                <a:solidFill>
+                  <a:srgbClr val="FFFFFF"/>
+                </a:solidFill>
+              </a:defRPr>
+            </a:pPr>
+            <a:r>
+              <a:t>1</a:t>
+            </a:r>
+          </a:p>
+        </p:txBody>
+      </p:sp>
+      <p:sp>
+        <p:nvSpPr>
+          <p:cNvPr id="4" name="TextBox 3"/>
+          <p:cNvSpPr txBox="1"/>
+          <p:nvPr/>
+        </p:nvSpPr>
+        <p:spPr>
+          <a:xfrm>
+            <a:off x="3931920" y="2286000"/>
+            <a:ext cx="7772400" cy="1828800"/>
+          </a:xfrm>
+          <a:prstGeom prst="rect">
+            <a:avLst/>
+          </a:prstGeom>
+          <a:noFill/>
+        </p:spPr>
+        <p:txBody>
+          <a:bodyPr wrap="square">
+            <a:spAutoFit/>
+          </a:bodyPr>
+          <a:lstStyle/>
+          <a:p>
+            <a:pPr>
+              <a:defRPr sz="3800" b="1">
+                <a:solidFill>
+                  <a:srgbClr val="FFFFFF"/>
+                </a:solidFill>
+              </a:defRPr>
+            </a:pPr>
+            <a:r>
+              <a:t>Status das decisões</a:t>
+            </a:r>
+          </a:p>
+          <a:p>
+            <a:pPr>
+              <a:defRPr sz="1800">
+                <a:solidFill>
+                  <a:srgbClr val="E8EAED"/>
+                </a:solidFill>
+              </a:defRPr>
+            </a:pPr>
+            <a:r>
+              <a:t>Reunião anterior — 08/jun/2026</a:t>
+            </a:r>
+          </a:p>
+        </p:txBody>
+      </p:sp>
+    </p:spTree>
+  </p:cSld>
+  <p:clrMapOvr>
+    <a:masterClrMapping/>
+  </p:clrMapOvr>
+</p:sld>
+</file>
+
+<file path=ppt/slides/slide4.xml><?xml version="1.0" encoding="utf-8"?>
 <p:sld xmlns:a="http://schemas.openxmlformats.org/drawingml/2006/main" xmlns:p="http://schemas.openxmlformats.org/presentationml/2006/main" xmlns:r="http://schemas.openxmlformats.org/officeDocument/2006/relationships">
   <p:cSld>
     <p:spTree>
@@ -8070,7 +8723,7 @@
               </a:defRPr>
             </a:pPr>
             <a:r>
-              <a:t>Perguntas ao orientador</a:t>
+              <a:t>Decisões da reunião anterior — status</a:t>
             </a:r>
           </a:p>
         </p:txBody>
@@ -8118,16 +8771,566 @@
           </a:p>
         </p:txBody>
       </p:sp>
-      <p:sp>
-        <p:nvSpPr>
-          <p:cNvPr id="4" name="TextBox 3"/>
+      <p:graphicFrame>
+        <p:nvGraphicFramePr>
+          <p:cNvPr id="4" name="Table 3"/>
+          <p:cNvGraphicFramePr>
+            <a:graphicFrameLocks noGrp="1"/>
+          </p:cNvGraphicFramePr>
+          <p:nvPr/>
+        </p:nvGraphicFramePr>
+        <p:xfrm>
+          <a:off x="457200" y="1371600"/>
+          <a:ext cx="11430000" cy="4754880"/>
+        </p:xfrm>
+        <a:graphic>
+          <a:graphicData uri="http://schemas.openxmlformats.org/drawingml/2006/table">
+            <a:tbl>
+              <a:tblPr firstRow="1" bandRow="1">
+                <a:tableStyleId>{5C22544A-7EE6-4342-B048-85BDC9FD1C3A}</a:tableStyleId>
+              </a:tblPr>
+              <a:tblGrid>
+                <a:gridCol w="457200"/>
+                <a:gridCol w="4389120"/>
+                <a:gridCol w="1645920"/>
+                <a:gridCol w="4937760"/>
+              </a:tblGrid>
+              <a:tr h="679268">
+                <a:tc>
+                  <a:txBody>
+                    <a:bodyPr/>
+                    <a:lstStyle/>
+                    <a:p>
+                      <a:r>
+                        <a:rPr sz="1300" b="1">
+                          <a:solidFill>
+                            <a:srgbClr val="FFFFFF"/>
+                          </a:solidFill>
+                        </a:rPr>
+                        <a:t>#</a:t>
+                      </a:r>
+                    </a:p>
+                  </a:txBody>
+                  <a:tcPr>
+                    <a:solidFill>
+                      <a:srgbClr val="1F2A4E"/>
+                    </a:solidFill>
+                  </a:tcPr>
+                </a:tc>
+                <a:tc>
+                  <a:txBody>
+                    <a:bodyPr/>
+                    <a:lstStyle/>
+                    <a:p>
+                      <a:r>
+                        <a:rPr sz="1300" b="1">
+                          <a:solidFill>
+                            <a:srgbClr val="FFFFFF"/>
+                          </a:solidFill>
+                        </a:rPr>
+                        <a:t>Decisão</a:t>
+                      </a:r>
+                    </a:p>
+                  </a:txBody>
+                  <a:tcPr>
+                    <a:solidFill>
+                      <a:srgbClr val="1F2A4E"/>
+                    </a:solidFill>
+                  </a:tcPr>
+                </a:tc>
+                <a:tc>
+                  <a:txBody>
+                    <a:bodyPr/>
+                    <a:lstStyle/>
+                    <a:p>
+                      <a:r>
+                        <a:rPr sz="1300" b="1">
+                          <a:solidFill>
+                            <a:srgbClr val="FFFFFF"/>
+                          </a:solidFill>
+                        </a:rPr>
+                        <a:t>Status</a:t>
+                      </a:r>
+                    </a:p>
+                  </a:txBody>
+                  <a:tcPr>
+                    <a:solidFill>
+                      <a:srgbClr val="1F2A4E"/>
+                    </a:solidFill>
+                  </a:tcPr>
+                </a:tc>
+                <a:tc>
+                  <a:txBody>
+                    <a:bodyPr/>
+                    <a:lstStyle/>
+                    <a:p>
+                      <a:r>
+                        <a:rPr sz="1300" b="1">
+                          <a:solidFill>
+                            <a:srgbClr val="FFFFFF"/>
+                          </a:solidFill>
+                        </a:rPr>
+                        <a:t>Observações</a:t>
+                      </a:r>
+                    </a:p>
+                  </a:txBody>
+                  <a:tcPr>
+                    <a:solidFill>
+                      <a:srgbClr val="1F2A4E"/>
+                    </a:solidFill>
+                  </a:tcPr>
+                </a:tc>
+              </a:tr>
+              <a:tr h="679268">
+                <a:tc>
+                  <a:txBody>
+                    <a:bodyPr/>
+                    <a:lstStyle/>
+                    <a:p>
+                      <a:r>
+                        <a:rPr sz="1100">
+                          <a:solidFill>
+                            <a:srgbClr val="3D424E"/>
+                          </a:solidFill>
+                        </a:rPr>
+                        <a:t>1</a:t>
+                      </a:r>
+                    </a:p>
+                  </a:txBody>
+                  <a:tcPr/>
+                </a:tc>
+                <a:tc>
+                  <a:txBody>
+                    <a:bodyPr/>
+                    <a:lstStyle/>
+                    <a:p>
+                      <a:r>
+                        <a:rPr sz="1100">
+                          <a:solidFill>
+                            <a:srgbClr val="3D424E"/>
+                          </a:solidFill>
+                        </a:rPr>
+                        <a:t>Pipeline 6 etapas aprovado</a:t>
+                      </a:r>
+                    </a:p>
+                  </a:txBody>
+                  <a:tcPr/>
+                </a:tc>
+                <a:tc>
+                  <a:txBody>
+                    <a:bodyPr/>
+                    <a:lstStyle/>
+                    <a:p>
+                      <a:r>
+                        <a:rPr sz="1100">
+                          <a:solidFill>
+                            <a:srgbClr val="3D424E"/>
+                          </a:solidFill>
+                        </a:rPr>
+                        <a:t>OK</a:t>
+                      </a:r>
+                    </a:p>
+                  </a:txBody>
+                  <a:tcPr/>
+                </a:tc>
+                <a:tc>
+                  <a:txBody>
+                    <a:bodyPr/>
+                    <a:lstStyle/>
+                    <a:p>
+                      <a:r>
+                        <a:rPr sz="1100">
+                          <a:solidFill>
+                            <a:srgbClr val="3D424E"/>
+                          </a:solidFill>
+                        </a:rPr>
+                        <a:t>Validado e detalhado por etapa</a:t>
+                      </a:r>
+                    </a:p>
+                  </a:txBody>
+                  <a:tcPr/>
+                </a:tc>
+              </a:tr>
+              <a:tr h="679268">
+                <a:tc>
+                  <a:txBody>
+                    <a:bodyPr/>
+                    <a:lstStyle/>
+                    <a:p>
+                      <a:r>
+                        <a:rPr sz="1100">
+                          <a:solidFill>
+                            <a:srgbClr val="3D424E"/>
+                          </a:solidFill>
+                        </a:rPr>
+                        <a:t>2</a:t>
+                      </a:r>
+                    </a:p>
+                  </a:txBody>
+                  <a:tcPr/>
+                </a:tc>
+                <a:tc>
+                  <a:txBody>
+                    <a:bodyPr/>
+                    <a:lstStyle/>
+                    <a:p>
+                      <a:r>
+                        <a:rPr sz="1100">
+                          <a:solidFill>
+                            <a:srgbClr val="3D424E"/>
+                          </a:solidFill>
+                        </a:rPr>
+                        <a:t>SkinToneNet pré-treinado</a:t>
+                      </a:r>
+                    </a:p>
+                  </a:txBody>
+                  <a:tcPr/>
+                </a:tc>
+                <a:tc>
+                  <a:txBody>
+                    <a:bodyPr/>
+                    <a:lstStyle/>
+                    <a:p>
+                      <a:r>
+                        <a:rPr sz="1100">
+                          <a:solidFill>
+                            <a:srgbClr val="3D424E"/>
+                          </a:solidFill>
+                        </a:rPr>
+                        <a:t>OK</a:t>
+                      </a:r>
+                    </a:p>
+                  </a:txBody>
+                  <a:tcPr/>
+                </a:tc>
+                <a:tc>
+                  <a:txBody>
+                    <a:bodyPr/>
+                    <a:lstStyle/>
+                    <a:p>
+                      <a:r>
+                        <a:rPr sz="1100">
+                          <a:solidFill>
+                            <a:srgbClr val="3D424E"/>
+                          </a:solidFill>
+                        </a:rPr>
+                        <a:t>Leitura integral concluída</a:t>
+                      </a:r>
+                    </a:p>
+                  </a:txBody>
+                  <a:tcPr/>
+                </a:tc>
+              </a:tr>
+              <a:tr h="679268">
+                <a:tc>
+                  <a:txBody>
+                    <a:bodyPr/>
+                    <a:lstStyle/>
+                    <a:p>
+                      <a:r>
+                        <a:rPr sz="1100">
+                          <a:solidFill>
+                            <a:srgbClr val="3D424E"/>
+                          </a:solidFill>
+                        </a:rPr>
+                        <a:t>3</a:t>
+                      </a:r>
+                    </a:p>
+                  </a:txBody>
+                  <a:tcPr/>
+                </a:tc>
+                <a:tc>
+                  <a:txBody>
+                    <a:bodyPr/>
+                    <a:lstStyle/>
+                    <a:p>
+                      <a:r>
+                        <a:rPr sz="1100">
+                          <a:solidFill>
+                            <a:srgbClr val="3D424E"/>
+                          </a:solidFill>
+                        </a:rPr>
+                        <a:t>Corpus ≥100 artigos</a:t>
+                      </a:r>
+                    </a:p>
+                  </a:txBody>
+                  <a:tcPr/>
+                </a:tc>
+                <a:tc>
+                  <a:txBody>
+                    <a:bodyPr/>
+                    <a:lstStyle/>
+                    <a:p>
+                      <a:r>
+                        <a:rPr sz="1100">
+                          <a:solidFill>
+                            <a:srgbClr val="3D424E"/>
+                          </a:solidFill>
+                        </a:rPr>
+                        <a:t>OK — 101</a:t>
+                      </a:r>
+                    </a:p>
+                  </a:txBody>
+                  <a:tcPr/>
+                </a:tc>
+                <a:tc>
+                  <a:txBody>
+                    <a:bodyPr/>
+                    <a:lstStyle/>
+                    <a:p>
+                      <a:r>
+                        <a:rPr sz="1100">
+                          <a:solidFill>
+                            <a:srgbClr val="3D424E"/>
+                          </a:solidFill>
+                        </a:rPr>
+                        <a:t>+46 fichas na última rodada</a:t>
+                      </a:r>
+                    </a:p>
+                  </a:txBody>
+                  <a:tcPr/>
+                </a:tc>
+              </a:tr>
+              <a:tr h="679268">
+                <a:tc>
+                  <a:txBody>
+                    <a:bodyPr/>
+                    <a:lstStyle/>
+                    <a:p>
+                      <a:r>
+                        <a:rPr sz="1100">
+                          <a:solidFill>
+                            <a:srgbClr val="3D424E"/>
+                          </a:solidFill>
+                        </a:rPr>
+                        <a:t>4</a:t>
+                      </a:r>
+                    </a:p>
+                  </a:txBody>
+                  <a:tcPr/>
+                </a:tc>
+                <a:tc>
+                  <a:txBody>
+                    <a:bodyPr/>
+                    <a:lstStyle/>
+                    <a:p>
+                      <a:r>
+                        <a:rPr sz="1100">
+                          <a:solidFill>
+                            <a:srgbClr val="3D424E"/>
+                          </a:solidFill>
+                        </a:rPr>
+                        <a:t>≥20 artigos 2025-2026</a:t>
+                      </a:r>
+                    </a:p>
+                  </a:txBody>
+                  <a:tcPr/>
+                </a:tc>
+                <a:tc>
+                  <a:txBody>
+                    <a:bodyPr/>
+                    <a:lstStyle/>
+                    <a:p>
+                      <a:r>
+                        <a:rPr sz="1100">
+                          <a:solidFill>
+                            <a:srgbClr val="3D424E"/>
+                          </a:solidFill>
+                        </a:rPr>
+                        <a:t>OK — 25</a:t>
+                      </a:r>
+                    </a:p>
+                  </a:txBody>
+                  <a:tcPr/>
+                </a:tc>
+                <a:tc>
+                  <a:txBody>
+                    <a:bodyPr/>
+                    <a:lstStyle/>
+                    <a:p>
+                      <a:r>
+                        <a:rPr sz="1100">
+                          <a:solidFill>
+                            <a:srgbClr val="3D424E"/>
+                          </a:solidFill>
+                        </a:rPr>
+                        <a:t>Meta superada</a:t>
+                      </a:r>
+                    </a:p>
+                  </a:txBody>
+                  <a:tcPr/>
+                </a:tc>
+              </a:tr>
+              <a:tr h="679268">
+                <a:tc>
+                  <a:txBody>
+                    <a:bodyPr/>
+                    <a:lstStyle/>
+                    <a:p>
+                      <a:r>
+                        <a:rPr sz="1100">
+                          <a:solidFill>
+                            <a:srgbClr val="3D424E"/>
+                          </a:solidFill>
+                        </a:rPr>
+                        <a:t>5</a:t>
+                      </a:r>
+                    </a:p>
+                  </a:txBody>
+                  <a:tcPr/>
+                </a:tc>
+                <a:tc>
+                  <a:txBody>
+                    <a:bodyPr/>
+                    <a:lstStyle/>
+                    <a:p>
+                      <a:r>
+                        <a:rPr sz="1100">
+                          <a:solidFill>
+                            <a:srgbClr val="3D424E"/>
+                          </a:solidFill>
+                        </a:rPr>
+                        <a:t>Adicionar CLIP conditioning</a:t>
+                      </a:r>
+                    </a:p>
+                  </a:txBody>
+                  <a:tcPr/>
+                </a:tc>
+                <a:tc>
+                  <a:txBody>
+                    <a:bodyPr/>
+                    <a:lstStyle/>
+                    <a:p>
+                      <a:r>
+                        <a:rPr sz="1100">
+                          <a:solidFill>
+                            <a:srgbClr val="3D424E"/>
+                          </a:solidFill>
+                        </a:rPr>
+                        <a:t>OK — Track I</a:t>
+                      </a:r>
+                    </a:p>
+                  </a:txBody>
+                  <a:tcPr/>
+                </a:tc>
+                <a:tc>
+                  <a:txBody>
+                    <a:bodyPr/>
+                    <a:lstStyle/>
+                    <a:p>
+                      <a:r>
+                        <a:rPr sz="1100">
+                          <a:solidFill>
+                            <a:srgbClr val="3D424E"/>
+                          </a:solidFill>
+                        </a:rPr>
+                        <a:t>14 fichas + análise técnica</a:t>
+                      </a:r>
+                    </a:p>
+                  </a:txBody>
+                  <a:tcPr/>
+                </a:tc>
+              </a:tr>
+              <a:tr h="679272">
+                <a:tc>
+                  <a:txBody>
+                    <a:bodyPr/>
+                    <a:lstStyle/>
+                    <a:p>
+                      <a:r>
+                        <a:rPr sz="1100">
+                          <a:solidFill>
+                            <a:srgbClr val="3D424E"/>
+                          </a:solidFill>
+                        </a:rPr>
+                        <a:t>6</a:t>
+                      </a:r>
+                    </a:p>
+                  </a:txBody>
+                  <a:tcPr>
+                    <a:solidFill>
+                      <a:srgbClr val="E8EAED"/>
+                    </a:solidFill>
+                  </a:tcPr>
+                </a:tc>
+                <a:tc>
+                  <a:txBody>
+                    <a:bodyPr/>
+                    <a:lstStyle/>
+                    <a:p>
+                      <a:r>
+                        <a:rPr sz="1100">
+                          <a:solidFill>
+                            <a:srgbClr val="3D424E"/>
+                          </a:solidFill>
+                        </a:rPr>
+                        <a:t>Submissão qualificação 15/jul/2026</a:t>
+                      </a:r>
+                    </a:p>
+                  </a:txBody>
+                  <a:tcPr>
+                    <a:solidFill>
+                      <a:srgbClr val="E8EAED"/>
+                    </a:solidFill>
+                  </a:tcPr>
+                </a:tc>
+                <a:tc>
+                  <a:txBody>
+                    <a:bodyPr/>
+                    <a:lstStyle/>
+                    <a:p>
+                      <a:r>
+                        <a:rPr sz="1100">
+                          <a:solidFill>
+                            <a:srgbClr val="3D424E"/>
+                          </a:solidFill>
+                        </a:rPr>
+                        <a:t>Em curso</a:t>
+                      </a:r>
+                    </a:p>
+                  </a:txBody>
+                  <a:tcPr>
+                    <a:solidFill>
+                      <a:srgbClr val="E8EAED"/>
+                    </a:solidFill>
+                  </a:tcPr>
+                </a:tc>
+                <a:tc>
+                  <a:txBody>
+                    <a:bodyPr/>
+                    <a:lstStyle/>
+                    <a:p>
+                      <a:r>
+                        <a:rPr sz="1100">
+                          <a:solidFill>
+                            <a:srgbClr val="3D424E"/>
+                          </a:solidFill>
+                        </a:rPr>
+                        <a:t>Escrita em andamento</a:t>
+                      </a:r>
+                    </a:p>
+                  </a:txBody>
+                  <a:tcPr>
+                    <a:solidFill>
+                      <a:srgbClr val="E8EAED"/>
+                    </a:solidFill>
+                  </a:tcPr>
+                </a:tc>
+              </a:tr>
+            </a:tbl>
+          </a:graphicData>
+        </a:graphic>
+      </p:graphicFrame>
+      <p:sp>
+        <p:nvSpPr>
+          <p:cNvPr id="5" name="TextBox 4"/>
           <p:cNvSpPr txBox="1"/>
           <p:nvPr/>
         </p:nvSpPr>
         <p:spPr>
           <a:xfrm>
-            <a:off x="457200" y="1371600"/>
-            <a:ext cx="11430000" cy="4937760"/>
+            <a:off x="457200" y="6446520"/>
+            <a:ext cx="11430000" cy="365760"/>
           </a:xfrm>
           <a:prstGeom prst="rect">
             <a:avLst/>
@@ -8135,146 +9338,20 @@
           <a:noFill/>
         </p:spPr>
         <p:txBody>
-          <a:bodyPr wrap="square">
+          <a:bodyPr wrap="none">
             <a:spAutoFit/>
           </a:bodyPr>
           <a:lstStyle/>
           <a:p>
             <a:pPr>
-              <a:spcAft>
-                <a:spcPts val="800"/>
-              </a:spcAft>
+              <a:defRPr sz="1000" i="1">
+                <a:solidFill>
+                  <a:srgbClr val="707682"/>
+                </a:solidFill>
+              </a:defRPr>
             </a:pPr>
             <a:r>
-              <a:rPr sz="1600" b="1">
-                <a:solidFill>
-                  <a:srgbClr val="1F2A4E"/>
-                </a:solidFill>
-              </a:rPr>
-              <a:t>1.  </a:t>
-            </a:r>
-            <a:r>
-              <a:rPr sz="1600">
-                <a:solidFill>
-                  <a:srgbClr val="3D424E"/>
-                </a:solidFill>
-              </a:rPr>
-              <a:t>Concorda com manter FiLM central + CLIP-conditioning como C7 (ablation)?</a:t>
-            </a:r>
-          </a:p>
-          <a:p>
-            <a:pPr>
-              <a:spcAft>
-                <a:spcPts val="800"/>
-              </a:spcAft>
-            </a:pPr>
-            <a:r>
-              <a:rPr sz="1600" b="1">
-                <a:solidFill>
-                  <a:srgbClr val="1F2A4E"/>
-                </a:solidFill>
-              </a:rPr>
-              <a:t>2.  </a:t>
-            </a:r>
-            <a:r>
-              <a:rPr sz="1600">
-                <a:solidFill>
-                  <a:srgbClr val="3D424E"/>
-                </a:solidFill>
-              </a:rPr>
-              <a:t>11 tracks bem cobertos? Algum precisa de mais fichas?</a:t>
-            </a:r>
-          </a:p>
-          <a:p>
-            <a:pPr>
-              <a:spcAft>
-                <a:spcPts val="800"/>
-              </a:spcAft>
-            </a:pPr>
-            <a:r>
-              <a:rPr sz="1600" b="1">
-                <a:solidFill>
-                  <a:srgbClr val="1F2A4E"/>
-                </a:solidFill>
-              </a:rPr>
-              <a:t>3.  </a:t>
-            </a:r>
-            <a:r>
-              <a:rPr sz="1600">
-                <a:solidFill>
-                  <a:srgbClr val="3D424E"/>
-                </a:solidFill>
-              </a:rPr>
-              <a:t>Esclarecimento conceitual CLIP (modelo) vs FiLM (mecanismo) faz sentido?</a:t>
-            </a:r>
-          </a:p>
-          <a:p>
-            <a:pPr>
-              <a:spcAft>
-                <a:spcPts val="800"/>
-              </a:spcAft>
-            </a:pPr>
-            <a:r>
-              <a:rPr sz="1600" b="1">
-                <a:solidFill>
-                  <a:srgbClr val="1F2A4E"/>
-                </a:solidFill>
-              </a:rPr>
-              <a:t>4.  </a:t>
-            </a:r>
-            <a:r>
-              <a:rPr sz="1600">
-                <a:solidFill>
-                  <a:srgbClr val="3D424E"/>
-                </a:solidFill>
-              </a:rPr>
-              <a:t>Tem template Overleaf Unifesp/ICT ou usamos padrao?</a:t>
-            </a:r>
-          </a:p>
-          <a:p>
-            <a:pPr>
-              <a:spcAft>
-                <a:spcPts val="800"/>
-              </a:spcAft>
-            </a:pPr>
-            <a:r>
-              <a:rPr sz="1600" b="1">
-                <a:solidFill>
-                  <a:srgbClr val="1F2A4E"/>
-                </a:solidFill>
-              </a:rPr>
-              <a:t>5.  </a:t>
-            </a:r>
-            <a:r>
-              <a:rPr sz="1600">
-                <a:solidFill>
-                  <a:srgbClr val="3D424E"/>
-                </a:solidFill>
-              </a:rPr>
-              <a:t>Co-orientador - ja podemos formalizar?</a:t>
-            </a:r>
-          </a:p>
-          <a:p>
-            <a:pPr>
-              <a:spcAft>
-                <a:spcPts val="800"/>
-              </a:spcAft>
-            </a:pPr>
-            <a:r>
-              <a:rPr sz="1600" b="1">
-                <a:solidFill>
-                  <a:srgbClr val="1F2A4E"/>
-                </a:solidFill>
-              </a:rPr>
-              <a:t>6.  </a:t>
-            </a:r>
-            <a:r>
-              <a:rPr sz="1600">
-                <a:solidFill>
-                  <a:srgbClr val="3D424E"/>
-                </a:solidFill>
-              </a:rPr>
-              <a:t>Sugestoes para banca preliminar?</a:t>
+              <a:t>5 itens fechados e 1 em execução conforme planejado</a:t>
             </a:r>
           </a:p>
         </p:txBody>
@@ -8287,7 +9364,150 @@
 </p:sld>
 </file>
 
-<file path=ppt/slides/slide24.xml><?xml version="1.0" encoding="utf-8"?>
+<file path=ppt/slides/slide5.xml><?xml version="1.0" encoding="utf-8"?>
+<p:sld xmlns:a="http://schemas.openxmlformats.org/drawingml/2006/main" xmlns:p="http://schemas.openxmlformats.org/presentationml/2006/main" xmlns:r="http://schemas.openxmlformats.org/officeDocument/2006/relationships">
+  <p:cSld>
+    <p:spTree>
+      <p:nvGrpSpPr>
+        <p:cNvPr id="1" name=""/>
+        <p:cNvGrpSpPr/>
+        <p:nvPr/>
+      </p:nvGrpSpPr>
+      <p:grpSpPr/>
+      <p:sp>
+        <p:nvSpPr>
+          <p:cNvPr id="2" name="Rectangle 1"/>
+          <p:cNvSpPr/>
+          <p:nvPr/>
+        </p:nvSpPr>
+        <p:spPr>
+          <a:xfrm>
+            <a:off x="0" y="0"/>
+            <a:ext cx="12188952" cy="6858000"/>
+          </a:xfrm>
+          <a:prstGeom prst="rect">
+            <a:avLst/>
+          </a:prstGeom>
+          <a:solidFill>
+            <a:srgbClr val="1F2A4E"/>
+          </a:solidFill>
+          <a:ln>
+            <a:noFill/>
+          </a:ln>
+        </p:spPr>
+        <p:style>
+          <a:lnRef idx="1">
+            <a:schemeClr val="accent1"/>
+          </a:lnRef>
+          <a:fillRef idx="3">
+            <a:schemeClr val="accent1"/>
+          </a:fillRef>
+          <a:effectRef idx="2">
+            <a:schemeClr val="accent1"/>
+          </a:effectRef>
+          <a:fontRef idx="minor">
+            <a:schemeClr val="lt1"/>
+          </a:fontRef>
+        </p:style>
+        <p:txBody>
+          <a:bodyPr rtlCol="0" anchor="ctr"/>
+          <a:lstStyle/>
+          <a:p>
+            <a:pPr algn="ctr"/>
+          </a:p>
+        </p:txBody>
+      </p:sp>
+      <p:sp>
+        <p:nvSpPr>
+          <p:cNvPr id="3" name="TextBox 2"/>
+          <p:cNvSpPr txBox="1"/>
+          <p:nvPr/>
+        </p:nvSpPr>
+        <p:spPr>
+          <a:xfrm>
+            <a:off x="731520" y="1371600"/>
+            <a:ext cx="2743200" cy="2743200"/>
+          </a:xfrm>
+          <a:prstGeom prst="rect">
+            <a:avLst/>
+          </a:prstGeom>
+          <a:noFill/>
+        </p:spPr>
+        <p:txBody>
+          <a:bodyPr wrap="none">
+            <a:spAutoFit/>
+          </a:bodyPr>
+          <a:lstStyle/>
+          <a:p>
+            <a:pPr>
+              <a:defRPr sz="14000" b="1">
+                <a:solidFill>
+                  <a:srgbClr val="FFFFFF"/>
+                </a:solidFill>
+              </a:defRPr>
+            </a:pPr>
+            <a:r>
+              <a:t>2</a:t>
+            </a:r>
+          </a:p>
+        </p:txBody>
+      </p:sp>
+      <p:sp>
+        <p:nvSpPr>
+          <p:cNvPr id="4" name="TextBox 3"/>
+          <p:cNvSpPr txBox="1"/>
+          <p:nvPr/>
+        </p:nvSpPr>
+        <p:spPr>
+          <a:xfrm>
+            <a:off x="3931920" y="2286000"/>
+            <a:ext cx="7772400" cy="1828800"/>
+          </a:xfrm>
+          <a:prstGeom prst="rect">
+            <a:avLst/>
+          </a:prstGeom>
+          <a:noFill/>
+        </p:spPr>
+        <p:txBody>
+          <a:bodyPr wrap="square">
+            <a:spAutoFit/>
+          </a:bodyPr>
+          <a:lstStyle/>
+          <a:p>
+            <a:pPr>
+              <a:defRPr sz="3800" b="1">
+                <a:solidFill>
+                  <a:srgbClr val="FFFFFF"/>
+                </a:solidFill>
+              </a:defRPr>
+            </a:pPr>
+            <a:r>
+              <a:t>Corpus consolidado</a:t>
+            </a:r>
+          </a:p>
+          <a:p>
+            <a:pPr>
+              <a:defRPr sz="1800">
+                <a:solidFill>
+                  <a:srgbClr val="E8EAED"/>
+                </a:solidFill>
+              </a:defRPr>
+            </a:pPr>
+            <a:r>
+              <a:t>101 fichas em 11 tracks temáticos</a:t>
+            </a:r>
+          </a:p>
+        </p:txBody>
+      </p:sp>
+    </p:spTree>
+  </p:cSld>
+  <p:clrMapOvr>
+    <a:masterClrMapping/>
+  </p:clrMapOvr>
+</p:sld>
+</file>
+
+<file path=ppt/slides/slide6.xml><?xml version="1.0" encoding="utf-8"?>
 <p:sld xmlns:a="http://schemas.openxmlformats.org/drawingml/2006/main" xmlns:p="http://schemas.openxmlformats.org/presentationml/2006/main" xmlns:r="http://schemas.openxmlformats.org/officeDocument/2006/relationships">
   <p:cSld>
     <p:spTree>
@@ -8327,7 +9547,7 @@
               </a:defRPr>
             </a:pPr>
             <a:r>
-              <a:t>Proximos passos imediatos (proxima semana)</a:t>
+              <a:t>Marco atingido: 101 fichas em 11 tracks</a:t>
             </a:r>
           </a:p>
         </p:txBody>
@@ -8408,7 +9628,7 @@
                   <a:srgbClr val="1F2A4E"/>
                 </a:solidFill>
               </a:rPr>
-              <a:t>1.  </a:t>
+              <a:t>Total:  </a:t>
             </a:r>
             <a:r>
               <a:rPr sz="1600">
@@ -8416,7 +9636,7 @@
                   <a:srgbClr val="3D424E"/>
                 </a:solidFill>
               </a:rPr>
-              <a:t>Setup Overleaf com template institucional</a:t>
+              <a:t>101 fichas distribuídas em 11 tracks temáticos</a:t>
             </a:r>
           </a:p>
           <a:p>
@@ -8431,7 +9651,7 @@
                   <a:srgbClr val="1F2A4E"/>
                 </a:solidFill>
               </a:rPr>
-              <a:t>2.  </a:t>
+              <a:t>Meta 2025-2026:  </a:t>
             </a:r>
             <a:r>
               <a:rPr sz="1600">
@@ -8439,7 +9659,7 @@
                   <a:srgbClr val="3D424E"/>
                 </a:solidFill>
               </a:rPr>
-              <a:t>Gerar .bib consolidado a partir das 101 fichas</a:t>
+              <a:t>25 fichas (meta era ≥20) — atingida</a:t>
             </a:r>
           </a:p>
           <a:p>
@@ -8454,7 +9674,7 @@
                   <a:srgbClr val="1F2A4E"/>
                 </a:solidFill>
               </a:rPr>
-              <a:t>3.  </a:t>
+              <a:t>Crescimento:  </a:t>
             </a:r>
             <a:r>
               <a:rPr sz="1600">
@@ -8462,7 +9682,7 @@
                   <a:srgbClr val="3D424E"/>
                 </a:solidFill>
               </a:rPr>
-              <a:t>Escrever Cap 1 - Introducao usando narrativa pre-qualificacao</a:t>
+              <a:t>+46 fichas na ampliação recente do corpus (55 → 101)</a:t>
             </a:r>
           </a:p>
           <a:p>
@@ -8477,7 +9697,7 @@
                   <a:srgbClr val="1F2A4E"/>
                 </a:solidFill>
               </a:rPr>
-              <a:t>4.  </a:t>
+              <a:t>Novos tracks:  </a:t>
             </a:r>
             <a:r>
               <a:rPr sz="1600">
@@ -8485,7 +9705,7 @@
                   <a:srgbClr val="3D424E"/>
                 </a:solidFill>
               </a:rPr>
-              <a:t>Importar imagens ja produzidas (FiLM pipeline, ConvNeXt-T, metricas Hardt)</a:t>
+              <a:t>I, J, K criados em resposta a recomendações</a:t>
             </a:r>
           </a:p>
           <a:p>
@@ -8500,7 +9720,7 @@
                   <a:srgbClr val="1F2A4E"/>
                 </a:solidFill>
               </a:rPr>
-              <a:t>5.  </a:t>
+              <a:t>Track I:  </a:t>
             </a:r>
             <a:r>
               <a:rPr sz="1600">
@@ -8508,7 +9728,7 @@
                   <a:srgbClr val="3D424E"/>
                 </a:solidFill>
               </a:rPr>
-              <a:t>Promover fichas OVERVIEW_ONLY para VERIFIED nas 12 forte favoravel</a:t>
+              <a:t>VLM / CLIP em fairness (14 fichas) — resposta direta ao orientador</a:t>
             </a:r>
           </a:p>
           <a:p>
@@ -8523,7 +9743,7 @@
                   <a:srgbClr val="1F2A4E"/>
                 </a:solidFill>
               </a:rPr>
-              <a:t>  </a:t>
+              <a:t>Track J:  </a:t>
             </a:r>
             <a:r>
               <a:rPr sz="1600">
@@ -8531,7 +9751,7 @@
                   <a:srgbClr val="3D424E"/>
                 </a:solidFill>
               </a:rPr>
-              <a:t/>
+              <a:t>Conditioning moderno LoRA / ViT (5 fichas)</a:t>
             </a:r>
           </a:p>
           <a:p>
@@ -8546,7 +9766,7 @@
                   <a:srgbClr val="1F2A4E"/>
                 </a:solidFill>
               </a:rPr>
-              <a:t>Entrega proxima reuniao:  </a:t>
+              <a:t>Track K:  </a:t>
             </a:r>
             <a:r>
               <a:rPr sz="1600">
@@ -8554,11 +9774,1039 @@
                   <a:srgbClr val="3D424E"/>
                 </a:solidFill>
               </a:rPr>
-              <a:t>Cap 1 escrito em LaTeX + bibliografia consolidada</a:t>
-            </a:r>
-          </a:p>
-        </p:txBody>
-      </p:sp>
+              <a:t>Fundadores de FR — ArcFace, FaceNet, AdaFace (6 fichas)</a:t>
+            </a:r>
+          </a:p>
+        </p:txBody>
+      </p:sp>
+    </p:spTree>
+  </p:cSld>
+  <p:clrMapOvr>
+    <a:masterClrMapping/>
+  </p:clrMapOvr>
+</p:sld>
+</file>
+
+<file path=ppt/slides/slide7.xml><?xml version="1.0" encoding="utf-8"?>
+<p:sld xmlns:a="http://schemas.openxmlformats.org/drawingml/2006/main" xmlns:p="http://schemas.openxmlformats.org/presentationml/2006/main" xmlns:r="http://schemas.openxmlformats.org/officeDocument/2006/relationships">
+  <p:cSld>
+    <p:spTree>
+      <p:nvGrpSpPr>
+        <p:cNvPr id="1" name=""/>
+        <p:cNvGrpSpPr/>
+        <p:nvPr/>
+      </p:nvGrpSpPr>
+      <p:grpSpPr/>
+      <p:sp>
+        <p:nvSpPr>
+          <p:cNvPr id="2" name="TextBox 1"/>
+          <p:cNvSpPr txBox="1"/>
+          <p:nvPr/>
+        </p:nvSpPr>
+        <p:spPr>
+          <a:xfrm>
+            <a:off x="457200" y="365760"/>
+            <a:ext cx="11430000" cy="822960"/>
+          </a:xfrm>
+          <a:prstGeom prst="rect">
+            <a:avLst/>
+          </a:prstGeom>
+          <a:noFill/>
+        </p:spPr>
+        <p:txBody>
+          <a:bodyPr wrap="square">
+            <a:spAutoFit/>
+          </a:bodyPr>
+          <a:lstStyle/>
+          <a:p>
+            <a:pPr>
+              <a:defRPr sz="2600" b="1">
+                <a:solidFill>
+                  <a:srgbClr val="1F2A4E"/>
+                </a:solidFill>
+              </a:defRPr>
+            </a:pPr>
+            <a:r>
+              <a:t>Justificativa de cada track (por que existe)</a:t>
+            </a:r>
+          </a:p>
+        </p:txBody>
+      </p:sp>
+      <p:sp>
+        <p:nvSpPr>
+          <p:cNvPr id="3" name="Rectangle 2"/>
+          <p:cNvSpPr/>
+          <p:nvPr/>
+        </p:nvSpPr>
+        <p:spPr>
+          <a:xfrm>
+            <a:off x="457200" y="1143000"/>
+            <a:ext cx="11430000" cy="36576"/>
+          </a:xfrm>
+          <a:prstGeom prst="rect">
+            <a:avLst/>
+          </a:prstGeom>
+          <a:solidFill>
+            <a:srgbClr val="1F2A4E"/>
+          </a:solidFill>
+          <a:ln>
+            <a:noFill/>
+          </a:ln>
+        </p:spPr>
+        <p:style>
+          <a:lnRef idx="1">
+            <a:schemeClr val="accent1"/>
+          </a:lnRef>
+          <a:fillRef idx="3">
+            <a:schemeClr val="accent1"/>
+          </a:fillRef>
+          <a:effectRef idx="2">
+            <a:schemeClr val="accent1"/>
+          </a:effectRef>
+          <a:fontRef idx="minor">
+            <a:schemeClr val="lt1"/>
+          </a:fontRef>
+        </p:style>
+        <p:txBody>
+          <a:bodyPr rtlCol="0" anchor="ctr"/>
+          <a:lstStyle/>
+          <a:p>
+            <a:pPr algn="ctr"/>
+          </a:p>
+        </p:txBody>
+      </p:sp>
+      <p:graphicFrame>
+        <p:nvGraphicFramePr>
+          <p:cNvPr id="4" name="Table 3"/>
+          <p:cNvGraphicFramePr>
+            <a:graphicFrameLocks noGrp="1"/>
+          </p:cNvGraphicFramePr>
+          <p:nvPr/>
+        </p:nvGraphicFramePr>
+        <p:xfrm>
+          <a:off x="457200" y="1371600"/>
+          <a:ext cx="11430000" cy="4754880"/>
+        </p:xfrm>
+        <a:graphic>
+          <a:graphicData uri="http://schemas.openxmlformats.org/drawingml/2006/table">
+            <a:tbl>
+              <a:tblPr firstRow="1" bandRow="1">
+                <a:tableStyleId>{5C22544A-7EE6-4342-B048-85BDC9FD1C3A}</a:tableStyleId>
+              </a:tblPr>
+              <a:tblGrid>
+                <a:gridCol w="914400"/>
+                <a:gridCol w="3657600"/>
+                <a:gridCol w="731520"/>
+                <a:gridCol w="6126480"/>
+              </a:tblGrid>
+              <a:tr h="396240">
+                <a:tc>
+                  <a:txBody>
+                    <a:bodyPr/>
+                    <a:lstStyle/>
+                    <a:p>
+                      <a:r>
+                        <a:rPr sz="1300" b="1">
+                          <a:solidFill>
+                            <a:srgbClr val="FFFFFF"/>
+                          </a:solidFill>
+                        </a:rPr>
+                        <a:t>Track</a:t>
+                      </a:r>
+                    </a:p>
+                  </a:txBody>
+                  <a:tcPr>
+                    <a:solidFill>
+                      <a:srgbClr val="1F2A4E"/>
+                    </a:solidFill>
+                  </a:tcPr>
+                </a:tc>
+                <a:tc>
+                  <a:txBody>
+                    <a:bodyPr/>
+                    <a:lstStyle/>
+                    <a:p>
+                      <a:r>
+                        <a:rPr sz="1300" b="1">
+                          <a:solidFill>
+                            <a:srgbClr val="FFFFFF"/>
+                          </a:solidFill>
+                        </a:rPr>
+                        <a:t>Tema</a:t>
+                      </a:r>
+                    </a:p>
+                  </a:txBody>
+                  <a:tcPr>
+                    <a:solidFill>
+                      <a:srgbClr val="1F2A4E"/>
+                    </a:solidFill>
+                  </a:tcPr>
+                </a:tc>
+                <a:tc>
+                  <a:txBody>
+                    <a:bodyPr/>
+                    <a:lstStyle/>
+                    <a:p>
+                      <a:r>
+                        <a:rPr sz="1300" b="1">
+                          <a:solidFill>
+                            <a:srgbClr val="FFFFFF"/>
+                          </a:solidFill>
+                        </a:rPr>
+                        <a:t>Fichas</a:t>
+                      </a:r>
+                    </a:p>
+                  </a:txBody>
+                  <a:tcPr>
+                    <a:solidFill>
+                      <a:srgbClr val="1F2A4E"/>
+                    </a:solidFill>
+                  </a:tcPr>
+                </a:tc>
+                <a:tc>
+                  <a:txBody>
+                    <a:bodyPr/>
+                    <a:lstStyle/>
+                    <a:p>
+                      <a:r>
+                        <a:rPr sz="1300" b="1">
+                          <a:solidFill>
+                            <a:srgbClr val="FFFFFF"/>
+                          </a:solidFill>
+                        </a:rPr>
+                        <a:t>Papel na tese</a:t>
+                      </a:r>
+                    </a:p>
+                  </a:txBody>
+                  <a:tcPr>
+                    <a:solidFill>
+                      <a:srgbClr val="1F2A4E"/>
+                    </a:solidFill>
+                  </a:tcPr>
+                </a:tc>
+              </a:tr>
+              <a:tr h="396240">
+                <a:tc>
+                  <a:txBody>
+                    <a:bodyPr/>
+                    <a:lstStyle/>
+                    <a:p>
+                      <a:r>
+                        <a:rPr sz="1100">
+                          <a:solidFill>
+                            <a:srgbClr val="3D424E"/>
+                          </a:solidFill>
+                        </a:rPr>
+                        <a:t>A</a:t>
+                      </a:r>
+                    </a:p>
+                  </a:txBody>
+                  <a:tcPr/>
+                </a:tc>
+                <a:tc>
+                  <a:txBody>
+                    <a:bodyPr/>
+                    <a:lstStyle/>
+                    <a:p>
+                      <a:r>
+                        <a:rPr sz="1100">
+                          <a:solidFill>
+                            <a:srgbClr val="3D424E"/>
+                          </a:solidFill>
+                        </a:rPr>
+                        <a:t>Race classification 7 classes</a:t>
+                      </a:r>
+                    </a:p>
+                  </a:txBody>
+                  <a:tcPr/>
+                </a:tc>
+                <a:tc>
+                  <a:txBody>
+                    <a:bodyPr/>
+                    <a:lstStyle/>
+                    <a:p>
+                      <a:r>
+                        <a:rPr sz="1100">
+                          <a:solidFill>
+                            <a:srgbClr val="3D424E"/>
+                          </a:solidFill>
+                        </a:rPr>
+                        <a:t>4</a:t>
+                      </a:r>
+                    </a:p>
+                  </a:txBody>
+                  <a:tcPr/>
+                </a:tc>
+                <a:tc>
+                  <a:txBody>
+                    <a:bodyPr/>
+                    <a:lstStyle/>
+                    <a:p>
+                      <a:r>
+                        <a:rPr sz="1100">
+                          <a:solidFill>
+                            <a:srgbClr val="3D424E"/>
+                          </a:solidFill>
+                        </a:rPr>
+                        <a:t>Tarefa central</a:t>
+                      </a:r>
+                    </a:p>
+                  </a:txBody>
+                  <a:tcPr/>
+                </a:tc>
+              </a:tr>
+              <a:tr h="396240">
+                <a:tc>
+                  <a:txBody>
+                    <a:bodyPr/>
+                    <a:lstStyle/>
+                    <a:p>
+                      <a:r>
+                        <a:rPr sz="1100">
+                          <a:solidFill>
+                            <a:srgbClr val="3D424E"/>
+                          </a:solidFill>
+                        </a:rPr>
+                        <a:t>B</a:t>
+                      </a:r>
+                    </a:p>
+                  </a:txBody>
+                  <a:tcPr/>
+                </a:tc>
+                <a:tc>
+                  <a:txBody>
+                    <a:bodyPr/>
+                    <a:lstStyle/>
+                    <a:p>
+                      <a:r>
+                        <a:rPr sz="1100">
+                          <a:solidFill>
+                            <a:srgbClr val="3D424E"/>
+                          </a:solidFill>
+                        </a:rPr>
+                        <a:t>FR fairness</a:t>
+                      </a:r>
+                    </a:p>
+                  </a:txBody>
+                  <a:tcPr/>
+                </a:tc>
+                <a:tc>
+                  <a:txBody>
+                    <a:bodyPr/>
+                    <a:lstStyle/>
+                    <a:p>
+                      <a:r>
+                        <a:rPr sz="1100">
+                          <a:solidFill>
+                            <a:srgbClr val="3D424E"/>
+                          </a:solidFill>
+                        </a:rPr>
+                        <a:t>16</a:t>
+                      </a:r>
+                    </a:p>
+                  </a:txBody>
+                  <a:tcPr/>
+                </a:tc>
+                <a:tc>
+                  <a:txBody>
+                    <a:bodyPr/>
+                    <a:lstStyle/>
+                    <a:p>
+                      <a:r>
+                        <a:rPr sz="1100">
+                          <a:solidFill>
+                            <a:srgbClr val="3D424E"/>
+                          </a:solidFill>
+                        </a:rPr>
+                        <a:t>Paradigma dominante</a:t>
+                      </a:r>
+                    </a:p>
+                  </a:txBody>
+                  <a:tcPr/>
+                </a:tc>
+              </a:tr>
+              <a:tr h="396240">
+                <a:tc>
+                  <a:txBody>
+                    <a:bodyPr/>
+                    <a:lstStyle/>
+                    <a:p>
+                      <a:r>
+                        <a:rPr sz="1100">
+                          <a:solidFill>
+                            <a:srgbClr val="3D424E"/>
+                          </a:solidFill>
+                        </a:rPr>
+                        <a:t>C</a:t>
+                      </a:r>
+                    </a:p>
+                  </a:txBody>
+                  <a:tcPr/>
+                </a:tc>
+                <a:tc>
+                  <a:txBody>
+                    <a:bodyPr/>
+                    <a:lstStyle/>
+                    <a:p>
+                      <a:r>
+                        <a:rPr sz="1100">
+                          <a:solidFill>
+                            <a:srgbClr val="3D424E"/>
+                          </a:solidFill>
+                        </a:rPr>
+                        <a:t>Skin tone (MST)</a:t>
+                      </a:r>
+                    </a:p>
+                  </a:txBody>
+                  <a:tcPr/>
+                </a:tc>
+                <a:tc>
+                  <a:txBody>
+                    <a:bodyPr/>
+                    <a:lstStyle/>
+                    <a:p>
+                      <a:r>
+                        <a:rPr sz="1100">
+                          <a:solidFill>
+                            <a:srgbClr val="3D424E"/>
+                          </a:solidFill>
+                        </a:rPr>
+                        <a:t>7</a:t>
+                      </a:r>
+                    </a:p>
+                  </a:txBody>
+                  <a:tcPr/>
+                </a:tc>
+                <a:tc>
+                  <a:txBody>
+                    <a:bodyPr/>
+                    <a:lstStyle/>
+                    <a:p>
+                      <a:r>
+                        <a:rPr sz="1100">
+                          <a:solidFill>
+                            <a:srgbClr val="3D424E"/>
+                          </a:solidFill>
+                        </a:rPr>
+                        <a:t>Sinal auxiliar do pipeline</a:t>
+                      </a:r>
+                    </a:p>
+                  </a:txBody>
+                  <a:tcPr/>
+                </a:tc>
+              </a:tr>
+              <a:tr h="396240">
+                <a:tc>
+                  <a:txBody>
+                    <a:bodyPr/>
+                    <a:lstStyle/>
+                    <a:p>
+                      <a:r>
+                        <a:rPr sz="1100">
+                          <a:solidFill>
+                            <a:srgbClr val="3D424E"/>
+                          </a:solidFill>
+                        </a:rPr>
+                        <a:t>D</a:t>
+                      </a:r>
+                    </a:p>
+                  </a:txBody>
+                  <a:tcPr/>
+                </a:tc>
+                <a:tc>
+                  <a:txBody>
+                    <a:bodyPr/>
+                    <a:lstStyle/>
+                    <a:p>
+                      <a:r>
+                        <a:rPr sz="1100">
+                          <a:solidFill>
+                            <a:srgbClr val="3D424E"/>
+                          </a:solidFill>
+                        </a:rPr>
+                        <a:t>Mitigação algorítmica</a:t>
+                      </a:r>
+                    </a:p>
+                  </a:txBody>
+                  <a:tcPr/>
+                </a:tc>
+                <a:tc>
+                  <a:txBody>
+                    <a:bodyPr/>
+                    <a:lstStyle/>
+                    <a:p>
+                      <a:r>
+                        <a:rPr sz="1100">
+                          <a:solidFill>
+                            <a:srgbClr val="3D424E"/>
+                          </a:solidFill>
+                        </a:rPr>
+                        <a:t>10</a:t>
+                      </a:r>
+                    </a:p>
+                  </a:txBody>
+                  <a:tcPr/>
+                </a:tc>
+                <a:tc>
+                  <a:txBody>
+                    <a:bodyPr/>
+                    <a:lstStyle/>
+                    <a:p>
+                      <a:r>
+                        <a:rPr sz="1100">
+                          <a:solidFill>
+                            <a:srgbClr val="3D424E"/>
+                          </a:solidFill>
+                        </a:rPr>
+                        <a:t>Baselines a superar</a:t>
+                      </a:r>
+                    </a:p>
+                  </a:txBody>
+                  <a:tcPr/>
+                </a:tc>
+              </a:tr>
+              <a:tr h="396240">
+                <a:tc>
+                  <a:txBody>
+                    <a:bodyPr/>
+                    <a:lstStyle/>
+                    <a:p>
+                      <a:r>
+                        <a:rPr sz="1100">
+                          <a:solidFill>
+                            <a:srgbClr val="3D424E"/>
+                          </a:solidFill>
+                        </a:rPr>
+                        <a:t>E</a:t>
+                      </a:r>
+                    </a:p>
+                  </a:txBody>
+                  <a:tcPr/>
+                </a:tc>
+                <a:tc>
+                  <a:txBody>
+                    <a:bodyPr/>
+                    <a:lstStyle/>
+                    <a:p>
+                      <a:r>
+                        <a:rPr sz="1100">
+                          <a:solidFill>
+                            <a:srgbClr val="3D424E"/>
+                          </a:solidFill>
+                        </a:rPr>
+                        <a:t>Auditoria e surveys</a:t>
+                      </a:r>
+                    </a:p>
+                  </a:txBody>
+                  <a:tcPr/>
+                </a:tc>
+                <a:tc>
+                  <a:txBody>
+                    <a:bodyPr/>
+                    <a:lstStyle/>
+                    <a:p>
+                      <a:r>
+                        <a:rPr sz="1100">
+                          <a:solidFill>
+                            <a:srgbClr val="3D424E"/>
+                          </a:solidFill>
+                        </a:rPr>
+                        <a:t>14</a:t>
+                      </a:r>
+                    </a:p>
+                  </a:txBody>
+                  <a:tcPr/>
+                </a:tc>
+                <a:tc>
+                  <a:txBody>
+                    <a:bodyPr/>
+                    <a:lstStyle/>
+                    <a:p>
+                      <a:r>
+                        <a:rPr sz="1100">
+                          <a:solidFill>
+                            <a:srgbClr val="3D424E"/>
+                          </a:solidFill>
+                        </a:rPr>
+                        <a:t>Infraestrutura intelectual</a:t>
+                      </a:r>
+                    </a:p>
+                  </a:txBody>
+                  <a:tcPr/>
+                </a:tc>
+              </a:tr>
+              <a:tr h="396240">
+                <a:tc>
+                  <a:txBody>
+                    <a:bodyPr/>
+                    <a:lstStyle/>
+                    <a:p>
+                      <a:r>
+                        <a:rPr sz="1100">
+                          <a:solidFill>
+                            <a:srgbClr val="3D424E"/>
+                          </a:solidFill>
+                        </a:rPr>
+                        <a:t>F</a:t>
+                      </a:r>
+                    </a:p>
+                  </a:txBody>
+                  <a:tcPr/>
+                </a:tc>
+                <a:tc>
+                  <a:txBody>
+                    <a:bodyPr/>
+                    <a:lstStyle/>
+                    <a:p>
+                      <a:r>
+                        <a:rPr sz="1100">
+                          <a:solidFill>
+                            <a:srgbClr val="3D424E"/>
+                          </a:solidFill>
+                        </a:rPr>
+                        <a:t>Fundamentação ética</a:t>
+                      </a:r>
+                    </a:p>
+                  </a:txBody>
+                  <a:tcPr/>
+                </a:tc>
+                <a:tc>
+                  <a:txBody>
+                    <a:bodyPr/>
+                    <a:lstStyle/>
+                    <a:p>
+                      <a:r>
+                        <a:rPr sz="1100">
+                          <a:solidFill>
+                            <a:srgbClr val="3D424E"/>
+                          </a:solidFill>
+                        </a:rPr>
+                        <a:t>3</a:t>
+                      </a:r>
+                    </a:p>
+                  </a:txBody>
+                  <a:tcPr/>
+                </a:tc>
+                <a:tc>
+                  <a:txBody>
+                    <a:bodyPr/>
+                    <a:lstStyle/>
+                    <a:p>
+                      <a:r>
+                        <a:rPr sz="1100">
+                          <a:solidFill>
+                            <a:srgbClr val="3D424E"/>
+                          </a:solidFill>
+                        </a:rPr>
+                        <a:t>Posicionamento da tese</a:t>
+                      </a:r>
+                    </a:p>
+                  </a:txBody>
+                  <a:tcPr/>
+                </a:tc>
+              </a:tr>
+              <a:tr h="396240">
+                <a:tc>
+                  <a:txBody>
+                    <a:bodyPr/>
+                    <a:lstStyle/>
+                    <a:p>
+                      <a:r>
+                        <a:rPr sz="1100">
+                          <a:solidFill>
+                            <a:srgbClr val="3D424E"/>
+                          </a:solidFill>
+                        </a:rPr>
+                        <a:t>G</a:t>
+                      </a:r>
+                    </a:p>
+                  </a:txBody>
+                  <a:tcPr/>
+                </a:tc>
+                <a:tc>
+                  <a:txBody>
+                    <a:bodyPr/>
+                    <a:lstStyle/>
+                    <a:p>
+                      <a:r>
+                        <a:rPr sz="1100">
+                          <a:solidFill>
+                            <a:srgbClr val="3D424E"/>
+                          </a:solidFill>
+                        </a:rPr>
+                        <a:t>Mecanismos ML paradigmáticos</a:t>
+                      </a:r>
+                    </a:p>
+                  </a:txBody>
+                  <a:tcPr/>
+                </a:tc>
+                <a:tc>
+                  <a:txBody>
+                    <a:bodyPr/>
+                    <a:lstStyle/>
+                    <a:p>
+                      <a:r>
+                        <a:rPr sz="1100">
+                          <a:solidFill>
+                            <a:srgbClr val="3D424E"/>
+                          </a:solidFill>
+                        </a:rPr>
+                        <a:t>9</a:t>
+                      </a:r>
+                    </a:p>
+                  </a:txBody>
+                  <a:tcPr/>
+                </a:tc>
+                <a:tc>
+                  <a:txBody>
+                    <a:bodyPr/>
+                    <a:lstStyle/>
+                    <a:p>
+                      <a:r>
+                        <a:rPr sz="1100">
+                          <a:solidFill>
+                            <a:srgbClr val="3D424E"/>
+                          </a:solidFill>
+                        </a:rPr>
+                        <a:t>Esqueleto teórico (FiLM, LAFTR)</a:t>
+                      </a:r>
+                    </a:p>
+                  </a:txBody>
+                  <a:tcPr/>
+                </a:tc>
+              </a:tr>
+              <a:tr h="396240">
+                <a:tc>
+                  <a:txBody>
+                    <a:bodyPr/>
+                    <a:lstStyle/>
+                    <a:p>
+                      <a:r>
+                        <a:rPr sz="1100">
+                          <a:solidFill>
+                            <a:srgbClr val="3D424E"/>
+                          </a:solidFill>
+                        </a:rPr>
+                        <a:t>I</a:t>
+                      </a:r>
+                    </a:p>
+                  </a:txBody>
+                  <a:tcPr>
+                    <a:solidFill>
+                      <a:srgbClr val="E8EAED"/>
+                    </a:solidFill>
+                  </a:tcPr>
+                </a:tc>
+                <a:tc>
+                  <a:txBody>
+                    <a:bodyPr/>
+                    <a:lstStyle/>
+                    <a:p>
+                      <a:r>
+                        <a:rPr sz="1100">
+                          <a:solidFill>
+                            <a:srgbClr val="3D424E"/>
+                          </a:solidFill>
+                        </a:rPr>
+                        <a:t>VLM / CLIP em fairness</a:t>
+                      </a:r>
+                    </a:p>
+                  </a:txBody>
+                  <a:tcPr>
+                    <a:solidFill>
+                      <a:srgbClr val="E8EAED"/>
+                    </a:solidFill>
+                  </a:tcPr>
+                </a:tc>
+                <a:tc>
+                  <a:txBody>
+                    <a:bodyPr/>
+                    <a:lstStyle/>
+                    <a:p>
+                      <a:r>
+                        <a:rPr sz="1100">
+                          <a:solidFill>
+                            <a:srgbClr val="3D424E"/>
+                          </a:solidFill>
+                        </a:rPr>
+                        <a:t>14</a:t>
+                      </a:r>
+                    </a:p>
+                  </a:txBody>
+                  <a:tcPr>
+                    <a:solidFill>
+                      <a:srgbClr val="E8EAED"/>
+                    </a:solidFill>
+                  </a:tcPr>
+                </a:tc>
+                <a:tc>
+                  <a:txBody>
+                    <a:bodyPr/>
+                    <a:lstStyle/>
+                    <a:p>
+                      <a:r>
+                        <a:rPr sz="1100">
+                          <a:solidFill>
+                            <a:srgbClr val="3D424E"/>
+                          </a:solidFill>
+                        </a:rPr>
+                        <a:t>Resposta direta ao orientador</a:t>
+                      </a:r>
+                    </a:p>
+                  </a:txBody>
+                  <a:tcPr>
+                    <a:solidFill>
+                      <a:srgbClr val="E8EAED"/>
+                    </a:solidFill>
+                  </a:tcPr>
+                </a:tc>
+              </a:tr>
+              <a:tr h="396240">
+                <a:tc>
+                  <a:txBody>
+                    <a:bodyPr/>
+                    <a:lstStyle/>
+                    <a:p>
+                      <a:r>
+                        <a:rPr sz="1100">
+                          <a:solidFill>
+                            <a:srgbClr val="3D424E"/>
+                          </a:solidFill>
+                        </a:rPr>
+                        <a:t>J</a:t>
+                      </a:r>
+                    </a:p>
+                  </a:txBody>
+                  <a:tcPr>
+                    <a:solidFill>
+                      <a:srgbClr val="E8EAED"/>
+                    </a:solidFill>
+                  </a:tcPr>
+                </a:tc>
+                <a:tc>
+                  <a:txBody>
+                    <a:bodyPr/>
+                    <a:lstStyle/>
+                    <a:p>
+                      <a:r>
+                        <a:rPr sz="1100">
+                          <a:solidFill>
+                            <a:srgbClr val="3D424E"/>
+                          </a:solidFill>
+                        </a:rPr>
+                        <a:t>Conditioning moderno (LoRA, ViT)</a:t>
+                      </a:r>
+                    </a:p>
+                  </a:txBody>
+                  <a:tcPr>
+                    <a:solidFill>
+                      <a:srgbClr val="E8EAED"/>
+                    </a:solidFill>
+                  </a:tcPr>
+                </a:tc>
+                <a:tc>
+                  <a:txBody>
+                    <a:bodyPr/>
+                    <a:lstStyle/>
+                    <a:p>
+                      <a:r>
+                        <a:rPr sz="1100">
+                          <a:solidFill>
+                            <a:srgbClr val="3D424E"/>
+                          </a:solidFill>
+                        </a:rPr>
+                        <a:t>5</a:t>
+                      </a:r>
+                    </a:p>
+                  </a:txBody>
+                  <a:tcPr>
+                    <a:solidFill>
+                      <a:srgbClr val="E8EAED"/>
+                    </a:solidFill>
+                  </a:tcPr>
+                </a:tc>
+                <a:tc>
+                  <a:txBody>
+                    <a:bodyPr/>
+                    <a:lstStyle/>
+                    <a:p>
+                      <a:r>
+                        <a:rPr sz="1100">
+                          <a:solidFill>
+                            <a:srgbClr val="3D424E"/>
+                          </a:solidFill>
+                        </a:rPr>
+                        <a:t>Alternativas ao FiLM</a:t>
+                      </a:r>
+                    </a:p>
+                  </a:txBody>
+                  <a:tcPr>
+                    <a:solidFill>
+                      <a:srgbClr val="E8EAED"/>
+                    </a:solidFill>
+                  </a:tcPr>
+                </a:tc>
+              </a:tr>
+              <a:tr h="396240">
+                <a:tc>
+                  <a:txBody>
+                    <a:bodyPr/>
+                    <a:lstStyle/>
+                    <a:p>
+                      <a:r>
+                        <a:rPr sz="1100">
+                          <a:solidFill>
+                            <a:srgbClr val="3D424E"/>
+                          </a:solidFill>
+                        </a:rPr>
+                        <a:t>K</a:t>
+                      </a:r>
+                    </a:p>
+                  </a:txBody>
+                  <a:tcPr>
+                    <a:solidFill>
+                      <a:srgbClr val="E8EAED"/>
+                    </a:solidFill>
+                  </a:tcPr>
+                </a:tc>
+                <a:tc>
+                  <a:txBody>
+                    <a:bodyPr/>
+                    <a:lstStyle/>
+                    <a:p>
+                      <a:r>
+                        <a:rPr sz="1100">
+                          <a:solidFill>
+                            <a:srgbClr val="3D424E"/>
+                          </a:solidFill>
+                        </a:rPr>
+                        <a:t>Fundadores de FR (ArcFace, FaceNet)</a:t>
+                      </a:r>
+                    </a:p>
+                  </a:txBody>
+                  <a:tcPr>
+                    <a:solidFill>
+                      <a:srgbClr val="E8EAED"/>
+                    </a:solidFill>
+                  </a:tcPr>
+                </a:tc>
+                <a:tc>
+                  <a:txBody>
+                    <a:bodyPr/>
+                    <a:lstStyle/>
+                    <a:p>
+                      <a:r>
+                        <a:rPr sz="1100">
+                          <a:solidFill>
+                            <a:srgbClr val="3D424E"/>
+                          </a:solidFill>
+                        </a:rPr>
+                        <a:t>6</a:t>
+                      </a:r>
+                    </a:p>
+                  </a:txBody>
+                  <a:tcPr>
+                    <a:solidFill>
+                      <a:srgbClr val="E8EAED"/>
+                    </a:solidFill>
+                  </a:tcPr>
+                </a:tc>
+                <a:tc>
+                  <a:txBody>
+                    <a:bodyPr/>
+                    <a:lstStyle/>
+                    <a:p>
+                      <a:r>
+                        <a:rPr sz="1100">
+                          <a:solidFill>
+                            <a:srgbClr val="3D424E"/>
+                          </a:solidFill>
+                        </a:rPr>
+                        <a:t>Preenche lacuna óbvia</a:t>
+                      </a:r>
+                    </a:p>
+                  </a:txBody>
+                  <a:tcPr>
+                    <a:solidFill>
+                      <a:srgbClr val="E8EAED"/>
+                    </a:solidFill>
+                  </a:tcPr>
+                </a:tc>
+              </a:tr>
+              <a:tr h="396240">
+                <a:tc>
+                  <a:txBody>
+                    <a:bodyPr/>
+                    <a:lstStyle/>
+                    <a:p>
+                      <a:r>
+                        <a:rPr sz="1100">
+                          <a:solidFill>
+                            <a:srgbClr val="3D424E"/>
+                          </a:solidFill>
+                        </a:rPr>
+                        <a:t>L</a:t>
+                      </a:r>
+                    </a:p>
+                  </a:txBody>
+                  <a:tcPr/>
+                </a:tc>
+                <a:tc>
+                  <a:txBody>
+                    <a:bodyPr/>
+                    <a:lstStyle/>
+                    <a:p>
+                      <a:r>
+                        <a:rPr sz="1100">
+                          <a:solidFill>
+                            <a:srgbClr val="3D424E"/>
+                          </a:solidFill>
+                        </a:rPr>
+                        <a:t>Auxiliar / complementar</a:t>
+                      </a:r>
+                    </a:p>
+                  </a:txBody>
+                  <a:tcPr/>
+                </a:tc>
+                <a:tc>
+                  <a:txBody>
+                    <a:bodyPr/>
+                    <a:lstStyle/>
+                    <a:p>
+                      <a:r>
+                        <a:rPr sz="1100">
+                          <a:solidFill>
+                            <a:srgbClr val="3D424E"/>
+                          </a:solidFill>
+                        </a:rPr>
+                        <a:t>13</a:t>
+                      </a:r>
+                    </a:p>
+                  </a:txBody>
+                  <a:tcPr/>
+                </a:tc>
+                <a:tc>
+                  <a:txBody>
+                    <a:bodyPr/>
+                    <a:lstStyle/>
+                    <a:p>
+                      <a:r>
+                        <a:rPr sz="1100">
+                          <a:solidFill>
+                            <a:srgbClr val="3D424E"/>
+                          </a:solidFill>
+                        </a:rPr>
+                        <a:t>Direções adjacentes</a:t>
+                      </a:r>
+                    </a:p>
+                  </a:txBody>
+                  <a:tcPr/>
+                </a:tc>
+              </a:tr>
+            </a:tbl>
+          </a:graphicData>
+        </a:graphic>
+      </p:graphicFrame>
       <p:sp>
         <p:nvSpPr>
           <p:cNvPr id="5" name="TextBox 4"/>
@@ -8589,7 +10837,7 @@
               </a:defRPr>
             </a:pPr>
             <a:r>
-              <a:t>30 dias contados ate 15/jul/2026 - margem confortavel sem folga para retrabalho</a:t>
+              <a:t>Tracks I, J, K são os novos tracks da ampliação recente — destacados para discussão</a:t>
             </a:r>
           </a:p>
         </p:txBody>
@@ -8602,7 +10850,7 @@
 </p:sld>
 </file>
 
-<file path=ppt/slides/slide25.xml><?xml version="1.0" encoding="utf-8"?>
+<file path=ppt/slides/slide8.xml><?xml version="1.0" encoding="utf-8"?>
 <p:sld xmlns:a="http://schemas.openxmlformats.org/drawingml/2006/main" xmlns:p="http://schemas.openxmlformats.org/presentationml/2006/main" xmlns:r="http://schemas.openxmlformats.org/officeDocument/2006/relationships">
   <p:cSld>
     <p:spTree>
@@ -8684,6 +10932,9 @@
                 </a:solidFill>
               </a:defRPr>
             </a:pPr>
+            <a:r>
+              <a:t>3</a:t>
+            </a:r>
           </a:p>
         </p:txBody>
       </p:sp>
@@ -8717,7 +10968,7 @@
               </a:defRPr>
             </a:pPr>
             <a:r>
-              <a:t>Obrigado</a:t>
+              <a:t>Pente fino</a:t>
             </a:r>
           </a:p>
           <a:p>
@@ -8729,7 +10980,7 @@
               </a:defRPr>
             </a:pPr>
             <a:r>
-              <a:t>Discussao livre - duvidas e ajustes antes do LaTeX</a:t>
+              <a:t>Classificação por impacto na tese</a:t>
             </a:r>
           </a:p>
         </p:txBody>
@@ -8742,150 +10993,7 @@
 </p:sld>
 </file>
 
-<file path=ppt/slides/slide3.xml><?xml version="1.0" encoding="utf-8"?>
-<p:sld xmlns:a="http://schemas.openxmlformats.org/drawingml/2006/main" xmlns:p="http://schemas.openxmlformats.org/presentationml/2006/main" xmlns:r="http://schemas.openxmlformats.org/officeDocument/2006/relationships">
-  <p:cSld>
-    <p:spTree>
-      <p:nvGrpSpPr>
-        <p:cNvPr id="1" name=""/>
-        <p:cNvGrpSpPr/>
-        <p:nvPr/>
-      </p:nvGrpSpPr>
-      <p:grpSpPr/>
-      <p:sp>
-        <p:nvSpPr>
-          <p:cNvPr id="2" name="Rectangle 1"/>
-          <p:cNvSpPr/>
-          <p:nvPr/>
-        </p:nvSpPr>
-        <p:spPr>
-          <a:xfrm>
-            <a:off x="0" y="0"/>
-            <a:ext cx="12188952" cy="6858000"/>
-          </a:xfrm>
-          <a:prstGeom prst="rect">
-            <a:avLst/>
-          </a:prstGeom>
-          <a:solidFill>
-            <a:srgbClr val="1F2A4E"/>
-          </a:solidFill>
-          <a:ln>
-            <a:noFill/>
-          </a:ln>
-        </p:spPr>
-        <p:style>
-          <a:lnRef idx="1">
-            <a:schemeClr val="accent1"/>
-          </a:lnRef>
-          <a:fillRef idx="3">
-            <a:schemeClr val="accent1"/>
-          </a:fillRef>
-          <a:effectRef idx="2">
-            <a:schemeClr val="accent1"/>
-          </a:effectRef>
-          <a:fontRef idx="minor">
-            <a:schemeClr val="lt1"/>
-          </a:fontRef>
-        </p:style>
-        <p:txBody>
-          <a:bodyPr rtlCol="0" anchor="ctr"/>
-          <a:lstStyle/>
-          <a:p>
-            <a:pPr algn="ctr"/>
-          </a:p>
-        </p:txBody>
-      </p:sp>
-      <p:sp>
-        <p:nvSpPr>
-          <p:cNvPr id="3" name="TextBox 2"/>
-          <p:cNvSpPr txBox="1"/>
-          <p:nvPr/>
-        </p:nvSpPr>
-        <p:spPr>
-          <a:xfrm>
-            <a:off x="731520" y="1371600"/>
-            <a:ext cx="2743200" cy="2743200"/>
-          </a:xfrm>
-          <a:prstGeom prst="rect">
-            <a:avLst/>
-          </a:prstGeom>
-          <a:noFill/>
-        </p:spPr>
-        <p:txBody>
-          <a:bodyPr wrap="none">
-            <a:spAutoFit/>
-          </a:bodyPr>
-          <a:lstStyle/>
-          <a:p>
-            <a:pPr>
-              <a:defRPr sz="14000" b="1">
-                <a:solidFill>
-                  <a:srgbClr val="FFFFFF"/>
-                </a:solidFill>
-              </a:defRPr>
-            </a:pPr>
-            <a:r>
-              <a:t>1</a:t>
-            </a:r>
-          </a:p>
-        </p:txBody>
-      </p:sp>
-      <p:sp>
-        <p:nvSpPr>
-          <p:cNvPr id="4" name="TextBox 3"/>
-          <p:cNvSpPr txBox="1"/>
-          <p:nvPr/>
-        </p:nvSpPr>
-        <p:spPr>
-          <a:xfrm>
-            <a:off x="3931920" y="2286000"/>
-            <a:ext cx="7772400" cy="1828800"/>
-          </a:xfrm>
-          <a:prstGeom prst="rect">
-            <a:avLst/>
-          </a:prstGeom>
-          <a:noFill/>
-        </p:spPr>
-        <p:txBody>
-          <a:bodyPr wrap="square">
-            <a:spAutoFit/>
-          </a:bodyPr>
-          <a:lstStyle/>
-          <a:p>
-            <a:pPr>
-              <a:defRPr sz="3800" b="1">
-                <a:solidFill>
-                  <a:srgbClr val="FFFFFF"/>
-                </a:solidFill>
-              </a:defRPr>
-            </a:pPr>
-            <a:r>
-              <a:t>Status das 8 decisoes</a:t>
-            </a:r>
-          </a:p>
-          <a:p>
-            <a:pPr>
-              <a:defRPr sz="1800">
-                <a:solidFill>
-                  <a:srgbClr val="E8EAED"/>
-                </a:solidFill>
-              </a:defRPr>
-            </a:pPr>
-            <a:r>
-              <a:t>Reuniao anterior - 08/jun/2026</a:t>
-            </a:r>
-          </a:p>
-        </p:txBody>
-      </p:sp>
-    </p:spTree>
-  </p:cSld>
-  <p:clrMapOvr>
-    <a:masterClrMapping/>
-  </p:clrMapOvr>
-</p:sld>
-</file>
-
-<file path=ppt/slides/slide4.xml><?xml version="1.0" encoding="utf-8"?>
+<file path=ppt/slides/slide9.xml><?xml version="1.0" encoding="utf-8"?>
 <p:sld xmlns:a="http://schemas.openxmlformats.org/drawingml/2006/main" xmlns:p="http://schemas.openxmlformats.org/presentationml/2006/main" xmlns:r="http://schemas.openxmlformats.org/officeDocument/2006/relationships">
   <p:cSld>
     <p:spTree>
@@ -8925,7 +11033,7 @@
               </a:defRPr>
             </a:pPr>
             <a:r>
-              <a:t>Decisoes da reuniao anterior - status</a:t>
+              <a:t>Classificação crítica das 101 fichas</a:t>
             </a:r>
           </a:p>
         </p:txBody>
@@ -8992,10 +11100,10 @@
                 <a:tableStyleId>{5C22544A-7EE6-4342-B048-85BDC9FD1C3A}</a:tableStyleId>
               </a:tblPr>
               <a:tblGrid>
-                <a:gridCol w="457200"/>
-                <a:gridCol w="4389120"/>
-                <a:gridCol w="1645920"/>
-                <a:gridCol w="4937760"/>
+                <a:gridCol w="2926080"/>
+                <a:gridCol w="914400"/>
+                <a:gridCol w="914400"/>
+                <a:gridCol w="6675120"/>
               </a:tblGrid>
               <a:tr h="679268">
                 <a:tc>
@@ -9009,7 +11117,7 @@
                             <a:srgbClr val="FFFFFF"/>
                           </a:solidFill>
                         </a:rPr>
-                        <a:t>#</a:t>
+                        <a:t>Categoria</a:t>
                       </a:r>
                     </a:p>
                   </a:txBody>
@@ -9030,7 +11138,7 @@
                             <a:srgbClr val="FFFFFF"/>
                           </a:solidFill>
                         </a:rPr>
-                        <a:t>Decisao</a:t>
+                        <a:t>Fichas</a:t>
                       </a:r>
                     </a:p>
                   </a:txBody>
@@ -9051,7 +11159,7 @@
                             <a:srgbClr val="FFFFFF"/>
                           </a:solidFill>
                         </a:rPr>
-                        <a:t>Status</a:t>
+                        <a:t>%</a:t>
                       </a:r>
                     </a:p>
                   </a:txBody>
@@ -9072,7 +11180,7 @@
                             <a:srgbClr val="FFFFFF"/>
                           </a:solidFill>
                         </a:rPr>
-                        <a:t>Observacoes</a:t>
+                        <a:t>Implicação para a tese</a:t>
                       </a:r>
                     </a:p>
                   </a:txBody>
@@ -9095,357 +11203,7 @@
                             <a:srgbClr val="3D424E"/>
                           </a:solidFill>
                         </a:rPr>
-                        <a:t>1</a:t>
-                      </a:r>
-                    </a:p>
-                  </a:txBody>
-                  <a:tcPr/>
-                </a:tc>
-                <a:tc>
-                  <a:txBody>
-                    <a:bodyPr/>
-                    <a:lstStyle/>
-                    <a:p>
-                      <a:r>
-                        <a:rPr sz="1100">
-                          <a:solidFill>
-                            <a:srgbClr val="3D424E"/>
-                          </a:solidFill>
-                        </a:rPr>
-                        <a:t>Pipeline 6 etapas aprovado</a:t>
-                      </a:r>
-                    </a:p>
-                  </a:txBody>
-                  <a:tcPr/>
-                </a:tc>
-                <a:tc>
-                  <a:txBody>
-                    <a:bodyPr/>
-                    <a:lstStyle/>
-                    <a:p>
-                      <a:r>
-                        <a:rPr sz="1100">
-                          <a:solidFill>
-                            <a:srgbClr val="3D424E"/>
-                          </a:solidFill>
-                        </a:rPr>
-                        <a:t>OK</a:t>
-                      </a:r>
-                    </a:p>
-                  </a:txBody>
-                  <a:tcPr/>
-                </a:tc>
-                <a:tc>
-                  <a:txBody>
-                    <a:bodyPr/>
-                    <a:lstStyle/>
-                    <a:p>
-                      <a:r>
-                        <a:rPr sz="1100">
-                          <a:solidFill>
-                            <a:srgbClr val="3D424E"/>
-                          </a:solidFill>
-                        </a:rPr>
-                        <a:t>Validado e detalhado por etapa</a:t>
-                      </a:r>
-                    </a:p>
-                  </a:txBody>
-                  <a:tcPr/>
-                </a:tc>
-              </a:tr>
-              <a:tr h="679268">
-                <a:tc>
-                  <a:txBody>
-                    <a:bodyPr/>
-                    <a:lstStyle/>
-                    <a:p>
-                      <a:r>
-                        <a:rPr sz="1100">
-                          <a:solidFill>
-                            <a:srgbClr val="3D424E"/>
-                          </a:solidFill>
-                        </a:rPr>
-                        <a:t>2</a:t>
-                      </a:r>
-                    </a:p>
-                  </a:txBody>
-                  <a:tcPr/>
-                </a:tc>
-                <a:tc>
-                  <a:txBody>
-                    <a:bodyPr/>
-                    <a:lstStyle/>
-                    <a:p>
-                      <a:r>
-                        <a:rPr sz="1100">
-                          <a:solidFill>
-                            <a:srgbClr val="3D424E"/>
-                          </a:solidFill>
-                        </a:rPr>
-                        <a:t>SkinToneNet pre-treinado</a:t>
-                      </a:r>
-                    </a:p>
-                  </a:txBody>
-                  <a:tcPr/>
-                </a:tc>
-                <a:tc>
-                  <a:txBody>
-                    <a:bodyPr/>
-                    <a:lstStyle/>
-                    <a:p>
-                      <a:r>
-                        <a:rPr sz="1100">
-                          <a:solidFill>
-                            <a:srgbClr val="3D424E"/>
-                          </a:solidFill>
-                        </a:rPr>
-                        <a:t>OK</a:t>
-                      </a:r>
-                    </a:p>
-                  </a:txBody>
-                  <a:tcPr/>
-                </a:tc>
-                <a:tc>
-                  <a:txBody>
-                    <a:bodyPr/>
-                    <a:lstStyle/>
-                    <a:p>
-                      <a:r>
-                        <a:rPr sz="1100">
-                          <a:solidFill>
-                            <a:srgbClr val="3D424E"/>
-                          </a:solidFill>
-                        </a:rPr>
-                        <a:t>Leitura integral concluida</a:t>
-                      </a:r>
-                    </a:p>
-                  </a:txBody>
-                  <a:tcPr/>
-                </a:tc>
-              </a:tr>
-              <a:tr h="679268">
-                <a:tc>
-                  <a:txBody>
-                    <a:bodyPr/>
-                    <a:lstStyle/>
-                    <a:p>
-                      <a:r>
-                        <a:rPr sz="1100">
-                          <a:solidFill>
-                            <a:srgbClr val="3D424E"/>
-                          </a:solidFill>
-                        </a:rPr>
-                        <a:t>3</a:t>
-                      </a:r>
-                    </a:p>
-                  </a:txBody>
-                  <a:tcPr/>
-                </a:tc>
-                <a:tc>
-                  <a:txBody>
-                    <a:bodyPr/>
-                    <a:lstStyle/>
-                    <a:p>
-                      <a:r>
-                        <a:rPr sz="1100">
-                          <a:solidFill>
-                            <a:srgbClr val="3D424E"/>
-                          </a:solidFill>
-                        </a:rPr>
-                        <a:t>Corpus &gt;=100 artigos</a:t>
-                      </a:r>
-                    </a:p>
-                  </a:txBody>
-                  <a:tcPr/>
-                </a:tc>
-                <a:tc>
-                  <a:txBody>
-                    <a:bodyPr/>
-                    <a:lstStyle/>
-                    <a:p>
-                      <a:r>
-                        <a:rPr sz="1100">
-                          <a:solidFill>
-                            <a:srgbClr val="3D424E"/>
-                          </a:solidFill>
-                        </a:rPr>
-                        <a:t>OK 101</a:t>
-                      </a:r>
-                    </a:p>
-                  </a:txBody>
-                  <a:tcPr/>
-                </a:tc>
-                <a:tc>
-                  <a:txBody>
-                    <a:bodyPr/>
-                    <a:lstStyle/>
-                    <a:p>
-                      <a:r>
-                        <a:rPr sz="1100">
-                          <a:solidFill>
-                            <a:srgbClr val="3D424E"/>
-                          </a:solidFill>
-                        </a:rPr>
-                        <a:t>+46 fichas na ultima rodada</a:t>
-                      </a:r>
-                    </a:p>
-                  </a:txBody>
-                  <a:tcPr/>
-                </a:tc>
-              </a:tr>
-              <a:tr h="679268">
-                <a:tc>
-                  <a:txBody>
-                    <a:bodyPr/>
-                    <a:lstStyle/>
-                    <a:p>
-                      <a:r>
-                        <a:rPr sz="1100">
-                          <a:solidFill>
-                            <a:srgbClr val="3D424E"/>
-                          </a:solidFill>
-                        </a:rPr>
-                        <a:t>4</a:t>
-                      </a:r>
-                    </a:p>
-                  </a:txBody>
-                  <a:tcPr/>
-                </a:tc>
-                <a:tc>
-                  <a:txBody>
-                    <a:bodyPr/>
-                    <a:lstStyle/>
-                    <a:p>
-                      <a:r>
-                        <a:rPr sz="1100">
-                          <a:solidFill>
-                            <a:srgbClr val="3D424E"/>
-                          </a:solidFill>
-                        </a:rPr>
-                        <a:t>&gt;=20 artigos 2025-2026</a:t>
-                      </a:r>
-                    </a:p>
-                  </a:txBody>
-                  <a:tcPr/>
-                </a:tc>
-                <a:tc>
-                  <a:txBody>
-                    <a:bodyPr/>
-                    <a:lstStyle/>
-                    <a:p>
-                      <a:r>
-                        <a:rPr sz="1100">
-                          <a:solidFill>
-                            <a:srgbClr val="3D424E"/>
-                          </a:solidFill>
-                        </a:rPr>
-                        <a:t>OK 25</a:t>
-                      </a:r>
-                    </a:p>
-                  </a:txBody>
-                  <a:tcPr/>
-                </a:tc>
-                <a:tc>
-                  <a:txBody>
-                    <a:bodyPr/>
-                    <a:lstStyle/>
-                    <a:p>
-                      <a:r>
-                        <a:rPr sz="1100">
-                          <a:solidFill>
-                            <a:srgbClr val="3D424E"/>
-                          </a:solidFill>
-                        </a:rPr>
-                        <a:t>Meta superada</a:t>
-                      </a:r>
-                    </a:p>
-                  </a:txBody>
-                  <a:tcPr/>
-                </a:tc>
-              </a:tr>
-              <a:tr h="679268">
-                <a:tc>
-                  <a:txBody>
-                    <a:bodyPr/>
-                    <a:lstStyle/>
-                    <a:p>
-                      <a:r>
-                        <a:rPr sz="1100">
-                          <a:solidFill>
-                            <a:srgbClr val="3D424E"/>
-                          </a:solidFill>
-                        </a:rPr>
-                        <a:t>5</a:t>
-                      </a:r>
-                    </a:p>
-                  </a:txBody>
-                  <a:tcPr/>
-                </a:tc>
-                <a:tc>
-                  <a:txBody>
-                    <a:bodyPr/>
-                    <a:lstStyle/>
-                    <a:p>
-                      <a:r>
-                        <a:rPr sz="1100">
-                          <a:solidFill>
-                            <a:srgbClr val="3D424E"/>
-                          </a:solidFill>
-                        </a:rPr>
-                        <a:t>Adicionar CLIP conditioning</a:t>
-                      </a:r>
-                    </a:p>
-                  </a:txBody>
-                  <a:tcPr/>
-                </a:tc>
-                <a:tc>
-                  <a:txBody>
-                    <a:bodyPr/>
-                    <a:lstStyle/>
-                    <a:p>
-                      <a:r>
-                        <a:rPr sz="1100">
-                          <a:solidFill>
-                            <a:srgbClr val="3D424E"/>
-                          </a:solidFill>
-                        </a:rPr>
-                        <a:t>OK Track I</a:t>
-                      </a:r>
-                    </a:p>
-                  </a:txBody>
-                  <a:tcPr/>
-                </a:tc>
-                <a:tc>
-                  <a:txBody>
-                    <a:bodyPr/>
-                    <a:lstStyle/>
-                    <a:p>
-                      <a:r>
-                        <a:rPr sz="1100">
-                          <a:solidFill>
-                            <a:srgbClr val="3D424E"/>
-                          </a:solidFill>
-                        </a:rPr>
-                        <a:t>14 fichas + analise tecnica</a:t>
-                      </a:r>
-                    </a:p>
-                  </a:txBody>
-                  <a:tcPr/>
-                </a:tc>
-              </a:tr>
-              <a:tr h="679272">
-                <a:tc>
-                  <a:txBody>
-                    <a:bodyPr/>
-                    <a:lstStyle/>
-                    <a:p>
-                      <a:r>
-                        <a:rPr sz="1100">
-                          <a:solidFill>
-                            <a:srgbClr val="3D424E"/>
-                          </a:solidFill>
-                        </a:rPr>
-                        <a:t>6</a:t>
+                        <a:t>Forte favorável</a:t>
                       </a:r>
                     </a:p>
                   </a:txBody>
@@ -9466,7 +11224,7 @@
                             <a:srgbClr val="3D424E"/>
                           </a:solidFill>
                         </a:rPr>
-                        <a:t>Submissao qualificacao 15/jul/2026</a:t>
+                        <a:t>12</a:t>
                       </a:r>
                     </a:p>
                   </a:txBody>
@@ -9487,7 +11245,7 @@
                             <a:srgbClr val="3D424E"/>
                           </a:solidFill>
                         </a:rPr>
-                        <a:t>Em curso</a:t>
+                        <a:t>11.9%</a:t>
                       </a:r>
                     </a:p>
                   </a:txBody>
@@ -9508,7 +11266,373 @@
                             <a:srgbClr val="3D424E"/>
                           </a:solidFill>
                         </a:rPr>
-                        <a:t>LaTeX em andamento</a:t>
+                        <a:t>Fundamentam etapas e contribuições diretamente</a:t>
+                      </a:r>
+                    </a:p>
+                  </a:txBody>
+                  <a:tcPr>
+                    <a:solidFill>
+                      <a:srgbClr val="E8EAED"/>
+                    </a:solidFill>
+                  </a:tcPr>
+                </a:tc>
+              </a:tr>
+              <a:tr h="679268">
+                <a:tc>
+                  <a:txBody>
+                    <a:bodyPr/>
+                    <a:lstStyle/>
+                    <a:p>
+                      <a:r>
+                        <a:rPr sz="1100">
+                          <a:solidFill>
+                            <a:srgbClr val="3D424E"/>
+                          </a:solidFill>
+                        </a:rPr>
+                        <a:t>Favorável</a:t>
+                      </a:r>
+                    </a:p>
+                  </a:txBody>
+                  <a:tcPr/>
+                </a:tc>
+                <a:tc>
+                  <a:txBody>
+                    <a:bodyPr/>
+                    <a:lstStyle/>
+                    <a:p>
+                      <a:r>
+                        <a:rPr sz="1100">
+                          <a:solidFill>
+                            <a:srgbClr val="3D424E"/>
+                          </a:solidFill>
+                        </a:rPr>
+                        <a:t>38</a:t>
+                      </a:r>
+                    </a:p>
+                  </a:txBody>
+                  <a:tcPr/>
+                </a:tc>
+                <a:tc>
+                  <a:txBody>
+                    <a:bodyPr/>
+                    <a:lstStyle/>
+                    <a:p>
+                      <a:r>
+                        <a:rPr sz="1100">
+                          <a:solidFill>
+                            <a:srgbClr val="3D424E"/>
+                          </a:solidFill>
+                        </a:rPr>
+                        <a:t>37.6%</a:t>
+                      </a:r>
+                    </a:p>
+                  </a:txBody>
+                  <a:tcPr/>
+                </a:tc>
+                <a:tc>
+                  <a:txBody>
+                    <a:bodyPr/>
+                    <a:lstStyle/>
+                    <a:p>
+                      <a:r>
+                        <a:rPr sz="1100">
+                          <a:solidFill>
+                            <a:srgbClr val="3D424E"/>
+                          </a:solidFill>
+                        </a:rPr>
+                        <a:t>Suporte / alinhadas ao argumento</a:t>
+                      </a:r>
+                    </a:p>
+                  </a:txBody>
+                  <a:tcPr/>
+                </a:tc>
+              </a:tr>
+              <a:tr h="679268">
+                <a:tc>
+                  <a:txBody>
+                    <a:bodyPr/>
+                    <a:lstStyle/>
+                    <a:p>
+                      <a:r>
+                        <a:rPr sz="1100">
+                          <a:solidFill>
+                            <a:srgbClr val="3D424E"/>
+                          </a:solidFill>
+                        </a:rPr>
+                        <a:t>Neutra / contextual</a:t>
+                      </a:r>
+                    </a:p>
+                  </a:txBody>
+                  <a:tcPr/>
+                </a:tc>
+                <a:tc>
+                  <a:txBody>
+                    <a:bodyPr/>
+                    <a:lstStyle/>
+                    <a:p>
+                      <a:r>
+                        <a:rPr sz="1100">
+                          <a:solidFill>
+                            <a:srgbClr val="3D424E"/>
+                          </a:solidFill>
+                        </a:rPr>
+                        <a:t>18</a:t>
+                      </a:r>
+                    </a:p>
+                  </a:txBody>
+                  <a:tcPr/>
+                </a:tc>
+                <a:tc>
+                  <a:txBody>
+                    <a:bodyPr/>
+                    <a:lstStyle/>
+                    <a:p>
+                      <a:r>
+                        <a:rPr sz="1100">
+                          <a:solidFill>
+                            <a:srgbClr val="3D424E"/>
+                          </a:solidFill>
+                        </a:rPr>
+                        <a:t>17.8%</a:t>
+                      </a:r>
+                    </a:p>
+                  </a:txBody>
+                  <a:tcPr/>
+                </a:tc>
+                <a:tc>
+                  <a:txBody>
+                    <a:bodyPr/>
+                    <a:lstStyle/>
+                    <a:p>
+                      <a:r>
+                        <a:rPr sz="1100">
+                          <a:solidFill>
+                            <a:srgbClr val="3D424E"/>
+                          </a:solidFill>
+                        </a:rPr>
+                        <a:t>Background, não influenciam decisões</a:t>
+                      </a:r>
+                    </a:p>
+                  </a:txBody>
+                  <a:tcPr/>
+                </a:tc>
+              </a:tr>
+              <a:tr h="679268">
+                <a:tc>
+                  <a:txBody>
+                    <a:bodyPr/>
+                    <a:lstStyle/>
+                    <a:p>
+                      <a:r>
+                        <a:rPr sz="1100">
+                          <a:solidFill>
+                            <a:srgbClr val="3D424E"/>
+                          </a:solidFill>
+                        </a:rPr>
+                        <a:t>Caminho alternativo</a:t>
+                      </a:r>
+                    </a:p>
+                  </a:txBody>
+                  <a:tcPr/>
+                </a:tc>
+                <a:tc>
+                  <a:txBody>
+                    <a:bodyPr/>
+                    <a:lstStyle/>
+                    <a:p>
+                      <a:r>
+                        <a:rPr sz="1100">
+                          <a:solidFill>
+                            <a:srgbClr val="3D424E"/>
+                          </a:solidFill>
+                        </a:rPr>
+                        <a:t>26</a:t>
+                      </a:r>
+                    </a:p>
+                  </a:txBody>
+                  <a:tcPr/>
+                </a:tc>
+                <a:tc>
+                  <a:txBody>
+                    <a:bodyPr/>
+                    <a:lstStyle/>
+                    <a:p>
+                      <a:r>
+                        <a:rPr sz="1100">
+                          <a:solidFill>
+                            <a:srgbClr val="3D424E"/>
+                          </a:solidFill>
+                        </a:rPr>
+                        <a:t>25.7%</a:t>
+                      </a:r>
+                    </a:p>
+                  </a:txBody>
+                  <a:tcPr/>
+                </a:tc>
+                <a:tc>
+                  <a:txBody>
+                    <a:bodyPr/>
+                    <a:lstStyle/>
+                    <a:p>
+                      <a:r>
+                        <a:rPr sz="1100">
+                          <a:solidFill>
+                            <a:srgbClr val="3D424E"/>
+                          </a:solidFill>
+                        </a:rPr>
+                        <a:t>Cobertos pela Contribuição C7 (ablation)</a:t>
+                      </a:r>
+                    </a:p>
+                  </a:txBody>
+                  <a:tcPr/>
+                </a:tc>
+              </a:tr>
+              <a:tr h="679268">
+                <a:tc>
+                  <a:txBody>
+                    <a:bodyPr/>
+                    <a:lstStyle/>
+                    <a:p>
+                      <a:r>
+                        <a:rPr sz="1100">
+                          <a:solidFill>
+                            <a:srgbClr val="3D424E"/>
+                          </a:solidFill>
+                        </a:rPr>
+                        <a:t>Conflito moderado</a:t>
+                      </a:r>
+                    </a:p>
+                  </a:txBody>
+                  <a:tcPr/>
+                </a:tc>
+                <a:tc>
+                  <a:txBody>
+                    <a:bodyPr/>
+                    <a:lstStyle/>
+                    <a:p>
+                      <a:r>
+                        <a:rPr sz="1100">
+                          <a:solidFill>
+                            <a:srgbClr val="3D424E"/>
+                          </a:solidFill>
+                        </a:rPr>
+                        <a:t>5</a:t>
+                      </a:r>
+                    </a:p>
+                  </a:txBody>
+                  <a:tcPr/>
+                </a:tc>
+                <a:tc>
+                  <a:txBody>
+                    <a:bodyPr/>
+                    <a:lstStyle/>
+                    <a:p>
+                      <a:r>
+                        <a:rPr sz="1100">
+                          <a:solidFill>
+                            <a:srgbClr val="3D424E"/>
+                          </a:solidFill>
+                        </a:rPr>
+                        <a:t>5.0%</a:t>
+                      </a:r>
+                    </a:p>
+                  </a:txBody>
+                  <a:tcPr/>
+                </a:tc>
+                <a:tc>
+                  <a:txBody>
+                    <a:bodyPr/>
+                    <a:lstStyle/>
+                    <a:p>
+                      <a:r>
+                        <a:rPr sz="1100">
+                          <a:solidFill>
+                            <a:srgbClr val="3D424E"/>
+                          </a:solidFill>
+                        </a:rPr>
+                        <a:t>Endereçáveis — resposta defensiva mapeada</a:t>
+                      </a:r>
+                    </a:p>
+                  </a:txBody>
+                  <a:tcPr/>
+                </a:tc>
+              </a:tr>
+              <a:tr h="679272">
+                <a:tc>
+                  <a:txBody>
+                    <a:bodyPr/>
+                    <a:lstStyle/>
+                    <a:p>
+                      <a:r>
+                        <a:rPr sz="1100">
+                          <a:solidFill>
+                            <a:srgbClr val="3D424E"/>
+                          </a:solidFill>
+                        </a:rPr>
+                        <a:t>Conflito forte</a:t>
+                      </a:r>
+                    </a:p>
+                  </a:txBody>
+                  <a:tcPr>
+                    <a:solidFill>
+                      <a:srgbClr val="E8EAED"/>
+                    </a:solidFill>
+                  </a:tcPr>
+                </a:tc>
+                <a:tc>
+                  <a:txBody>
+                    <a:bodyPr/>
+                    <a:lstStyle/>
+                    <a:p>
+                      <a:r>
+                        <a:rPr sz="1100">
+                          <a:solidFill>
+                            <a:srgbClr val="3D424E"/>
+                          </a:solidFill>
+                        </a:rPr>
+                        <a:t>2</a:t>
+                      </a:r>
+                    </a:p>
+                  </a:txBody>
+                  <a:tcPr>
+                    <a:solidFill>
+                      <a:srgbClr val="E8EAED"/>
+                    </a:solidFill>
+                  </a:tcPr>
+                </a:tc>
+                <a:tc>
+                  <a:txBody>
+                    <a:bodyPr/>
+                    <a:lstStyle/>
+                    <a:p>
+                      <a:r>
+                        <a:rPr sz="1100">
+                          <a:solidFill>
+                            <a:srgbClr val="3D424E"/>
+                          </a:solidFill>
+                        </a:rPr>
+                        <a:t>2.0%</a:t>
+                      </a:r>
+                    </a:p>
+                  </a:txBody>
+                  <a:tcPr>
+                    <a:solidFill>
+                      <a:srgbClr val="E8EAED"/>
+                    </a:solidFill>
+                  </a:tcPr>
+                </a:tc>
+                <a:tc>
+                  <a:txBody>
+                    <a:bodyPr/>
+                    <a:lstStyle/>
+                    <a:p>
+                      <a:r>
+                        <a:rPr sz="1100">
+                          <a:solidFill>
+                            <a:srgbClr val="3D424E"/>
+                          </a:solidFill>
+                        </a:rPr>
+                        <a:t>Pangelinan (via H6); Neto (limitação reconhecida)</a:t>
                       </a:r>
                     </a:p>
                   </a:txBody>
@@ -9553,2333 +11677,7 @@
               </a:defRPr>
             </a:pPr>
             <a:r>
-              <a:t>4 itens fechados + 1 com track dedicada + 1 em execucao conforme planejado</a:t>
-            </a:r>
-          </a:p>
-        </p:txBody>
-      </p:sp>
-    </p:spTree>
-  </p:cSld>
-  <p:clrMapOvr>
-    <a:masterClrMapping/>
-  </p:clrMapOvr>
-</p:sld>
-</file>
-
-<file path=ppt/slides/slide5.xml><?xml version="1.0" encoding="utf-8"?>
-<p:sld xmlns:a="http://schemas.openxmlformats.org/drawingml/2006/main" xmlns:p="http://schemas.openxmlformats.org/presentationml/2006/main" xmlns:r="http://schemas.openxmlformats.org/officeDocument/2006/relationships">
-  <p:cSld>
-    <p:spTree>
-      <p:nvGrpSpPr>
-        <p:cNvPr id="1" name=""/>
-        <p:cNvGrpSpPr/>
-        <p:nvPr/>
-      </p:nvGrpSpPr>
-      <p:grpSpPr/>
-      <p:sp>
-        <p:nvSpPr>
-          <p:cNvPr id="2" name="Rectangle 1"/>
-          <p:cNvSpPr/>
-          <p:nvPr/>
-        </p:nvSpPr>
-        <p:spPr>
-          <a:xfrm>
-            <a:off x="0" y="0"/>
-            <a:ext cx="12188952" cy="6858000"/>
-          </a:xfrm>
-          <a:prstGeom prst="rect">
-            <a:avLst/>
-          </a:prstGeom>
-          <a:solidFill>
-            <a:srgbClr val="1F2A4E"/>
-          </a:solidFill>
-          <a:ln>
-            <a:noFill/>
-          </a:ln>
-        </p:spPr>
-        <p:style>
-          <a:lnRef idx="1">
-            <a:schemeClr val="accent1"/>
-          </a:lnRef>
-          <a:fillRef idx="3">
-            <a:schemeClr val="accent1"/>
-          </a:fillRef>
-          <a:effectRef idx="2">
-            <a:schemeClr val="accent1"/>
-          </a:effectRef>
-          <a:fontRef idx="minor">
-            <a:schemeClr val="lt1"/>
-          </a:fontRef>
-        </p:style>
-        <p:txBody>
-          <a:bodyPr rtlCol="0" anchor="ctr"/>
-          <a:lstStyle/>
-          <a:p>
-            <a:pPr algn="ctr"/>
-          </a:p>
-        </p:txBody>
-      </p:sp>
-      <p:sp>
-        <p:nvSpPr>
-          <p:cNvPr id="3" name="TextBox 2"/>
-          <p:cNvSpPr txBox="1"/>
-          <p:nvPr/>
-        </p:nvSpPr>
-        <p:spPr>
-          <a:xfrm>
-            <a:off x="731520" y="1371600"/>
-            <a:ext cx="2743200" cy="2743200"/>
-          </a:xfrm>
-          <a:prstGeom prst="rect">
-            <a:avLst/>
-          </a:prstGeom>
-          <a:noFill/>
-        </p:spPr>
-        <p:txBody>
-          <a:bodyPr wrap="none">
-            <a:spAutoFit/>
-          </a:bodyPr>
-          <a:lstStyle/>
-          <a:p>
-            <a:pPr>
-              <a:defRPr sz="14000" b="1">
-                <a:solidFill>
-                  <a:srgbClr val="FFFFFF"/>
-                </a:solidFill>
-              </a:defRPr>
-            </a:pPr>
-            <a:r>
-              <a:t>2</a:t>
-            </a:r>
-          </a:p>
-        </p:txBody>
-      </p:sp>
-      <p:sp>
-        <p:nvSpPr>
-          <p:cNvPr id="4" name="TextBox 3"/>
-          <p:cNvSpPr txBox="1"/>
-          <p:nvPr/>
-        </p:nvSpPr>
-        <p:spPr>
-          <a:xfrm>
-            <a:off x="3931920" y="2286000"/>
-            <a:ext cx="7772400" cy="1828800"/>
-          </a:xfrm>
-          <a:prstGeom prst="rect">
-            <a:avLst/>
-          </a:prstGeom>
-          <a:noFill/>
-        </p:spPr>
-        <p:txBody>
-          <a:bodyPr wrap="square">
-            <a:spAutoFit/>
-          </a:bodyPr>
-          <a:lstStyle/>
-          <a:p>
-            <a:pPr>
-              <a:defRPr sz="3800" b="1">
-                <a:solidFill>
-                  <a:srgbClr val="FFFFFF"/>
-                </a:solidFill>
-              </a:defRPr>
-            </a:pPr>
-            <a:r>
-              <a:t>Corpus consolidado</a:t>
-            </a:r>
-          </a:p>
-          <a:p>
-            <a:pPr>
-              <a:defRPr sz="1800">
-                <a:solidFill>
-                  <a:srgbClr val="E8EAED"/>
-                </a:solidFill>
-              </a:defRPr>
-            </a:pPr>
-            <a:r>
-              <a:t>101 fichas / 11 tracks tematicos</a:t>
-            </a:r>
-          </a:p>
-        </p:txBody>
-      </p:sp>
-    </p:spTree>
-  </p:cSld>
-  <p:clrMapOvr>
-    <a:masterClrMapping/>
-  </p:clrMapOvr>
-</p:sld>
-</file>
-
-<file path=ppt/slides/slide6.xml><?xml version="1.0" encoding="utf-8"?>
-<p:sld xmlns:a="http://schemas.openxmlformats.org/drawingml/2006/main" xmlns:p="http://schemas.openxmlformats.org/presentationml/2006/main" xmlns:r="http://schemas.openxmlformats.org/officeDocument/2006/relationships">
-  <p:cSld>
-    <p:spTree>
-      <p:nvGrpSpPr>
-        <p:cNvPr id="1" name=""/>
-        <p:cNvGrpSpPr/>
-        <p:nvPr/>
-      </p:nvGrpSpPr>
-      <p:grpSpPr/>
-      <p:sp>
-        <p:nvSpPr>
-          <p:cNvPr id="2" name="TextBox 1"/>
-          <p:cNvSpPr txBox="1"/>
-          <p:nvPr/>
-        </p:nvSpPr>
-        <p:spPr>
-          <a:xfrm>
-            <a:off x="457200" y="365760"/>
-            <a:ext cx="11430000" cy="822960"/>
-          </a:xfrm>
-          <a:prstGeom prst="rect">
-            <a:avLst/>
-          </a:prstGeom>
-          <a:noFill/>
-        </p:spPr>
-        <p:txBody>
-          <a:bodyPr wrap="square">
-            <a:spAutoFit/>
-          </a:bodyPr>
-          <a:lstStyle/>
-          <a:p>
-            <a:pPr>
-              <a:defRPr sz="2600" b="1">
-                <a:solidFill>
-                  <a:srgbClr val="1F2A4E"/>
-                </a:solidFill>
-              </a:defRPr>
-            </a:pPr>
-            <a:r>
-              <a:t>Marco atingido: 101 fichas em 11 tracks</a:t>
-            </a:r>
-          </a:p>
-        </p:txBody>
-      </p:sp>
-      <p:sp>
-        <p:nvSpPr>
-          <p:cNvPr id="3" name="Rectangle 2"/>
-          <p:cNvSpPr/>
-          <p:nvPr/>
-        </p:nvSpPr>
-        <p:spPr>
-          <a:xfrm>
-            <a:off x="457200" y="1143000"/>
-            <a:ext cx="11430000" cy="36576"/>
-          </a:xfrm>
-          <a:prstGeom prst="rect">
-            <a:avLst/>
-          </a:prstGeom>
-          <a:solidFill>
-            <a:srgbClr val="1F2A4E"/>
-          </a:solidFill>
-          <a:ln>
-            <a:noFill/>
-          </a:ln>
-        </p:spPr>
-        <p:style>
-          <a:lnRef idx="1">
-            <a:schemeClr val="accent1"/>
-          </a:lnRef>
-          <a:fillRef idx="3">
-            <a:schemeClr val="accent1"/>
-          </a:fillRef>
-          <a:effectRef idx="2">
-            <a:schemeClr val="accent1"/>
-          </a:effectRef>
-          <a:fontRef idx="minor">
-            <a:schemeClr val="lt1"/>
-          </a:fontRef>
-        </p:style>
-        <p:txBody>
-          <a:bodyPr rtlCol="0" anchor="ctr"/>
-          <a:lstStyle/>
-          <a:p>
-            <a:pPr algn="ctr"/>
-          </a:p>
-        </p:txBody>
-      </p:sp>
-      <p:sp>
-        <p:nvSpPr>
-          <p:cNvPr id="4" name="TextBox 3"/>
-          <p:cNvSpPr txBox="1"/>
-          <p:nvPr/>
-        </p:nvSpPr>
-        <p:spPr>
-          <a:xfrm>
-            <a:off x="457200" y="1371600"/>
-            <a:ext cx="11430000" cy="4937760"/>
-          </a:xfrm>
-          <a:prstGeom prst="rect">
-            <a:avLst/>
-          </a:prstGeom>
-          <a:noFill/>
-        </p:spPr>
-        <p:txBody>
-          <a:bodyPr wrap="square">
-            <a:spAutoFit/>
-          </a:bodyPr>
-          <a:lstStyle/>
-          <a:p>
-            <a:pPr>
-              <a:spcAft>
-                <a:spcPts val="800"/>
-              </a:spcAft>
-            </a:pPr>
-            <a:r>
-              <a:rPr sz="1600" b="1">
-                <a:solidFill>
-                  <a:srgbClr val="1F2A4E"/>
-                </a:solidFill>
-              </a:rPr>
-              <a:t>Total:  </a:t>
-            </a:r>
-            <a:r>
-              <a:rPr sz="1600">
-                <a:solidFill>
-                  <a:srgbClr val="3D424E"/>
-                </a:solidFill>
-              </a:rPr>
-              <a:t>101 fichas distribuidas em 11 tracks tematicos</a:t>
-            </a:r>
-          </a:p>
-          <a:p>
-            <a:pPr>
-              <a:spcAft>
-                <a:spcPts val="800"/>
-              </a:spcAft>
-            </a:pPr>
-            <a:r>
-              <a:rPr sz="1600" b="1">
-                <a:solidFill>
-                  <a:srgbClr val="1F2A4E"/>
-                </a:solidFill>
-              </a:rPr>
-              <a:t>Meta 2025-2026:  </a:t>
-            </a:r>
-            <a:r>
-              <a:rPr sz="1600">
-                <a:solidFill>
-                  <a:srgbClr val="3D424E"/>
-                </a:solidFill>
-              </a:rPr>
-              <a:t>25 fichas (meta era &gt;=20) - ATINGIDA</a:t>
-            </a:r>
-          </a:p>
-          <a:p>
-            <a:pPr>
-              <a:spcAft>
-                <a:spcPts val="800"/>
-              </a:spcAft>
-            </a:pPr>
-            <a:r>
-              <a:rPr sz="1600" b="1">
-                <a:solidFill>
-                  <a:srgbClr val="1F2A4E"/>
-                </a:solidFill>
-              </a:rPr>
-              <a:t>Crescimento:  </a:t>
-            </a:r>
-            <a:r>
-              <a:rPr sz="1600">
-                <a:solidFill>
-                  <a:srgbClr val="3D424E"/>
-                </a:solidFill>
-              </a:rPr>
-              <a:t>+46 fichas em 3 levas da Rodada 7 (55 -&gt; 101)</a:t>
-            </a:r>
-          </a:p>
-          <a:p>
-            <a:pPr>
-              <a:spcAft>
-                <a:spcPts val="800"/>
-              </a:spcAft>
-            </a:pPr>
-            <a:r>
-              <a:rPr sz="1600" b="1">
-                <a:solidFill>
-                  <a:srgbClr val="1F2A4E"/>
-                </a:solidFill>
-              </a:rPr>
-              <a:t>Novos tracks:  </a:t>
-            </a:r>
-            <a:r>
-              <a:rPr sz="1600">
-                <a:solidFill>
-                  <a:srgbClr val="3D424E"/>
-                </a:solidFill>
-              </a:rPr>
-              <a:t>I, J, K criados em resposta a recomendacoes</a:t>
-            </a:r>
-          </a:p>
-          <a:p>
-            <a:pPr>
-              <a:spcAft>
-                <a:spcPts val="800"/>
-              </a:spcAft>
-            </a:pPr>
-            <a:r>
-              <a:rPr sz="1600" b="1">
-                <a:solidFill>
-                  <a:srgbClr val="1F2A4E"/>
-                </a:solidFill>
-              </a:rPr>
-              <a:t>Track I:  </a:t>
-            </a:r>
-            <a:r>
-              <a:rPr sz="1600">
-                <a:solidFill>
-                  <a:srgbClr val="3D424E"/>
-                </a:solidFill>
-              </a:rPr>
-              <a:t>VLM/CLIP fairness (14 fichas) - resposta direta ao orientador</a:t>
-            </a:r>
-          </a:p>
-          <a:p>
-            <a:pPr>
-              <a:spcAft>
-                <a:spcPts val="800"/>
-              </a:spcAft>
-            </a:pPr>
-            <a:r>
-              <a:rPr sz="1600" b="1">
-                <a:solidFill>
-                  <a:srgbClr val="1F2A4E"/>
-                </a:solidFill>
-              </a:rPr>
-              <a:t>Track J:  </a:t>
-            </a:r>
-            <a:r>
-              <a:rPr sz="1600">
-                <a:solidFill>
-                  <a:srgbClr val="3D424E"/>
-                </a:solidFill>
-              </a:rPr>
-              <a:t>Conditioning moderno LoRA/ViT (5 fichas)</a:t>
-            </a:r>
-          </a:p>
-          <a:p>
-            <a:pPr>
-              <a:spcAft>
-                <a:spcPts val="800"/>
-              </a:spcAft>
-            </a:pPr>
-            <a:r>
-              <a:rPr sz="1600" b="1">
-                <a:solidFill>
-                  <a:srgbClr val="1F2A4E"/>
-                </a:solidFill>
-              </a:rPr>
-              <a:t>Track K:  </a:t>
-            </a:r>
-            <a:r>
-              <a:rPr sz="1600">
-                <a:solidFill>
-                  <a:srgbClr val="3D424E"/>
-                </a:solidFill>
-              </a:rPr>
-              <a:t>FR fundadores ArcFace/FaceNet/AdaFace (6 fichas) - gap fix</a:t>
-            </a:r>
-          </a:p>
-        </p:txBody>
-      </p:sp>
-    </p:spTree>
-  </p:cSld>
-  <p:clrMapOvr>
-    <a:masterClrMapping/>
-  </p:clrMapOvr>
-</p:sld>
-</file>
-
-<file path=ppt/slides/slide7.xml><?xml version="1.0" encoding="utf-8"?>
-<p:sld xmlns:a="http://schemas.openxmlformats.org/drawingml/2006/main" xmlns:p="http://schemas.openxmlformats.org/presentationml/2006/main" xmlns:r="http://schemas.openxmlformats.org/officeDocument/2006/relationships">
-  <p:cSld>
-    <p:spTree>
-      <p:nvGrpSpPr>
-        <p:cNvPr id="1" name=""/>
-        <p:cNvGrpSpPr/>
-        <p:nvPr/>
-      </p:nvGrpSpPr>
-      <p:grpSpPr/>
-      <p:sp>
-        <p:nvSpPr>
-          <p:cNvPr id="2" name="TextBox 1"/>
-          <p:cNvSpPr txBox="1"/>
-          <p:nvPr/>
-        </p:nvSpPr>
-        <p:spPr>
-          <a:xfrm>
-            <a:off x="457200" y="365760"/>
-            <a:ext cx="11430000" cy="822960"/>
-          </a:xfrm>
-          <a:prstGeom prst="rect">
-            <a:avLst/>
-          </a:prstGeom>
-          <a:noFill/>
-        </p:spPr>
-        <p:txBody>
-          <a:bodyPr wrap="square">
-            <a:spAutoFit/>
-          </a:bodyPr>
-          <a:lstStyle/>
-          <a:p>
-            <a:pPr>
-              <a:defRPr sz="2600" b="1">
-                <a:solidFill>
-                  <a:srgbClr val="1F2A4E"/>
-                </a:solidFill>
-              </a:defRPr>
-            </a:pPr>
-            <a:r>
-              <a:t>Justificativa de cada track (por que existe)</a:t>
-            </a:r>
-          </a:p>
-        </p:txBody>
-      </p:sp>
-      <p:sp>
-        <p:nvSpPr>
-          <p:cNvPr id="3" name="Rectangle 2"/>
-          <p:cNvSpPr/>
-          <p:nvPr/>
-        </p:nvSpPr>
-        <p:spPr>
-          <a:xfrm>
-            <a:off x="457200" y="1143000"/>
-            <a:ext cx="11430000" cy="36576"/>
-          </a:xfrm>
-          <a:prstGeom prst="rect">
-            <a:avLst/>
-          </a:prstGeom>
-          <a:solidFill>
-            <a:srgbClr val="1F2A4E"/>
-          </a:solidFill>
-          <a:ln>
-            <a:noFill/>
-          </a:ln>
-        </p:spPr>
-        <p:style>
-          <a:lnRef idx="1">
-            <a:schemeClr val="accent1"/>
-          </a:lnRef>
-          <a:fillRef idx="3">
-            <a:schemeClr val="accent1"/>
-          </a:fillRef>
-          <a:effectRef idx="2">
-            <a:schemeClr val="accent1"/>
-          </a:effectRef>
-          <a:fontRef idx="minor">
-            <a:schemeClr val="lt1"/>
-          </a:fontRef>
-        </p:style>
-        <p:txBody>
-          <a:bodyPr rtlCol="0" anchor="ctr"/>
-          <a:lstStyle/>
-          <a:p>
-            <a:pPr algn="ctr"/>
-          </a:p>
-        </p:txBody>
-      </p:sp>
-      <p:graphicFrame>
-        <p:nvGraphicFramePr>
-          <p:cNvPr id="4" name="Table 3"/>
-          <p:cNvGraphicFramePr>
-            <a:graphicFrameLocks noGrp="1"/>
-          </p:cNvGraphicFramePr>
-          <p:nvPr/>
-        </p:nvGraphicFramePr>
-        <p:xfrm>
-          <a:off x="457200" y="1371600"/>
-          <a:ext cx="11430000" cy="4754880"/>
-        </p:xfrm>
-        <a:graphic>
-          <a:graphicData uri="http://schemas.openxmlformats.org/drawingml/2006/table">
-            <a:tbl>
-              <a:tblPr firstRow="1" bandRow="1">
-                <a:tableStyleId>{5C22544A-7EE6-4342-B048-85BDC9FD1C3A}</a:tableStyleId>
-              </a:tblPr>
-              <a:tblGrid>
-                <a:gridCol w="914400"/>
-                <a:gridCol w="3657600"/>
-                <a:gridCol w="731520"/>
-                <a:gridCol w="6126480"/>
-              </a:tblGrid>
-              <a:tr h="396240">
-                <a:tc>
-                  <a:txBody>
-                    <a:bodyPr/>
-                    <a:lstStyle/>
-                    <a:p>
-                      <a:r>
-                        <a:rPr sz="1300" b="1">
-                          <a:solidFill>
-                            <a:srgbClr val="FFFFFF"/>
-                          </a:solidFill>
-                        </a:rPr>
-                        <a:t>Track</a:t>
-                      </a:r>
-                    </a:p>
-                  </a:txBody>
-                  <a:tcPr>
-                    <a:solidFill>
-                      <a:srgbClr val="1F2A4E"/>
-                    </a:solidFill>
-                  </a:tcPr>
-                </a:tc>
-                <a:tc>
-                  <a:txBody>
-                    <a:bodyPr/>
-                    <a:lstStyle/>
-                    <a:p>
-                      <a:r>
-                        <a:rPr sz="1300" b="1">
-                          <a:solidFill>
-                            <a:srgbClr val="FFFFFF"/>
-                          </a:solidFill>
-                        </a:rPr>
-                        <a:t>Tema</a:t>
-                      </a:r>
-                    </a:p>
-                  </a:txBody>
-                  <a:tcPr>
-                    <a:solidFill>
-                      <a:srgbClr val="1F2A4E"/>
-                    </a:solidFill>
-                  </a:tcPr>
-                </a:tc>
-                <a:tc>
-                  <a:txBody>
-                    <a:bodyPr/>
-                    <a:lstStyle/>
-                    <a:p>
-                      <a:r>
-                        <a:rPr sz="1300" b="1">
-                          <a:solidFill>
-                            <a:srgbClr val="FFFFFF"/>
-                          </a:solidFill>
-                        </a:rPr>
-                        <a:t>Fichas</a:t>
-                      </a:r>
-                    </a:p>
-                  </a:txBody>
-                  <a:tcPr>
-                    <a:solidFill>
-                      <a:srgbClr val="1F2A4E"/>
-                    </a:solidFill>
-                  </a:tcPr>
-                </a:tc>
-                <a:tc>
-                  <a:txBody>
-                    <a:bodyPr/>
-                    <a:lstStyle/>
-                    <a:p>
-                      <a:r>
-                        <a:rPr sz="1300" b="1">
-                          <a:solidFill>
-                            <a:srgbClr val="FFFFFF"/>
-                          </a:solidFill>
-                        </a:rPr>
-                        <a:t>Papel na tese</a:t>
-                      </a:r>
-                    </a:p>
-                  </a:txBody>
-                  <a:tcPr>
-                    <a:solidFill>
-                      <a:srgbClr val="1F2A4E"/>
-                    </a:solidFill>
-                  </a:tcPr>
-                </a:tc>
-              </a:tr>
-              <a:tr h="396240">
-                <a:tc>
-                  <a:txBody>
-                    <a:bodyPr/>
-                    <a:lstStyle/>
-                    <a:p>
-                      <a:r>
-                        <a:rPr sz="1100">
-                          <a:solidFill>
-                            <a:srgbClr val="3D424E"/>
-                          </a:solidFill>
-                        </a:rPr>
-                        <a:t>A</a:t>
-                      </a:r>
-                    </a:p>
-                  </a:txBody>
-                  <a:tcPr/>
-                </a:tc>
-                <a:tc>
-                  <a:txBody>
-                    <a:bodyPr/>
-                    <a:lstStyle/>
-                    <a:p>
-                      <a:r>
-                        <a:rPr sz="1100">
-                          <a:solidFill>
-                            <a:srgbClr val="3D424E"/>
-                          </a:solidFill>
-                        </a:rPr>
-                        <a:t>Race classification 7-class</a:t>
-                      </a:r>
-                    </a:p>
-                  </a:txBody>
-                  <a:tcPr/>
-                </a:tc>
-                <a:tc>
-                  <a:txBody>
-                    <a:bodyPr/>
-                    <a:lstStyle/>
-                    <a:p>
-                      <a:r>
-                        <a:rPr sz="1100">
-                          <a:solidFill>
-                            <a:srgbClr val="3D424E"/>
-                          </a:solidFill>
-                        </a:rPr>
-                        <a:t>4</a:t>
-                      </a:r>
-                    </a:p>
-                  </a:txBody>
-                  <a:tcPr/>
-                </a:tc>
-                <a:tc>
-                  <a:txBody>
-                    <a:bodyPr/>
-                    <a:lstStyle/>
-                    <a:p>
-                      <a:r>
-                        <a:rPr sz="1100">
-                          <a:solidFill>
-                            <a:srgbClr val="3D424E"/>
-                          </a:solidFill>
-                        </a:rPr>
-                        <a:t>Tarefa central</a:t>
-                      </a:r>
-                    </a:p>
-                  </a:txBody>
-                  <a:tcPr/>
-                </a:tc>
-              </a:tr>
-              <a:tr h="396240">
-                <a:tc>
-                  <a:txBody>
-                    <a:bodyPr/>
-                    <a:lstStyle/>
-                    <a:p>
-                      <a:r>
-                        <a:rPr sz="1100">
-                          <a:solidFill>
-                            <a:srgbClr val="3D424E"/>
-                          </a:solidFill>
-                        </a:rPr>
-                        <a:t>B</a:t>
-                      </a:r>
-                    </a:p>
-                  </a:txBody>
-                  <a:tcPr/>
-                </a:tc>
-                <a:tc>
-                  <a:txBody>
-                    <a:bodyPr/>
-                    <a:lstStyle/>
-                    <a:p>
-                      <a:r>
-                        <a:rPr sz="1100">
-                          <a:solidFill>
-                            <a:srgbClr val="3D424E"/>
-                          </a:solidFill>
-                        </a:rPr>
-                        <a:t>FR fairness</a:t>
-                      </a:r>
-                    </a:p>
-                  </a:txBody>
-                  <a:tcPr/>
-                </a:tc>
-                <a:tc>
-                  <a:txBody>
-                    <a:bodyPr/>
-                    <a:lstStyle/>
-                    <a:p>
-                      <a:r>
-                        <a:rPr sz="1100">
-                          <a:solidFill>
-                            <a:srgbClr val="3D424E"/>
-                          </a:solidFill>
-                        </a:rPr>
-                        <a:t>16</a:t>
-                      </a:r>
-                    </a:p>
-                  </a:txBody>
-                  <a:tcPr/>
-                </a:tc>
-                <a:tc>
-                  <a:txBody>
-                    <a:bodyPr/>
-                    <a:lstStyle/>
-                    <a:p>
-                      <a:r>
-                        <a:rPr sz="1100">
-                          <a:solidFill>
-                            <a:srgbClr val="3D424E"/>
-                          </a:solidFill>
-                        </a:rPr>
-                        <a:t>Paradigma dominante</a:t>
-                      </a:r>
-                    </a:p>
-                  </a:txBody>
-                  <a:tcPr/>
-                </a:tc>
-              </a:tr>
-              <a:tr h="396240">
-                <a:tc>
-                  <a:txBody>
-                    <a:bodyPr/>
-                    <a:lstStyle/>
-                    <a:p>
-                      <a:r>
-                        <a:rPr sz="1100">
-                          <a:solidFill>
-                            <a:srgbClr val="3D424E"/>
-                          </a:solidFill>
-                        </a:rPr>
-                        <a:t>C</a:t>
-                      </a:r>
-                    </a:p>
-                  </a:txBody>
-                  <a:tcPr/>
-                </a:tc>
-                <a:tc>
-                  <a:txBody>
-                    <a:bodyPr/>
-                    <a:lstStyle/>
-                    <a:p>
-                      <a:r>
-                        <a:rPr sz="1100">
-                          <a:solidFill>
-                            <a:srgbClr val="3D424E"/>
-                          </a:solidFill>
-                        </a:rPr>
-                        <a:t>Skin tone (MST)</a:t>
-                      </a:r>
-                    </a:p>
-                  </a:txBody>
-                  <a:tcPr/>
-                </a:tc>
-                <a:tc>
-                  <a:txBody>
-                    <a:bodyPr/>
-                    <a:lstStyle/>
-                    <a:p>
-                      <a:r>
-                        <a:rPr sz="1100">
-                          <a:solidFill>
-                            <a:srgbClr val="3D424E"/>
-                          </a:solidFill>
-                        </a:rPr>
-                        <a:t>7</a:t>
-                      </a:r>
-                    </a:p>
-                  </a:txBody>
-                  <a:tcPr/>
-                </a:tc>
-                <a:tc>
-                  <a:txBody>
-                    <a:bodyPr/>
-                    <a:lstStyle/>
-                    <a:p>
-                      <a:r>
-                        <a:rPr sz="1100">
-                          <a:solidFill>
-                            <a:srgbClr val="3D424E"/>
-                          </a:solidFill>
-                        </a:rPr>
-                        <a:t>Sinal auxiliar do pipeline</a:t>
-                      </a:r>
-                    </a:p>
-                  </a:txBody>
-                  <a:tcPr/>
-                </a:tc>
-              </a:tr>
-              <a:tr h="396240">
-                <a:tc>
-                  <a:txBody>
-                    <a:bodyPr/>
-                    <a:lstStyle/>
-                    <a:p>
-                      <a:r>
-                        <a:rPr sz="1100">
-                          <a:solidFill>
-                            <a:srgbClr val="3D424E"/>
-                          </a:solidFill>
-                        </a:rPr>
-                        <a:t>D</a:t>
-                      </a:r>
-                    </a:p>
-                  </a:txBody>
-                  <a:tcPr/>
-                </a:tc>
-                <a:tc>
-                  <a:txBody>
-                    <a:bodyPr/>
-                    <a:lstStyle/>
-                    <a:p>
-                      <a:r>
-                        <a:rPr sz="1100">
-                          <a:solidFill>
-                            <a:srgbClr val="3D424E"/>
-                          </a:solidFill>
-                        </a:rPr>
-                        <a:t>Mitigacao algoritmica</a:t>
-                      </a:r>
-                    </a:p>
-                  </a:txBody>
-                  <a:tcPr/>
-                </a:tc>
-                <a:tc>
-                  <a:txBody>
-                    <a:bodyPr/>
-                    <a:lstStyle/>
-                    <a:p>
-                      <a:r>
-                        <a:rPr sz="1100">
-                          <a:solidFill>
-                            <a:srgbClr val="3D424E"/>
-                          </a:solidFill>
-                        </a:rPr>
-                        <a:t>10</a:t>
-                      </a:r>
-                    </a:p>
-                  </a:txBody>
-                  <a:tcPr/>
-                </a:tc>
-                <a:tc>
-                  <a:txBody>
-                    <a:bodyPr/>
-                    <a:lstStyle/>
-                    <a:p>
-                      <a:r>
-                        <a:rPr sz="1100">
-                          <a:solidFill>
-                            <a:srgbClr val="3D424E"/>
-                          </a:solidFill>
-                        </a:rPr>
-                        <a:t>Baselines a superar</a:t>
-                      </a:r>
-                    </a:p>
-                  </a:txBody>
-                  <a:tcPr/>
-                </a:tc>
-              </a:tr>
-              <a:tr h="396240">
-                <a:tc>
-                  <a:txBody>
-                    <a:bodyPr/>
-                    <a:lstStyle/>
-                    <a:p>
-                      <a:r>
-                        <a:rPr sz="1100">
-                          <a:solidFill>
-                            <a:srgbClr val="3D424E"/>
-                          </a:solidFill>
-                        </a:rPr>
-                        <a:t>E</a:t>
-                      </a:r>
-                    </a:p>
-                  </a:txBody>
-                  <a:tcPr/>
-                </a:tc>
-                <a:tc>
-                  <a:txBody>
-                    <a:bodyPr/>
-                    <a:lstStyle/>
-                    <a:p>
-                      <a:r>
-                        <a:rPr sz="1100">
-                          <a:solidFill>
-                            <a:srgbClr val="3D424E"/>
-                          </a:solidFill>
-                        </a:rPr>
-                        <a:t>Auditoria &amp; surveys</a:t>
-                      </a:r>
-                    </a:p>
-                  </a:txBody>
-                  <a:tcPr/>
-                </a:tc>
-                <a:tc>
-                  <a:txBody>
-                    <a:bodyPr/>
-                    <a:lstStyle/>
-                    <a:p>
-                      <a:r>
-                        <a:rPr sz="1100">
-                          <a:solidFill>
-                            <a:srgbClr val="3D424E"/>
-                          </a:solidFill>
-                        </a:rPr>
-                        <a:t>14</a:t>
-                      </a:r>
-                    </a:p>
-                  </a:txBody>
-                  <a:tcPr/>
-                </a:tc>
-                <a:tc>
-                  <a:txBody>
-                    <a:bodyPr/>
-                    <a:lstStyle/>
-                    <a:p>
-                      <a:r>
-                        <a:rPr sz="1100">
-                          <a:solidFill>
-                            <a:srgbClr val="3D424E"/>
-                          </a:solidFill>
-                        </a:rPr>
-                        <a:t>Infraestrutura intelectual</a:t>
-                      </a:r>
-                    </a:p>
-                  </a:txBody>
-                  <a:tcPr/>
-                </a:tc>
-              </a:tr>
-              <a:tr h="396240">
-                <a:tc>
-                  <a:txBody>
-                    <a:bodyPr/>
-                    <a:lstStyle/>
-                    <a:p>
-                      <a:r>
-                        <a:rPr sz="1100">
-                          <a:solidFill>
-                            <a:srgbClr val="3D424E"/>
-                          </a:solidFill>
-                        </a:rPr>
-                        <a:t>F</a:t>
-                      </a:r>
-                    </a:p>
-                  </a:txBody>
-                  <a:tcPr/>
-                </a:tc>
-                <a:tc>
-                  <a:txBody>
-                    <a:bodyPr/>
-                    <a:lstStyle/>
-                    <a:p>
-                      <a:r>
-                        <a:rPr sz="1100">
-                          <a:solidFill>
-                            <a:srgbClr val="3D424E"/>
-                          </a:solidFill>
-                        </a:rPr>
-                        <a:t>Fundamentacao etica</a:t>
-                      </a:r>
-                    </a:p>
-                  </a:txBody>
-                  <a:tcPr/>
-                </a:tc>
-                <a:tc>
-                  <a:txBody>
-                    <a:bodyPr/>
-                    <a:lstStyle/>
-                    <a:p>
-                      <a:r>
-                        <a:rPr sz="1100">
-                          <a:solidFill>
-                            <a:srgbClr val="3D424E"/>
-                          </a:solidFill>
-                        </a:rPr>
-                        <a:t>3</a:t>
-                      </a:r>
-                    </a:p>
-                  </a:txBody>
-                  <a:tcPr/>
-                </a:tc>
-                <a:tc>
-                  <a:txBody>
-                    <a:bodyPr/>
-                    <a:lstStyle/>
-                    <a:p>
-                      <a:r>
-                        <a:rPr sz="1100">
-                          <a:solidFill>
-                            <a:srgbClr val="3D424E"/>
-                          </a:solidFill>
-                        </a:rPr>
-                        <a:t>Posicionamento da tese</a:t>
-                      </a:r>
-                    </a:p>
-                  </a:txBody>
-                  <a:tcPr/>
-                </a:tc>
-              </a:tr>
-              <a:tr h="396240">
-                <a:tc>
-                  <a:txBody>
-                    <a:bodyPr/>
-                    <a:lstStyle/>
-                    <a:p>
-                      <a:r>
-                        <a:rPr sz="1100">
-                          <a:solidFill>
-                            <a:srgbClr val="3D424E"/>
-                          </a:solidFill>
-                        </a:rPr>
-                        <a:t>G</a:t>
-                      </a:r>
-                    </a:p>
-                  </a:txBody>
-                  <a:tcPr/>
-                </a:tc>
-                <a:tc>
-                  <a:txBody>
-                    <a:bodyPr/>
-                    <a:lstStyle/>
-                    <a:p>
-                      <a:r>
-                        <a:rPr sz="1100">
-                          <a:solidFill>
-                            <a:srgbClr val="3D424E"/>
-                          </a:solidFill>
-                        </a:rPr>
-                        <a:t>Mecanismos ML paradigmaticos</a:t>
-                      </a:r>
-                    </a:p>
-                  </a:txBody>
-                  <a:tcPr/>
-                </a:tc>
-                <a:tc>
-                  <a:txBody>
-                    <a:bodyPr/>
-                    <a:lstStyle/>
-                    <a:p>
-                      <a:r>
-                        <a:rPr sz="1100">
-                          <a:solidFill>
-                            <a:srgbClr val="3D424E"/>
-                          </a:solidFill>
-                        </a:rPr>
-                        <a:t>9</a:t>
-                      </a:r>
-                    </a:p>
-                  </a:txBody>
-                  <a:tcPr/>
-                </a:tc>
-                <a:tc>
-                  <a:txBody>
-                    <a:bodyPr/>
-                    <a:lstStyle/>
-                    <a:p>
-                      <a:r>
-                        <a:rPr sz="1100">
-                          <a:solidFill>
-                            <a:srgbClr val="3D424E"/>
-                          </a:solidFill>
-                        </a:rPr>
-                        <a:t>Esqueleto teorico (FiLM, LAFTR)</a:t>
-                      </a:r>
-                    </a:p>
-                  </a:txBody>
-                  <a:tcPr/>
-                </a:tc>
-              </a:tr>
-              <a:tr h="396240">
-                <a:tc>
-                  <a:txBody>
-                    <a:bodyPr/>
-                    <a:lstStyle/>
-                    <a:p>
-                      <a:r>
-                        <a:rPr sz="1100">
-                          <a:solidFill>
-                            <a:srgbClr val="3D424E"/>
-                          </a:solidFill>
-                        </a:rPr>
-                        <a:t>I (R7)</a:t>
-                      </a:r>
-                    </a:p>
-                  </a:txBody>
-                  <a:tcPr>
-                    <a:solidFill>
-                      <a:srgbClr val="E8EAED"/>
-                    </a:solidFill>
-                  </a:tcPr>
-                </a:tc>
-                <a:tc>
-                  <a:txBody>
-                    <a:bodyPr/>
-                    <a:lstStyle/>
-                    <a:p>
-                      <a:r>
-                        <a:rPr sz="1100">
-                          <a:solidFill>
-                            <a:srgbClr val="3D424E"/>
-                          </a:solidFill>
-                        </a:rPr>
-                        <a:t>VLM/CLIP fairness</a:t>
-                      </a:r>
-                    </a:p>
-                  </a:txBody>
-                  <a:tcPr>
-                    <a:solidFill>
-                      <a:srgbClr val="E8EAED"/>
-                    </a:solidFill>
-                  </a:tcPr>
-                </a:tc>
-                <a:tc>
-                  <a:txBody>
-                    <a:bodyPr/>
-                    <a:lstStyle/>
-                    <a:p>
-                      <a:r>
-                        <a:rPr sz="1100">
-                          <a:solidFill>
-                            <a:srgbClr val="3D424E"/>
-                          </a:solidFill>
-                        </a:rPr>
-                        <a:t>14</a:t>
-                      </a:r>
-                    </a:p>
-                  </a:txBody>
-                  <a:tcPr>
-                    <a:solidFill>
-                      <a:srgbClr val="E8EAED"/>
-                    </a:solidFill>
-                  </a:tcPr>
-                </a:tc>
-                <a:tc>
-                  <a:txBody>
-                    <a:bodyPr/>
-                    <a:lstStyle/>
-                    <a:p>
-                      <a:r>
-                        <a:rPr sz="1100">
-                          <a:solidFill>
-                            <a:srgbClr val="3D424E"/>
-                          </a:solidFill>
-                        </a:rPr>
-                        <a:t>Resposta ao orientador</a:t>
-                      </a:r>
-                    </a:p>
-                  </a:txBody>
-                  <a:tcPr>
-                    <a:solidFill>
-                      <a:srgbClr val="E8EAED"/>
-                    </a:solidFill>
-                  </a:tcPr>
-                </a:tc>
-              </a:tr>
-              <a:tr h="396240">
-                <a:tc>
-                  <a:txBody>
-                    <a:bodyPr/>
-                    <a:lstStyle/>
-                    <a:p>
-                      <a:r>
-                        <a:rPr sz="1100">
-                          <a:solidFill>
-                            <a:srgbClr val="3D424E"/>
-                          </a:solidFill>
-                        </a:rPr>
-                        <a:t>J (R7)</a:t>
-                      </a:r>
-                    </a:p>
-                  </a:txBody>
-                  <a:tcPr>
-                    <a:solidFill>
-                      <a:srgbClr val="E8EAED"/>
-                    </a:solidFill>
-                  </a:tcPr>
-                </a:tc>
-                <a:tc>
-                  <a:txBody>
-                    <a:bodyPr/>
-                    <a:lstStyle/>
-                    <a:p>
-                      <a:r>
-                        <a:rPr sz="1100">
-                          <a:solidFill>
-                            <a:srgbClr val="3D424E"/>
-                          </a:solidFill>
-                        </a:rPr>
-                        <a:t>Conditioning moderno (LoRA, ViT)</a:t>
-                      </a:r>
-                    </a:p>
-                  </a:txBody>
-                  <a:tcPr>
-                    <a:solidFill>
-                      <a:srgbClr val="E8EAED"/>
-                    </a:solidFill>
-                  </a:tcPr>
-                </a:tc>
-                <a:tc>
-                  <a:txBody>
-                    <a:bodyPr/>
-                    <a:lstStyle/>
-                    <a:p>
-                      <a:r>
-                        <a:rPr sz="1100">
-                          <a:solidFill>
-                            <a:srgbClr val="3D424E"/>
-                          </a:solidFill>
-                        </a:rPr>
-                        <a:t>5</a:t>
-                      </a:r>
-                    </a:p>
-                  </a:txBody>
-                  <a:tcPr>
-                    <a:solidFill>
-                      <a:srgbClr val="E8EAED"/>
-                    </a:solidFill>
-                  </a:tcPr>
-                </a:tc>
-                <a:tc>
-                  <a:txBody>
-                    <a:bodyPr/>
-                    <a:lstStyle/>
-                    <a:p>
-                      <a:r>
-                        <a:rPr sz="1100">
-                          <a:solidFill>
-                            <a:srgbClr val="3D424E"/>
-                          </a:solidFill>
-                        </a:rPr>
-                        <a:t>Alternativas ao FiLM</a:t>
-                      </a:r>
-                    </a:p>
-                  </a:txBody>
-                  <a:tcPr>
-                    <a:solidFill>
-                      <a:srgbClr val="E8EAED"/>
-                    </a:solidFill>
-                  </a:tcPr>
-                </a:tc>
-              </a:tr>
-              <a:tr h="396240">
-                <a:tc>
-                  <a:txBody>
-                    <a:bodyPr/>
-                    <a:lstStyle/>
-                    <a:p>
-                      <a:r>
-                        <a:rPr sz="1100">
-                          <a:solidFill>
-                            <a:srgbClr val="3D424E"/>
-                          </a:solidFill>
-                        </a:rPr>
-                        <a:t>K (R7)</a:t>
-                      </a:r>
-                    </a:p>
-                  </a:txBody>
-                  <a:tcPr>
-                    <a:solidFill>
-                      <a:srgbClr val="E8EAED"/>
-                    </a:solidFill>
-                  </a:tcPr>
-                </a:tc>
-                <a:tc>
-                  <a:txBody>
-                    <a:bodyPr/>
-                    <a:lstStyle/>
-                    <a:p>
-                      <a:r>
-                        <a:rPr sz="1100">
-                          <a:solidFill>
-                            <a:srgbClr val="3D424E"/>
-                          </a:solidFill>
-                        </a:rPr>
-                        <a:t>FR fundadores (ArcFace, FaceNet)</a:t>
-                      </a:r>
-                    </a:p>
-                  </a:txBody>
-                  <a:tcPr>
-                    <a:solidFill>
-                      <a:srgbClr val="E8EAED"/>
-                    </a:solidFill>
-                  </a:tcPr>
-                </a:tc>
-                <a:tc>
-                  <a:txBody>
-                    <a:bodyPr/>
-                    <a:lstStyle/>
-                    <a:p>
-                      <a:r>
-                        <a:rPr sz="1100">
-                          <a:solidFill>
-                            <a:srgbClr val="3D424E"/>
-                          </a:solidFill>
-                        </a:rPr>
-                        <a:t>6</a:t>
-                      </a:r>
-                    </a:p>
-                  </a:txBody>
-                  <a:tcPr>
-                    <a:solidFill>
-                      <a:srgbClr val="E8EAED"/>
-                    </a:solidFill>
-                  </a:tcPr>
-                </a:tc>
-                <a:tc>
-                  <a:txBody>
-                    <a:bodyPr/>
-                    <a:lstStyle/>
-                    <a:p>
-                      <a:r>
-                        <a:rPr sz="1100">
-                          <a:solidFill>
-                            <a:srgbClr val="3D424E"/>
-                          </a:solidFill>
-                        </a:rPr>
-                        <a:t>Preenche gap obvio</a:t>
-                      </a:r>
-                    </a:p>
-                  </a:txBody>
-                  <a:tcPr>
-                    <a:solidFill>
-                      <a:srgbClr val="E8EAED"/>
-                    </a:solidFill>
-                  </a:tcPr>
-                </a:tc>
-              </a:tr>
-              <a:tr h="396240">
-                <a:tc>
-                  <a:txBody>
-                    <a:bodyPr/>
-                    <a:lstStyle/>
-                    <a:p>
-                      <a:r>
-                        <a:rPr sz="1100">
-                          <a:solidFill>
-                            <a:srgbClr val="3D424E"/>
-                          </a:solidFill>
-                        </a:rPr>
-                        <a:t>L</a:t>
-                      </a:r>
-                    </a:p>
-                  </a:txBody>
-                  <a:tcPr/>
-                </a:tc>
-                <a:tc>
-                  <a:txBody>
-                    <a:bodyPr/>
-                    <a:lstStyle/>
-                    <a:p>
-                      <a:r>
-                        <a:rPr sz="1100">
-                          <a:solidFill>
-                            <a:srgbClr val="3D424E"/>
-                          </a:solidFill>
-                        </a:rPr>
-                        <a:t>Auxiliar / complementar</a:t>
-                      </a:r>
-                    </a:p>
-                  </a:txBody>
-                  <a:tcPr/>
-                </a:tc>
-                <a:tc>
-                  <a:txBody>
-                    <a:bodyPr/>
-                    <a:lstStyle/>
-                    <a:p>
-                      <a:r>
-                        <a:rPr sz="1100">
-                          <a:solidFill>
-                            <a:srgbClr val="3D424E"/>
-                          </a:solidFill>
-                        </a:rPr>
-                        <a:t>13</a:t>
-                      </a:r>
-                    </a:p>
-                  </a:txBody>
-                  <a:tcPr/>
-                </a:tc>
-                <a:tc>
-                  <a:txBody>
-                    <a:bodyPr/>
-                    <a:lstStyle/>
-                    <a:p>
-                      <a:r>
-                        <a:rPr sz="1100">
-                          <a:solidFill>
-                            <a:srgbClr val="3D424E"/>
-                          </a:solidFill>
-                        </a:rPr>
-                        <a:t>Direcoes adjacentes</a:t>
-                      </a:r>
-                    </a:p>
-                  </a:txBody>
-                  <a:tcPr/>
-                </a:tc>
-              </a:tr>
-            </a:tbl>
-          </a:graphicData>
-        </a:graphic>
-      </p:graphicFrame>
-      <p:sp>
-        <p:nvSpPr>
-          <p:cNvPr id="5" name="TextBox 4"/>
-          <p:cNvSpPr txBox="1"/>
-          <p:nvPr/>
-        </p:nvSpPr>
-        <p:spPr>
-          <a:xfrm>
-            <a:off x="457200" y="6446520"/>
-            <a:ext cx="11430000" cy="365760"/>
-          </a:xfrm>
-          <a:prstGeom prst="rect">
-            <a:avLst/>
-          </a:prstGeom>
-          <a:noFill/>
-        </p:spPr>
-        <p:txBody>
-          <a:bodyPr wrap="none">
-            <a:spAutoFit/>
-          </a:bodyPr>
-          <a:lstStyle/>
-          <a:p>
-            <a:pPr>
-              <a:defRPr sz="1000" i="1">
-                <a:solidFill>
-                  <a:srgbClr val="707682"/>
-                </a:solidFill>
-              </a:defRPr>
-            </a:pPr>
-            <a:r>
-              <a:t>Tracks I, J, K criados na Rodada 7 - destacados para discussao</a:t>
-            </a:r>
-          </a:p>
-        </p:txBody>
-      </p:sp>
-    </p:spTree>
-  </p:cSld>
-  <p:clrMapOvr>
-    <a:masterClrMapping/>
-  </p:clrMapOvr>
-</p:sld>
-</file>
-
-<file path=ppt/slides/slide8.xml><?xml version="1.0" encoding="utf-8"?>
-<p:sld xmlns:a="http://schemas.openxmlformats.org/drawingml/2006/main" xmlns:p="http://schemas.openxmlformats.org/presentationml/2006/main" xmlns:r="http://schemas.openxmlformats.org/officeDocument/2006/relationships">
-  <p:cSld>
-    <p:spTree>
-      <p:nvGrpSpPr>
-        <p:cNvPr id="1" name=""/>
-        <p:cNvGrpSpPr/>
-        <p:nvPr/>
-      </p:nvGrpSpPr>
-      <p:grpSpPr/>
-      <p:sp>
-        <p:nvSpPr>
-          <p:cNvPr id="2" name="Rectangle 1"/>
-          <p:cNvSpPr/>
-          <p:nvPr/>
-        </p:nvSpPr>
-        <p:spPr>
-          <a:xfrm>
-            <a:off x="0" y="0"/>
-            <a:ext cx="12188952" cy="6858000"/>
-          </a:xfrm>
-          <a:prstGeom prst="rect">
-            <a:avLst/>
-          </a:prstGeom>
-          <a:solidFill>
-            <a:srgbClr val="1F2A4E"/>
-          </a:solidFill>
-          <a:ln>
-            <a:noFill/>
-          </a:ln>
-        </p:spPr>
-        <p:style>
-          <a:lnRef idx="1">
-            <a:schemeClr val="accent1"/>
-          </a:lnRef>
-          <a:fillRef idx="3">
-            <a:schemeClr val="accent1"/>
-          </a:fillRef>
-          <a:effectRef idx="2">
-            <a:schemeClr val="accent1"/>
-          </a:effectRef>
-          <a:fontRef idx="minor">
-            <a:schemeClr val="lt1"/>
-          </a:fontRef>
-        </p:style>
-        <p:txBody>
-          <a:bodyPr rtlCol="0" anchor="ctr"/>
-          <a:lstStyle/>
-          <a:p>
-            <a:pPr algn="ctr"/>
-          </a:p>
-        </p:txBody>
-      </p:sp>
-      <p:sp>
-        <p:nvSpPr>
-          <p:cNvPr id="3" name="TextBox 2"/>
-          <p:cNvSpPr txBox="1"/>
-          <p:nvPr/>
-        </p:nvSpPr>
-        <p:spPr>
-          <a:xfrm>
-            <a:off x="731520" y="1371600"/>
-            <a:ext cx="2743200" cy="2743200"/>
-          </a:xfrm>
-          <a:prstGeom prst="rect">
-            <a:avLst/>
-          </a:prstGeom>
-          <a:noFill/>
-        </p:spPr>
-        <p:txBody>
-          <a:bodyPr wrap="none">
-            <a:spAutoFit/>
-          </a:bodyPr>
-          <a:lstStyle/>
-          <a:p>
-            <a:pPr>
-              <a:defRPr sz="14000" b="1">
-                <a:solidFill>
-                  <a:srgbClr val="FFFFFF"/>
-                </a:solidFill>
-              </a:defRPr>
-            </a:pPr>
-            <a:r>
-              <a:t>3</a:t>
-            </a:r>
-          </a:p>
-        </p:txBody>
-      </p:sp>
-      <p:sp>
-        <p:nvSpPr>
-          <p:cNvPr id="4" name="TextBox 3"/>
-          <p:cNvSpPr txBox="1"/>
-          <p:nvPr/>
-        </p:nvSpPr>
-        <p:spPr>
-          <a:xfrm>
-            <a:off x="3931920" y="2286000"/>
-            <a:ext cx="7772400" cy="1828800"/>
-          </a:xfrm>
-          <a:prstGeom prst="rect">
-            <a:avLst/>
-          </a:prstGeom>
-          <a:noFill/>
-        </p:spPr>
-        <p:txBody>
-          <a:bodyPr wrap="square">
-            <a:spAutoFit/>
-          </a:bodyPr>
-          <a:lstStyle/>
-          <a:p>
-            <a:pPr>
-              <a:defRPr sz="3800" b="1">
-                <a:solidFill>
-                  <a:srgbClr val="FFFFFF"/>
-                </a:solidFill>
-              </a:defRPr>
-            </a:pPr>
-            <a:r>
-              <a:t>Pente fino</a:t>
-            </a:r>
-          </a:p>
-          <a:p>
-            <a:pPr>
-              <a:defRPr sz="1800">
-                <a:solidFill>
-                  <a:srgbClr val="E8EAED"/>
-                </a:solidFill>
-              </a:defRPr>
-            </a:pPr>
-            <a:r>
-              <a:t>Classificacao por impacto na tese</a:t>
-            </a:r>
-          </a:p>
-        </p:txBody>
-      </p:sp>
-    </p:spTree>
-  </p:cSld>
-  <p:clrMapOvr>
-    <a:masterClrMapping/>
-  </p:clrMapOvr>
-</p:sld>
-</file>
-
-<file path=ppt/slides/slide9.xml><?xml version="1.0" encoding="utf-8"?>
-<p:sld xmlns:a="http://schemas.openxmlformats.org/drawingml/2006/main" xmlns:p="http://schemas.openxmlformats.org/presentationml/2006/main" xmlns:r="http://schemas.openxmlformats.org/officeDocument/2006/relationships">
-  <p:cSld>
-    <p:spTree>
-      <p:nvGrpSpPr>
-        <p:cNvPr id="1" name=""/>
-        <p:cNvGrpSpPr/>
-        <p:nvPr/>
-      </p:nvGrpSpPr>
-      <p:grpSpPr/>
-      <p:sp>
-        <p:nvSpPr>
-          <p:cNvPr id="2" name="TextBox 1"/>
-          <p:cNvSpPr txBox="1"/>
-          <p:nvPr/>
-        </p:nvSpPr>
-        <p:spPr>
-          <a:xfrm>
-            <a:off x="457200" y="365760"/>
-            <a:ext cx="11430000" cy="822960"/>
-          </a:xfrm>
-          <a:prstGeom prst="rect">
-            <a:avLst/>
-          </a:prstGeom>
-          <a:noFill/>
-        </p:spPr>
-        <p:txBody>
-          <a:bodyPr wrap="square">
-            <a:spAutoFit/>
-          </a:bodyPr>
-          <a:lstStyle/>
-          <a:p>
-            <a:pPr>
-              <a:defRPr sz="2600" b="1">
-                <a:solidFill>
-                  <a:srgbClr val="1F2A4E"/>
-                </a:solidFill>
-              </a:defRPr>
-            </a:pPr>
-            <a:r>
-              <a:t>Classificacao critica das 101 fichas</a:t>
-            </a:r>
-          </a:p>
-        </p:txBody>
-      </p:sp>
-      <p:sp>
-        <p:nvSpPr>
-          <p:cNvPr id="3" name="Rectangle 2"/>
-          <p:cNvSpPr/>
-          <p:nvPr/>
-        </p:nvSpPr>
-        <p:spPr>
-          <a:xfrm>
-            <a:off x="457200" y="1143000"/>
-            <a:ext cx="11430000" cy="36576"/>
-          </a:xfrm>
-          <a:prstGeom prst="rect">
-            <a:avLst/>
-          </a:prstGeom>
-          <a:solidFill>
-            <a:srgbClr val="1F2A4E"/>
-          </a:solidFill>
-          <a:ln>
-            <a:noFill/>
-          </a:ln>
-        </p:spPr>
-        <p:style>
-          <a:lnRef idx="1">
-            <a:schemeClr val="accent1"/>
-          </a:lnRef>
-          <a:fillRef idx="3">
-            <a:schemeClr val="accent1"/>
-          </a:fillRef>
-          <a:effectRef idx="2">
-            <a:schemeClr val="accent1"/>
-          </a:effectRef>
-          <a:fontRef idx="minor">
-            <a:schemeClr val="lt1"/>
-          </a:fontRef>
-        </p:style>
-        <p:txBody>
-          <a:bodyPr rtlCol="0" anchor="ctr"/>
-          <a:lstStyle/>
-          <a:p>
-            <a:pPr algn="ctr"/>
-          </a:p>
-        </p:txBody>
-      </p:sp>
-      <p:graphicFrame>
-        <p:nvGraphicFramePr>
-          <p:cNvPr id="4" name="Table 3"/>
-          <p:cNvGraphicFramePr>
-            <a:graphicFrameLocks noGrp="1"/>
-          </p:cNvGraphicFramePr>
-          <p:nvPr/>
-        </p:nvGraphicFramePr>
-        <p:xfrm>
-          <a:off x="457200" y="1371600"/>
-          <a:ext cx="11430000" cy="4754880"/>
-        </p:xfrm>
-        <a:graphic>
-          <a:graphicData uri="http://schemas.openxmlformats.org/drawingml/2006/table">
-            <a:tbl>
-              <a:tblPr firstRow="1" bandRow="1">
-                <a:tableStyleId>{5C22544A-7EE6-4342-B048-85BDC9FD1C3A}</a:tableStyleId>
-              </a:tblPr>
-              <a:tblGrid>
-                <a:gridCol w="2926080"/>
-                <a:gridCol w="914400"/>
-                <a:gridCol w="914400"/>
-                <a:gridCol w="6675120"/>
-              </a:tblGrid>
-              <a:tr h="679268">
-                <a:tc>
-                  <a:txBody>
-                    <a:bodyPr/>
-                    <a:lstStyle/>
-                    <a:p>
-                      <a:r>
-                        <a:rPr sz="1300" b="1">
-                          <a:solidFill>
-                            <a:srgbClr val="FFFFFF"/>
-                          </a:solidFill>
-                        </a:rPr>
-                        <a:t>Categoria</a:t>
-                      </a:r>
-                    </a:p>
-                  </a:txBody>
-                  <a:tcPr>
-                    <a:solidFill>
-                      <a:srgbClr val="1F2A4E"/>
-                    </a:solidFill>
-                  </a:tcPr>
-                </a:tc>
-                <a:tc>
-                  <a:txBody>
-                    <a:bodyPr/>
-                    <a:lstStyle/>
-                    <a:p>
-                      <a:r>
-                        <a:rPr sz="1300" b="1">
-                          <a:solidFill>
-                            <a:srgbClr val="FFFFFF"/>
-                          </a:solidFill>
-                        </a:rPr>
-                        <a:t>Fichas</a:t>
-                      </a:r>
-                    </a:p>
-                  </a:txBody>
-                  <a:tcPr>
-                    <a:solidFill>
-                      <a:srgbClr val="1F2A4E"/>
-                    </a:solidFill>
-                  </a:tcPr>
-                </a:tc>
-                <a:tc>
-                  <a:txBody>
-                    <a:bodyPr/>
-                    <a:lstStyle/>
-                    <a:p>
-                      <a:r>
-                        <a:rPr sz="1300" b="1">
-                          <a:solidFill>
-                            <a:srgbClr val="FFFFFF"/>
-                          </a:solidFill>
-                        </a:rPr>
-                        <a:t>%</a:t>
-                      </a:r>
-                    </a:p>
-                  </a:txBody>
-                  <a:tcPr>
-                    <a:solidFill>
-                      <a:srgbClr val="1F2A4E"/>
-                    </a:solidFill>
-                  </a:tcPr>
-                </a:tc>
-                <a:tc>
-                  <a:txBody>
-                    <a:bodyPr/>
-                    <a:lstStyle/>
-                    <a:p>
-                      <a:r>
-                        <a:rPr sz="1300" b="1">
-                          <a:solidFill>
-                            <a:srgbClr val="FFFFFF"/>
-                          </a:solidFill>
-                        </a:rPr>
-                        <a:t>Implicacao para a tese</a:t>
-                      </a:r>
-                    </a:p>
-                  </a:txBody>
-                  <a:tcPr>
-                    <a:solidFill>
-                      <a:srgbClr val="1F2A4E"/>
-                    </a:solidFill>
-                  </a:tcPr>
-                </a:tc>
-              </a:tr>
-              <a:tr h="679268">
-                <a:tc>
-                  <a:txBody>
-                    <a:bodyPr/>
-                    <a:lstStyle/>
-                    <a:p>
-                      <a:r>
-                        <a:rPr sz="1100">
-                          <a:solidFill>
-                            <a:srgbClr val="3D424E"/>
-                          </a:solidFill>
-                        </a:rPr>
-                        <a:t>Forte favoravel</a:t>
-                      </a:r>
-                    </a:p>
-                  </a:txBody>
-                  <a:tcPr>
-                    <a:solidFill>
-                      <a:srgbClr val="E8EAED"/>
-                    </a:solidFill>
-                  </a:tcPr>
-                </a:tc>
-                <a:tc>
-                  <a:txBody>
-                    <a:bodyPr/>
-                    <a:lstStyle/>
-                    <a:p>
-                      <a:r>
-                        <a:rPr sz="1100">
-                          <a:solidFill>
-                            <a:srgbClr val="3D424E"/>
-                          </a:solidFill>
-                        </a:rPr>
-                        <a:t>12</a:t>
-                      </a:r>
-                    </a:p>
-                  </a:txBody>
-                  <a:tcPr>
-                    <a:solidFill>
-                      <a:srgbClr val="E8EAED"/>
-                    </a:solidFill>
-                  </a:tcPr>
-                </a:tc>
-                <a:tc>
-                  <a:txBody>
-                    <a:bodyPr/>
-                    <a:lstStyle/>
-                    <a:p>
-                      <a:r>
-                        <a:rPr sz="1100">
-                          <a:solidFill>
-                            <a:srgbClr val="3D424E"/>
-                          </a:solidFill>
-                        </a:rPr>
-                        <a:t>11.9%</a:t>
-                      </a:r>
-                    </a:p>
-                  </a:txBody>
-                  <a:tcPr>
-                    <a:solidFill>
-                      <a:srgbClr val="E8EAED"/>
-                    </a:solidFill>
-                  </a:tcPr>
-                </a:tc>
-                <a:tc>
-                  <a:txBody>
-                    <a:bodyPr/>
-                    <a:lstStyle/>
-                    <a:p>
-                      <a:r>
-                        <a:rPr sz="1100">
-                          <a:solidFill>
-                            <a:srgbClr val="3D424E"/>
-                          </a:solidFill>
-                        </a:rPr>
-                        <a:t>Fundamentam etapas/contribuicoes diretamente</a:t>
-                      </a:r>
-                    </a:p>
-                  </a:txBody>
-                  <a:tcPr>
-                    <a:solidFill>
-                      <a:srgbClr val="E8EAED"/>
-                    </a:solidFill>
-                  </a:tcPr>
-                </a:tc>
-              </a:tr>
-              <a:tr h="679268">
-                <a:tc>
-                  <a:txBody>
-                    <a:bodyPr/>
-                    <a:lstStyle/>
-                    <a:p>
-                      <a:r>
-                        <a:rPr sz="1100">
-                          <a:solidFill>
-                            <a:srgbClr val="3D424E"/>
-                          </a:solidFill>
-                        </a:rPr>
-                        <a:t>Favoravel</a:t>
-                      </a:r>
-                    </a:p>
-                  </a:txBody>
-                  <a:tcPr/>
-                </a:tc>
-                <a:tc>
-                  <a:txBody>
-                    <a:bodyPr/>
-                    <a:lstStyle/>
-                    <a:p>
-                      <a:r>
-                        <a:rPr sz="1100">
-                          <a:solidFill>
-                            <a:srgbClr val="3D424E"/>
-                          </a:solidFill>
-                        </a:rPr>
-                        <a:t>38</a:t>
-                      </a:r>
-                    </a:p>
-                  </a:txBody>
-                  <a:tcPr/>
-                </a:tc>
-                <a:tc>
-                  <a:txBody>
-                    <a:bodyPr/>
-                    <a:lstStyle/>
-                    <a:p>
-                      <a:r>
-                        <a:rPr sz="1100">
-                          <a:solidFill>
-                            <a:srgbClr val="3D424E"/>
-                          </a:solidFill>
-                        </a:rPr>
-                        <a:t>37.6%</a:t>
-                      </a:r>
-                    </a:p>
-                  </a:txBody>
-                  <a:tcPr/>
-                </a:tc>
-                <a:tc>
-                  <a:txBody>
-                    <a:bodyPr/>
-                    <a:lstStyle/>
-                    <a:p>
-                      <a:r>
-                        <a:rPr sz="1100">
-                          <a:solidFill>
-                            <a:srgbClr val="3D424E"/>
-                          </a:solidFill>
-                        </a:rPr>
-                        <a:t>Suporte / alinhadas ao argumento</a:t>
-                      </a:r>
-                    </a:p>
-                  </a:txBody>
-                  <a:tcPr/>
-                </a:tc>
-              </a:tr>
-              <a:tr h="679268">
-                <a:tc>
-                  <a:txBody>
-                    <a:bodyPr/>
-                    <a:lstStyle/>
-                    <a:p>
-                      <a:r>
-                        <a:rPr sz="1100">
-                          <a:solidFill>
-                            <a:srgbClr val="3D424E"/>
-                          </a:solidFill>
-                        </a:rPr>
-                        <a:t>Neutra / contextual</a:t>
-                      </a:r>
-                    </a:p>
-                  </a:txBody>
-                  <a:tcPr/>
-                </a:tc>
-                <a:tc>
-                  <a:txBody>
-                    <a:bodyPr/>
-                    <a:lstStyle/>
-                    <a:p>
-                      <a:r>
-                        <a:rPr sz="1100">
-                          <a:solidFill>
-                            <a:srgbClr val="3D424E"/>
-                          </a:solidFill>
-                        </a:rPr>
-                        <a:t>18</a:t>
-                      </a:r>
-                    </a:p>
-                  </a:txBody>
-                  <a:tcPr/>
-                </a:tc>
-                <a:tc>
-                  <a:txBody>
-                    <a:bodyPr/>
-                    <a:lstStyle/>
-                    <a:p>
-                      <a:r>
-                        <a:rPr sz="1100">
-                          <a:solidFill>
-                            <a:srgbClr val="3D424E"/>
-                          </a:solidFill>
-                        </a:rPr>
-                        <a:t>17.8%</a:t>
-                      </a:r>
-                    </a:p>
-                  </a:txBody>
-                  <a:tcPr/>
-                </a:tc>
-                <a:tc>
-                  <a:txBody>
-                    <a:bodyPr/>
-                    <a:lstStyle/>
-                    <a:p>
-                      <a:r>
-                        <a:rPr sz="1100">
-                          <a:solidFill>
-                            <a:srgbClr val="3D424E"/>
-                          </a:solidFill>
-                        </a:rPr>
-                        <a:t>Background, nao influenciam decisoes</a:t>
-                      </a:r>
-                    </a:p>
-                  </a:txBody>
-                  <a:tcPr/>
-                </a:tc>
-              </a:tr>
-              <a:tr h="679268">
-                <a:tc>
-                  <a:txBody>
-                    <a:bodyPr/>
-                    <a:lstStyle/>
-                    <a:p>
-                      <a:r>
-                        <a:rPr sz="1100">
-                          <a:solidFill>
-                            <a:srgbClr val="3D424E"/>
-                          </a:solidFill>
-                        </a:rPr>
-                        <a:t>Caminho alternativo</a:t>
-                      </a:r>
-                    </a:p>
-                  </a:txBody>
-                  <a:tcPr/>
-                </a:tc>
-                <a:tc>
-                  <a:txBody>
-                    <a:bodyPr/>
-                    <a:lstStyle/>
-                    <a:p>
-                      <a:r>
-                        <a:rPr sz="1100">
-                          <a:solidFill>
-                            <a:srgbClr val="3D424E"/>
-                          </a:solidFill>
-                        </a:rPr>
-                        <a:t>26</a:t>
-                      </a:r>
-                    </a:p>
-                  </a:txBody>
-                  <a:tcPr/>
-                </a:tc>
-                <a:tc>
-                  <a:txBody>
-                    <a:bodyPr/>
-                    <a:lstStyle/>
-                    <a:p>
-                      <a:r>
-                        <a:rPr sz="1100">
-                          <a:solidFill>
-                            <a:srgbClr val="3D424E"/>
-                          </a:solidFill>
-                        </a:rPr>
-                        <a:t>25.7%</a:t>
-                      </a:r>
-                    </a:p>
-                  </a:txBody>
-                  <a:tcPr/>
-                </a:tc>
-                <a:tc>
-                  <a:txBody>
-                    <a:bodyPr/>
-                    <a:lstStyle/>
-                    <a:p>
-                      <a:r>
-                        <a:rPr sz="1100">
-                          <a:solidFill>
-                            <a:srgbClr val="3D424E"/>
-                          </a:solidFill>
-                        </a:rPr>
-                        <a:t>Cobertos via Contribuicao C7 (ablation)</a:t>
-                      </a:r>
-                    </a:p>
-                  </a:txBody>
-                  <a:tcPr/>
-                </a:tc>
-              </a:tr>
-              <a:tr h="679268">
-                <a:tc>
-                  <a:txBody>
-                    <a:bodyPr/>
-                    <a:lstStyle/>
-                    <a:p>
-                      <a:r>
-                        <a:rPr sz="1100">
-                          <a:solidFill>
-                            <a:srgbClr val="3D424E"/>
-                          </a:solidFill>
-                        </a:rPr>
-                        <a:t>Conflito moderado</a:t>
-                      </a:r>
-                    </a:p>
-                  </a:txBody>
-                  <a:tcPr/>
-                </a:tc>
-                <a:tc>
-                  <a:txBody>
-                    <a:bodyPr/>
-                    <a:lstStyle/>
-                    <a:p>
-                      <a:r>
-                        <a:rPr sz="1100">
-                          <a:solidFill>
-                            <a:srgbClr val="3D424E"/>
-                          </a:solidFill>
-                        </a:rPr>
-                        <a:t>5</a:t>
-                      </a:r>
-                    </a:p>
-                  </a:txBody>
-                  <a:tcPr/>
-                </a:tc>
-                <a:tc>
-                  <a:txBody>
-                    <a:bodyPr/>
-                    <a:lstStyle/>
-                    <a:p>
-                      <a:r>
-                        <a:rPr sz="1100">
-                          <a:solidFill>
-                            <a:srgbClr val="3D424E"/>
-                          </a:solidFill>
-                        </a:rPr>
-                        <a:t>5.0%</a:t>
-                      </a:r>
-                    </a:p>
-                  </a:txBody>
-                  <a:tcPr/>
-                </a:tc>
-                <a:tc>
-                  <a:txBody>
-                    <a:bodyPr/>
-                    <a:lstStyle/>
-                    <a:p>
-                      <a:r>
-                        <a:rPr sz="1100">
-                          <a:solidFill>
-                            <a:srgbClr val="3D424E"/>
-                          </a:solidFill>
-                        </a:rPr>
-                        <a:t>Endereçaveis - resposta defensiva mapeada</a:t>
-                      </a:r>
-                    </a:p>
-                  </a:txBody>
-                  <a:tcPr/>
-                </a:tc>
-              </a:tr>
-              <a:tr h="679272">
-                <a:tc>
-                  <a:txBody>
-                    <a:bodyPr/>
-                    <a:lstStyle/>
-                    <a:p>
-                      <a:r>
-                        <a:rPr sz="1100">
-                          <a:solidFill>
-                            <a:srgbClr val="3D424E"/>
-                          </a:solidFill>
-                        </a:rPr>
-                        <a:t>Conflito forte</a:t>
-                      </a:r>
-                    </a:p>
-                  </a:txBody>
-                  <a:tcPr>
-                    <a:solidFill>
-                      <a:srgbClr val="E8EAED"/>
-                    </a:solidFill>
-                  </a:tcPr>
-                </a:tc>
-                <a:tc>
-                  <a:txBody>
-                    <a:bodyPr/>
-                    <a:lstStyle/>
-                    <a:p>
-                      <a:r>
-                        <a:rPr sz="1100">
-                          <a:solidFill>
-                            <a:srgbClr val="3D424E"/>
-                          </a:solidFill>
-                        </a:rPr>
-                        <a:t>2</a:t>
-                      </a:r>
-                    </a:p>
-                  </a:txBody>
-                  <a:tcPr>
-                    <a:solidFill>
-                      <a:srgbClr val="E8EAED"/>
-                    </a:solidFill>
-                  </a:tcPr>
-                </a:tc>
-                <a:tc>
-                  <a:txBody>
-                    <a:bodyPr/>
-                    <a:lstStyle/>
-                    <a:p>
-                      <a:r>
-                        <a:rPr sz="1100">
-                          <a:solidFill>
-                            <a:srgbClr val="3D424E"/>
-                          </a:solidFill>
-                        </a:rPr>
-                        <a:t>2.0%</a:t>
-                      </a:r>
-                    </a:p>
-                  </a:txBody>
-                  <a:tcPr>
-                    <a:solidFill>
-                      <a:srgbClr val="E8EAED"/>
-                    </a:solidFill>
-                  </a:tcPr>
-                </a:tc>
-                <a:tc>
-                  <a:txBody>
-                    <a:bodyPr/>
-                    <a:lstStyle/>
-                    <a:p>
-                      <a:r>
-                        <a:rPr sz="1100">
-                          <a:solidFill>
-                            <a:srgbClr val="3D424E"/>
-                          </a:solidFill>
-                        </a:rPr>
-                        <a:t>Pangelinan (via H6), Neto (limitacao reconhecida)</a:t>
-                      </a:r>
-                    </a:p>
-                  </a:txBody>
-                  <a:tcPr>
-                    <a:solidFill>
-                      <a:srgbClr val="E8EAED"/>
-                    </a:solidFill>
-                  </a:tcPr>
-                </a:tc>
-              </a:tr>
-            </a:tbl>
-          </a:graphicData>
-        </a:graphic>
-      </p:graphicFrame>
-      <p:sp>
-        <p:nvSpPr>
-          <p:cNvPr id="5" name="TextBox 4"/>
-          <p:cNvSpPr txBox="1"/>
-          <p:nvPr/>
-        </p:nvSpPr>
-        <p:spPr>
-          <a:xfrm>
-            <a:off x="457200" y="6446520"/>
-            <a:ext cx="11430000" cy="365760"/>
-          </a:xfrm>
-          <a:prstGeom prst="rect">
-            <a:avLst/>
-          </a:prstGeom>
-          <a:noFill/>
-        </p:spPr>
-        <p:txBody>
-          <a:bodyPr wrap="none">
-            <a:spAutoFit/>
-          </a:bodyPr>
-          <a:lstStyle/>
-          <a:p>
-            <a:pPr>
-              <a:defRPr sz="1000" i="1">
-                <a:solidFill>
-                  <a:srgbClr val="707682"/>
-                </a:solidFill>
-              </a:defRPr>
-            </a:pPr>
-            <a:r>
-              <a:t>Apenas 2 conflitos fortes - ambos com resposta defensiva pronta. Nenhuma refutacao categorica sem resposta.</a:t>
+              <a:t>Apenas 2 conflitos fortes — ambos com resposta defensiva pronta. Nenhuma refutação categórica sem resposta.</a:t>
             </a:r>
           </a:p>
         </p:txBody>

--- a/docs/ativo/material_reuniao_orientador_2026-06-15.pptx
+++ b/docs/ativo/material_reuniao_orientador_2026-06-15.pptx
@@ -3559,7 +3559,7 @@
                   <a:srgbClr val="3D424E"/>
                 </a:solidFill>
               </a:rPr>
-              <a:t>Corpus está sólido para sustentar a qualificação</a:t>
+              <a:t>Corpus está sólido para sustentar a primeira versão da escrita</a:t>
             </a:r>
           </a:p>
         </p:txBody>
@@ -7327,7 +7327,7 @@
               </a:defRPr>
             </a:pPr>
             <a:r>
-              <a:t>Plano de escrita — 4 semanas até 15/jul/2026</a:t>
+              <a:t>Plano de escrita — 4 semanas até a primeira revisão (15/jul/2026)</a:t>
             </a:r>
           </a:p>
         </p:txBody>
@@ -7560,7 +7560,7 @@
                             <a:srgbClr val="3D424E"/>
                           </a:solidFill>
                         </a:rPr>
-                        <a:t>Narrativa pré-qualificação consolidada</a:t>
+                        <a:t>Narrativa de abertura consolidada</a:t>
                       </a:r>
                     </a:p>
                   </a:txBody>
@@ -7827,24 +7827,24 @@
                             <a:srgbClr val="3D424E"/>
                           </a:solidFill>
                         </a:rPr>
-                        <a:t>Ajustes finais e submissão</a:t>
-                      </a:r>
-                    </a:p>
-                  </a:txBody>
-                  <a:tcPr/>
-                </a:tc>
-                <a:tc>
-                  <a:txBody>
-                    <a:bodyPr/>
-                    <a:lstStyle/>
-                    <a:p>
-                      <a:r>
-                        <a:rPr sz="1100">
-                          <a:solidFill>
-                            <a:srgbClr val="3D424E"/>
-                          </a:solidFill>
-                        </a:rPr>
-                        <a:t>—</a:t>
+                        <a:t>Ajustes finais e entrega ao orientador</a:t>
+                      </a:r>
+                    </a:p>
+                  </a:txBody>
+                  <a:tcPr/>
+                </a:tc>
+                <a:tc>
+                  <a:txBody>
+                    <a:bodyPr/>
+                    <a:lstStyle/>
+                    <a:p>
+                      <a:r>
+                        <a:rPr sz="1100">
+                          <a:solidFill>
+                            <a:srgbClr val="3D424E"/>
+                          </a:solidFill>
+                        </a:rPr>
+                        <a:t>Primeira revisão</a:t>
                       </a:r>
                     </a:p>
                   </a:txBody>
@@ -8295,7 +8295,7 @@
                   <a:srgbClr val="3D424E"/>
                 </a:solidFill>
               </a:rPr>
-              <a:t>Escrever Capítulo 1 (Introdução) usando a narrativa pré-qualificação</a:t>
+              <a:t>Escrever Capítulo 1 (Introdução) usando a narrativa de abertura</a:t>
             </a:r>
           </a:p>
           <a:p>
@@ -8910,7 +8910,7 @@
                             <a:srgbClr val="3D424E"/>
                           </a:solidFill>
                         </a:rPr>
-                        <a:t>Pipeline 6 etapas aprovado</a:t>
+                        <a:t>Pipeline 6 etapas validado</a:t>
                       </a:r>
                     </a:p>
                   </a:txBody>
@@ -8944,7 +8944,7 @@
                             <a:srgbClr val="3D424E"/>
                           </a:solidFill>
                         </a:rPr>
-                        <a:t>Validado e detalhado por etapa</a:t>
+                        <a:t>Detalhado etapa por etapa</a:t>
                       </a:r>
                     </a:p>
                   </a:txBody>
@@ -9264,7 +9264,7 @@
                             <a:srgbClr val="3D424E"/>
                           </a:solidFill>
                         </a:rPr>
-                        <a:t>Submissão qualificação 15/jul/2026</a:t>
+                        <a:t>Primeira revisão ao orientador em 15/jul/2026</a:t>
                       </a:r>
                     </a:p>
                   </a:txBody>

--- a/docs/ativo/material_reuniao_orientador_2026-06-15.pptx
+++ b/docs/ativo/material_reuniao_orientador_2026-06-15.pptx
@@ -7539,7 +7539,7 @@
                             <a:srgbClr val="3D424E"/>
                           </a:solidFill>
                         </a:rPr>
-                        <a:t>Setup do ambiente + Capítulo 1 (Introdução)</a:t>
+                        <a:t>Estrutura no repositório + Capítulo 1 (Introdução)</a:t>
                       </a:r>
                     </a:p>
                   </a:txBody>
@@ -7855,6 +7855,41 @@
           </a:graphicData>
         </a:graphic>
       </p:graphicFrame>
+      <p:sp>
+        <p:nvSpPr>
+          <p:cNvPr id="5" name="TextBox 4"/>
+          <p:cNvSpPr txBox="1"/>
+          <p:nvPr/>
+        </p:nvSpPr>
+        <p:spPr>
+          <a:xfrm>
+            <a:off x="457200" y="6446520"/>
+            <a:ext cx="11430000" cy="365760"/>
+          </a:xfrm>
+          <a:prstGeom prst="rect">
+            <a:avLst/>
+          </a:prstGeom>
+          <a:noFill/>
+        </p:spPr>
+        <p:txBody>
+          <a:bodyPr wrap="none">
+            <a:spAutoFit/>
+          </a:bodyPr>
+          <a:lstStyle/>
+          <a:p>
+            <a:pPr>
+              <a:defRPr sz="1000" i="1">
+                <a:solidFill>
+                  <a:srgbClr val="707682"/>
+                </a:solidFill>
+              </a:defRPr>
+            </a:pPr>
+            <a:r>
+              <a:t>LaTeX ainda não iniciado: estrutura sendo organizada no projeto base do GitHub. Migração para o Overleaf após consolidação.</a:t>
+            </a:r>
+          </a:p>
+        </p:txBody>
+      </p:sp>
     </p:spTree>
   </p:cSld>
   <p:clrMapOvr>
@@ -8061,7 +8096,7 @@
                   <a:srgbClr val="3D424E"/>
                 </a:solidFill>
               </a:rPr>
-              <a:t>Há template institucional para a escrita ou seguimos com o padrão?</a:t>
+              <a:t>Há template institucional Unifesp/ICT no Overleaf ou seguimos com o padrão?</a:t>
             </a:r>
           </a:p>
           <a:p>
@@ -8249,7 +8284,7 @@
                   <a:srgbClr val="3D424E"/>
                 </a:solidFill>
               </a:rPr>
-              <a:t>Setup do ambiente de escrita com template institucional</a:t>
+              <a:t>Consolidar a estrutura no repositório do GitHub (ainda não iniciei o LaTeX)</a:t>
             </a:r>
           </a:p>
           <a:p>
@@ -8272,7 +8307,7 @@
                   <a:srgbClr val="3D424E"/>
                 </a:solidFill>
               </a:rPr>
-              <a:t>Consolidar bibliografia a partir das 101 fichas</a:t>
+              <a:t>Migrar para o Overleaf assim que a estrutura estiver estável</a:t>
             </a:r>
           </a:p>
           <a:p>
@@ -8295,7 +8330,7 @@
                   <a:srgbClr val="3D424E"/>
                 </a:solidFill>
               </a:rPr>
-              <a:t>Escrever Capítulo 1 (Introdução) usando a narrativa de abertura</a:t>
+              <a:t>Consolidar a bibliografia a partir das 101 fichas</a:t>
             </a:r>
           </a:p>
           <a:p>
@@ -8318,7 +8353,7 @@
                   <a:srgbClr val="3D424E"/>
                 </a:solidFill>
               </a:rPr>
-              <a:t>Incorporar as imagens já produzidas (pipeline FiLM, ConvNeXt-T, métricas de Hardt)</a:t>
+              <a:t>Escrever Capítulo 1 (Introdução) usando a narrativa de abertura</a:t>
             </a:r>
           </a:p>
           <a:p>
@@ -8334,6 +8369,29 @@
                 </a:solidFill>
               </a:rPr>
               <a:t>5.  </a:t>
+            </a:r>
+            <a:r>
+              <a:rPr sz="1600">
+                <a:solidFill>
+                  <a:srgbClr val="3D424E"/>
+                </a:solidFill>
+              </a:rPr>
+              <a:t>Incorporar as imagens já produzidas (pipeline FiLM, ConvNeXt-T, métricas de Hardt)</a:t>
+            </a:r>
+          </a:p>
+          <a:p>
+            <a:pPr>
+              <a:spcAft>
+                <a:spcPts val="800"/>
+              </a:spcAft>
+            </a:pPr>
+            <a:r>
+              <a:rPr sz="1600" b="1">
+                <a:solidFill>
+                  <a:srgbClr val="1F2A4E"/>
+                </a:solidFill>
+              </a:rPr>
+              <a:t>6.  </a:t>
             </a:r>
             <a:r>
               <a:rPr sz="1600">

--- a/docs/ativo/material_reuniao_orientador_2026-06-15.pptx
+++ b/docs/ativo/material_reuniao_orientador_2026-06-15.pptx
@@ -8096,7 +8096,7 @@
                   <a:srgbClr val="3D424E"/>
                 </a:solidFill>
               </a:rPr>
-              <a:t>Há template institucional Unifesp/ICT no Overleaf ou seguimos com o padrão?</a:t>
+              <a:t>Co-orientador — já podemos formalizar?</a:t>
             </a:r>
           </a:p>
           <a:p>
@@ -8112,29 +8112,6 @@
                 </a:solidFill>
               </a:rPr>
               <a:t>5.  </a:t>
-            </a:r>
-            <a:r>
-              <a:rPr sz="1600">
-                <a:solidFill>
-                  <a:srgbClr val="3D424E"/>
-                </a:solidFill>
-              </a:rPr>
-              <a:t>Co-orientador — já podemos formalizar?</a:t>
-            </a:r>
-          </a:p>
-          <a:p>
-            <a:pPr>
-              <a:spcAft>
-                <a:spcPts val="800"/>
-              </a:spcAft>
-            </a:pPr>
-            <a:r>
-              <a:rPr sz="1600" b="1">
-                <a:solidFill>
-                  <a:srgbClr val="1F2A4E"/>
-                </a:solidFill>
-              </a:rPr>
-              <a:t>6.  </a:t>
             </a:r>
             <a:r>
               <a:rPr sz="1600">
@@ -9364,7 +9341,7 @@
                             <a:srgbClr val="3D424E"/>
                           </a:solidFill>
                         </a:rPr>
-                        <a:t>Escrita em andamento</a:t>
+                        <a:t>Estrutura sendo organizada — LaTeX ainda não iniciado</a:t>
                       </a:r>
                     </a:p>
                   </a:txBody>

--- a/docs/ativo/material_reuniao_orientador_2026-06-15.pptx
+++ b/docs/ativo/material_reuniao_orientador_2026-06-15.pptx
@@ -9582,7 +9582,7 @@
               </a:defRPr>
             </a:pPr>
             <a:r>
-              <a:t>Marco atingido: 101 fichas em 11 tracks</a:t>
+              <a:t>Cobertura do corpus ampliada: 101 fichas em 11 tracks</a:t>
             </a:r>
           </a:p>
         </p:txBody>
@@ -9686,7 +9686,7 @@
                   <a:srgbClr val="1F2A4E"/>
                 </a:solidFill>
               </a:rPr>
-              <a:t>Meta 2025-2026:  </a:t>
+              <a:t>Ampliação:  </a:t>
             </a:r>
             <a:r>
               <a:rPr sz="1600">
@@ -9694,7 +9694,7 @@
                   <a:srgbClr val="3D424E"/>
                 </a:solidFill>
               </a:rPr>
-              <a:t>25 fichas (meta era ≥20) — atingida</a:t>
+              <a:t>+46 fichas adicionadas na rodada mais recente (55 → 101)</a:t>
             </a:r>
           </a:p>
           <a:p>
@@ -9709,7 +9709,7 @@
                   <a:srgbClr val="1F2A4E"/>
                 </a:solidFill>
               </a:rPr>
-              <a:t>Crescimento:  </a:t>
+              <a:t>Cobertura 2025-2026:  </a:t>
             </a:r>
             <a:r>
               <a:rPr sz="1600">
@@ -9717,7 +9717,7 @@
                   <a:srgbClr val="3D424E"/>
                 </a:solidFill>
               </a:rPr>
-              <a:t>+46 fichas na ampliação recente do corpus (55 → 101)</a:t>
+              <a:t>25 fichas — corpus mais atualizado e amplo</a:t>
             </a:r>
           </a:p>
           <a:p>
@@ -9862,7 +9862,7 @@
               </a:defRPr>
             </a:pPr>
             <a:r>
-              <a:t>Justificativa de cada track (por que existe)</a:t>
+              <a:t>Densidade das fichas por Tracking</a:t>
             </a:r>
           </a:p>
         </p:txBody>
@@ -9929,10 +9929,11 @@
                 <a:tableStyleId>{5C22544A-7EE6-4342-B048-85BDC9FD1C3A}</a:tableStyleId>
               </a:tblPr>
               <a:tblGrid>
-                <a:gridCol w="914400"/>
-                <a:gridCol w="3657600"/>
-                <a:gridCol w="731520"/>
-                <a:gridCol w="6126480"/>
+                <a:gridCol w="640080"/>
+                <a:gridCol w="1920240"/>
+                <a:gridCol w="3108960"/>
+                <a:gridCol w="5120640"/>
+                <a:gridCol w="640080"/>
               </a:tblGrid>
               <a:tr h="396240">
                 <a:tc>
@@ -9988,7 +9989,7 @@
                             <a:srgbClr val="FFFFFF"/>
                           </a:solidFill>
                         </a:rPr>
-                        <a:t>Fichas</a:t>
+                        <a:t>O que é o track</a:t>
                       </a:r>
                     </a:p>
                   </a:txBody>
@@ -10009,7 +10010,7 @@
                             <a:srgbClr val="FFFFFF"/>
                           </a:solidFill>
                         </a:rPr>
-                        <a:t>Papel na tese</a:t>
+                        <a:t>Principais artigos</a:t>
                       </a:r>
                     </a:p>
                   </a:txBody>
@@ -10019,6 +10020,27 @@
                     </a:solidFill>
                   </a:tcPr>
                 </a:tc>
+                <a:tc>
+                  <a:txBody>
+                    <a:bodyPr/>
+                    <a:lstStyle/>
+                    <a:p>
+                      <a:r>
+                        <a:rPr sz="1300" b="1">
+                          <a:solidFill>
+                            <a:srgbClr val="FFFFFF"/>
+                          </a:solidFill>
+                        </a:rPr>
+                        <a:t>Fichas</a:t>
+                      </a:r>
+                    </a:p>
+                  </a:txBody>
+                  <a:tcPr>
+                    <a:solidFill>
+                      <a:srgbClr val="1F2A4E"/>
+                    </a:solidFill>
+                  </a:tcPr>
+                </a:tc>
               </a:tr>
               <a:tr h="396240">
                 <a:tc>
@@ -10049,7 +10071,41 @@
                             <a:srgbClr val="3D424E"/>
                           </a:solidFill>
                         </a:rPr>
-                        <a:t>Race classification 7 classes</a:t>
+                        <a:t>Race classification</a:t>
+                      </a:r>
+                    </a:p>
+                  </a:txBody>
+                  <a:tcPr/>
+                </a:tc>
+                <a:tc>
+                  <a:txBody>
+                    <a:bodyPr/>
+                    <a:lstStyle/>
+                    <a:p>
+                      <a:r>
+                        <a:rPr sz="1100">
+                          <a:solidFill>
+                            <a:srgbClr val="3D424E"/>
+                          </a:solidFill>
+                        </a:rPr>
+                        <a:t>Classificação racial em 7 categorias sobre o FairFace</a:t>
+                      </a:r>
+                    </a:p>
+                  </a:txBody>
+                  <a:tcPr/>
+                </a:tc>
+                <a:tc>
+                  <a:txBody>
+                    <a:bodyPr/>
+                    <a:lstStyle/>
+                    <a:p>
+                      <a:r>
+                        <a:rPr sz="1100">
+                          <a:solidFill>
+                            <a:srgbClr val="3D424E"/>
+                          </a:solidFill>
+                        </a:rPr>
+                        <a:t>Kärkkäinen &amp; Joo 2021, AlDahoul 2024, Lin (FairGRAPE) 2022</a:t>
                       </a:r>
                     </a:p>
                   </a:txBody>
@@ -10067,23 +10123,6 @@
                           </a:solidFill>
                         </a:rPr>
                         <a:t>4</a:t>
-                      </a:r>
-                    </a:p>
-                  </a:txBody>
-                  <a:tcPr/>
-                </a:tc>
-                <a:tc>
-                  <a:txBody>
-                    <a:bodyPr/>
-                    <a:lstStyle/>
-                    <a:p>
-                      <a:r>
-                        <a:rPr sz="1100">
-                          <a:solidFill>
-                            <a:srgbClr val="3D424E"/>
-                          </a:solidFill>
-                        </a:rPr>
-                        <a:t>Tarefa central</a:t>
                       </a:r>
                     </a:p>
                   </a:txBody>
@@ -10136,24 +10175,41 @@
                             <a:srgbClr val="3D424E"/>
                           </a:solidFill>
                         </a:rPr>
+                        <a:t>Datasets, métricas e auditorias de viés em reconhecimento facial</a:t>
+                      </a:r>
+                    </a:p>
+                  </a:txBody>
+                  <a:tcPr/>
+                </a:tc>
+                <a:tc>
+                  <a:txBody>
+                    <a:bodyPr/>
+                    <a:lstStyle/>
+                    <a:p>
+                      <a:r>
+                        <a:rPr sz="1100">
+                          <a:solidFill>
+                            <a:srgbClr val="3D424E"/>
+                          </a:solidFill>
+                        </a:rPr>
+                        <a:t>Buolamwini 2018, Grother (NIST) 2019, Wang (RFW) 2019</a:t>
+                      </a:r>
+                    </a:p>
+                  </a:txBody>
+                  <a:tcPr/>
+                </a:tc>
+                <a:tc>
+                  <a:txBody>
+                    <a:bodyPr/>
+                    <a:lstStyle/>
+                    <a:p>
+                      <a:r>
+                        <a:rPr sz="1100">
+                          <a:solidFill>
+                            <a:srgbClr val="3D424E"/>
+                          </a:solidFill>
+                        </a:rPr>
                         <a:t>16</a:t>
-                      </a:r>
-                    </a:p>
-                  </a:txBody>
-                  <a:tcPr/>
-                </a:tc>
-                <a:tc>
-                  <a:txBody>
-                    <a:bodyPr/>
-                    <a:lstStyle/>
-                    <a:p>
-                      <a:r>
-                        <a:rPr sz="1100">
-                          <a:solidFill>
-                            <a:srgbClr val="3D424E"/>
-                          </a:solidFill>
-                        </a:rPr>
-                        <a:t>Paradigma dominante</a:t>
                       </a:r>
                     </a:p>
                   </a:txBody>
@@ -10206,24 +10262,41 @@
                             <a:srgbClr val="3D424E"/>
                           </a:solidFill>
                         </a:rPr>
+                        <a:t>Escalas e classificadores de tom de pele como sinal auxiliar</a:t>
+                      </a:r>
+                    </a:p>
+                  </a:txBody>
+                  <a:tcPr/>
+                </a:tc>
+                <a:tc>
+                  <a:txBody>
+                    <a:bodyPr/>
+                    <a:lstStyle/>
+                    <a:p>
+                      <a:r>
+                        <a:rPr sz="1100">
+                          <a:solidFill>
+                            <a:srgbClr val="3D424E"/>
+                          </a:solidFill>
+                        </a:rPr>
+                        <a:t>Fitzpatrick 1988, Schumann 2023, Pereira (SkinToneNet) 2026</a:t>
+                      </a:r>
+                    </a:p>
+                  </a:txBody>
+                  <a:tcPr/>
+                </a:tc>
+                <a:tc>
+                  <a:txBody>
+                    <a:bodyPr/>
+                    <a:lstStyle/>
+                    <a:p>
+                      <a:r>
+                        <a:rPr sz="1100">
+                          <a:solidFill>
+                            <a:srgbClr val="3D424E"/>
+                          </a:solidFill>
+                        </a:rPr>
                         <a:t>7</a:t>
-                      </a:r>
-                    </a:p>
-                  </a:txBody>
-                  <a:tcPr/>
-                </a:tc>
-                <a:tc>
-                  <a:txBody>
-                    <a:bodyPr/>
-                    <a:lstStyle/>
-                    <a:p>
-                      <a:r>
-                        <a:rPr sz="1100">
-                          <a:solidFill>
-                            <a:srgbClr val="3D424E"/>
-                          </a:solidFill>
-                        </a:rPr>
-                        <a:t>Sinal auxiliar do pipeline</a:t>
                       </a:r>
                     </a:p>
                   </a:txBody>
@@ -10276,24 +10349,41 @@
                             <a:srgbClr val="3D424E"/>
                           </a:solidFill>
                         </a:rPr>
+                        <a:t>Algoritmos para reduzir viés (contrastive, DRO, arquitetural)</a:t>
+                      </a:r>
+                    </a:p>
+                  </a:txBody>
+                  <a:tcPr/>
+                </a:tc>
+                <a:tc>
+                  <a:txBody>
+                    <a:bodyPr/>
+                    <a:lstStyle/>
+                    <a:p>
+                      <a:r>
+                        <a:rPr sz="1100">
+                          <a:solidFill>
+                            <a:srgbClr val="3D424E"/>
+                          </a:solidFill>
+                        </a:rPr>
+                        <a:t>Park (FSCL+) 2022, Sagawa (Group DRO) 2020, Manzoor 2024</a:t>
+                      </a:r>
+                    </a:p>
+                  </a:txBody>
+                  <a:tcPr/>
+                </a:tc>
+                <a:tc>
+                  <a:txBody>
+                    <a:bodyPr/>
+                    <a:lstStyle/>
+                    <a:p>
+                      <a:r>
+                        <a:rPr sz="1100">
+                          <a:solidFill>
+                            <a:srgbClr val="3D424E"/>
+                          </a:solidFill>
+                        </a:rPr>
                         <a:t>10</a:t>
-                      </a:r>
-                    </a:p>
-                  </a:txBody>
-                  <a:tcPr/>
-                </a:tc>
-                <a:tc>
-                  <a:txBody>
-                    <a:bodyPr/>
-                    <a:lstStyle/>
-                    <a:p>
-                      <a:r>
-                        <a:rPr sz="1100">
-                          <a:solidFill>
-                            <a:srgbClr val="3D424E"/>
-                          </a:solidFill>
-                        </a:rPr>
-                        <a:t>Baselines a superar</a:t>
                       </a:r>
                     </a:p>
                   </a:txBody>
@@ -10346,24 +10436,41 @@
                             <a:srgbClr val="3D424E"/>
                           </a:solidFill>
                         </a:rPr>
+                        <a:t>Auditorias sistêmicas e revisões da literatura</a:t>
+                      </a:r>
+                    </a:p>
+                  </a:txBody>
+                  <a:tcPr/>
+                </a:tc>
+                <a:tc>
+                  <a:txBody>
+                    <a:bodyPr/>
+                    <a:lstStyle/>
+                    <a:p>
+                      <a:r>
+                        <a:rPr sz="1100">
+                          <a:solidFill>
+                            <a:srgbClr val="3D424E"/>
+                          </a:solidFill>
+                        </a:rPr>
+                        <a:t>Mehrabi 2021, Dominguez (DSAP) 2024, Buolamwini 2018</a:t>
+                      </a:r>
+                    </a:p>
+                  </a:txBody>
+                  <a:tcPr/>
+                </a:tc>
+                <a:tc>
+                  <a:txBody>
+                    <a:bodyPr/>
+                    <a:lstStyle/>
+                    <a:p>
+                      <a:r>
+                        <a:rPr sz="1100">
+                          <a:solidFill>
+                            <a:srgbClr val="3D424E"/>
+                          </a:solidFill>
+                        </a:rPr>
                         <a:t>14</a:t>
-                      </a:r>
-                    </a:p>
-                  </a:txBody>
-                  <a:tcPr/>
-                </a:tc>
-                <a:tc>
-                  <a:txBody>
-                    <a:bodyPr/>
-                    <a:lstStyle/>
-                    <a:p>
-                      <a:r>
-                        <a:rPr sz="1100">
-                          <a:solidFill>
-                            <a:srgbClr val="3D424E"/>
-                          </a:solidFill>
-                        </a:rPr>
-                        <a:t>Infraestrutura intelectual</a:t>
                       </a:r>
                     </a:p>
                   </a:txBody>
@@ -10416,24 +10523,41 @@
                             <a:srgbClr val="3D424E"/>
                           </a:solidFill>
                         </a:rPr>
+                        <a:t>Validade conceitual de 'raça' como variável científica</a:t>
+                      </a:r>
+                    </a:p>
+                  </a:txBody>
+                  <a:tcPr/>
+                </a:tc>
+                <a:tc>
+                  <a:txBody>
+                    <a:bodyPr/>
+                    <a:lstStyle/>
+                    <a:p>
+                      <a:r>
+                        <a:rPr sz="1100">
+                          <a:solidFill>
+                            <a:srgbClr val="3D424E"/>
+                          </a:solidFill>
+                        </a:rPr>
+                        <a:t>Lewontin 1972, Fuentes 2019, Neto 2025</a:t>
+                      </a:r>
+                    </a:p>
+                  </a:txBody>
+                  <a:tcPr/>
+                </a:tc>
+                <a:tc>
+                  <a:txBody>
+                    <a:bodyPr/>
+                    <a:lstStyle/>
+                    <a:p>
+                      <a:r>
+                        <a:rPr sz="1100">
+                          <a:solidFill>
+                            <a:srgbClr val="3D424E"/>
+                          </a:solidFill>
+                        </a:rPr>
                         <a:t>3</a:t>
-                      </a:r>
-                    </a:p>
-                  </a:txBody>
-                  <a:tcPr/>
-                </a:tc>
-                <a:tc>
-                  <a:txBody>
-                    <a:bodyPr/>
-                    <a:lstStyle/>
-                    <a:p>
-                      <a:r>
-                        <a:rPr sz="1100">
-                          <a:solidFill>
-                            <a:srgbClr val="3D424E"/>
-                          </a:solidFill>
-                        </a:rPr>
-                        <a:t>Posicionamento da tese</a:t>
                       </a:r>
                     </a:p>
                   </a:txBody>
@@ -10486,24 +10610,41 @@
                             <a:srgbClr val="3D424E"/>
                           </a:solidFill>
                         </a:rPr>
+                        <a:t>Mecanismos teóricos clássicos (métricas, conditioning)</a:t>
+                      </a:r>
+                    </a:p>
+                  </a:txBody>
+                  <a:tcPr/>
+                </a:tc>
+                <a:tc>
+                  <a:txBody>
+                    <a:bodyPr/>
+                    <a:lstStyle/>
+                    <a:p>
+                      <a:r>
+                        <a:rPr sz="1100">
+                          <a:solidFill>
+                            <a:srgbClr val="3D424E"/>
+                          </a:solidFill>
+                        </a:rPr>
+                        <a:t>Hardt 2016, Perez (FiLM) 2018, Kleinberg 2017</a:t>
+                      </a:r>
+                    </a:p>
+                  </a:txBody>
+                  <a:tcPr/>
+                </a:tc>
+                <a:tc>
+                  <a:txBody>
+                    <a:bodyPr/>
+                    <a:lstStyle/>
+                    <a:p>
+                      <a:r>
+                        <a:rPr sz="1100">
+                          <a:solidFill>
+                            <a:srgbClr val="3D424E"/>
+                          </a:solidFill>
+                        </a:rPr>
                         <a:t>9</a:t>
-                      </a:r>
-                    </a:p>
-                  </a:txBody>
-                  <a:tcPr/>
-                </a:tc>
-                <a:tc>
-                  <a:txBody>
-                    <a:bodyPr/>
-                    <a:lstStyle/>
-                    <a:p>
-                      <a:r>
-                        <a:rPr sz="1100">
-                          <a:solidFill>
-                            <a:srgbClr val="3D424E"/>
-                          </a:solidFill>
-                        </a:rPr>
-                        <a:t>Esqueleto teórico (FiLM, LAFTR)</a:t>
                       </a:r>
                     </a:p>
                   </a:txBody>
@@ -10564,7 +10705,7 @@
                             <a:srgbClr val="3D424E"/>
                           </a:solidFill>
                         </a:rPr>
-                        <a:t>14</a:t>
+                        <a:t>Fairness em modelos vision-language (CLIP, BLIP)</a:t>
                       </a:r>
                     </a:p>
                   </a:txBody>
@@ -10585,7 +10726,7 @@
                             <a:srgbClr val="3D424E"/>
                           </a:solidFill>
                         </a:rPr>
-                        <a:t>Resposta direta ao orientador</a:t>
+                        <a:t>Luo (FairCLIP) 2024, Dehdashtian (FairerCLIP) 2024, BendVLM 2024</a:t>
                       </a:r>
                     </a:p>
                   </a:txBody>
@@ -10595,20 +10736,18 @@
                     </a:solidFill>
                   </a:tcPr>
                 </a:tc>
-              </a:tr>
-              <a:tr h="396240">
-                <a:tc>
-                  <a:txBody>
-                    <a:bodyPr/>
-                    <a:lstStyle/>
-                    <a:p>
-                      <a:r>
-                        <a:rPr sz="1100">
-                          <a:solidFill>
-                            <a:srgbClr val="3D424E"/>
-                          </a:solidFill>
-                        </a:rPr>
-                        <a:t>J</a:t>
+                <a:tc>
+                  <a:txBody>
+                    <a:bodyPr/>
+                    <a:lstStyle/>
+                    <a:p>
+                      <a:r>
+                        <a:rPr sz="1100">
+                          <a:solidFill>
+                            <a:srgbClr val="3D424E"/>
+                          </a:solidFill>
+                        </a:rPr>
+                        <a:t>14</a:t>
                       </a:r>
                     </a:p>
                   </a:txBody>
@@ -10618,18 +10757,20 @@
                     </a:solidFill>
                   </a:tcPr>
                 </a:tc>
-                <a:tc>
-                  <a:txBody>
-                    <a:bodyPr/>
-                    <a:lstStyle/>
-                    <a:p>
-                      <a:r>
-                        <a:rPr sz="1100">
-                          <a:solidFill>
-                            <a:srgbClr val="3D424E"/>
-                          </a:solidFill>
-                        </a:rPr>
-                        <a:t>Conditioning moderno (LoRA, ViT)</a:t>
+              </a:tr>
+              <a:tr h="396240">
+                <a:tc>
+                  <a:txBody>
+                    <a:bodyPr/>
+                    <a:lstStyle/>
+                    <a:p>
+                      <a:r>
+                        <a:rPr sz="1100">
+                          <a:solidFill>
+                            <a:srgbClr val="3D424E"/>
+                          </a:solidFill>
+                        </a:rPr>
+                        <a:t>J</a:t>
                       </a:r>
                     </a:p>
                   </a:txBody>
@@ -10650,7 +10791,7 @@
                             <a:srgbClr val="3D424E"/>
                           </a:solidFill>
                         </a:rPr>
-                        <a:t>5</a:t>
+                        <a:t>Conditioning moderno</a:t>
                       </a:r>
                     </a:p>
                   </a:txBody>
@@ -10671,7 +10812,7 @@
                             <a:srgbClr val="3D424E"/>
                           </a:solidFill>
                         </a:rPr>
-                        <a:t>Alternativas ao FiLM</a:t>
+                        <a:t>Adaptadores alternativos ao FiLM (LoRA, ViT-mask)</a:t>
                       </a:r>
                     </a:p>
                   </a:txBody>
@@ -10681,20 +10822,18 @@
                     </a:solidFill>
                   </a:tcPr>
                 </a:tc>
-              </a:tr>
-              <a:tr h="396240">
-                <a:tc>
-                  <a:txBody>
-                    <a:bodyPr/>
-                    <a:lstStyle/>
-                    <a:p>
-                      <a:r>
-                        <a:rPr sz="1100">
-                          <a:solidFill>
-                            <a:srgbClr val="3D424E"/>
-                          </a:solidFill>
-                        </a:rPr>
-                        <a:t>K</a:t>
+                <a:tc>
+                  <a:txBody>
+                    <a:bodyPr/>
+                    <a:lstStyle/>
+                    <a:p>
+                      <a:r>
+                        <a:rPr sz="1100">
+                          <a:solidFill>
+                            <a:srgbClr val="3D424E"/>
+                          </a:solidFill>
+                        </a:rPr>
+                        <a:t>Bian (LoRA-FAIR) 2025, Tian (FairViT) 2024, Zhao (AIM-Fair) 2025</a:t>
                       </a:r>
                     </a:p>
                   </a:txBody>
@@ -10715,7 +10854,7 @@
                             <a:srgbClr val="3D424E"/>
                           </a:solidFill>
                         </a:rPr>
-                        <a:t>Fundadores de FR (ArcFace, FaceNet)</a:t>
+                        <a:t>5</a:t>
                       </a:r>
                     </a:p>
                   </a:txBody>
@@ -10725,18 +10864,20 @@
                     </a:solidFill>
                   </a:tcPr>
                 </a:tc>
-                <a:tc>
-                  <a:txBody>
-                    <a:bodyPr/>
-                    <a:lstStyle/>
-                    <a:p>
-                      <a:r>
-                        <a:rPr sz="1100">
-                          <a:solidFill>
-                            <a:srgbClr val="3D424E"/>
-                          </a:solidFill>
-                        </a:rPr>
-                        <a:t>6</a:t>
+              </a:tr>
+              <a:tr h="396240">
+                <a:tc>
+                  <a:txBody>
+                    <a:bodyPr/>
+                    <a:lstStyle/>
+                    <a:p>
+                      <a:r>
+                        <a:rPr sz="1100">
+                          <a:solidFill>
+                            <a:srgbClr val="3D424E"/>
+                          </a:solidFill>
+                        </a:rPr>
+                        <a:t>K</a:t>
                       </a:r>
                     </a:p>
                   </a:txBody>
@@ -10757,7 +10898,7 @@
                             <a:srgbClr val="3D424E"/>
                           </a:solidFill>
                         </a:rPr>
-                        <a:t>Preenche lacuna óbvia</a:t>
+                        <a:t>Fundadores de FR</a:t>
                       </a:r>
                     </a:p>
                   </a:txBody>
@@ -10767,6 +10908,69 @@
                     </a:solidFill>
                   </a:tcPr>
                 </a:tc>
+                <a:tc>
+                  <a:txBody>
+                    <a:bodyPr/>
+                    <a:lstStyle/>
+                    <a:p>
+                      <a:r>
+                        <a:rPr sz="1100">
+                          <a:solidFill>
+                            <a:srgbClr val="3D424E"/>
+                          </a:solidFill>
+                        </a:rPr>
+                        <a:t>Losses fundadoras de reconhecimento facial</a:t>
+                      </a:r>
+                    </a:p>
+                  </a:txBody>
+                  <a:tcPr>
+                    <a:solidFill>
+                      <a:srgbClr val="E8EAED"/>
+                    </a:solidFill>
+                  </a:tcPr>
+                </a:tc>
+                <a:tc>
+                  <a:txBody>
+                    <a:bodyPr/>
+                    <a:lstStyle/>
+                    <a:p>
+                      <a:r>
+                        <a:rPr sz="1100">
+                          <a:solidFill>
+                            <a:srgbClr val="3D424E"/>
+                          </a:solidFill>
+                        </a:rPr>
+                        <a:t>Schroff (FaceNet) 2015, Deng (ArcFace) 2019, Kim (AdaFace) 2022</a:t>
+                      </a:r>
+                    </a:p>
+                  </a:txBody>
+                  <a:tcPr>
+                    <a:solidFill>
+                      <a:srgbClr val="E8EAED"/>
+                    </a:solidFill>
+                  </a:tcPr>
+                </a:tc>
+                <a:tc>
+                  <a:txBody>
+                    <a:bodyPr/>
+                    <a:lstStyle/>
+                    <a:p>
+                      <a:r>
+                        <a:rPr sz="1100">
+                          <a:solidFill>
+                            <a:srgbClr val="3D424E"/>
+                          </a:solidFill>
+                        </a:rPr>
+                        <a:t>6</a:t>
+                      </a:r>
+                    </a:p>
+                  </a:txBody>
+                  <a:tcPr>
+                    <a:solidFill>
+                      <a:srgbClr val="E8EAED"/>
+                    </a:solidFill>
+                  </a:tcPr>
+                </a:tc>
               </a:tr>
               <a:tr h="396240">
                 <a:tc>
@@ -10814,24 +11018,41 @@
                             <a:srgbClr val="3D424E"/>
                           </a:solidFill>
                         </a:rPr>
+                        <a:t>Direções adjacentes (federated, synthetic, post-hoc)</a:t>
+                      </a:r>
+                    </a:p>
+                  </a:txBody>
+                  <a:tcPr/>
+                </a:tc>
+                <a:tc>
+                  <a:txBody>
+                    <a:bodyPr/>
+                    <a:lstStyle/>
+                    <a:p>
+                      <a:r>
+                        <a:rPr sz="1100">
+                          <a:solidFill>
+                            <a:srgbClr val="3D424E"/>
+                          </a:solidFill>
+                        </a:rPr>
+                        <a:t>Salvador (FairCal) 2021, FairImagen 2025, VoIDFace 2025</a:t>
+                      </a:r>
+                    </a:p>
+                  </a:txBody>
+                  <a:tcPr/>
+                </a:tc>
+                <a:tc>
+                  <a:txBody>
+                    <a:bodyPr/>
+                    <a:lstStyle/>
+                    <a:p>
+                      <a:r>
+                        <a:rPr sz="1100">
+                          <a:solidFill>
+                            <a:srgbClr val="3D424E"/>
+                          </a:solidFill>
+                        </a:rPr>
                         <a:t>13</a:t>
-                      </a:r>
-                    </a:p>
-                  </a:txBody>
-                  <a:tcPr/>
-                </a:tc>
-                <a:tc>
-                  <a:txBody>
-                    <a:bodyPr/>
-                    <a:lstStyle/>
-                    <a:p>
-                      <a:r>
-                        <a:rPr sz="1100">
-                          <a:solidFill>
-                            <a:srgbClr val="3D424E"/>
-                          </a:solidFill>
-                        </a:rPr>
-                        <a:t>Direções adjacentes</a:t>
                       </a:r>
                     </a:p>
                   </a:txBody>
@@ -10872,7 +11093,7 @@
               </a:defRPr>
             </a:pPr>
             <a:r>
-              <a:t>Tracks I, J, K são os novos tracks da ampliação recente — destacados para discussão</a:t>
+              <a:t>Tracks I, J e K são os novos tracks da ampliação recente do corpus — destacados para discussão</a:t>
             </a:r>
           </a:p>
         </p:txBody>

--- a/docs/ativo/material_reuniao_orientador_2026-06-15.pptx
+++ b/docs/ativo/material_reuniao_orientador_2026-06-15.pptx
@@ -7687,7 +7687,7 @@
                             <a:srgbClr val="3D424E"/>
                           </a:solidFill>
                         </a:rPr>
-                        <a:t>Capítulo 3 (Objetivos) e Capítulo 4 (Metodologia)</a:t>
+                        <a:t>Capítulo 3 (Objetivos) e Capítulo 4 (Ampliação e busca de novas técnicas)</a:t>
                       </a:r>
                     </a:p>
                   </a:txBody>
@@ -8826,8 +8826,8 @@
               </a:tblPr>
               <a:tblGrid>
                 <a:gridCol w="457200"/>
-                <a:gridCol w="4389120"/>
-                <a:gridCol w="1645920"/>
+                <a:gridCol w="4206240"/>
+                <a:gridCol w="1828800"/>
                 <a:gridCol w="4937760"/>
               </a:tblGrid>
               <a:tr h="679268">
@@ -8962,7 +8962,7 @@
                             <a:srgbClr val="3D424E"/>
                           </a:solidFill>
                         </a:rPr>
-                        <a:t>OK</a:t>
+                        <a:t>Concluído</a:t>
                       </a:r>
                     </a:p>
                   </a:txBody>
@@ -9032,7 +9032,7 @@
                             <a:srgbClr val="3D424E"/>
                           </a:solidFill>
                         </a:rPr>
-                        <a:t>OK</a:t>
+                        <a:t>Concluído</a:t>
                       </a:r>
                     </a:p>
                   </a:txBody>
@@ -9102,24 +9102,24 @@
                             <a:srgbClr val="3D424E"/>
                           </a:solidFill>
                         </a:rPr>
-                        <a:t>OK — 101</a:t>
-                      </a:r>
-                    </a:p>
-                  </a:txBody>
-                  <a:tcPr/>
-                </a:tc>
-                <a:tc>
-                  <a:txBody>
-                    <a:bodyPr/>
-                    <a:lstStyle/>
-                    <a:p>
-                      <a:r>
-                        <a:rPr sz="1100">
-                          <a:solidFill>
-                            <a:srgbClr val="3D424E"/>
-                          </a:solidFill>
-                        </a:rPr>
-                        <a:t>+46 fichas na última rodada</a:t>
+                        <a:t>Concluído</a:t>
+                      </a:r>
+                    </a:p>
+                  </a:txBody>
+                  <a:tcPr/>
+                </a:tc>
+                <a:tc>
+                  <a:txBody>
+                    <a:bodyPr/>
+                    <a:lstStyle/>
+                    <a:p>
+                      <a:r>
+                        <a:rPr sz="1100">
+                          <a:solidFill>
+                            <a:srgbClr val="3D424E"/>
+                          </a:solidFill>
+                        </a:rPr>
+                        <a:t>101 fichas (+46 na última rodada)</a:t>
                       </a:r>
                     </a:p>
                   </a:txBody>
@@ -9172,24 +9172,24 @@
                             <a:srgbClr val="3D424E"/>
                           </a:solidFill>
                         </a:rPr>
-                        <a:t>OK — 25</a:t>
-                      </a:r>
-                    </a:p>
-                  </a:txBody>
-                  <a:tcPr/>
-                </a:tc>
-                <a:tc>
-                  <a:txBody>
-                    <a:bodyPr/>
-                    <a:lstStyle/>
-                    <a:p>
-                      <a:r>
-                        <a:rPr sz="1100">
-                          <a:solidFill>
-                            <a:srgbClr val="3D424E"/>
-                          </a:solidFill>
-                        </a:rPr>
-                        <a:t>Meta superada</a:t>
+                        <a:t>Concluído</a:t>
+                      </a:r>
+                    </a:p>
+                  </a:txBody>
+                  <a:tcPr/>
+                </a:tc>
+                <a:tc>
+                  <a:txBody>
+                    <a:bodyPr/>
+                    <a:lstStyle/>
+                    <a:p>
+                      <a:r>
+                        <a:rPr sz="1100">
+                          <a:solidFill>
+                            <a:srgbClr val="3D424E"/>
+                          </a:solidFill>
+                        </a:rPr>
+                        <a:t>25 fichas em 2025-2026</a:t>
                       </a:r>
                     </a:p>
                   </a:txBody>
@@ -9242,24 +9242,24 @@
                             <a:srgbClr val="3D424E"/>
                           </a:solidFill>
                         </a:rPr>
-                        <a:t>OK — Track I</a:t>
-                      </a:r>
-                    </a:p>
-                  </a:txBody>
-                  <a:tcPr/>
-                </a:tc>
-                <a:tc>
-                  <a:txBody>
-                    <a:bodyPr/>
-                    <a:lstStyle/>
-                    <a:p>
-                      <a:r>
-                        <a:rPr sz="1100">
-                          <a:solidFill>
-                            <a:srgbClr val="3D424E"/>
-                          </a:solidFill>
-                        </a:rPr>
-                        <a:t>14 fichas + análise técnica</a:t>
+                        <a:t>Concluído</a:t>
+                      </a:r>
+                    </a:p>
+                  </a:txBody>
+                  <a:tcPr/>
+                </a:tc>
+                <a:tc>
+                  <a:txBody>
+                    <a:bodyPr/>
+                    <a:lstStyle/>
+                    <a:p>
+                      <a:r>
+                        <a:rPr sz="1100">
+                          <a:solidFill>
+                            <a:srgbClr val="3D424E"/>
+                          </a:solidFill>
+                        </a:rPr>
+                        <a:t>Track I criada — 14 fichas + análise técnica</a:t>
                       </a:r>
                     </a:p>
                   </a:txBody>
@@ -9320,7 +9320,7 @@
                             <a:srgbClr val="3D424E"/>
                           </a:solidFill>
                         </a:rPr>
-                        <a:t>Em curso</a:t>
+                        <a:t>Em andamento</a:t>
                       </a:r>
                     </a:p>
                   </a:txBody>
@@ -9386,7 +9386,7 @@
               </a:defRPr>
             </a:pPr>
             <a:r>
-              <a:t>5 itens fechados e 1 em execução conforme planejado</a:t>
+              <a:t>5 itens concluídos e 1 em andamento conforme planejado</a:t>
             </a:r>
           </a:p>
         </p:txBody>
@@ -9582,7 +9582,7 @@
               </a:defRPr>
             </a:pPr>
             <a:r>
-              <a:t>Cobertura do corpus ampliada: 101 fichas em 11 tracks</a:t>
+              <a:t>Como o corpus foi ampliado: 55 → 101 fichas em 11 tracks</a:t>
             </a:r>
           </a:p>
         </p:txBody>
@@ -9663,7 +9663,7 @@
                   <a:srgbClr val="1F2A4E"/>
                 </a:solidFill>
               </a:rPr>
-              <a:t>Total:  </a:t>
+              <a:t>Critérios da busca:  </a:t>
             </a:r>
             <a:r>
               <a:rPr sz="1600">
@@ -9671,7 +9671,7 @@
                   <a:srgbClr val="3D424E"/>
                 </a:solidFill>
               </a:rPr>
-              <a:t>101 fichas distribuídas em 11 tracks temáticos</a:t>
+              <a:t>Top venues (CVPR, ICCV, ICLR, ECCV, Nature SR) com filtros menos restritivos</a:t>
             </a:r>
           </a:p>
           <a:p>
@@ -9686,7 +9686,7 @@
                   <a:srgbClr val="1F2A4E"/>
                 </a:solidFill>
               </a:rPr>
-              <a:t>Ampliação:  </a:t>
+              <a:t>Recorte temporal:  </a:t>
             </a:r>
             <a:r>
               <a:rPr sz="1600">
@@ -9694,7 +9694,7 @@
                   <a:srgbClr val="3D424E"/>
                 </a:solidFill>
               </a:rPr>
-              <a:t>+46 fichas adicionadas na rodada mais recente (55 → 101)</a:t>
+              <a:t>Foco em 2025-2026 para refletir o estado da arte mais recente</a:t>
             </a:r>
           </a:p>
           <a:p>
@@ -9709,7 +9709,7 @@
                   <a:srgbClr val="1F2A4E"/>
                 </a:solidFill>
               </a:rPr>
-              <a:t>Cobertura 2025-2026:  </a:t>
+              <a:t>Fontes consultadas:  </a:t>
             </a:r>
             <a:r>
               <a:rPr sz="1600">
@@ -9717,7 +9717,7 @@
                   <a:srgbClr val="3D424E"/>
                 </a:solidFill>
               </a:rPr>
-              <a:t>25 fichas — corpus mais atualizado e amplo</a:t>
+              <a:t>arXiv, OpenAccess (CVPR/ICCV), Semantic Scholar e busca direta por DOI</a:t>
             </a:r>
           </a:p>
           <a:p>
@@ -9732,7 +9732,7 @@
                   <a:srgbClr val="1F2A4E"/>
                 </a:solidFill>
               </a:rPr>
-              <a:t>Novos tracks:  </a:t>
+              <a:t>Estratégia em 3 levas:  </a:t>
             </a:r>
             <a:r>
               <a:rPr sz="1600">
@@ -9740,7 +9740,7 @@
                   <a:srgbClr val="3D424E"/>
                 </a:solidFill>
               </a:rPr>
-              <a:t>I, J, K criados em resposta a recomendações</a:t>
+              <a:t>Top venues recentes → fundadores de FR → temas complementares</a:t>
             </a:r>
           </a:p>
           <a:p>
@@ -9755,7 +9755,7 @@
                   <a:srgbClr val="1F2A4E"/>
                 </a:solidFill>
               </a:rPr>
-              <a:t>Track I:  </a:t>
+              <a:t>Reorganização temática:  </a:t>
             </a:r>
             <a:r>
               <a:rPr sz="1600">
@@ -9763,7 +9763,7 @@
                   <a:srgbClr val="3D424E"/>
                 </a:solidFill>
               </a:rPr>
-              <a:t>VLM / CLIP em fairness (14 fichas) — resposta direta ao orientador</a:t>
+              <a:t>3 novos tracks criados a partir dos achados (I, J, K)</a:t>
             </a:r>
           </a:p>
           <a:p>
@@ -9778,7 +9778,7 @@
                   <a:srgbClr val="1F2A4E"/>
                 </a:solidFill>
               </a:rPr>
-              <a:t>Track J:  </a:t>
+              <a:t>  </a:t>
             </a:r>
             <a:r>
               <a:rPr sz="1600">
@@ -9786,7 +9786,7 @@
                   <a:srgbClr val="3D424E"/>
                 </a:solidFill>
               </a:rPr>
-              <a:t>Conditioning moderno LoRA / ViT (5 fichas)</a:t>
+              <a:t/>
             </a:r>
           </a:p>
           <a:p>
@@ -9801,7 +9801,7 @@
                   <a:srgbClr val="1F2A4E"/>
                 </a:solidFill>
               </a:rPr>
-              <a:t>Track K:  </a:t>
+              <a:t>Resultado:  </a:t>
             </a:r>
             <a:r>
               <a:rPr sz="1600">
@@ -9809,7 +9809,7 @@
                   <a:srgbClr val="3D424E"/>
                 </a:solidFill>
               </a:rPr>
-              <a:t>Fundadores de FR — ArcFace, FaceNet, AdaFace (6 fichas)</a:t>
+              <a:t>+46 fichas / 25 fichas em 2025-2026 / 3 tracks novos</a:t>
             </a:r>
           </a:p>
         </p:txBody>
@@ -10667,11 +10667,7 @@
                       </a:r>
                     </a:p>
                   </a:txBody>
-                  <a:tcPr>
-                    <a:solidFill>
-                      <a:srgbClr val="E8EAED"/>
-                    </a:solidFill>
-                  </a:tcPr>
+                  <a:tcPr/>
                 </a:tc>
                 <a:tc>
                   <a:txBody>
@@ -10688,11 +10684,7 @@
                       </a:r>
                     </a:p>
                   </a:txBody>
-                  <a:tcPr>
-                    <a:solidFill>
-                      <a:srgbClr val="E8EAED"/>
-                    </a:solidFill>
-                  </a:tcPr>
+                  <a:tcPr/>
                 </a:tc>
                 <a:tc>
                   <a:txBody>
@@ -10709,11 +10701,7 @@
                       </a:r>
                     </a:p>
                   </a:txBody>
-                  <a:tcPr>
-                    <a:solidFill>
-                      <a:srgbClr val="E8EAED"/>
-                    </a:solidFill>
-                  </a:tcPr>
+                  <a:tcPr/>
                 </a:tc>
                 <a:tc>
                   <a:txBody>
@@ -10730,11 +10718,7 @@
                       </a:r>
                     </a:p>
                   </a:txBody>
-                  <a:tcPr>
-                    <a:solidFill>
-                      <a:srgbClr val="E8EAED"/>
-                    </a:solidFill>
-                  </a:tcPr>
+                  <a:tcPr/>
                 </a:tc>
                 <a:tc>
                   <a:txBody>
@@ -10751,11 +10735,7 @@
                       </a:r>
                     </a:p>
                   </a:txBody>
-                  <a:tcPr>
-                    <a:solidFill>
-                      <a:srgbClr val="E8EAED"/>
-                    </a:solidFill>
-                  </a:tcPr>
+                  <a:tcPr/>
                 </a:tc>
               </a:tr>
               <a:tr h="396240">
@@ -10774,11 +10754,7 @@
                       </a:r>
                     </a:p>
                   </a:txBody>
-                  <a:tcPr>
-                    <a:solidFill>
-                      <a:srgbClr val="E8EAED"/>
-                    </a:solidFill>
-                  </a:tcPr>
+                  <a:tcPr/>
                 </a:tc>
                 <a:tc>
                   <a:txBody>
@@ -10795,11 +10771,7 @@
                       </a:r>
                     </a:p>
                   </a:txBody>
-                  <a:tcPr>
-                    <a:solidFill>
-                      <a:srgbClr val="E8EAED"/>
-                    </a:solidFill>
-                  </a:tcPr>
+                  <a:tcPr/>
                 </a:tc>
                 <a:tc>
                   <a:txBody>
@@ -10816,11 +10788,7 @@
                       </a:r>
                     </a:p>
                   </a:txBody>
-                  <a:tcPr>
-                    <a:solidFill>
-                      <a:srgbClr val="E8EAED"/>
-                    </a:solidFill>
-                  </a:tcPr>
+                  <a:tcPr/>
                 </a:tc>
                 <a:tc>
                   <a:txBody>
@@ -10837,11 +10805,7 @@
                       </a:r>
                     </a:p>
                   </a:txBody>
-                  <a:tcPr>
-                    <a:solidFill>
-                      <a:srgbClr val="E8EAED"/>
-                    </a:solidFill>
-                  </a:tcPr>
+                  <a:tcPr/>
                 </a:tc>
                 <a:tc>
                   <a:txBody>
@@ -10858,11 +10822,7 @@
                       </a:r>
                     </a:p>
                   </a:txBody>
-                  <a:tcPr>
-                    <a:solidFill>
-                      <a:srgbClr val="E8EAED"/>
-                    </a:solidFill>
-                  </a:tcPr>
+                  <a:tcPr/>
                 </a:tc>
               </a:tr>
               <a:tr h="396240">
@@ -10881,11 +10841,7 @@
                       </a:r>
                     </a:p>
                   </a:txBody>
-                  <a:tcPr>
-                    <a:solidFill>
-                      <a:srgbClr val="E8EAED"/>
-                    </a:solidFill>
-                  </a:tcPr>
+                  <a:tcPr/>
                 </a:tc>
                 <a:tc>
                   <a:txBody>
@@ -10902,11 +10858,7 @@
                       </a:r>
                     </a:p>
                   </a:txBody>
-                  <a:tcPr>
-                    <a:solidFill>
-                      <a:srgbClr val="E8EAED"/>
-                    </a:solidFill>
-                  </a:tcPr>
+                  <a:tcPr/>
                 </a:tc>
                 <a:tc>
                   <a:txBody>
@@ -10923,11 +10875,7 @@
                       </a:r>
                     </a:p>
                   </a:txBody>
-                  <a:tcPr>
-                    <a:solidFill>
-                      <a:srgbClr val="E8EAED"/>
-                    </a:solidFill>
-                  </a:tcPr>
+                  <a:tcPr/>
                 </a:tc>
                 <a:tc>
                   <a:txBody>
@@ -10944,11 +10892,7 @@
                       </a:r>
                     </a:p>
                   </a:txBody>
-                  <a:tcPr>
-                    <a:solidFill>
-                      <a:srgbClr val="E8EAED"/>
-                    </a:solidFill>
-                  </a:tcPr>
+                  <a:tcPr/>
                 </a:tc>
                 <a:tc>
                   <a:txBody>
@@ -10965,11 +10909,7 @@
                       </a:r>
                     </a:p>
                   </a:txBody>
-                  <a:tcPr>
-                    <a:solidFill>
-                      <a:srgbClr val="E8EAED"/>
-                    </a:solidFill>
-                  </a:tcPr>
+                  <a:tcPr/>
                 </a:tc>
               </a:tr>
               <a:tr h="396240">
@@ -11093,7 +11033,7 @@
               </a:defRPr>
             </a:pPr>
             <a:r>
-              <a:t>Tracks I, J e K são os novos tracks da ampliação recente do corpus — destacados para discussão</a:t>
+              <a:t>Tracks I, J e K são os novos tracks da ampliação recente do corpus</a:t>
             </a:r>
           </a:p>
         </p:txBody>

--- a/docs/ativo/material_reuniao_orientador_2026-06-15.pptx
+++ b/docs/ativo/material_reuniao_orientador_2026-06-15.pptx
@@ -7793,7 +7793,7 @@
                             <a:srgbClr val="3D424E"/>
                           </a:solidFill>
                         </a:rPr>
-                        <a:t>Folga</a:t>
+                        <a:t>Target</a:t>
                       </a:r>
                     </a:p>
                   </a:txBody>

--- a/docs/ativo/material_reuniao_orientador_2026-06-15.pptx
+++ b/docs/ativo/material_reuniao_orientador_2026-06-15.pptx
@@ -3490,7 +3490,7 @@
                   <a:srgbClr val="3D424E"/>
                 </a:solidFill>
               </a:rPr>
-              <a:t>26 fichas (VLM, CLIP) cobertas pela Contribuição C7 (ablation arquitetural)</a:t>
+              <a:t>26 fichas (VLM, CLIP) cobertas pelo estudo comparativo de mecanismos de conditioning</a:t>
             </a:r>
           </a:p>
           <a:p>
@@ -4303,7 +4303,7 @@
                             <a:srgbClr val="3D424E"/>
                           </a:solidFill>
                         </a:rPr>
-                        <a:t>Baseline principal da C7</a:t>
+                        <a:t>Baseline principal do estudo comparativo</a:t>
                       </a:r>
                     </a:p>
                   </a:txBody>
@@ -4389,7 +4389,7 @@
                             <a:srgbClr val="3D424E"/>
                           </a:solidFill>
                         </a:rPr>
-                        <a:t>Baseline leve da C7</a:t>
+                        <a:t>Baseline leve do estudo comparativo</a:t>
                       </a:r>
                     </a:p>
                   </a:txBody>
@@ -4533,7 +4533,7 @@
                             <a:srgbClr val="3D424E"/>
                           </a:solidFill>
                         </a:rPr>
-                        <a:t>Track J — ablation da C7</a:t>
+                        <a:t>Entra no estudo comparativo (Track J)</a:t>
                       </a:r>
                     </a:p>
                   </a:txBody>
@@ -5878,7 +5878,7 @@
               </a:defRPr>
             </a:pPr>
             <a:r>
-              <a:t>Proposta</a:t>
+              <a:t>Estudo comparativo de mecanismos de conditioning</a:t>
             </a:r>
           </a:p>
           <a:p>
@@ -5890,7 +5890,7 @@
               </a:defRPr>
             </a:pPr>
             <a:r>
-              <a:t>Contribuição C7 — ablation arquitetural no Capítulo 2</a:t>
+              <a:t>FiLM, CLIP-conditioning e LoRA aplicados a race classification</a:t>
             </a:r>
           </a:p>
         </p:txBody>
@@ -5943,7 +5943,7 @@
               </a:defRPr>
             </a:pPr>
             <a:r>
-              <a:t>C7 — 5 configurações comparadas</a:t>
+              <a:t>5 configurações de conditioning comparadas</a:t>
             </a:r>
           </a:p>
         </p:txBody>
@@ -6727,7 +6727,7 @@
                   <a:srgbClr val="1F2A4E"/>
                 </a:solidFill>
               </a:rPr>
-              <a:t>Compatibilidade com a C7:  </a:t>
+              <a:t>Compatibilidade com o estudo comparativo:  </a:t>
             </a:r>
             <a:r>
               <a:rPr sz="1600">
@@ -7073,7 +7073,7 @@
                   <a:srgbClr val="3D424E"/>
                 </a:solidFill>
               </a:rPr>
-              <a:t>Proposta: Contribuição C7 — ablation arquitetural</a:t>
+              <a:t>Proposta: estudo comparativo de mecanismos de conditioning</a:t>
             </a:r>
           </a:p>
           <a:p>
@@ -7097,41 +7097,6 @@
                 </a:solidFill>
               </a:rPr>
               <a:t>Plano de escrita e decisões a alinhar</a:t>
-            </a:r>
-          </a:p>
-        </p:txBody>
-      </p:sp>
-      <p:sp>
-        <p:nvSpPr>
-          <p:cNvPr id="5" name="TextBox 4"/>
-          <p:cNvSpPr txBox="1"/>
-          <p:nvPr/>
-        </p:nvSpPr>
-        <p:spPr>
-          <a:xfrm>
-            <a:off x="457200" y="6446520"/>
-            <a:ext cx="11430000" cy="365760"/>
-          </a:xfrm>
-          <a:prstGeom prst="rect">
-            <a:avLst/>
-          </a:prstGeom>
-          <a:noFill/>
-        </p:spPr>
-        <p:txBody>
-          <a:bodyPr wrap="none">
-            <a:spAutoFit/>
-          </a:bodyPr>
-          <a:lstStyle/>
-          <a:p>
-            <a:pPr>
-              <a:defRPr sz="1000" i="1">
-                <a:solidFill>
-                  <a:srgbClr val="707682"/>
-                </a:solidFill>
-              </a:defRPr>
-            </a:pPr>
-            <a:r>
-              <a:t>Tempo estimado: 12-15 min de apresentação + discussão</a:t>
             </a:r>
           </a:p>
         </p:txBody>
@@ -8027,7 +7992,7 @@
                   <a:srgbClr val="3D424E"/>
                 </a:solidFill>
               </a:rPr>
-              <a:t>Concorda em manter FiLM como mecanismo central e CLIP-conditioning como C7 (ablation)?</a:t>
+              <a:t>Concorda em manter FiLM como mecanismo central e incluir CLIP-conditioning no estudo comparativo?</a:t>
             </a:r>
           </a:p>
           <a:p>
@@ -11676,7 +11641,7 @@
                             <a:srgbClr val="3D424E"/>
                           </a:solidFill>
                         </a:rPr>
-                        <a:t>Cobertos pela Contribuição C7 (ablation)</a:t>
+                        <a:t>Cobertos pelo estudo comparativo de mecanismos de conditioning</a:t>
                       </a:r>
                     </a:p>
                   </a:txBody>

--- a/docs/ativo/material_reuniao_orientador_2026-06-15.pptx
+++ b/docs/ativo/material_reuniao_orientador_2026-06-15.pptx
@@ -5,32 +5,34 @@
     <p:sldMasterId id="2147483648" r:id="rId1"/>
   </p:sldMasterIdLst>
   <p:sldIdLst>
-    <p:sldId id="256" r:id="rId7"/>
-    <p:sldId id="257" r:id="rId8"/>
-    <p:sldId id="258" r:id="rId9"/>
-    <p:sldId id="259" r:id="rId10"/>
-    <p:sldId id="260" r:id="rId11"/>
-    <p:sldId id="261" r:id="rId12"/>
-    <p:sldId id="262" r:id="rId13"/>
-    <p:sldId id="263" r:id="rId14"/>
-    <p:sldId id="264" r:id="rId15"/>
-    <p:sldId id="265" r:id="rId16"/>
-    <p:sldId id="266" r:id="rId17"/>
-    <p:sldId id="267" r:id="rId18"/>
-    <p:sldId id="268" r:id="rId19"/>
-    <p:sldId id="269" r:id="rId20"/>
-    <p:sldId id="270" r:id="rId21"/>
-    <p:sldId id="271" r:id="rId22"/>
-    <p:sldId id="272" r:id="rId23"/>
-    <p:sldId id="273" r:id="rId24"/>
-    <p:sldId id="274" r:id="rId25"/>
-    <p:sldId id="275" r:id="rId26"/>
-    <p:sldId id="276" r:id="rId27"/>
-    <p:sldId id="277" r:id="rId28"/>
-    <p:sldId id="278" r:id="rId29"/>
-    <p:sldId id="279" r:id="rId30"/>
+    <p:sldId id="256" r:id="rId2"/>
+    <p:sldId id="257" r:id="rId3"/>
+    <p:sldId id="258" r:id="rId4"/>
+    <p:sldId id="259" r:id="rId5"/>
+    <p:sldId id="260" r:id="rId6"/>
+    <p:sldId id="261" r:id="rId7"/>
+    <p:sldId id="262" r:id="rId8"/>
+    <p:sldId id="263" r:id="rId9"/>
+    <p:sldId id="264" r:id="rId10"/>
+    <p:sldId id="280" r:id="rId11"/>
+    <p:sldId id="281" r:id="rId12"/>
+    <p:sldId id="265" r:id="rId13"/>
+    <p:sldId id="266" r:id="rId14"/>
+    <p:sldId id="267" r:id="rId15"/>
+    <p:sldId id="268" r:id="rId16"/>
+    <p:sldId id="269" r:id="rId17"/>
+    <p:sldId id="270" r:id="rId18"/>
+    <p:sldId id="271" r:id="rId19"/>
+    <p:sldId id="272" r:id="rId20"/>
+    <p:sldId id="273" r:id="rId21"/>
+    <p:sldId id="274" r:id="rId22"/>
+    <p:sldId id="275" r:id="rId23"/>
+    <p:sldId id="276" r:id="rId24"/>
+    <p:sldId id="277" r:id="rId25"/>
+    <p:sldId id="278" r:id="rId26"/>
+    <p:sldId id="279" r:id="rId27"/>
   </p:sldIdLst>
-  <p:sldSz cx="12188952" cy="6858000" type="screen4x3"/>
+  <p:sldSz cx="12188825" cy="6858000"/>
   <p:notesSz cx="6858000" cy="9144000"/>
   <p:defaultTextStyle>
     <a:defPPr>
@@ -127,6 +129,22 @@
       </a:defRPr>
     </a:lvl9pPr>
   </p:defaultTextStyle>
+  <p:extLst>
+    <p:ext uri="{EFAFB233-063F-42B5-8137-9DF3F51BA10A}">
+      <p15:sldGuideLst xmlns:p15="http://schemas.microsoft.com/office/powerpoint/2012/main">
+        <p15:guide id="1" orient="horz" pos="2160">
+          <p15:clr>
+            <a:srgbClr val="A4A3A4"/>
+          </p15:clr>
+        </p15:guide>
+        <p15:guide id="2" pos="2880">
+          <p15:clr>
+            <a:srgbClr val="A4A3A4"/>
+          </p15:clr>
+        </p15:guide>
+      </p15:sldGuideLst>
+    </p:ext>
+  </p:extLst>
 </p:presentation>
 </file>
 
@@ -168,10 +186,9 @@
           <a:lstStyle/>
           <a:p>
             <a:r>
-              <a:rPr lang="en-US" smtClean="0"/>
+              <a:rPr lang="en-US"/>
               <a:t>Click to edit Master title style</a:t>
             </a:r>
-            <a:endParaRPr lang="en-US"/>
           </a:p>
         </p:txBody>
       </p:sp>
@@ -287,10 +304,9 @@
           </a:lstStyle>
           <a:p>
             <a:r>
-              <a:rPr lang="en-US" smtClean="0"/>
+              <a:rPr lang="en-US"/>
               <a:t>Click to edit Master subtitle style</a:t>
             </a:r>
-            <a:endParaRPr lang="en-US"/>
           </a:p>
         </p:txBody>
       </p:sp>
@@ -311,7 +327,7 @@
           <a:p>
             <a:fld id="{5BCAD085-E8A6-8845-BD4E-CB4CCA059FC4}" type="datetimeFigureOut">
               <a:rPr lang="en-US" smtClean="0"/>
-              <a:t>1/27/13</a:t>
+              <a:t>6/15/2026</a:t>
             </a:fld>
             <a:endParaRPr lang="en-US"/>
           </a:p>
@@ -353,7 +369,7 @@
           <a:p>
             <a:fld id="{C1FF6DA9-008F-8B48-92A6-B652298478BF}" type="slidenum">
               <a:rPr lang="en-US" smtClean="0"/>
-              <a:t>‹#›</a:t>
+              <a:t>‹nº›</a:t>
             </a:fld>
             <a:endParaRPr lang="en-US"/>
           </a:p>
@@ -405,10 +421,9 @@
           <a:lstStyle/>
           <a:p>
             <a:r>
-              <a:rPr lang="en-US" smtClean="0"/>
+              <a:rPr lang="en-US"/>
               <a:t>Click to edit Master title style</a:t>
             </a:r>
-            <a:endParaRPr lang="en-US"/>
           </a:p>
         </p:txBody>
       </p:sp>
@@ -429,38 +444,37 @@
           <a:p>
             <a:pPr lvl="0"/>
             <a:r>
-              <a:rPr lang="en-US" smtClean="0"/>
+              <a:rPr lang="en-US"/>
               <a:t>Click to edit Master text styles</a:t>
             </a:r>
           </a:p>
           <a:p>
             <a:pPr lvl="1"/>
             <a:r>
-              <a:rPr lang="en-US" smtClean="0"/>
+              <a:rPr lang="en-US"/>
               <a:t>Second level</a:t>
             </a:r>
           </a:p>
           <a:p>
             <a:pPr lvl="2"/>
             <a:r>
-              <a:rPr lang="en-US" smtClean="0"/>
+              <a:rPr lang="en-US"/>
               <a:t>Third level</a:t>
             </a:r>
           </a:p>
           <a:p>
             <a:pPr lvl="3"/>
             <a:r>
-              <a:rPr lang="en-US" smtClean="0"/>
+              <a:rPr lang="en-US"/>
               <a:t>Fourth level</a:t>
             </a:r>
           </a:p>
           <a:p>
             <a:pPr lvl="4"/>
             <a:r>
-              <a:rPr lang="en-US" smtClean="0"/>
+              <a:rPr lang="en-US"/>
               <a:t>Fifth level</a:t>
             </a:r>
-            <a:endParaRPr lang="en-US"/>
           </a:p>
         </p:txBody>
       </p:sp>
@@ -481,7 +495,7 @@
           <a:p>
             <a:fld id="{5BCAD085-E8A6-8845-BD4E-CB4CCA059FC4}" type="datetimeFigureOut">
               <a:rPr lang="en-US" smtClean="0"/>
-              <a:t>1/27/13</a:t>
+              <a:t>6/15/2026</a:t>
             </a:fld>
             <a:endParaRPr lang="en-US"/>
           </a:p>
@@ -523,7 +537,7 @@
           <a:p>
             <a:fld id="{C1FF6DA9-008F-8B48-92A6-B652298478BF}" type="slidenum">
               <a:rPr lang="en-US" smtClean="0"/>
-              <a:t>‹#›</a:t>
+              <a:t>‹nº›</a:t>
             </a:fld>
             <a:endParaRPr lang="en-US"/>
           </a:p>
@@ -580,10 +594,9 @@
           <a:lstStyle/>
           <a:p>
             <a:r>
-              <a:rPr lang="en-US" smtClean="0"/>
+              <a:rPr lang="en-US"/>
               <a:t>Click to edit Master title style</a:t>
             </a:r>
-            <a:endParaRPr lang="en-US"/>
           </a:p>
         </p:txBody>
       </p:sp>
@@ -609,38 +622,37 @@
           <a:p>
             <a:pPr lvl="0"/>
             <a:r>
-              <a:rPr lang="en-US" smtClean="0"/>
+              <a:rPr lang="en-US"/>
               <a:t>Click to edit Master text styles</a:t>
             </a:r>
           </a:p>
           <a:p>
             <a:pPr lvl="1"/>
             <a:r>
-              <a:rPr lang="en-US" smtClean="0"/>
+              <a:rPr lang="en-US"/>
               <a:t>Second level</a:t>
             </a:r>
           </a:p>
           <a:p>
             <a:pPr lvl="2"/>
             <a:r>
-              <a:rPr lang="en-US" smtClean="0"/>
+              <a:rPr lang="en-US"/>
               <a:t>Third level</a:t>
             </a:r>
           </a:p>
           <a:p>
             <a:pPr lvl="3"/>
             <a:r>
-              <a:rPr lang="en-US" smtClean="0"/>
+              <a:rPr lang="en-US"/>
               <a:t>Fourth level</a:t>
             </a:r>
           </a:p>
           <a:p>
             <a:pPr lvl="4"/>
             <a:r>
-              <a:rPr lang="en-US" smtClean="0"/>
+              <a:rPr lang="en-US"/>
               <a:t>Fifth level</a:t>
             </a:r>
-            <a:endParaRPr lang="en-US"/>
           </a:p>
         </p:txBody>
       </p:sp>
@@ -661,7 +673,7 @@
           <a:p>
             <a:fld id="{5BCAD085-E8A6-8845-BD4E-CB4CCA059FC4}" type="datetimeFigureOut">
               <a:rPr lang="en-US" smtClean="0"/>
-              <a:t>1/27/13</a:t>
+              <a:t>6/15/2026</a:t>
             </a:fld>
             <a:endParaRPr lang="en-US"/>
           </a:p>
@@ -703,7 +715,7 @@
           <a:p>
             <a:fld id="{C1FF6DA9-008F-8B48-92A6-B652298478BF}" type="slidenum">
               <a:rPr lang="en-US" smtClean="0"/>
-              <a:t>‹#›</a:t>
+              <a:t>‹nº›</a:t>
             </a:fld>
             <a:endParaRPr lang="en-US"/>
           </a:p>
@@ -755,10 +767,9 @@
           <a:lstStyle/>
           <a:p>
             <a:r>
-              <a:rPr lang="en-US" smtClean="0"/>
+              <a:rPr lang="en-US"/>
               <a:t>Click to edit Master title style</a:t>
             </a:r>
-            <a:endParaRPr lang="en-US"/>
           </a:p>
         </p:txBody>
       </p:sp>
@@ -779,38 +790,37 @@
           <a:p>
             <a:pPr lvl="0"/>
             <a:r>
-              <a:rPr lang="en-US" smtClean="0"/>
+              <a:rPr lang="en-US"/>
               <a:t>Click to edit Master text styles</a:t>
             </a:r>
           </a:p>
           <a:p>
             <a:pPr lvl="1"/>
             <a:r>
-              <a:rPr lang="en-US" smtClean="0"/>
+              <a:rPr lang="en-US"/>
               <a:t>Second level</a:t>
             </a:r>
           </a:p>
           <a:p>
             <a:pPr lvl="2"/>
             <a:r>
-              <a:rPr lang="en-US" smtClean="0"/>
+              <a:rPr lang="en-US"/>
               <a:t>Third level</a:t>
             </a:r>
           </a:p>
           <a:p>
             <a:pPr lvl="3"/>
             <a:r>
-              <a:rPr lang="en-US" smtClean="0"/>
+              <a:rPr lang="en-US"/>
               <a:t>Fourth level</a:t>
             </a:r>
           </a:p>
           <a:p>
             <a:pPr lvl="4"/>
             <a:r>
-              <a:rPr lang="en-US" smtClean="0"/>
+              <a:rPr lang="en-US"/>
               <a:t>Fifth level</a:t>
             </a:r>
-            <a:endParaRPr lang="en-US"/>
           </a:p>
         </p:txBody>
       </p:sp>
@@ -831,7 +841,7 @@
           <a:p>
             <a:fld id="{5BCAD085-E8A6-8845-BD4E-CB4CCA059FC4}" type="datetimeFigureOut">
               <a:rPr lang="en-US" smtClean="0"/>
-              <a:t>1/27/13</a:t>
+              <a:t>6/15/2026</a:t>
             </a:fld>
             <a:endParaRPr lang="en-US"/>
           </a:p>
@@ -873,7 +883,7 @@
           <a:p>
             <a:fld id="{C1FF6DA9-008F-8B48-92A6-B652298478BF}" type="slidenum">
               <a:rPr lang="en-US" smtClean="0"/>
-              <a:t>‹#›</a:t>
+              <a:t>‹nº›</a:t>
             </a:fld>
             <a:endParaRPr lang="en-US"/>
           </a:p>
@@ -934,10 +944,9 @@
           </a:lstStyle>
           <a:p>
             <a:r>
-              <a:rPr lang="en-US" smtClean="0"/>
+              <a:rPr lang="en-US"/>
               <a:t>Click to edit Master title style</a:t>
             </a:r>
-            <a:endParaRPr lang="en-US"/>
           </a:p>
         </p:txBody>
       </p:sp>
@@ -1054,7 +1063,7 @@
           <a:p>
             <a:pPr lvl="0"/>
             <a:r>
-              <a:rPr lang="en-US" smtClean="0"/>
+              <a:rPr lang="en-US"/>
               <a:t>Click to edit Master text styles</a:t>
             </a:r>
           </a:p>
@@ -1077,7 +1086,7 @@
           <a:p>
             <a:fld id="{5BCAD085-E8A6-8845-BD4E-CB4CCA059FC4}" type="datetimeFigureOut">
               <a:rPr lang="en-US" smtClean="0"/>
-              <a:t>1/27/13</a:t>
+              <a:t>6/15/2026</a:t>
             </a:fld>
             <a:endParaRPr lang="en-US"/>
           </a:p>
@@ -1119,7 +1128,7 @@
           <a:p>
             <a:fld id="{C1FF6DA9-008F-8B48-92A6-B652298478BF}" type="slidenum">
               <a:rPr lang="en-US" smtClean="0"/>
-              <a:t>‹#›</a:t>
+              <a:t>‹nº›</a:t>
             </a:fld>
             <a:endParaRPr lang="en-US"/>
           </a:p>
@@ -1171,10 +1180,9 @@
           <a:lstStyle/>
           <a:p>
             <a:r>
-              <a:rPr lang="en-US" smtClean="0"/>
+              <a:rPr lang="en-US"/>
               <a:t>Click to edit Master title style</a:t>
             </a:r>
-            <a:endParaRPr lang="en-US"/>
           </a:p>
         </p:txBody>
       </p:sp>
@@ -1228,38 +1236,37 @@
           <a:p>
             <a:pPr lvl="0"/>
             <a:r>
-              <a:rPr lang="en-US" smtClean="0"/>
+              <a:rPr lang="en-US"/>
               <a:t>Click to edit Master text styles</a:t>
             </a:r>
           </a:p>
           <a:p>
             <a:pPr lvl="1"/>
             <a:r>
-              <a:rPr lang="en-US" smtClean="0"/>
+              <a:rPr lang="en-US"/>
               <a:t>Second level</a:t>
             </a:r>
           </a:p>
           <a:p>
             <a:pPr lvl="2"/>
             <a:r>
-              <a:rPr lang="en-US" smtClean="0"/>
+              <a:rPr lang="en-US"/>
               <a:t>Third level</a:t>
             </a:r>
           </a:p>
           <a:p>
             <a:pPr lvl="3"/>
             <a:r>
-              <a:rPr lang="en-US" smtClean="0"/>
+              <a:rPr lang="en-US"/>
               <a:t>Fourth level</a:t>
             </a:r>
           </a:p>
           <a:p>
             <a:pPr lvl="4"/>
             <a:r>
-              <a:rPr lang="en-US" smtClean="0"/>
+              <a:rPr lang="en-US"/>
               <a:t>Fifth level</a:t>
             </a:r>
-            <a:endParaRPr lang="en-US"/>
           </a:p>
         </p:txBody>
       </p:sp>
@@ -1313,38 +1320,37 @@
           <a:p>
             <a:pPr lvl="0"/>
             <a:r>
-              <a:rPr lang="en-US" smtClean="0"/>
+              <a:rPr lang="en-US"/>
               <a:t>Click to edit Master text styles</a:t>
             </a:r>
           </a:p>
           <a:p>
             <a:pPr lvl="1"/>
             <a:r>
-              <a:rPr lang="en-US" smtClean="0"/>
+              <a:rPr lang="en-US"/>
               <a:t>Second level</a:t>
             </a:r>
           </a:p>
           <a:p>
             <a:pPr lvl="2"/>
             <a:r>
-              <a:rPr lang="en-US" smtClean="0"/>
+              <a:rPr lang="en-US"/>
               <a:t>Third level</a:t>
             </a:r>
           </a:p>
           <a:p>
             <a:pPr lvl="3"/>
             <a:r>
-              <a:rPr lang="en-US" smtClean="0"/>
+              <a:rPr lang="en-US"/>
               <a:t>Fourth level</a:t>
             </a:r>
           </a:p>
           <a:p>
             <a:pPr lvl="4"/>
             <a:r>
-              <a:rPr lang="en-US" smtClean="0"/>
+              <a:rPr lang="en-US"/>
               <a:t>Fifth level</a:t>
             </a:r>
-            <a:endParaRPr lang="en-US"/>
           </a:p>
         </p:txBody>
       </p:sp>
@@ -1365,7 +1371,7 @@
           <a:p>
             <a:fld id="{5BCAD085-E8A6-8845-BD4E-CB4CCA059FC4}" type="datetimeFigureOut">
               <a:rPr lang="en-US" smtClean="0"/>
-              <a:t>1/27/13</a:t>
+              <a:t>6/15/2026</a:t>
             </a:fld>
             <a:endParaRPr lang="en-US"/>
           </a:p>
@@ -1407,7 +1413,7 @@
           <a:p>
             <a:fld id="{C1FF6DA9-008F-8B48-92A6-B652298478BF}" type="slidenum">
               <a:rPr lang="en-US" smtClean="0"/>
-              <a:t>‹#›</a:t>
+              <a:t>‹nº›</a:t>
             </a:fld>
             <a:endParaRPr lang="en-US"/>
           </a:p>
@@ -1463,10 +1469,9 @@
           </a:lstStyle>
           <a:p>
             <a:r>
-              <a:rPr lang="en-US" smtClean="0"/>
+              <a:rPr lang="en-US"/>
               <a:t>Click to edit Master title style</a:t>
             </a:r>
-            <a:endParaRPr lang="en-US"/>
           </a:p>
         </p:txBody>
       </p:sp>
@@ -1529,7 +1534,7 @@
           <a:p>
             <a:pPr lvl="0"/>
             <a:r>
-              <a:rPr lang="en-US" smtClean="0"/>
+              <a:rPr lang="en-US"/>
               <a:t>Click to edit Master text styles</a:t>
             </a:r>
           </a:p>
@@ -1585,38 +1590,37 @@
           <a:p>
             <a:pPr lvl="0"/>
             <a:r>
-              <a:rPr lang="en-US" smtClean="0"/>
+              <a:rPr lang="en-US"/>
               <a:t>Click to edit Master text styles</a:t>
             </a:r>
           </a:p>
           <a:p>
             <a:pPr lvl="1"/>
             <a:r>
-              <a:rPr lang="en-US" smtClean="0"/>
+              <a:rPr lang="en-US"/>
               <a:t>Second level</a:t>
             </a:r>
           </a:p>
           <a:p>
             <a:pPr lvl="2"/>
             <a:r>
-              <a:rPr lang="en-US" smtClean="0"/>
+              <a:rPr lang="en-US"/>
               <a:t>Third level</a:t>
             </a:r>
           </a:p>
           <a:p>
             <a:pPr lvl="3"/>
             <a:r>
-              <a:rPr lang="en-US" smtClean="0"/>
+              <a:rPr lang="en-US"/>
               <a:t>Fourth level</a:t>
             </a:r>
           </a:p>
           <a:p>
             <a:pPr lvl="4"/>
             <a:r>
-              <a:rPr lang="en-US" smtClean="0"/>
+              <a:rPr lang="en-US"/>
               <a:t>Fifth level</a:t>
             </a:r>
-            <a:endParaRPr lang="en-US"/>
           </a:p>
         </p:txBody>
       </p:sp>
@@ -1679,7 +1683,7 @@
           <a:p>
             <a:pPr lvl="0"/>
             <a:r>
-              <a:rPr lang="en-US" smtClean="0"/>
+              <a:rPr lang="en-US"/>
               <a:t>Click to edit Master text styles</a:t>
             </a:r>
           </a:p>
@@ -1735,38 +1739,37 @@
           <a:p>
             <a:pPr lvl="0"/>
             <a:r>
-              <a:rPr lang="en-US" smtClean="0"/>
+              <a:rPr lang="en-US"/>
               <a:t>Click to edit Master text styles</a:t>
             </a:r>
           </a:p>
           <a:p>
             <a:pPr lvl="1"/>
             <a:r>
-              <a:rPr lang="en-US" smtClean="0"/>
+              <a:rPr lang="en-US"/>
               <a:t>Second level</a:t>
             </a:r>
           </a:p>
           <a:p>
             <a:pPr lvl="2"/>
             <a:r>
-              <a:rPr lang="en-US" smtClean="0"/>
+              <a:rPr lang="en-US"/>
               <a:t>Third level</a:t>
             </a:r>
           </a:p>
           <a:p>
             <a:pPr lvl="3"/>
             <a:r>
-              <a:rPr lang="en-US" smtClean="0"/>
+              <a:rPr lang="en-US"/>
               <a:t>Fourth level</a:t>
             </a:r>
           </a:p>
           <a:p>
             <a:pPr lvl="4"/>
             <a:r>
-              <a:rPr lang="en-US" smtClean="0"/>
+              <a:rPr lang="en-US"/>
               <a:t>Fifth level</a:t>
             </a:r>
-            <a:endParaRPr lang="en-US"/>
           </a:p>
         </p:txBody>
       </p:sp>
@@ -1787,7 +1790,7 @@
           <a:p>
             <a:fld id="{5BCAD085-E8A6-8845-BD4E-CB4CCA059FC4}" type="datetimeFigureOut">
               <a:rPr lang="en-US" smtClean="0"/>
-              <a:t>1/27/13</a:t>
+              <a:t>6/15/2026</a:t>
             </a:fld>
             <a:endParaRPr lang="en-US"/>
           </a:p>
@@ -1829,7 +1832,7 @@
           <a:p>
             <a:fld id="{C1FF6DA9-008F-8B48-92A6-B652298478BF}" type="slidenum">
               <a:rPr lang="en-US" smtClean="0"/>
-              <a:t>‹#›</a:t>
+              <a:t>‹nº›</a:t>
             </a:fld>
             <a:endParaRPr lang="en-US"/>
           </a:p>
@@ -1881,10 +1884,9 @@
           <a:lstStyle/>
           <a:p>
             <a:r>
-              <a:rPr lang="en-US" smtClean="0"/>
+              <a:rPr lang="en-US"/>
               <a:t>Click to edit Master title style</a:t>
             </a:r>
-            <a:endParaRPr lang="en-US"/>
           </a:p>
         </p:txBody>
       </p:sp>
@@ -1905,7 +1907,7 @@
           <a:p>
             <a:fld id="{5BCAD085-E8A6-8845-BD4E-CB4CCA059FC4}" type="datetimeFigureOut">
               <a:rPr lang="en-US" smtClean="0"/>
-              <a:t>1/27/13</a:t>
+              <a:t>6/15/2026</a:t>
             </a:fld>
             <a:endParaRPr lang="en-US"/>
           </a:p>
@@ -1947,7 +1949,7 @@
           <a:p>
             <a:fld id="{C1FF6DA9-008F-8B48-92A6-B652298478BF}" type="slidenum">
               <a:rPr lang="en-US" smtClean="0"/>
-              <a:t>‹#›</a:t>
+              <a:t>‹nº›</a:t>
             </a:fld>
             <a:endParaRPr lang="en-US"/>
           </a:p>
@@ -2000,7 +2002,7 @@
           <a:p>
             <a:fld id="{5BCAD085-E8A6-8845-BD4E-CB4CCA059FC4}" type="datetimeFigureOut">
               <a:rPr lang="en-US" smtClean="0"/>
-              <a:t>1/27/13</a:t>
+              <a:t>6/15/2026</a:t>
             </a:fld>
             <a:endParaRPr lang="en-US"/>
           </a:p>
@@ -2042,7 +2044,7 @@
           <a:p>
             <a:fld id="{C1FF6DA9-008F-8B48-92A6-B652298478BF}" type="slidenum">
               <a:rPr lang="en-US" smtClean="0"/>
-              <a:t>‹#›</a:t>
+              <a:t>‹nº›</a:t>
             </a:fld>
             <a:endParaRPr lang="en-US"/>
           </a:p>
@@ -2103,10 +2105,9 @@
           </a:lstStyle>
           <a:p>
             <a:r>
-              <a:rPr lang="en-US" smtClean="0"/>
+              <a:rPr lang="en-US"/>
               <a:t>Click to edit Master title style</a:t>
             </a:r>
-            <a:endParaRPr lang="en-US"/>
           </a:p>
         </p:txBody>
       </p:sp>
@@ -2160,38 +2161,37 @@
           <a:p>
             <a:pPr lvl="0"/>
             <a:r>
-              <a:rPr lang="en-US" smtClean="0"/>
+              <a:rPr lang="en-US"/>
               <a:t>Click to edit Master text styles</a:t>
             </a:r>
           </a:p>
           <a:p>
             <a:pPr lvl="1"/>
             <a:r>
-              <a:rPr lang="en-US" smtClean="0"/>
+              <a:rPr lang="en-US"/>
               <a:t>Second level</a:t>
             </a:r>
           </a:p>
           <a:p>
             <a:pPr lvl="2"/>
             <a:r>
-              <a:rPr lang="en-US" smtClean="0"/>
+              <a:rPr lang="en-US"/>
               <a:t>Third level</a:t>
             </a:r>
           </a:p>
           <a:p>
             <a:pPr lvl="3"/>
             <a:r>
-              <a:rPr lang="en-US" smtClean="0"/>
+              <a:rPr lang="en-US"/>
               <a:t>Fourth level</a:t>
             </a:r>
           </a:p>
           <a:p>
             <a:pPr lvl="4"/>
             <a:r>
-              <a:rPr lang="en-US" smtClean="0"/>
+              <a:rPr lang="en-US"/>
               <a:t>Fifth level</a:t>
             </a:r>
-            <a:endParaRPr lang="en-US"/>
           </a:p>
         </p:txBody>
       </p:sp>
@@ -2254,7 +2254,7 @@
           <a:p>
             <a:pPr lvl="0"/>
             <a:r>
-              <a:rPr lang="en-US" smtClean="0"/>
+              <a:rPr lang="en-US"/>
               <a:t>Click to edit Master text styles</a:t>
             </a:r>
           </a:p>
@@ -2277,7 +2277,7 @@
           <a:p>
             <a:fld id="{5BCAD085-E8A6-8845-BD4E-CB4CCA059FC4}" type="datetimeFigureOut">
               <a:rPr lang="en-US" smtClean="0"/>
-              <a:t>1/27/13</a:t>
+              <a:t>6/15/2026</a:t>
             </a:fld>
             <a:endParaRPr lang="en-US"/>
           </a:p>
@@ -2319,7 +2319,7 @@
           <a:p>
             <a:fld id="{C1FF6DA9-008F-8B48-92A6-B652298478BF}" type="slidenum">
               <a:rPr lang="en-US" smtClean="0"/>
-              <a:t>‹#›</a:t>
+              <a:t>‹nº›</a:t>
             </a:fld>
             <a:endParaRPr lang="en-US"/>
           </a:p>
@@ -2380,10 +2380,9 @@
           </a:lstStyle>
           <a:p>
             <a:r>
-              <a:rPr lang="en-US" smtClean="0"/>
+              <a:rPr lang="en-US"/>
               <a:t>Click to edit Master title style</a:t>
             </a:r>
-            <a:endParaRPr lang="en-US"/>
           </a:p>
         </p:txBody>
       </p:sp>
@@ -2507,7 +2506,7 @@
           <a:p>
             <a:pPr lvl="0"/>
             <a:r>
-              <a:rPr lang="en-US" smtClean="0"/>
+              <a:rPr lang="en-US"/>
               <a:t>Click to edit Master text styles</a:t>
             </a:r>
           </a:p>
@@ -2530,7 +2529,7 @@
           <a:p>
             <a:fld id="{5BCAD085-E8A6-8845-BD4E-CB4CCA059FC4}" type="datetimeFigureOut">
               <a:rPr lang="en-US" smtClean="0"/>
-              <a:t>1/27/13</a:t>
+              <a:t>6/15/2026</a:t>
             </a:fld>
             <a:endParaRPr lang="en-US"/>
           </a:p>
@@ -2572,7 +2571,7 @@
           <a:p>
             <a:fld id="{C1FF6DA9-008F-8B48-92A6-B652298478BF}" type="slidenum">
               <a:rPr lang="en-US" smtClean="0"/>
-              <a:t>‹#›</a:t>
+              <a:t>‹nº›</a:t>
             </a:fld>
             <a:endParaRPr lang="en-US"/>
           </a:p>
@@ -2639,10 +2638,9 @@
           <a:lstStyle/>
           <a:p>
             <a:r>
-              <a:rPr lang="en-US" smtClean="0"/>
+              <a:rPr lang="en-US"/>
               <a:t>Click to edit Master title style</a:t>
             </a:r>
-            <a:endParaRPr lang="en-US"/>
           </a:p>
         </p:txBody>
       </p:sp>
@@ -2673,38 +2671,37 @@
           <a:p>
             <a:pPr lvl="0"/>
             <a:r>
-              <a:rPr lang="en-US" smtClean="0"/>
+              <a:rPr lang="en-US"/>
               <a:t>Click to edit Master text styles</a:t>
             </a:r>
           </a:p>
           <a:p>
             <a:pPr lvl="1"/>
             <a:r>
-              <a:rPr lang="en-US" smtClean="0"/>
+              <a:rPr lang="en-US"/>
               <a:t>Second level</a:t>
             </a:r>
           </a:p>
           <a:p>
             <a:pPr lvl="2"/>
             <a:r>
-              <a:rPr lang="en-US" smtClean="0"/>
+              <a:rPr lang="en-US"/>
               <a:t>Third level</a:t>
             </a:r>
           </a:p>
           <a:p>
             <a:pPr lvl="3"/>
             <a:r>
-              <a:rPr lang="en-US" smtClean="0"/>
+              <a:rPr lang="en-US"/>
               <a:t>Fourth level</a:t>
             </a:r>
           </a:p>
           <a:p>
             <a:pPr lvl="4"/>
             <a:r>
-              <a:rPr lang="en-US" smtClean="0"/>
+              <a:rPr lang="en-US"/>
               <a:t>Fifth level</a:t>
             </a:r>
-            <a:endParaRPr lang="en-US"/>
           </a:p>
         </p:txBody>
       </p:sp>
@@ -2743,7 +2740,7 @@
           <a:p>
             <a:fld id="{5BCAD085-E8A6-8845-BD4E-CB4CCA059FC4}" type="datetimeFigureOut">
               <a:rPr lang="en-US" smtClean="0"/>
-              <a:t>1/27/13</a:t>
+              <a:t>6/15/2026</a:t>
             </a:fld>
             <a:endParaRPr lang="en-US"/>
           </a:p>
@@ -2821,7 +2818,7 @@
           <a:p>
             <a:fld id="{C1FF6DA9-008F-8B48-92A6-B652298478BF}" type="slidenum">
               <a:rPr lang="en-US" smtClean="0"/>
-              <a:t>‹#›</a:t>
+              <a:t>‹nº›</a:t>
             </a:fld>
             <a:endParaRPr lang="en-US"/>
           </a:p>
@@ -3102,7 +3099,7 @@
 </file>
 
 <file path=ppt/slides/slide1.xml><?xml version="1.0" encoding="utf-8"?>
-<p:sld xmlns:a="http://schemas.openxmlformats.org/drawingml/2006/main" xmlns:p="http://schemas.openxmlformats.org/presentationml/2006/main" xmlns:r="http://schemas.openxmlformats.org/officeDocument/2006/relationships">
+<p:sld xmlns:a="http://schemas.openxmlformats.org/drawingml/2006/main" xmlns:r="http://schemas.openxmlformats.org/officeDocument/2006/relationships" xmlns:p="http://schemas.openxmlformats.org/presentationml/2006/main">
   <p:cSld>
     <p:spTree>
       <p:nvGrpSpPr>
@@ -3110,7 +3107,14 @@
         <p:cNvGrpSpPr/>
         <p:nvPr/>
       </p:nvGrpSpPr>
-      <p:grpSpPr/>
+      <p:grpSpPr>
+        <a:xfrm>
+          <a:off x="0" y="0"/>
+          <a:ext cx="0" cy="0"/>
+          <a:chOff x="0" y="0"/>
+          <a:chExt cx="0" cy="0"/>
+        </a:xfrm>
+      </p:grpSpPr>
       <p:sp>
         <p:nvSpPr>
           <p:cNvPr id="2" name="Rectangle 1"/>
@@ -3151,6 +3155,7 @@
           <a:lstStyle/>
           <a:p>
             <a:pPr algn="ctr"/>
+            <a:endParaRPr/>
           </a:p>
         </p:txBody>
       </p:sp>
@@ -3293,7 +3298,7 @@
 </file>
 
 <file path=ppt/slides/slide10.xml><?xml version="1.0" encoding="utf-8"?>
-<p:sld xmlns:a="http://schemas.openxmlformats.org/drawingml/2006/main" xmlns:p="http://schemas.openxmlformats.org/presentationml/2006/main" xmlns:r="http://schemas.openxmlformats.org/officeDocument/2006/relationships">
+<p:sld xmlns:a="http://schemas.openxmlformats.org/drawingml/2006/main" xmlns:r="http://schemas.openxmlformats.org/officeDocument/2006/relationships" xmlns:p="http://schemas.openxmlformats.org/presentationml/2006/main">
   <p:cSld>
     <p:spTree>
       <p:nvGrpSpPr>
@@ -3301,7 +3306,112 @@
         <p:cNvGrpSpPr/>
         <p:nvPr/>
       </p:nvGrpSpPr>
-      <p:grpSpPr/>
+      <p:grpSpPr>
+        <a:xfrm>
+          <a:off x="0" y="0"/>
+          <a:ext cx="0" cy="0"/>
+          <a:chOff x="0" y="0"/>
+          <a:chExt cx="0" cy="0"/>
+        </a:xfrm>
+      </p:grpSpPr>
+      <p:pic>
+        <p:nvPicPr>
+          <p:cNvPr id="2" name="Picture 2"/>
+          <p:cNvPicPr>
+            <a:picLocks noChangeAspect="1"/>
+          </p:cNvPicPr>
+          <p:nvPr/>
+        </p:nvPicPr>
+        <p:blipFill>
+          <a:blip r:embed="rId2"/>
+          <a:stretch>
+            <a:fillRect/>
+          </a:stretch>
+        </p:blipFill>
+        <p:spPr>
+          <a:xfrm>
+            <a:off x="-1" y="29461"/>
+            <a:ext cx="12188825" cy="6799079"/>
+          </a:xfrm>
+          <a:prstGeom prst="rect">
+            <a:avLst/>
+          </a:prstGeom>
+        </p:spPr>
+      </p:pic>
+    </p:spTree>
+  </p:cSld>
+  <p:clrMapOvr>
+    <a:masterClrMapping/>
+  </p:clrMapOvr>
+</p:sld>
+</file>
+
+<file path=ppt/slides/slide11.xml><?xml version="1.0" encoding="utf-8"?>
+<p:sld xmlns:a="http://schemas.openxmlformats.org/drawingml/2006/main" xmlns:r="http://schemas.openxmlformats.org/officeDocument/2006/relationships" xmlns:p="http://schemas.openxmlformats.org/presentationml/2006/main">
+  <p:cSld>
+    <p:spTree>
+      <p:nvGrpSpPr>
+        <p:cNvPr id="1" name=""/>
+        <p:cNvGrpSpPr/>
+        <p:nvPr/>
+      </p:nvGrpSpPr>
+      <p:grpSpPr>
+        <a:xfrm>
+          <a:off x="0" y="0"/>
+          <a:ext cx="0" cy="0"/>
+          <a:chOff x="0" y="0"/>
+          <a:chExt cx="0" cy="0"/>
+        </a:xfrm>
+      </p:grpSpPr>
+      <p:pic>
+        <p:nvPicPr>
+          <p:cNvPr id="2" name="Picture 2"/>
+          <p:cNvPicPr>
+            <a:picLocks noChangeAspect="1"/>
+          </p:cNvPicPr>
+          <p:nvPr/>
+        </p:nvPicPr>
+        <p:blipFill>
+          <a:blip r:embed="rId2"/>
+          <a:stretch>
+            <a:fillRect/>
+          </a:stretch>
+        </p:blipFill>
+        <p:spPr>
+          <a:xfrm>
+            <a:off x="-1" y="29461"/>
+            <a:ext cx="12188825" cy="6799079"/>
+          </a:xfrm>
+          <a:prstGeom prst="rect">
+            <a:avLst/>
+          </a:prstGeom>
+        </p:spPr>
+      </p:pic>
+    </p:spTree>
+  </p:cSld>
+  <p:clrMapOvr>
+    <a:masterClrMapping/>
+  </p:clrMapOvr>
+</p:sld>
+</file>
+
+<file path=ppt/slides/slide12.xml><?xml version="1.0" encoding="utf-8"?>
+<p:sld xmlns:a="http://schemas.openxmlformats.org/drawingml/2006/main" xmlns:r="http://schemas.openxmlformats.org/officeDocument/2006/relationships" xmlns:p="http://schemas.openxmlformats.org/presentationml/2006/main" show="0">
+  <p:cSld>
+    <p:spTree>
+      <p:nvGrpSpPr>
+        <p:cNvPr id="1" name=""/>
+        <p:cNvGrpSpPr/>
+        <p:nvPr/>
+      </p:nvGrpSpPr>
+      <p:grpSpPr>
+        <a:xfrm>
+          <a:off x="0" y="0"/>
+          <a:ext cx="0" cy="0"/>
+          <a:chOff x="0" y="0"/>
+          <a:chExt cx="0" cy="0"/>
+        </a:xfrm>
+      </p:grpSpPr>
       <p:sp>
         <p:nvSpPr>
           <p:cNvPr id="2" name="TextBox 1"/>
@@ -3377,6 +3487,7 @@
           <a:lstStyle/>
           <a:p>
             <a:pPr algn="ctr"/>
+            <a:endParaRPr/>
           </a:p>
         </p:txBody>
       </p:sp>
@@ -3530,14 +3641,6 @@
               </a:rPr>
               <a:t>  </a:t>
             </a:r>
-            <a:r>
-              <a:rPr sz="1600">
-                <a:solidFill>
-                  <a:srgbClr val="3D424E"/>
-                </a:solidFill>
-              </a:rPr>
-              <a:t/>
-            </a:r>
           </a:p>
           <a:p>
             <a:pPr>
@@ -3572,8 +3675,8 @@
 </p:sld>
 </file>
 
-<file path=ppt/slides/slide11.xml><?xml version="1.0" encoding="utf-8"?>
-<p:sld xmlns:a="http://schemas.openxmlformats.org/drawingml/2006/main" xmlns:p="http://schemas.openxmlformats.org/presentationml/2006/main" xmlns:r="http://schemas.openxmlformats.org/officeDocument/2006/relationships">
+<file path=ppt/slides/slide13.xml><?xml version="1.0" encoding="utf-8"?>
+<p:sld xmlns:a="http://schemas.openxmlformats.org/drawingml/2006/main" xmlns:r="http://schemas.openxmlformats.org/officeDocument/2006/relationships" xmlns:p="http://schemas.openxmlformats.org/presentationml/2006/main">
   <p:cSld>
     <p:spTree>
       <p:nvGrpSpPr>
@@ -3581,7 +3684,14 @@
         <p:cNvGrpSpPr/>
         <p:nvPr/>
       </p:nvGrpSpPr>
-      <p:grpSpPr/>
+      <p:grpSpPr>
+        <a:xfrm>
+          <a:off x="0" y="0"/>
+          <a:ext cx="0" cy="0"/>
+          <a:chOff x="0" y="0"/>
+          <a:chExt cx="0" cy="0"/>
+        </a:xfrm>
+      </p:grpSpPr>
       <p:sp>
         <p:nvSpPr>
           <p:cNvPr id="2" name="Rectangle 1"/>
@@ -3622,6 +3732,7 @@
           <a:lstStyle/>
           <a:p>
             <a:pPr algn="ctr"/>
+            <a:endParaRPr/>
           </a:p>
         </p:txBody>
       </p:sp>
@@ -3669,7 +3780,7 @@
         <p:spPr>
           <a:xfrm>
             <a:off x="3931920" y="2286000"/>
-            <a:ext cx="7772400" cy="1828800"/>
+            <a:ext cx="7772400" cy="954107"/>
           </a:xfrm>
           <a:prstGeom prst="rect">
             <a:avLst/>
@@ -3690,7 +3801,8 @@
               </a:defRPr>
             </a:pPr>
             <a:r>
-              <a:t>Resposta ao orientador</a:t>
+              <a:rPr lang="pt-BR" dirty="0"/>
+              <a:t>Resposta à sugestão do orientador</a:t>
             </a:r>
           </a:p>
           <a:p>
@@ -3702,7 +3814,40 @@
               </a:defRPr>
             </a:pPr>
             <a:r>
-              <a:t>CLIP = Contrastive Language-Image Pre-training (Radford et al., ICML 2021)</a:t>
+              <a:rPr lang="pt-BR" dirty="0"/>
+              <a:t>CLIP = </a:t>
+            </a:r>
+            <a:r>
+              <a:rPr lang="pt-BR" dirty="0" err="1"/>
+              <a:t>Contrastive</a:t>
+            </a:r>
+            <a:r>
+              <a:rPr lang="pt-BR" dirty="0"/>
+              <a:t> </a:t>
+            </a:r>
+            <a:r>
+              <a:rPr lang="pt-BR" dirty="0" err="1"/>
+              <a:t>Language-Image</a:t>
+            </a:r>
+            <a:r>
+              <a:rPr lang="pt-BR" dirty="0"/>
+              <a:t> </a:t>
+            </a:r>
+            <a:r>
+              <a:rPr lang="pt-BR" dirty="0" err="1"/>
+              <a:t>Pre</a:t>
+            </a:r>
+            <a:r>
+              <a:rPr lang="pt-BR" dirty="0"/>
+              <a:t>-training (</a:t>
+            </a:r>
+            <a:r>
+              <a:rPr lang="pt-BR" dirty="0" err="1"/>
+              <a:t>Radford</a:t>
+            </a:r>
+            <a:r>
+              <a:rPr lang="pt-BR" dirty="0"/>
+              <a:t> et al., ICML 2021)</a:t>
             </a:r>
           </a:p>
         </p:txBody>
@@ -3715,8 +3860,8 @@
 </p:sld>
 </file>
 
-<file path=ppt/slides/slide12.xml><?xml version="1.0" encoding="utf-8"?>
-<p:sld xmlns:a="http://schemas.openxmlformats.org/drawingml/2006/main" xmlns:p="http://schemas.openxmlformats.org/presentationml/2006/main" xmlns:r="http://schemas.openxmlformats.org/officeDocument/2006/relationships">
+<file path=ppt/slides/slide14.xml><?xml version="1.0" encoding="utf-8"?>
+<p:sld xmlns:a="http://schemas.openxmlformats.org/drawingml/2006/main" xmlns:r="http://schemas.openxmlformats.org/officeDocument/2006/relationships" xmlns:p="http://schemas.openxmlformats.org/presentationml/2006/main">
   <p:cSld>
     <p:spTree>
       <p:nvGrpSpPr>
@@ -3724,7 +3869,14 @@
         <p:cNvGrpSpPr/>
         <p:nvPr/>
       </p:nvGrpSpPr>
-      <p:grpSpPr/>
+      <p:grpSpPr>
+        <a:xfrm>
+          <a:off x="0" y="0"/>
+          <a:ext cx="0" cy="0"/>
+          <a:chOff x="0" y="0"/>
+          <a:chExt cx="0" cy="0"/>
+        </a:xfrm>
+      </p:grpSpPr>
       <p:sp>
         <p:nvSpPr>
           <p:cNvPr id="2" name="TextBox 1"/>
@@ -3800,6 +3952,7 @@
           <a:lstStyle/>
           <a:p>
             <a:pPr algn="ctr"/>
+            <a:endParaRPr/>
           </a:p>
         </p:txBody>
       </p:sp>
@@ -3953,14 +4106,6 @@
               </a:rPr>
               <a:t>  </a:t>
             </a:r>
-            <a:r>
-              <a:rPr sz="1600">
-                <a:solidFill>
-                  <a:srgbClr val="3D424E"/>
-                </a:solidFill>
-              </a:rPr>
-              <a:t/>
-            </a:r>
           </a:p>
           <a:p>
             <a:pPr>
@@ -4030,8 +4175,8 @@
 </p:sld>
 </file>
 
-<file path=ppt/slides/slide13.xml><?xml version="1.0" encoding="utf-8"?>
-<p:sld xmlns:a="http://schemas.openxmlformats.org/drawingml/2006/main" xmlns:p="http://schemas.openxmlformats.org/presentationml/2006/main" xmlns:r="http://schemas.openxmlformats.org/officeDocument/2006/relationships">
+<file path=ppt/slides/slide15.xml><?xml version="1.0" encoding="utf-8"?>
+<p:sld xmlns:a="http://schemas.openxmlformats.org/drawingml/2006/main" xmlns:r="http://schemas.openxmlformats.org/officeDocument/2006/relationships" xmlns:p="http://schemas.openxmlformats.org/presentationml/2006/main">
   <p:cSld>
     <p:spTree>
       <p:nvGrpSpPr>
@@ -4039,7 +4184,14 @@
         <p:cNvGrpSpPr/>
         <p:nvPr/>
       </p:nvGrpSpPr>
-      <p:grpSpPr/>
+      <p:grpSpPr>
+        <a:xfrm>
+          <a:off x="0" y="0"/>
+          <a:ext cx="0" cy="0"/>
+          <a:chOff x="0" y="0"/>
+          <a:chExt cx="0" cy="0"/>
+        </a:xfrm>
+      </p:grpSpPr>
       <p:sp>
         <p:nvSpPr>
           <p:cNvPr id="2" name="TextBox 1"/>
@@ -4115,6 +4267,7 @@
           <a:lstStyle/>
           <a:p>
             <a:pPr algn="ctr"/>
+            <a:endParaRPr/>
           </a:p>
         </p:txBody>
       </p:sp>
@@ -4137,10 +4290,34 @@
                 <a:tableStyleId>{5C22544A-7EE6-4342-B048-85BDC9FD1C3A}</a:tableStyleId>
               </a:tblPr>
               <a:tblGrid>
-                <a:gridCol w="3017520"/>
-                <a:gridCol w="1645920"/>
-                <a:gridCol w="2926080"/>
-                <a:gridCol w="3840480"/>
+                <a:gridCol w="3017520">
+                  <a:extLst>
+                    <a:ext uri="{9D8B030D-6E8A-4147-A177-3AD203B41FA5}">
+                      <a16:colId xmlns:a16="http://schemas.microsoft.com/office/drawing/2014/main" val="20000"/>
+                    </a:ext>
+                  </a:extLst>
+                </a:gridCol>
+                <a:gridCol w="1645920">
+                  <a:extLst>
+                    <a:ext uri="{9D8B030D-6E8A-4147-A177-3AD203B41FA5}">
+                      <a16:colId xmlns:a16="http://schemas.microsoft.com/office/drawing/2014/main" val="20001"/>
+                    </a:ext>
+                  </a:extLst>
+                </a:gridCol>
+                <a:gridCol w="2926080">
+                  <a:extLst>
+                    <a:ext uri="{9D8B030D-6E8A-4147-A177-3AD203B41FA5}">
+                      <a16:colId xmlns:a16="http://schemas.microsoft.com/office/drawing/2014/main" val="20002"/>
+                    </a:ext>
+                  </a:extLst>
+                </a:gridCol>
+                <a:gridCol w="3840480">
+                  <a:extLst>
+                    <a:ext uri="{9D8B030D-6E8A-4147-A177-3AD203B41FA5}">
+                      <a16:colId xmlns:a16="http://schemas.microsoft.com/office/drawing/2014/main" val="20003"/>
+                    </a:ext>
+                  </a:extLst>
+                </a:gridCol>
               </a:tblGrid>
               <a:tr h="475488">
                 <a:tc>
@@ -4227,6 +4404,11 @@
                     </a:solidFill>
                   </a:tcPr>
                 </a:tc>
+                <a:extLst>
+                  <a:ext uri="{0D108BD9-81ED-4DB2-BD59-A6C34878D82A}">
+                    <a16:rowId xmlns:a16="http://schemas.microsoft.com/office/drawing/2014/main" val="10000"/>
+                  </a:ext>
+                </a:extLst>
               </a:tr>
               <a:tr h="475488">
                 <a:tc>
@@ -4313,6 +4495,11 @@
                     </a:solidFill>
                   </a:tcPr>
                 </a:tc>
+                <a:extLst>
+                  <a:ext uri="{0D108BD9-81ED-4DB2-BD59-A6C34878D82A}">
+                    <a16:rowId xmlns:a16="http://schemas.microsoft.com/office/drawing/2014/main" val="10001"/>
+                  </a:ext>
+                </a:extLst>
               </a:tr>
               <a:tr h="475488">
                 <a:tc>
@@ -4399,6 +4586,11 @@
                     </a:solidFill>
                   </a:tcPr>
                 </a:tc>
+                <a:extLst>
+                  <a:ext uri="{0D108BD9-81ED-4DB2-BD59-A6C34878D82A}">
+                    <a16:rowId xmlns:a16="http://schemas.microsoft.com/office/drawing/2014/main" val="10002"/>
+                  </a:ext>
+                </a:extLst>
               </a:tr>
               <a:tr h="475488">
                 <a:tc>
@@ -4469,6 +4661,11 @@
                   </a:txBody>
                   <a:tcPr/>
                 </a:tc>
+                <a:extLst>
+                  <a:ext uri="{0D108BD9-81ED-4DB2-BD59-A6C34878D82A}">
+                    <a16:rowId xmlns:a16="http://schemas.microsoft.com/office/drawing/2014/main" val="10003"/>
+                  </a:ext>
+                </a:extLst>
               </a:tr>
               <a:tr h="475488">
                 <a:tc>
@@ -4539,6 +4736,11 @@
                   </a:txBody>
                   <a:tcPr/>
                 </a:tc>
+                <a:extLst>
+                  <a:ext uri="{0D108BD9-81ED-4DB2-BD59-A6C34878D82A}">
+                    <a16:rowId xmlns:a16="http://schemas.microsoft.com/office/drawing/2014/main" val="10004"/>
+                  </a:ext>
+                </a:extLst>
               </a:tr>
               <a:tr h="475488">
                 <a:tc>
@@ -4625,6 +4827,11 @@
                     </a:solidFill>
                   </a:tcPr>
                 </a:tc>
+                <a:extLst>
+                  <a:ext uri="{0D108BD9-81ED-4DB2-BD59-A6C34878D82A}">
+                    <a16:rowId xmlns:a16="http://schemas.microsoft.com/office/drawing/2014/main" val="10005"/>
+                  </a:ext>
+                </a:extLst>
               </a:tr>
               <a:tr h="475488">
                 <a:tc>
@@ -4695,6 +4902,11 @@
                   </a:txBody>
                   <a:tcPr/>
                 </a:tc>
+                <a:extLst>
+                  <a:ext uri="{0D108BD9-81ED-4DB2-BD59-A6C34878D82A}">
+                    <a16:rowId xmlns:a16="http://schemas.microsoft.com/office/drawing/2014/main" val="10006"/>
+                  </a:ext>
+                </a:extLst>
               </a:tr>
               <a:tr h="475488">
                 <a:tc>
@@ -4765,6 +4977,11 @@
                   </a:txBody>
                   <a:tcPr/>
                 </a:tc>
+                <a:extLst>
+                  <a:ext uri="{0D108BD9-81ED-4DB2-BD59-A6C34878D82A}">
+                    <a16:rowId xmlns:a16="http://schemas.microsoft.com/office/drawing/2014/main" val="10007"/>
+                  </a:ext>
+                </a:extLst>
               </a:tr>
               <a:tr h="475488">
                 <a:tc>
@@ -4835,6 +5052,11 @@
                   </a:txBody>
                   <a:tcPr/>
                 </a:tc>
+                <a:extLst>
+                  <a:ext uri="{0D108BD9-81ED-4DB2-BD59-A6C34878D82A}">
+                    <a16:rowId xmlns:a16="http://schemas.microsoft.com/office/drawing/2014/main" val="10008"/>
+                  </a:ext>
+                </a:extLst>
               </a:tr>
               <a:tr h="475488">
                 <a:tc>
@@ -4905,6 +5127,11 @@
                   </a:txBody>
                   <a:tcPr/>
                 </a:tc>
+                <a:extLst>
+                  <a:ext uri="{0D108BD9-81ED-4DB2-BD59-A6C34878D82A}">
+                    <a16:rowId xmlns:a16="http://schemas.microsoft.com/office/drawing/2014/main" val="10009"/>
+                  </a:ext>
+                </a:extLst>
               </a:tr>
             </a:tbl>
           </a:graphicData>
@@ -4953,8 +5180,8 @@
 </p:sld>
 </file>
 
-<file path=ppt/slides/slide14.xml><?xml version="1.0" encoding="utf-8"?>
-<p:sld xmlns:a="http://schemas.openxmlformats.org/drawingml/2006/main" xmlns:p="http://schemas.openxmlformats.org/presentationml/2006/main" xmlns:r="http://schemas.openxmlformats.org/officeDocument/2006/relationships">
+<file path=ppt/slides/slide16.xml><?xml version="1.0" encoding="utf-8"?>
+<p:sld xmlns:a="http://schemas.openxmlformats.org/drawingml/2006/main" xmlns:r="http://schemas.openxmlformats.org/officeDocument/2006/relationships" xmlns:p="http://schemas.openxmlformats.org/presentationml/2006/main">
   <p:cSld>
     <p:spTree>
       <p:nvGrpSpPr>
@@ -4962,7 +5189,14 @@
         <p:cNvGrpSpPr/>
         <p:nvPr/>
       </p:nvGrpSpPr>
-      <p:grpSpPr/>
+      <p:grpSpPr>
+        <a:xfrm>
+          <a:off x="0" y="0"/>
+          <a:ext cx="0" cy="0"/>
+          <a:chOff x="0" y="0"/>
+          <a:chExt cx="0" cy="0"/>
+        </a:xfrm>
+      </p:grpSpPr>
       <p:sp>
         <p:nvSpPr>
           <p:cNvPr id="2" name="Rectangle 1"/>
@@ -5003,6 +5237,7 @@
           <a:lstStyle/>
           <a:p>
             <a:pPr algn="ctr"/>
+            <a:endParaRPr/>
           </a:p>
         </p:txBody>
       </p:sp>
@@ -5096,8 +5331,8 @@
 </p:sld>
 </file>
 
-<file path=ppt/slides/slide15.xml><?xml version="1.0" encoding="utf-8"?>
-<p:sld xmlns:a="http://schemas.openxmlformats.org/drawingml/2006/main" xmlns:p="http://schemas.openxmlformats.org/presentationml/2006/main" xmlns:r="http://schemas.openxmlformats.org/officeDocument/2006/relationships">
+<file path=ppt/slides/slide17.xml><?xml version="1.0" encoding="utf-8"?>
+<p:sld xmlns:a="http://schemas.openxmlformats.org/drawingml/2006/main" xmlns:r="http://schemas.openxmlformats.org/officeDocument/2006/relationships" xmlns:p="http://schemas.openxmlformats.org/presentationml/2006/main">
   <p:cSld>
     <p:spTree>
       <p:nvGrpSpPr>
@@ -5105,7 +5340,14 @@
         <p:cNvGrpSpPr/>
         <p:nvPr/>
       </p:nvGrpSpPr>
-      <p:grpSpPr/>
+      <p:grpSpPr>
+        <a:xfrm>
+          <a:off x="0" y="0"/>
+          <a:ext cx="0" cy="0"/>
+          <a:chOff x="0" y="0"/>
+          <a:chExt cx="0" cy="0"/>
+        </a:xfrm>
+      </p:grpSpPr>
       <p:sp>
         <p:nvSpPr>
           <p:cNvPr id="2" name="TextBox 1"/>
@@ -5181,6 +5423,7 @@
           <a:lstStyle/>
           <a:p>
             <a:pPr algn="ctr"/>
+            <a:endParaRPr/>
           </a:p>
         </p:txBody>
       </p:sp>
@@ -5288,14 +5531,6 @@
               </a:rPr>
               <a:t>Mecanismos análogos no corpus:  </a:t>
             </a:r>
-            <a:r>
-              <a:rPr sz="1600">
-                <a:solidFill>
-                  <a:srgbClr val="3D424E"/>
-                </a:solidFill>
-              </a:rPr>
-              <a:t/>
-            </a:r>
           </a:p>
           <a:p>
             <a:pPr>
@@ -5379,14 +5614,6 @@
                 </a:solidFill>
               </a:rPr>
               <a:t>  </a:t>
-            </a:r>
-            <a:r>
-              <a:rPr sz="1600">
-                <a:solidFill>
-                  <a:srgbClr val="3D424E"/>
-                </a:solidFill>
-              </a:rPr>
-              <a:t/>
             </a:r>
           </a:p>
           <a:p>
@@ -5457,8 +5684,8 @@
 </p:sld>
 </file>
 
-<file path=ppt/slides/slide16.xml><?xml version="1.0" encoding="utf-8"?>
-<p:sld xmlns:a="http://schemas.openxmlformats.org/drawingml/2006/main" xmlns:p="http://schemas.openxmlformats.org/presentationml/2006/main" xmlns:r="http://schemas.openxmlformats.org/officeDocument/2006/relationships">
+<file path=ppt/slides/slide18.xml><?xml version="1.0" encoding="utf-8"?>
+<p:sld xmlns:a="http://schemas.openxmlformats.org/drawingml/2006/main" xmlns:r="http://schemas.openxmlformats.org/officeDocument/2006/relationships" xmlns:p="http://schemas.openxmlformats.org/presentationml/2006/main">
   <p:cSld>
     <p:spTree>
       <p:nvGrpSpPr>
@@ -5466,7 +5693,14 @@
         <p:cNvGrpSpPr/>
         <p:nvPr/>
       </p:nvGrpSpPr>
-      <p:grpSpPr/>
+      <p:grpSpPr>
+        <a:xfrm>
+          <a:off x="0" y="0"/>
+          <a:ext cx="0" cy="0"/>
+          <a:chOff x="0" y="0"/>
+          <a:chExt cx="0" cy="0"/>
+        </a:xfrm>
+      </p:grpSpPr>
       <p:sp>
         <p:nvSpPr>
           <p:cNvPr id="2" name="TextBox 1"/>
@@ -5542,6 +5776,7 @@
           <a:lstStyle/>
           <a:p>
             <a:pPr algn="ctr"/>
+            <a:endParaRPr/>
           </a:p>
         </p:txBody>
       </p:sp>
@@ -5718,14 +5953,6 @@
               </a:rPr>
               <a:t>  </a:t>
             </a:r>
-            <a:r>
-              <a:rPr sz="1600">
-                <a:solidFill>
-                  <a:srgbClr val="3D424E"/>
-                </a:solidFill>
-              </a:rPr>
-              <a:t/>
-            </a:r>
           </a:p>
           <a:p>
             <a:pPr>
@@ -5760,8 +5987,8 @@
 </p:sld>
 </file>
 
-<file path=ppt/slides/slide17.xml><?xml version="1.0" encoding="utf-8"?>
-<p:sld xmlns:a="http://schemas.openxmlformats.org/drawingml/2006/main" xmlns:p="http://schemas.openxmlformats.org/presentationml/2006/main" xmlns:r="http://schemas.openxmlformats.org/officeDocument/2006/relationships">
+<file path=ppt/slides/slide19.xml><?xml version="1.0" encoding="utf-8"?>
+<p:sld xmlns:a="http://schemas.openxmlformats.org/drawingml/2006/main" xmlns:r="http://schemas.openxmlformats.org/officeDocument/2006/relationships" xmlns:p="http://schemas.openxmlformats.org/presentationml/2006/main">
   <p:cSld>
     <p:spTree>
       <p:nvGrpSpPr>
@@ -5769,7 +5996,14 @@
         <p:cNvGrpSpPr/>
         <p:nvPr/>
       </p:nvGrpSpPr>
-      <p:grpSpPr/>
+      <p:grpSpPr>
+        <a:xfrm>
+          <a:off x="0" y="0"/>
+          <a:ext cx="0" cy="0"/>
+          <a:chOff x="0" y="0"/>
+          <a:chExt cx="0" cy="0"/>
+        </a:xfrm>
+      </p:grpSpPr>
       <p:sp>
         <p:nvSpPr>
           <p:cNvPr id="2" name="Rectangle 1"/>
@@ -5810,6 +6044,7 @@
           <a:lstStyle/>
           <a:p>
             <a:pPr algn="ctr"/>
+            <a:endParaRPr/>
           </a:p>
         </p:txBody>
       </p:sp>
@@ -5903,8 +6138,8 @@
 </p:sld>
 </file>
 
-<file path=ppt/slides/slide18.xml><?xml version="1.0" encoding="utf-8"?>
-<p:sld xmlns:a="http://schemas.openxmlformats.org/drawingml/2006/main" xmlns:p="http://schemas.openxmlformats.org/presentationml/2006/main" xmlns:r="http://schemas.openxmlformats.org/officeDocument/2006/relationships">
+<file path=ppt/slides/slide2.xml><?xml version="1.0" encoding="utf-8"?>
+<p:sld xmlns:a="http://schemas.openxmlformats.org/drawingml/2006/main" xmlns:r="http://schemas.openxmlformats.org/officeDocument/2006/relationships" xmlns:p="http://schemas.openxmlformats.org/presentationml/2006/main">
   <p:cSld>
     <p:spTree>
       <p:nvGrpSpPr>
@@ -5912,7 +6147,14 @@
         <p:cNvGrpSpPr/>
         <p:nvPr/>
       </p:nvGrpSpPr>
-      <p:grpSpPr/>
+      <p:grpSpPr>
+        <a:xfrm>
+          <a:off x="0" y="0"/>
+          <a:ext cx="0" cy="0"/>
+          <a:chOff x="0" y="0"/>
+          <a:chExt cx="0" cy="0"/>
+        </a:xfrm>
+      </p:grpSpPr>
       <p:sp>
         <p:nvSpPr>
           <p:cNvPr id="2" name="TextBox 1"/>
@@ -5943,7 +6185,7 @@
               </a:defRPr>
             </a:pPr>
             <a:r>
-              <a:t>5 configurações de conditioning comparadas</a:t>
+              <a:t>Agenda da reunião</a:t>
             </a:r>
           </a:p>
         </p:txBody>
@@ -5988,499 +6230,20 @@
           <a:lstStyle/>
           <a:p>
             <a:pPr algn="ctr"/>
+            <a:endParaRPr/>
           </a:p>
         </p:txBody>
       </p:sp>
-      <p:graphicFrame>
-        <p:nvGraphicFramePr>
-          <p:cNvPr id="4" name="Table 3"/>
-          <p:cNvGraphicFramePr>
-            <a:graphicFrameLocks noGrp="1"/>
-          </p:cNvGraphicFramePr>
-          <p:nvPr/>
-        </p:nvGraphicFramePr>
-        <p:xfrm>
-          <a:off x="457200" y="1371600"/>
-          <a:ext cx="11887200" cy="4754880"/>
-        </p:xfrm>
-        <a:graphic>
-          <a:graphicData uri="http://schemas.openxmlformats.org/drawingml/2006/table">
-            <a:tbl>
-              <a:tblPr firstRow="1" bandRow="1">
-                <a:tableStyleId>{5C22544A-7EE6-4342-B048-85BDC9FD1C3A}</a:tableStyleId>
-              </a:tblPr>
-              <a:tblGrid>
-                <a:gridCol w="914400"/>
-                <a:gridCol w="2743200"/>
-                <a:gridCol w="4114800"/>
-                <a:gridCol w="4114800"/>
-              </a:tblGrid>
-              <a:tr h="792480">
-                <a:tc>
-                  <a:txBody>
-                    <a:bodyPr/>
-                    <a:lstStyle/>
-                    <a:p>
-                      <a:r>
-                        <a:rPr sz="1300" b="1">
-                          <a:solidFill>
-                            <a:srgbClr val="FFFFFF"/>
-                          </a:solidFill>
-                        </a:rPr>
-                        <a:t>Config</a:t>
-                      </a:r>
-                    </a:p>
-                  </a:txBody>
-                  <a:tcPr>
-                    <a:solidFill>
-                      <a:srgbClr val="1F2A4E"/>
-                    </a:solidFill>
-                  </a:tcPr>
-                </a:tc>
-                <a:tc>
-                  <a:txBody>
-                    <a:bodyPr/>
-                    <a:lstStyle/>
-                    <a:p>
-                      <a:r>
-                        <a:rPr sz="1300" b="1">
-                          <a:solidFill>
-                            <a:srgbClr val="FFFFFF"/>
-                          </a:solidFill>
-                        </a:rPr>
-                        <a:t>Arquitetura</a:t>
-                      </a:r>
-                    </a:p>
-                  </a:txBody>
-                  <a:tcPr>
-                    <a:solidFill>
-                      <a:srgbClr val="1F2A4E"/>
-                    </a:solidFill>
-                  </a:tcPr>
-                </a:tc>
-                <a:tc>
-                  <a:txBody>
-                    <a:bodyPr/>
-                    <a:lstStyle/>
-                    <a:p>
-                      <a:r>
-                        <a:rPr sz="1300" b="1">
-                          <a:solidFill>
-                            <a:srgbClr val="FFFFFF"/>
-                          </a:solidFill>
-                        </a:rPr>
-                        <a:t>Mecanismo de conditioning</a:t>
-                      </a:r>
-                    </a:p>
-                  </a:txBody>
-                  <a:tcPr>
-                    <a:solidFill>
-                      <a:srgbClr val="1F2A4E"/>
-                    </a:solidFill>
-                  </a:tcPr>
-                </a:tc>
-                <a:tc>
-                  <a:txBody>
-                    <a:bodyPr/>
-                    <a:lstStyle/>
-                    <a:p>
-                      <a:r>
-                        <a:rPr sz="1300" b="1">
-                          <a:solidFill>
-                            <a:srgbClr val="FFFFFF"/>
-                          </a:solidFill>
-                        </a:rPr>
-                        <a:t>Origem</a:t>
-                      </a:r>
-                    </a:p>
-                  </a:txBody>
-                  <a:tcPr>
-                    <a:solidFill>
-                      <a:srgbClr val="1F2A4E"/>
-                    </a:solidFill>
-                  </a:tcPr>
-                </a:tc>
-              </a:tr>
-              <a:tr h="792480">
-                <a:tc>
-                  <a:txBody>
-                    <a:bodyPr/>
-                    <a:lstStyle/>
-                    <a:p>
-                      <a:r>
-                        <a:rPr sz="1100">
-                          <a:solidFill>
-                            <a:srgbClr val="3D424E"/>
-                          </a:solidFill>
-                        </a:rPr>
-                        <a:t>A</a:t>
-                      </a:r>
-                    </a:p>
-                  </a:txBody>
-                  <a:tcPr/>
-                </a:tc>
-                <a:tc>
-                  <a:txBody>
-                    <a:bodyPr/>
-                    <a:lstStyle/>
-                    <a:p>
-                      <a:r>
-                        <a:rPr sz="1100">
-                          <a:solidFill>
-                            <a:srgbClr val="3D424E"/>
-                          </a:solidFill>
-                        </a:rPr>
-                        <a:t>ConvNeXt-T baseline</a:t>
-                      </a:r>
-                    </a:p>
-                  </a:txBody>
-                  <a:tcPr/>
-                </a:tc>
-                <a:tc>
-                  <a:txBody>
-                    <a:bodyPr/>
-                    <a:lstStyle/>
-                    <a:p>
-                      <a:r>
-                        <a:rPr sz="1100">
-                          <a:solidFill>
-                            <a:srgbClr val="3D424E"/>
-                          </a:solidFill>
-                        </a:rPr>
-                        <a:t>Sem conditioning</a:t>
-                      </a:r>
-                    </a:p>
-                  </a:txBody>
-                  <a:tcPr/>
-                </a:tc>
-                <a:tc>
-                  <a:txBody>
-                    <a:bodyPr/>
-                    <a:lstStyle/>
-                    <a:p>
-                      <a:r>
-                        <a:rPr sz="1100">
-                          <a:solidFill>
-                            <a:srgbClr val="3D424E"/>
-                          </a:solidFill>
-                        </a:rPr>
-                        <a:t>Controle</a:t>
-                      </a:r>
-                    </a:p>
-                  </a:txBody>
-                  <a:tcPr/>
-                </a:tc>
-              </a:tr>
-              <a:tr h="792480">
-                <a:tc>
-                  <a:txBody>
-                    <a:bodyPr/>
-                    <a:lstStyle/>
-                    <a:p>
-                      <a:r>
-                        <a:rPr sz="1100">
-                          <a:solidFill>
-                            <a:srgbClr val="3D424E"/>
-                          </a:solidFill>
-                        </a:rPr>
-                        <a:t>B (proposta)</a:t>
-                      </a:r>
-                    </a:p>
-                  </a:txBody>
-                  <a:tcPr>
-                    <a:solidFill>
-                      <a:srgbClr val="E8EAED"/>
-                    </a:solidFill>
-                  </a:tcPr>
-                </a:tc>
-                <a:tc>
-                  <a:txBody>
-                    <a:bodyPr/>
-                    <a:lstStyle/>
-                    <a:p>
-                      <a:r>
-                        <a:rPr sz="1100">
-                          <a:solidFill>
-                            <a:srgbClr val="3D424E"/>
-                          </a:solidFill>
-                        </a:rPr>
-                        <a:t>ConvNeXt-T + FiLM</a:t>
-                      </a:r>
-                    </a:p>
-                  </a:txBody>
-                  <a:tcPr>
-                    <a:solidFill>
-                      <a:srgbClr val="E8EAED"/>
-                    </a:solidFill>
-                  </a:tcPr>
-                </a:tc>
-                <a:tc>
-                  <a:txBody>
-                    <a:bodyPr/>
-                    <a:lstStyle/>
-                    <a:p>
-                      <a:r>
-                        <a:rPr sz="1100">
-                          <a:solidFill>
-                            <a:srgbClr val="3D424E"/>
-                          </a:solidFill>
-                        </a:rPr>
-                        <a:t>MST 10-dim → γ, β</a:t>
-                      </a:r>
-                    </a:p>
-                  </a:txBody>
-                  <a:tcPr>
-                    <a:solidFill>
-                      <a:srgbClr val="E8EAED"/>
-                    </a:solidFill>
-                  </a:tcPr>
-                </a:tc>
-                <a:tc>
-                  <a:txBody>
-                    <a:bodyPr/>
-                    <a:lstStyle/>
-                    <a:p>
-                      <a:r>
-                        <a:rPr sz="1100">
-                          <a:solidFill>
-                            <a:srgbClr val="3D424E"/>
-                          </a:solidFill>
-                        </a:rPr>
-                        <a:t>Nossa contribuição central</a:t>
-                      </a:r>
-                    </a:p>
-                  </a:txBody>
-                  <a:tcPr>
-                    <a:solidFill>
-                      <a:srgbClr val="E8EAED"/>
-                    </a:solidFill>
-                  </a:tcPr>
-                </a:tc>
-              </a:tr>
-              <a:tr h="792480">
-                <a:tc>
-                  <a:txBody>
-                    <a:bodyPr/>
-                    <a:lstStyle/>
-                    <a:p>
-                      <a:r>
-                        <a:rPr sz="1100">
-                          <a:solidFill>
-                            <a:srgbClr val="3D424E"/>
-                          </a:solidFill>
-                        </a:rPr>
-                        <a:t>C</a:t>
-                      </a:r>
-                    </a:p>
-                  </a:txBody>
-                  <a:tcPr/>
-                </a:tc>
-                <a:tc>
-                  <a:txBody>
-                    <a:bodyPr/>
-                    <a:lstStyle/>
-                    <a:p>
-                      <a:r>
-                        <a:rPr sz="1100">
-                          <a:solidFill>
-                            <a:srgbClr val="3D424E"/>
-                          </a:solidFill>
-                        </a:rPr>
-                        <a:t>ConvNeXt-T + FiLM</a:t>
-                      </a:r>
-                    </a:p>
-                  </a:txBody>
-                  <a:tcPr/>
-                </a:tc>
-                <a:tc>
-                  <a:txBody>
-                    <a:bodyPr/>
-                    <a:lstStyle/>
-                    <a:p>
-                      <a:r>
-                        <a:rPr sz="1100">
-                          <a:solidFill>
-                            <a:srgbClr val="3D424E"/>
-                          </a:solidFill>
-                        </a:rPr>
-                        <a:t>Embedding CLIP-text → γ, β</a:t>
-                      </a:r>
-                    </a:p>
-                  </a:txBody>
-                  <a:tcPr/>
-                </a:tc>
-                <a:tc>
-                  <a:txBody>
-                    <a:bodyPr/>
-                    <a:lstStyle/>
-                    <a:p>
-                      <a:r>
-                        <a:rPr sz="1100">
-                          <a:solidFill>
-                            <a:srgbClr val="3D424E"/>
-                          </a:solidFill>
-                        </a:rPr>
-                        <a:t>Híbrido CLIP + FiLM</a:t>
-                      </a:r>
-                    </a:p>
-                  </a:txBody>
-                  <a:tcPr/>
-                </a:tc>
-              </a:tr>
-              <a:tr h="792480">
-                <a:tc>
-                  <a:txBody>
-                    <a:bodyPr/>
-                    <a:lstStyle/>
-                    <a:p>
-                      <a:r>
-                        <a:rPr sz="1100">
-                          <a:solidFill>
-                            <a:srgbClr val="3D424E"/>
-                          </a:solidFill>
-                        </a:rPr>
-                        <a:t>D</a:t>
-                      </a:r>
-                    </a:p>
-                  </a:txBody>
-                  <a:tcPr/>
-                </a:tc>
-                <a:tc>
-                  <a:txBody>
-                    <a:bodyPr/>
-                    <a:lstStyle/>
-                    <a:p>
-                      <a:r>
-                        <a:rPr sz="1100">
-                          <a:solidFill>
-                            <a:srgbClr val="3D424E"/>
-                          </a:solidFill>
-                        </a:rPr>
-                        <a:t>ConvNeXt-T + cross-attention</a:t>
-                      </a:r>
-                    </a:p>
-                  </a:txBody>
-                  <a:tcPr/>
-                </a:tc>
-                <a:tc>
-                  <a:txBody>
-                    <a:bodyPr/>
-                    <a:lstStyle/>
-                    <a:p>
-                      <a:r>
-                        <a:rPr sz="1100">
-                          <a:solidFill>
-                            <a:srgbClr val="3D424E"/>
-                          </a:solidFill>
-                        </a:rPr>
-                        <a:t>Embedding CLIP-text via attention</a:t>
-                      </a:r>
-                    </a:p>
-                  </a:txBody>
-                  <a:tcPr/>
-                </a:tc>
-                <a:tc>
-                  <a:txBody>
-                    <a:bodyPr/>
-                    <a:lstStyle/>
-                    <a:p>
-                      <a:r>
-                        <a:rPr sz="1100">
-                          <a:solidFill>
-                            <a:srgbClr val="3D424E"/>
-                          </a:solidFill>
-                        </a:rPr>
-                        <a:t>Estilo FairCLIP</a:t>
-                      </a:r>
-                    </a:p>
-                  </a:txBody>
-                  <a:tcPr/>
-                </a:tc>
-              </a:tr>
-              <a:tr h="792480">
-                <a:tc>
-                  <a:txBody>
-                    <a:bodyPr/>
-                    <a:lstStyle/>
-                    <a:p>
-                      <a:r>
-                        <a:rPr sz="1100">
-                          <a:solidFill>
-                            <a:srgbClr val="3D424E"/>
-                          </a:solidFill>
-                        </a:rPr>
-                        <a:t>E</a:t>
-                      </a:r>
-                    </a:p>
-                  </a:txBody>
-                  <a:tcPr/>
-                </a:tc>
-                <a:tc>
-                  <a:txBody>
-                    <a:bodyPr/>
-                    <a:lstStyle/>
-                    <a:p>
-                      <a:r>
-                        <a:rPr sz="1100">
-                          <a:solidFill>
-                            <a:srgbClr val="3D424E"/>
-                          </a:solidFill>
-                        </a:rPr>
-                        <a:t>ConvNeXt-T + LoRA-FAIR</a:t>
-                      </a:r>
-                    </a:p>
-                  </a:txBody>
-                  <a:tcPr/>
-                </a:tc>
-                <a:tc>
-                  <a:txBody>
-                    <a:bodyPr/>
-                    <a:lstStyle/>
-                    <a:p>
-                      <a:r>
-                        <a:rPr sz="1100">
-                          <a:solidFill>
-                            <a:srgbClr val="3D424E"/>
-                          </a:solidFill>
-                        </a:rPr>
-                        <a:t>Low-rank weight modulation</a:t>
-                      </a:r>
-                    </a:p>
-                  </a:txBody>
-                  <a:tcPr/>
-                </a:tc>
-                <a:tc>
-                  <a:txBody>
-                    <a:bodyPr/>
-                    <a:lstStyle/>
-                    <a:p>
-                      <a:r>
-                        <a:rPr sz="1100">
-                          <a:solidFill>
-                            <a:srgbClr val="3D424E"/>
-                          </a:solidFill>
-                        </a:rPr>
-                        <a:t>LoRA-FAIR (Bian, 2025)</a:t>
-                      </a:r>
-                    </a:p>
-                  </a:txBody>
-                  <a:tcPr/>
-                </a:tc>
-              </a:tr>
-            </a:tbl>
-          </a:graphicData>
-        </a:graphic>
-      </p:graphicFrame>
       <p:sp>
         <p:nvSpPr>
-          <p:cNvPr id="5" name="TextBox 4"/>
+          <p:cNvPr id="4" name="TextBox 3"/>
           <p:cNvSpPr txBox="1"/>
           <p:nvPr/>
         </p:nvSpPr>
         <p:spPr>
           <a:xfrm>
-            <a:off x="457200" y="6446520"/>
-            <a:ext cx="11430000" cy="365760"/>
+            <a:off x="457200" y="1371600"/>
+            <a:ext cx="11430000" cy="4937760"/>
           </a:xfrm>
           <a:prstGeom prst="rect">
             <a:avLst/>
@@ -6488,21 +6251,588 @@
           <a:noFill/>
         </p:spPr>
         <p:txBody>
-          <a:bodyPr wrap="none">
+          <a:bodyPr wrap="square">
             <a:spAutoFit/>
           </a:bodyPr>
           <a:lstStyle/>
           <a:p>
             <a:pPr>
-              <a:defRPr sz="1000" i="1">
-                <a:solidFill>
-                  <a:srgbClr val="707682"/>
-                </a:solidFill>
-              </a:defRPr>
+              <a:spcAft>
+                <a:spcPts val="800"/>
+              </a:spcAft>
             </a:pPr>
             <a:r>
-              <a:t>Se CLIP superar FiLM, reportamos como informação útil — não como invalidação. Honra a recomendação do orientador.</a:t>
-            </a:r>
+              <a:rPr sz="1600" b="1" dirty="0">
+                <a:solidFill>
+                  <a:srgbClr val="1F2A4E"/>
+                </a:solidFill>
+              </a:rPr>
+              <a:t>1.  </a:t>
+            </a:r>
+            <a:r>
+              <a:rPr sz="1600" dirty="0">
+                <a:solidFill>
+                  <a:srgbClr val="3D424E"/>
+                </a:solidFill>
+              </a:rPr>
+              <a:t>Status das </a:t>
+            </a:r>
+            <a:r>
+              <a:rPr sz="1600" dirty="0" err="1">
+                <a:solidFill>
+                  <a:srgbClr val="3D424E"/>
+                </a:solidFill>
+              </a:rPr>
+              <a:t>decisões</a:t>
+            </a:r>
+            <a:r>
+              <a:rPr sz="1600" dirty="0">
+                <a:solidFill>
+                  <a:srgbClr val="3D424E"/>
+                </a:solidFill>
+              </a:rPr>
+              <a:t> da </a:t>
+            </a:r>
+            <a:r>
+              <a:rPr sz="1600" dirty="0" err="1">
+                <a:solidFill>
+                  <a:srgbClr val="3D424E"/>
+                </a:solidFill>
+              </a:rPr>
+              <a:t>reunião</a:t>
+            </a:r>
+            <a:r>
+              <a:rPr sz="1600" dirty="0">
+                <a:solidFill>
+                  <a:srgbClr val="3D424E"/>
+                </a:solidFill>
+              </a:rPr>
+              <a:t> anterior (08/</a:t>
+            </a:r>
+            <a:r>
+              <a:rPr sz="1600" dirty="0" err="1">
+                <a:solidFill>
+                  <a:srgbClr val="3D424E"/>
+                </a:solidFill>
+              </a:rPr>
+              <a:t>jun</a:t>
+            </a:r>
+            <a:r>
+              <a:rPr sz="1600" dirty="0">
+                <a:solidFill>
+                  <a:srgbClr val="3D424E"/>
+                </a:solidFill>
+              </a:rPr>
+              <a:t>)</a:t>
+            </a:r>
+          </a:p>
+          <a:p>
+            <a:pPr>
+              <a:spcAft>
+                <a:spcPts val="800"/>
+              </a:spcAft>
+            </a:pPr>
+            <a:r>
+              <a:rPr sz="1600" b="1" dirty="0">
+                <a:solidFill>
+                  <a:srgbClr val="1F2A4E"/>
+                </a:solidFill>
+              </a:rPr>
+              <a:t>2.  </a:t>
+            </a:r>
+            <a:r>
+              <a:rPr sz="1600" dirty="0">
+                <a:solidFill>
+                  <a:srgbClr val="3D424E"/>
+                </a:solidFill>
+              </a:rPr>
+              <a:t>Corpus </a:t>
+            </a:r>
+            <a:r>
+              <a:rPr sz="1600" dirty="0" err="1">
+                <a:solidFill>
+                  <a:srgbClr val="3D424E"/>
+                </a:solidFill>
+              </a:rPr>
+              <a:t>consolidado</a:t>
+            </a:r>
+            <a:r>
+              <a:rPr sz="1600" dirty="0">
+                <a:solidFill>
+                  <a:srgbClr val="3D424E"/>
+                </a:solidFill>
+              </a:rPr>
+              <a:t>: 101 </a:t>
+            </a:r>
+            <a:r>
+              <a:rPr sz="1600" dirty="0" err="1">
+                <a:solidFill>
+                  <a:srgbClr val="3D424E"/>
+                </a:solidFill>
+              </a:rPr>
+              <a:t>fichas</a:t>
+            </a:r>
+            <a:r>
+              <a:rPr sz="1600" dirty="0">
+                <a:solidFill>
+                  <a:srgbClr val="3D424E"/>
+                </a:solidFill>
+              </a:rPr>
+              <a:t> </a:t>
+            </a:r>
+            <a:r>
+              <a:rPr sz="1600" dirty="0" err="1">
+                <a:solidFill>
+                  <a:srgbClr val="3D424E"/>
+                </a:solidFill>
+              </a:rPr>
+              <a:t>em</a:t>
+            </a:r>
+            <a:r>
+              <a:rPr sz="1600" dirty="0">
+                <a:solidFill>
+                  <a:srgbClr val="3D424E"/>
+                </a:solidFill>
+              </a:rPr>
+              <a:t> 11 tracks </a:t>
+            </a:r>
+            <a:r>
+              <a:rPr sz="1600" dirty="0" err="1">
+                <a:solidFill>
+                  <a:srgbClr val="3D424E"/>
+                </a:solidFill>
+              </a:rPr>
+              <a:t>temáticos</a:t>
+            </a:r>
+            <a:endParaRPr sz="1600" dirty="0">
+              <a:solidFill>
+                <a:srgbClr val="3D424E"/>
+              </a:solidFill>
+            </a:endParaRPr>
+          </a:p>
+          <a:p>
+            <a:pPr>
+              <a:spcAft>
+                <a:spcPts val="800"/>
+              </a:spcAft>
+            </a:pPr>
+            <a:r>
+              <a:rPr sz="1600" b="1" dirty="0">
+                <a:solidFill>
+                  <a:srgbClr val="1F2A4E"/>
+                </a:solidFill>
+              </a:rPr>
+              <a:t>3.  </a:t>
+            </a:r>
+            <a:r>
+              <a:rPr sz="1600" dirty="0">
+                <a:solidFill>
+                  <a:srgbClr val="3D424E"/>
+                </a:solidFill>
+              </a:rPr>
+              <a:t>Pente </a:t>
+            </a:r>
+            <a:r>
+              <a:rPr sz="1600" dirty="0" err="1">
+                <a:solidFill>
+                  <a:srgbClr val="3D424E"/>
+                </a:solidFill>
+              </a:rPr>
+              <a:t>fino</a:t>
+            </a:r>
+            <a:r>
+              <a:rPr sz="1600" dirty="0">
+                <a:solidFill>
+                  <a:srgbClr val="3D424E"/>
+                </a:solidFill>
+              </a:rPr>
+              <a:t> </a:t>
+            </a:r>
+            <a:r>
+              <a:rPr sz="1600" dirty="0" err="1">
+                <a:solidFill>
+                  <a:srgbClr val="3D424E"/>
+                </a:solidFill>
+              </a:rPr>
+              <a:t>crítico</a:t>
+            </a:r>
+            <a:r>
+              <a:rPr sz="1600" dirty="0">
+                <a:solidFill>
+                  <a:srgbClr val="3D424E"/>
+                </a:solidFill>
+              </a:rPr>
+              <a:t> do corpus (</a:t>
+            </a:r>
+            <a:r>
+              <a:rPr sz="1600" dirty="0" err="1">
+                <a:solidFill>
+                  <a:srgbClr val="3D424E"/>
+                </a:solidFill>
+              </a:rPr>
+              <a:t>classificação</a:t>
+            </a:r>
+            <a:r>
+              <a:rPr sz="1600" dirty="0">
+                <a:solidFill>
+                  <a:srgbClr val="3D424E"/>
+                </a:solidFill>
+              </a:rPr>
+              <a:t> </a:t>
+            </a:r>
+            <a:r>
+              <a:rPr sz="1600" dirty="0" err="1">
+                <a:solidFill>
+                  <a:srgbClr val="3D424E"/>
+                </a:solidFill>
+              </a:rPr>
+              <a:t>por</a:t>
+            </a:r>
+            <a:r>
+              <a:rPr sz="1600" dirty="0">
+                <a:solidFill>
+                  <a:srgbClr val="3D424E"/>
+                </a:solidFill>
+              </a:rPr>
+              <a:t> </a:t>
+            </a:r>
+            <a:r>
+              <a:rPr sz="1600" dirty="0" err="1">
+                <a:solidFill>
+                  <a:srgbClr val="3D424E"/>
+                </a:solidFill>
+              </a:rPr>
+              <a:t>impacto</a:t>
+            </a:r>
+            <a:r>
+              <a:rPr sz="1600" dirty="0">
+                <a:solidFill>
+                  <a:srgbClr val="3D424E"/>
+                </a:solidFill>
+              </a:rPr>
+              <a:t>)</a:t>
+            </a:r>
+          </a:p>
+          <a:p>
+            <a:pPr>
+              <a:spcAft>
+                <a:spcPts val="800"/>
+              </a:spcAft>
+            </a:pPr>
+            <a:r>
+              <a:rPr sz="1600" b="1" dirty="0">
+                <a:solidFill>
+                  <a:srgbClr val="1F2A4E"/>
+                </a:solidFill>
+              </a:rPr>
+              <a:t>4.  </a:t>
+            </a:r>
+            <a:r>
+              <a:rPr sz="1600" dirty="0" err="1">
+                <a:solidFill>
+                  <a:srgbClr val="3D424E"/>
+                </a:solidFill>
+              </a:rPr>
+              <a:t>Resposta</a:t>
+            </a:r>
+            <a:r>
+              <a:rPr sz="1600" dirty="0">
+                <a:solidFill>
+                  <a:srgbClr val="3D424E"/>
+                </a:solidFill>
+              </a:rPr>
+              <a:t> à </a:t>
+            </a:r>
+            <a:r>
+              <a:rPr sz="1600" dirty="0" err="1">
+                <a:solidFill>
+                  <a:srgbClr val="3D424E"/>
+                </a:solidFill>
+              </a:rPr>
+              <a:t>sugestão</a:t>
+            </a:r>
+            <a:r>
+              <a:rPr sz="1600" dirty="0">
+                <a:solidFill>
+                  <a:srgbClr val="3D424E"/>
+                </a:solidFill>
+              </a:rPr>
+              <a:t> do </a:t>
+            </a:r>
+            <a:r>
+              <a:rPr sz="1600" dirty="0" err="1">
+                <a:solidFill>
+                  <a:srgbClr val="3D424E"/>
+                </a:solidFill>
+              </a:rPr>
+              <a:t>orientador</a:t>
+            </a:r>
+            <a:r>
+              <a:rPr sz="1600" dirty="0">
+                <a:solidFill>
+                  <a:srgbClr val="3D424E"/>
+                </a:solidFill>
+              </a:rPr>
+              <a:t>: CLIP (Contrastive Language-Image Pre-training)</a:t>
+            </a:r>
+          </a:p>
+          <a:p>
+            <a:pPr>
+              <a:spcAft>
+                <a:spcPts val="800"/>
+              </a:spcAft>
+            </a:pPr>
+            <a:r>
+              <a:rPr sz="1600" b="1" dirty="0">
+                <a:solidFill>
+                  <a:srgbClr val="1F2A4E"/>
+                </a:solidFill>
+              </a:rPr>
+              <a:t>5.  </a:t>
+            </a:r>
+            <a:r>
+              <a:rPr sz="1600" dirty="0" err="1">
+                <a:solidFill>
+                  <a:srgbClr val="3D424E"/>
+                </a:solidFill>
+              </a:rPr>
+              <a:t>FiLM</a:t>
+            </a:r>
+            <a:r>
+              <a:rPr sz="1600" dirty="0">
+                <a:solidFill>
+                  <a:srgbClr val="3D424E"/>
+                </a:solidFill>
+              </a:rPr>
+              <a:t> </a:t>
+            </a:r>
+            <a:r>
+              <a:rPr sz="1600" dirty="0" err="1">
+                <a:solidFill>
+                  <a:srgbClr val="3D424E"/>
+                </a:solidFill>
+              </a:rPr>
+              <a:t>em</a:t>
+            </a:r>
+            <a:r>
+              <a:rPr sz="1600" dirty="0">
+                <a:solidFill>
+                  <a:srgbClr val="3D424E"/>
+                </a:solidFill>
+              </a:rPr>
+              <a:t> fairness: lacuna </a:t>
+            </a:r>
+            <a:r>
+              <a:rPr sz="1600" dirty="0" err="1">
+                <a:solidFill>
+                  <a:srgbClr val="3D424E"/>
+                </a:solidFill>
+              </a:rPr>
+              <a:t>na</a:t>
+            </a:r>
+            <a:r>
+              <a:rPr sz="1600" dirty="0">
+                <a:solidFill>
+                  <a:srgbClr val="3D424E"/>
+                </a:solidFill>
+              </a:rPr>
+              <a:t> </a:t>
+            </a:r>
+            <a:r>
+              <a:rPr sz="1600" dirty="0" err="1">
+                <a:solidFill>
+                  <a:srgbClr val="3D424E"/>
+                </a:solidFill>
+              </a:rPr>
+              <a:t>literatura</a:t>
+            </a:r>
+            <a:r>
+              <a:rPr sz="1600" dirty="0">
+                <a:solidFill>
+                  <a:srgbClr val="3D424E"/>
+                </a:solidFill>
+              </a:rPr>
+              <a:t> </a:t>
+            </a:r>
+            <a:r>
+              <a:rPr sz="1600" dirty="0" err="1">
+                <a:solidFill>
+                  <a:srgbClr val="3D424E"/>
+                </a:solidFill>
+              </a:rPr>
+              <a:t>como</a:t>
+            </a:r>
+            <a:r>
+              <a:rPr sz="1600" dirty="0">
+                <a:solidFill>
+                  <a:srgbClr val="3D424E"/>
+                </a:solidFill>
+              </a:rPr>
+              <a:t> </a:t>
+            </a:r>
+            <a:r>
+              <a:rPr sz="1600" dirty="0" err="1">
+                <a:solidFill>
+                  <a:srgbClr val="3D424E"/>
+                </a:solidFill>
+              </a:rPr>
+              <a:t>contribuição</a:t>
+            </a:r>
+            <a:r>
+              <a:rPr sz="1600" dirty="0">
+                <a:solidFill>
+                  <a:srgbClr val="3D424E"/>
+                </a:solidFill>
+              </a:rPr>
+              <a:t> original</a:t>
+            </a:r>
+          </a:p>
+          <a:p>
+            <a:pPr>
+              <a:spcAft>
+                <a:spcPts val="800"/>
+              </a:spcAft>
+            </a:pPr>
+            <a:r>
+              <a:rPr sz="1600" b="1" dirty="0">
+                <a:solidFill>
+                  <a:srgbClr val="1F2A4E"/>
+                </a:solidFill>
+              </a:rPr>
+              <a:t>6.  </a:t>
+            </a:r>
+            <a:r>
+              <a:rPr sz="1600" dirty="0" err="1">
+                <a:solidFill>
+                  <a:srgbClr val="3D424E"/>
+                </a:solidFill>
+              </a:rPr>
+              <a:t>Proposta</a:t>
+            </a:r>
+            <a:r>
+              <a:rPr sz="1600" dirty="0">
+                <a:solidFill>
+                  <a:srgbClr val="3D424E"/>
+                </a:solidFill>
+              </a:rPr>
+              <a:t>: </a:t>
+            </a:r>
+            <a:r>
+              <a:rPr sz="1600" dirty="0" err="1">
+                <a:solidFill>
+                  <a:srgbClr val="3D424E"/>
+                </a:solidFill>
+              </a:rPr>
+              <a:t>estudo</a:t>
+            </a:r>
+            <a:r>
+              <a:rPr sz="1600" dirty="0">
+                <a:solidFill>
+                  <a:srgbClr val="3D424E"/>
+                </a:solidFill>
+              </a:rPr>
+              <a:t> </a:t>
+            </a:r>
+            <a:r>
+              <a:rPr sz="1600" dirty="0" err="1">
+                <a:solidFill>
+                  <a:srgbClr val="3D424E"/>
+                </a:solidFill>
+              </a:rPr>
+              <a:t>comparativo</a:t>
+            </a:r>
+            <a:r>
+              <a:rPr sz="1600" dirty="0">
+                <a:solidFill>
+                  <a:srgbClr val="3D424E"/>
+                </a:solidFill>
+              </a:rPr>
+              <a:t> de </a:t>
+            </a:r>
+            <a:r>
+              <a:rPr sz="1600" dirty="0" err="1">
+                <a:solidFill>
+                  <a:srgbClr val="3D424E"/>
+                </a:solidFill>
+              </a:rPr>
+              <a:t>mecanismos</a:t>
+            </a:r>
+            <a:r>
+              <a:rPr sz="1600" dirty="0">
+                <a:solidFill>
+                  <a:srgbClr val="3D424E"/>
+                </a:solidFill>
+              </a:rPr>
+              <a:t> de conditioning</a:t>
+            </a:r>
+          </a:p>
+          <a:p>
+            <a:pPr>
+              <a:spcAft>
+                <a:spcPts val="800"/>
+              </a:spcAft>
+            </a:pPr>
+            <a:r>
+              <a:rPr sz="1600" b="1" dirty="0">
+                <a:solidFill>
+                  <a:srgbClr val="1F2A4E"/>
+                </a:solidFill>
+              </a:rPr>
+              <a:t>7.  </a:t>
+            </a:r>
+            <a:r>
+              <a:rPr sz="1600" dirty="0">
+                <a:solidFill>
+                  <a:srgbClr val="3D424E"/>
+                </a:solidFill>
+              </a:rPr>
+              <a:t>Plano de </a:t>
+            </a:r>
+            <a:r>
+              <a:rPr sz="1600" dirty="0" err="1">
+                <a:solidFill>
+                  <a:srgbClr val="3D424E"/>
+                </a:solidFill>
+              </a:rPr>
+              <a:t>escrita</a:t>
+            </a:r>
+            <a:r>
+              <a:rPr sz="1600" dirty="0">
+                <a:solidFill>
+                  <a:srgbClr val="3D424E"/>
+                </a:solidFill>
+              </a:rPr>
+              <a:t> e </a:t>
+            </a:r>
+            <a:r>
+              <a:rPr sz="1600" dirty="0" err="1">
+                <a:solidFill>
+                  <a:srgbClr val="3D424E"/>
+                </a:solidFill>
+              </a:rPr>
+              <a:t>decisões</a:t>
+            </a:r>
+            <a:r>
+              <a:rPr sz="1600" dirty="0">
+                <a:solidFill>
+                  <a:srgbClr val="3D424E"/>
+                </a:solidFill>
+              </a:rPr>
+              <a:t> a </a:t>
+            </a:r>
+            <a:r>
+              <a:rPr sz="1600" dirty="0" err="1">
+                <a:solidFill>
+                  <a:srgbClr val="3D424E"/>
+                </a:solidFill>
+              </a:rPr>
+              <a:t>alinhar</a:t>
+            </a:r>
+            <a:endParaRPr sz="1600" dirty="0">
+              <a:solidFill>
+                <a:srgbClr val="3D424E"/>
+              </a:solidFill>
+            </a:endParaRPr>
           </a:p>
         </p:txBody>
       </p:sp>
@@ -6514,8 +6844,8 @@
 </p:sld>
 </file>
 
-<file path=ppt/slides/slide19.xml><?xml version="1.0" encoding="utf-8"?>
-<p:sld xmlns:a="http://schemas.openxmlformats.org/drawingml/2006/main" xmlns:p="http://schemas.openxmlformats.org/presentationml/2006/main" xmlns:r="http://schemas.openxmlformats.org/officeDocument/2006/relationships">
+<file path=ppt/slides/slide20.xml><?xml version="1.0" encoding="utf-8"?>
+<p:sld xmlns:a="http://schemas.openxmlformats.org/drawingml/2006/main" xmlns:r="http://schemas.openxmlformats.org/officeDocument/2006/relationships" xmlns:p="http://schemas.openxmlformats.org/presentationml/2006/main">
   <p:cSld>
     <p:spTree>
       <p:nvGrpSpPr>
@@ -6523,7 +6853,14 @@
         <p:cNvGrpSpPr/>
         <p:nvPr/>
       </p:nvGrpSpPr>
-      <p:grpSpPr/>
+      <p:grpSpPr>
+        <a:xfrm>
+          <a:off x="0" y="0"/>
+          <a:ext cx="0" cy="0"/>
+          <a:chOff x="0" y="0"/>
+          <a:chExt cx="0" cy="0"/>
+        </a:xfrm>
+      </p:grpSpPr>
       <p:sp>
         <p:nvSpPr>
           <p:cNvPr id="2" name="TextBox 1"/>
@@ -6554,7 +6891,7 @@
               </a:defRPr>
             </a:pPr>
             <a:r>
-              <a:t>Justificativa para manter FiLM como mecanismo central</a:t>
+              <a:t>5 configurações de conditioning comparadas</a:t>
             </a:r>
           </a:p>
         </p:txBody>
@@ -6599,193 +6936,544 @@
           <a:lstStyle/>
           <a:p>
             <a:pPr algn="ctr"/>
+            <a:endParaRPr/>
           </a:p>
         </p:txBody>
       </p:sp>
-      <p:sp>
-        <p:nvSpPr>
-          <p:cNvPr id="4" name="TextBox 3"/>
-          <p:cNvSpPr txBox="1"/>
+      <p:graphicFrame>
+        <p:nvGraphicFramePr>
+          <p:cNvPr id="4" name="Table 3"/>
+          <p:cNvGraphicFramePr>
+            <a:graphicFrameLocks noGrp="1"/>
+          </p:cNvGraphicFramePr>
           <p:nvPr/>
-        </p:nvSpPr>
-        <p:spPr>
-          <a:xfrm>
-            <a:off x="457200" y="1371600"/>
-            <a:ext cx="11430000" cy="4937760"/>
-          </a:xfrm>
-          <a:prstGeom prst="rect">
-            <a:avLst/>
-          </a:prstGeom>
-          <a:noFill/>
-        </p:spPr>
-        <p:txBody>
-          <a:bodyPr wrap="square">
-            <a:spAutoFit/>
-          </a:bodyPr>
-          <a:lstStyle/>
-          <a:p>
-            <a:pPr>
-              <a:spcAft>
-                <a:spcPts val="800"/>
-              </a:spcAft>
-            </a:pPr>
-            <a:r>
-              <a:rPr sz="1600" b="1">
-                <a:solidFill>
-                  <a:srgbClr val="1F2A4E"/>
-                </a:solidFill>
-              </a:rPr>
-              <a:t>Adequação a baixa dimensão:  </a:t>
-            </a:r>
-            <a:r>
-              <a:rPr sz="1600">
-                <a:solidFill>
-                  <a:srgbClr val="3D424E"/>
-                </a:solidFill>
-              </a:rPr>
-              <a:t>MST é vetor 10-dim — FiLM é o ponto ótimo</a:t>
-            </a:r>
-          </a:p>
-          <a:p>
-            <a:pPr>
-              <a:spcAft>
-                <a:spcPts val="800"/>
-              </a:spcAft>
-            </a:pPr>
-            <a:r>
-              <a:rPr sz="1600" b="1">
-                <a:solidFill>
-                  <a:srgbClr val="1F2A4E"/>
-                </a:solidFill>
-              </a:rPr>
-              <a:t>Custo paramétrico:  </a:t>
-            </a:r>
-            <a:r>
-              <a:rPr sz="1600">
-                <a:solidFill>
-                  <a:srgbClr val="3D424E"/>
-                </a:solidFill>
-              </a:rPr>
-              <a:t>~1% sobre o backbone (vs. ~3% de cross-attention equivalente)</a:t>
-            </a:r>
-          </a:p>
-          <a:p>
-            <a:pPr>
-              <a:spcAft>
-                <a:spcPts val="800"/>
-              </a:spcAft>
-            </a:pPr>
-            <a:r>
-              <a:rPr sz="1600" b="1">
-                <a:solidFill>
-                  <a:srgbClr val="1F2A4E"/>
-                </a:solidFill>
-              </a:rPr>
-              <a:t>Interpretabilidade:  </a:t>
-            </a:r>
-            <a:r>
-              <a:rPr sz="1600">
-                <a:solidFill>
-                  <a:srgbClr val="3D424E"/>
-                </a:solidFill>
-              </a:rPr>
-              <a:t>γ e β são por canal e podem ser visualizados</a:t>
-            </a:r>
-          </a:p>
-          <a:p>
-            <a:pPr>
-              <a:spcAft>
-                <a:spcPts val="800"/>
-              </a:spcAft>
-            </a:pPr>
-            <a:r>
-              <a:rPr sz="1600" b="1">
-                <a:solidFill>
-                  <a:srgbClr val="1F2A4E"/>
-                </a:solidFill>
-              </a:rPr>
-              <a:t>Compatibilidade:  </a:t>
-            </a:r>
-            <a:r>
-              <a:rPr sz="1600">
-                <a:solidFill>
-                  <a:srgbClr val="3D424E"/>
-                </a:solidFill>
-              </a:rPr>
-              <a:t>Substitui parâmetros do BatchNorm — 'conditional BatchNorm'</a:t>
-            </a:r>
-          </a:p>
-          <a:p>
-            <a:pPr>
-              <a:spcAft>
-                <a:spcPts val="800"/>
-              </a:spcAft>
-            </a:pPr>
-            <a:r>
-              <a:rPr sz="1600" b="1">
-                <a:solidFill>
-                  <a:srgbClr val="1F2A4E"/>
-                </a:solidFill>
-              </a:rPr>
-              <a:t>Compatibilidade com o estudo comparativo:  </a:t>
-            </a:r>
-            <a:r>
-              <a:rPr sz="1600">
-                <a:solidFill>
-                  <a:srgbClr val="3D424E"/>
-                </a:solidFill>
-              </a:rPr>
-              <a:t>Ablation limpa — liga ou desliga o FiLM mantendo o backbone fixo</a:t>
-            </a:r>
-          </a:p>
-          <a:p>
-            <a:pPr>
-              <a:spcAft>
-                <a:spcPts val="800"/>
-              </a:spcAft>
-            </a:pPr>
-            <a:r>
-              <a:rPr sz="1600" b="1">
-                <a:solidFill>
-                  <a:srgbClr val="1F2A4E"/>
-                </a:solidFill>
-              </a:rPr>
-              <a:t>  </a:t>
-            </a:r>
-            <a:r>
-              <a:rPr sz="1600">
-                <a:solidFill>
-                  <a:srgbClr val="3D424E"/>
-                </a:solidFill>
-              </a:rPr>
-              <a:t/>
-            </a:r>
-          </a:p>
-          <a:p>
-            <a:pPr>
-              <a:spcAft>
-                <a:spcPts val="800"/>
-              </a:spcAft>
-            </a:pPr>
-            <a:r>
-              <a:rPr sz="1600" b="1">
-                <a:solidFill>
-                  <a:srgbClr val="1F2A4E"/>
-                </a:solidFill>
-              </a:rPr>
-              <a:t>Argumento de originalidade:  </a:t>
-            </a:r>
-            <a:r>
-              <a:rPr sz="1600">
-                <a:solidFill>
-                  <a:srgbClr val="3D424E"/>
-                </a:solidFill>
-              </a:rPr>
-              <a:t>FiLM em fairness é direção pouco explorada — vira contribuição</a:t>
-            </a:r>
-          </a:p>
-        </p:txBody>
-      </p:sp>
+        </p:nvGraphicFramePr>
+        <p:xfrm>
+          <a:off x="457200" y="1371600"/>
+          <a:ext cx="11887200" cy="4754880"/>
+        </p:xfrm>
+        <a:graphic>
+          <a:graphicData uri="http://schemas.openxmlformats.org/drawingml/2006/table">
+            <a:tbl>
+              <a:tblPr firstRow="1" bandRow="1">
+                <a:tableStyleId>{5C22544A-7EE6-4342-B048-85BDC9FD1C3A}</a:tableStyleId>
+              </a:tblPr>
+              <a:tblGrid>
+                <a:gridCol w="914400">
+                  <a:extLst>
+                    <a:ext uri="{9D8B030D-6E8A-4147-A177-3AD203B41FA5}">
+                      <a16:colId xmlns:a16="http://schemas.microsoft.com/office/drawing/2014/main" val="20000"/>
+                    </a:ext>
+                  </a:extLst>
+                </a:gridCol>
+                <a:gridCol w="2743200">
+                  <a:extLst>
+                    <a:ext uri="{9D8B030D-6E8A-4147-A177-3AD203B41FA5}">
+                      <a16:colId xmlns:a16="http://schemas.microsoft.com/office/drawing/2014/main" val="20001"/>
+                    </a:ext>
+                  </a:extLst>
+                </a:gridCol>
+                <a:gridCol w="4114800">
+                  <a:extLst>
+                    <a:ext uri="{9D8B030D-6E8A-4147-A177-3AD203B41FA5}">
+                      <a16:colId xmlns:a16="http://schemas.microsoft.com/office/drawing/2014/main" val="20002"/>
+                    </a:ext>
+                  </a:extLst>
+                </a:gridCol>
+                <a:gridCol w="4114800">
+                  <a:extLst>
+                    <a:ext uri="{9D8B030D-6E8A-4147-A177-3AD203B41FA5}">
+                      <a16:colId xmlns:a16="http://schemas.microsoft.com/office/drawing/2014/main" val="20003"/>
+                    </a:ext>
+                  </a:extLst>
+                </a:gridCol>
+              </a:tblGrid>
+              <a:tr h="792480">
+                <a:tc>
+                  <a:txBody>
+                    <a:bodyPr/>
+                    <a:lstStyle/>
+                    <a:p>
+                      <a:r>
+                        <a:rPr sz="1300" b="1">
+                          <a:solidFill>
+                            <a:srgbClr val="FFFFFF"/>
+                          </a:solidFill>
+                        </a:rPr>
+                        <a:t>Config</a:t>
+                      </a:r>
+                    </a:p>
+                  </a:txBody>
+                  <a:tcPr>
+                    <a:solidFill>
+                      <a:srgbClr val="1F2A4E"/>
+                    </a:solidFill>
+                  </a:tcPr>
+                </a:tc>
+                <a:tc>
+                  <a:txBody>
+                    <a:bodyPr/>
+                    <a:lstStyle/>
+                    <a:p>
+                      <a:r>
+                        <a:rPr sz="1300" b="1">
+                          <a:solidFill>
+                            <a:srgbClr val="FFFFFF"/>
+                          </a:solidFill>
+                        </a:rPr>
+                        <a:t>Arquitetura</a:t>
+                      </a:r>
+                    </a:p>
+                  </a:txBody>
+                  <a:tcPr>
+                    <a:solidFill>
+                      <a:srgbClr val="1F2A4E"/>
+                    </a:solidFill>
+                  </a:tcPr>
+                </a:tc>
+                <a:tc>
+                  <a:txBody>
+                    <a:bodyPr/>
+                    <a:lstStyle/>
+                    <a:p>
+                      <a:r>
+                        <a:rPr sz="1300" b="1">
+                          <a:solidFill>
+                            <a:srgbClr val="FFFFFF"/>
+                          </a:solidFill>
+                        </a:rPr>
+                        <a:t>Mecanismo de conditioning</a:t>
+                      </a:r>
+                    </a:p>
+                  </a:txBody>
+                  <a:tcPr>
+                    <a:solidFill>
+                      <a:srgbClr val="1F2A4E"/>
+                    </a:solidFill>
+                  </a:tcPr>
+                </a:tc>
+                <a:tc>
+                  <a:txBody>
+                    <a:bodyPr/>
+                    <a:lstStyle/>
+                    <a:p>
+                      <a:r>
+                        <a:rPr sz="1300" b="1">
+                          <a:solidFill>
+                            <a:srgbClr val="FFFFFF"/>
+                          </a:solidFill>
+                        </a:rPr>
+                        <a:t>Origem</a:t>
+                      </a:r>
+                    </a:p>
+                  </a:txBody>
+                  <a:tcPr>
+                    <a:solidFill>
+                      <a:srgbClr val="1F2A4E"/>
+                    </a:solidFill>
+                  </a:tcPr>
+                </a:tc>
+                <a:extLst>
+                  <a:ext uri="{0D108BD9-81ED-4DB2-BD59-A6C34878D82A}">
+                    <a16:rowId xmlns:a16="http://schemas.microsoft.com/office/drawing/2014/main" val="10000"/>
+                  </a:ext>
+                </a:extLst>
+              </a:tr>
+              <a:tr h="792480">
+                <a:tc>
+                  <a:txBody>
+                    <a:bodyPr/>
+                    <a:lstStyle/>
+                    <a:p>
+                      <a:r>
+                        <a:rPr sz="1100">
+                          <a:solidFill>
+                            <a:srgbClr val="3D424E"/>
+                          </a:solidFill>
+                        </a:rPr>
+                        <a:t>A</a:t>
+                      </a:r>
+                    </a:p>
+                  </a:txBody>
+                  <a:tcPr/>
+                </a:tc>
+                <a:tc>
+                  <a:txBody>
+                    <a:bodyPr/>
+                    <a:lstStyle/>
+                    <a:p>
+                      <a:r>
+                        <a:rPr sz="1100">
+                          <a:solidFill>
+                            <a:srgbClr val="3D424E"/>
+                          </a:solidFill>
+                        </a:rPr>
+                        <a:t>ConvNeXt-T baseline</a:t>
+                      </a:r>
+                    </a:p>
+                  </a:txBody>
+                  <a:tcPr/>
+                </a:tc>
+                <a:tc>
+                  <a:txBody>
+                    <a:bodyPr/>
+                    <a:lstStyle/>
+                    <a:p>
+                      <a:r>
+                        <a:rPr sz="1100">
+                          <a:solidFill>
+                            <a:srgbClr val="3D424E"/>
+                          </a:solidFill>
+                        </a:rPr>
+                        <a:t>Sem conditioning</a:t>
+                      </a:r>
+                    </a:p>
+                  </a:txBody>
+                  <a:tcPr/>
+                </a:tc>
+                <a:tc>
+                  <a:txBody>
+                    <a:bodyPr/>
+                    <a:lstStyle/>
+                    <a:p>
+                      <a:r>
+                        <a:rPr sz="1100">
+                          <a:solidFill>
+                            <a:srgbClr val="3D424E"/>
+                          </a:solidFill>
+                        </a:rPr>
+                        <a:t>Controle</a:t>
+                      </a:r>
+                    </a:p>
+                  </a:txBody>
+                  <a:tcPr/>
+                </a:tc>
+                <a:extLst>
+                  <a:ext uri="{0D108BD9-81ED-4DB2-BD59-A6C34878D82A}">
+                    <a16:rowId xmlns:a16="http://schemas.microsoft.com/office/drawing/2014/main" val="10001"/>
+                  </a:ext>
+                </a:extLst>
+              </a:tr>
+              <a:tr h="792480">
+                <a:tc>
+                  <a:txBody>
+                    <a:bodyPr/>
+                    <a:lstStyle/>
+                    <a:p>
+                      <a:r>
+                        <a:rPr sz="1100">
+                          <a:solidFill>
+                            <a:srgbClr val="3D424E"/>
+                          </a:solidFill>
+                        </a:rPr>
+                        <a:t>B (proposta)</a:t>
+                      </a:r>
+                    </a:p>
+                  </a:txBody>
+                  <a:tcPr>
+                    <a:solidFill>
+                      <a:srgbClr val="E8EAED"/>
+                    </a:solidFill>
+                  </a:tcPr>
+                </a:tc>
+                <a:tc>
+                  <a:txBody>
+                    <a:bodyPr/>
+                    <a:lstStyle/>
+                    <a:p>
+                      <a:r>
+                        <a:rPr sz="1100">
+                          <a:solidFill>
+                            <a:srgbClr val="3D424E"/>
+                          </a:solidFill>
+                        </a:rPr>
+                        <a:t>ConvNeXt-T + FiLM</a:t>
+                      </a:r>
+                    </a:p>
+                  </a:txBody>
+                  <a:tcPr>
+                    <a:solidFill>
+                      <a:srgbClr val="E8EAED"/>
+                    </a:solidFill>
+                  </a:tcPr>
+                </a:tc>
+                <a:tc>
+                  <a:txBody>
+                    <a:bodyPr/>
+                    <a:lstStyle/>
+                    <a:p>
+                      <a:r>
+                        <a:rPr sz="1100">
+                          <a:solidFill>
+                            <a:srgbClr val="3D424E"/>
+                          </a:solidFill>
+                        </a:rPr>
+                        <a:t>MST 10-dim → γ, β</a:t>
+                      </a:r>
+                    </a:p>
+                  </a:txBody>
+                  <a:tcPr>
+                    <a:solidFill>
+                      <a:srgbClr val="E8EAED"/>
+                    </a:solidFill>
+                  </a:tcPr>
+                </a:tc>
+                <a:tc>
+                  <a:txBody>
+                    <a:bodyPr/>
+                    <a:lstStyle/>
+                    <a:p>
+                      <a:r>
+                        <a:rPr sz="1100">
+                          <a:solidFill>
+                            <a:srgbClr val="3D424E"/>
+                          </a:solidFill>
+                        </a:rPr>
+                        <a:t>Nossa contribuição central</a:t>
+                      </a:r>
+                    </a:p>
+                  </a:txBody>
+                  <a:tcPr>
+                    <a:solidFill>
+                      <a:srgbClr val="E8EAED"/>
+                    </a:solidFill>
+                  </a:tcPr>
+                </a:tc>
+                <a:extLst>
+                  <a:ext uri="{0D108BD9-81ED-4DB2-BD59-A6C34878D82A}">
+                    <a16:rowId xmlns:a16="http://schemas.microsoft.com/office/drawing/2014/main" val="10002"/>
+                  </a:ext>
+                </a:extLst>
+              </a:tr>
+              <a:tr h="792480">
+                <a:tc>
+                  <a:txBody>
+                    <a:bodyPr/>
+                    <a:lstStyle/>
+                    <a:p>
+                      <a:r>
+                        <a:rPr sz="1100">
+                          <a:solidFill>
+                            <a:srgbClr val="3D424E"/>
+                          </a:solidFill>
+                        </a:rPr>
+                        <a:t>C</a:t>
+                      </a:r>
+                    </a:p>
+                  </a:txBody>
+                  <a:tcPr/>
+                </a:tc>
+                <a:tc>
+                  <a:txBody>
+                    <a:bodyPr/>
+                    <a:lstStyle/>
+                    <a:p>
+                      <a:r>
+                        <a:rPr sz="1100">
+                          <a:solidFill>
+                            <a:srgbClr val="3D424E"/>
+                          </a:solidFill>
+                        </a:rPr>
+                        <a:t>ConvNeXt-T + FiLM</a:t>
+                      </a:r>
+                    </a:p>
+                  </a:txBody>
+                  <a:tcPr/>
+                </a:tc>
+                <a:tc>
+                  <a:txBody>
+                    <a:bodyPr/>
+                    <a:lstStyle/>
+                    <a:p>
+                      <a:r>
+                        <a:rPr sz="1100">
+                          <a:solidFill>
+                            <a:srgbClr val="3D424E"/>
+                          </a:solidFill>
+                        </a:rPr>
+                        <a:t>Embedding CLIP-text → γ, β</a:t>
+                      </a:r>
+                    </a:p>
+                  </a:txBody>
+                  <a:tcPr/>
+                </a:tc>
+                <a:tc>
+                  <a:txBody>
+                    <a:bodyPr/>
+                    <a:lstStyle/>
+                    <a:p>
+                      <a:r>
+                        <a:rPr sz="1100">
+                          <a:solidFill>
+                            <a:srgbClr val="3D424E"/>
+                          </a:solidFill>
+                        </a:rPr>
+                        <a:t>Híbrido CLIP + FiLM</a:t>
+                      </a:r>
+                    </a:p>
+                  </a:txBody>
+                  <a:tcPr/>
+                </a:tc>
+                <a:extLst>
+                  <a:ext uri="{0D108BD9-81ED-4DB2-BD59-A6C34878D82A}">
+                    <a16:rowId xmlns:a16="http://schemas.microsoft.com/office/drawing/2014/main" val="10003"/>
+                  </a:ext>
+                </a:extLst>
+              </a:tr>
+              <a:tr h="792480">
+                <a:tc>
+                  <a:txBody>
+                    <a:bodyPr/>
+                    <a:lstStyle/>
+                    <a:p>
+                      <a:r>
+                        <a:rPr sz="1100">
+                          <a:solidFill>
+                            <a:srgbClr val="3D424E"/>
+                          </a:solidFill>
+                        </a:rPr>
+                        <a:t>D</a:t>
+                      </a:r>
+                    </a:p>
+                  </a:txBody>
+                  <a:tcPr/>
+                </a:tc>
+                <a:tc>
+                  <a:txBody>
+                    <a:bodyPr/>
+                    <a:lstStyle/>
+                    <a:p>
+                      <a:r>
+                        <a:rPr sz="1100">
+                          <a:solidFill>
+                            <a:srgbClr val="3D424E"/>
+                          </a:solidFill>
+                        </a:rPr>
+                        <a:t>ConvNeXt-T + cross-attention</a:t>
+                      </a:r>
+                    </a:p>
+                  </a:txBody>
+                  <a:tcPr/>
+                </a:tc>
+                <a:tc>
+                  <a:txBody>
+                    <a:bodyPr/>
+                    <a:lstStyle/>
+                    <a:p>
+                      <a:r>
+                        <a:rPr sz="1100">
+                          <a:solidFill>
+                            <a:srgbClr val="3D424E"/>
+                          </a:solidFill>
+                        </a:rPr>
+                        <a:t>Embedding CLIP-text via attention</a:t>
+                      </a:r>
+                    </a:p>
+                  </a:txBody>
+                  <a:tcPr/>
+                </a:tc>
+                <a:tc>
+                  <a:txBody>
+                    <a:bodyPr/>
+                    <a:lstStyle/>
+                    <a:p>
+                      <a:r>
+                        <a:rPr sz="1100">
+                          <a:solidFill>
+                            <a:srgbClr val="3D424E"/>
+                          </a:solidFill>
+                        </a:rPr>
+                        <a:t>Estilo FairCLIP</a:t>
+                      </a:r>
+                    </a:p>
+                  </a:txBody>
+                  <a:tcPr/>
+                </a:tc>
+                <a:extLst>
+                  <a:ext uri="{0D108BD9-81ED-4DB2-BD59-A6C34878D82A}">
+                    <a16:rowId xmlns:a16="http://schemas.microsoft.com/office/drawing/2014/main" val="10004"/>
+                  </a:ext>
+                </a:extLst>
+              </a:tr>
+              <a:tr h="792480">
+                <a:tc>
+                  <a:txBody>
+                    <a:bodyPr/>
+                    <a:lstStyle/>
+                    <a:p>
+                      <a:r>
+                        <a:rPr sz="1100">
+                          <a:solidFill>
+                            <a:srgbClr val="3D424E"/>
+                          </a:solidFill>
+                        </a:rPr>
+                        <a:t>E</a:t>
+                      </a:r>
+                    </a:p>
+                  </a:txBody>
+                  <a:tcPr/>
+                </a:tc>
+                <a:tc>
+                  <a:txBody>
+                    <a:bodyPr/>
+                    <a:lstStyle/>
+                    <a:p>
+                      <a:r>
+                        <a:rPr sz="1100">
+                          <a:solidFill>
+                            <a:srgbClr val="3D424E"/>
+                          </a:solidFill>
+                        </a:rPr>
+                        <a:t>ConvNeXt-T + LoRA-FAIR</a:t>
+                      </a:r>
+                    </a:p>
+                  </a:txBody>
+                  <a:tcPr/>
+                </a:tc>
+                <a:tc>
+                  <a:txBody>
+                    <a:bodyPr/>
+                    <a:lstStyle/>
+                    <a:p>
+                      <a:r>
+                        <a:rPr sz="1100">
+                          <a:solidFill>
+                            <a:srgbClr val="3D424E"/>
+                          </a:solidFill>
+                        </a:rPr>
+                        <a:t>Low-rank weight modulation</a:t>
+                      </a:r>
+                    </a:p>
+                  </a:txBody>
+                  <a:tcPr/>
+                </a:tc>
+                <a:tc>
+                  <a:txBody>
+                    <a:bodyPr/>
+                    <a:lstStyle/>
+                    <a:p>
+                      <a:r>
+                        <a:rPr sz="1100">
+                          <a:solidFill>
+                            <a:srgbClr val="3D424E"/>
+                          </a:solidFill>
+                        </a:rPr>
+                        <a:t>LoRA-FAIR (Bian, 2025)</a:t>
+                      </a:r>
+                    </a:p>
+                  </a:txBody>
+                  <a:tcPr/>
+                </a:tc>
+                <a:extLst>
+                  <a:ext uri="{0D108BD9-81ED-4DB2-BD59-A6C34878D82A}">
+                    <a16:rowId xmlns:a16="http://schemas.microsoft.com/office/drawing/2014/main" val="10005"/>
+                  </a:ext>
+                </a:extLst>
+              </a:tr>
+            </a:tbl>
+          </a:graphicData>
+        </a:graphic>
+      </p:graphicFrame>
       <p:sp>
         <p:nvSpPr>
           <p:cNvPr id="5" name="TextBox 4"/>
@@ -6816,7 +7504,7 @@
               </a:defRPr>
             </a:pPr>
             <a:r>
-              <a:t>Perez et al. (AAAI 2018) + Schumann (2023, MST) + Pereira (2026, SkinToneNet) — ancoragem direta</a:t>
+              <a:t>Se CLIP superar FiLM, reportamos como informação útil — não como invalidação. Honra a recomendação do orientador.</a:t>
             </a:r>
           </a:p>
         </p:txBody>
@@ -6829,8 +7517,8 @@
 </p:sld>
 </file>
 
-<file path=ppt/slides/slide2.xml><?xml version="1.0" encoding="utf-8"?>
-<p:sld xmlns:a="http://schemas.openxmlformats.org/drawingml/2006/main" xmlns:p="http://schemas.openxmlformats.org/presentationml/2006/main" xmlns:r="http://schemas.openxmlformats.org/officeDocument/2006/relationships">
+<file path=ppt/slides/slide21.xml><?xml version="1.0" encoding="utf-8"?>
+<p:sld xmlns:a="http://schemas.openxmlformats.org/drawingml/2006/main" xmlns:r="http://schemas.openxmlformats.org/officeDocument/2006/relationships" xmlns:p="http://schemas.openxmlformats.org/presentationml/2006/main">
   <p:cSld>
     <p:spTree>
       <p:nvGrpSpPr>
@@ -6838,7 +7526,14 @@
         <p:cNvGrpSpPr/>
         <p:nvPr/>
       </p:nvGrpSpPr>
-      <p:grpSpPr/>
+      <p:grpSpPr>
+        <a:xfrm>
+          <a:off x="0" y="0"/>
+          <a:ext cx="0" cy="0"/>
+          <a:chOff x="0" y="0"/>
+          <a:chExt cx="0" cy="0"/>
+        </a:xfrm>
+      </p:grpSpPr>
       <p:sp>
         <p:nvSpPr>
           <p:cNvPr id="2" name="TextBox 1"/>
@@ -6869,7 +7564,7 @@
               </a:defRPr>
             </a:pPr>
             <a:r>
-              <a:t>Agenda da reunião</a:t>
+              <a:t>Justificativa para manter FiLM como mecanismo central</a:t>
             </a:r>
           </a:p>
         </p:txBody>
@@ -6914,6 +7609,7 @@
           <a:lstStyle/>
           <a:p>
             <a:pPr algn="ctr"/>
+            <a:endParaRPr/>
           </a:p>
         </p:txBody>
       </p:sp>
@@ -6950,7 +7646,7 @@
                   <a:srgbClr val="1F2A4E"/>
                 </a:solidFill>
               </a:rPr>
-              <a:t>1.  </a:t>
+              <a:t>Adequação a baixa dimensão:  </a:t>
             </a:r>
             <a:r>
               <a:rPr sz="1600">
@@ -6958,7 +7654,7 @@
                   <a:srgbClr val="3D424E"/>
                 </a:solidFill>
               </a:rPr>
-              <a:t>Status das decisões da reunião anterior (08/jun)</a:t>
+              <a:t>MST é vetor 10-dim — FiLM é o ponto ótimo</a:t>
             </a:r>
           </a:p>
           <a:p>
@@ -6973,7 +7669,7 @@
                   <a:srgbClr val="1F2A4E"/>
                 </a:solidFill>
               </a:rPr>
-              <a:t>2.  </a:t>
+              <a:t>Custo paramétrico:  </a:t>
             </a:r>
             <a:r>
               <a:rPr sz="1600">
@@ -6981,7 +7677,7 @@
                   <a:srgbClr val="3D424E"/>
                 </a:solidFill>
               </a:rPr>
-              <a:t>Corpus consolidado: 101 fichas em 11 tracks temáticos</a:t>
+              <a:t>~1% sobre o backbone (vs. ~3% de cross-attention equivalente)</a:t>
             </a:r>
           </a:p>
           <a:p>
@@ -6996,7 +7692,7 @@
                   <a:srgbClr val="1F2A4E"/>
                 </a:solidFill>
               </a:rPr>
-              <a:t>3.  </a:t>
+              <a:t>Interpretabilidade:  </a:t>
             </a:r>
             <a:r>
               <a:rPr sz="1600">
@@ -7004,7 +7700,7 @@
                   <a:srgbClr val="3D424E"/>
                 </a:solidFill>
               </a:rPr>
-              <a:t>Pente fino crítico do corpus (classificação por impacto)</a:t>
+              <a:t>γ e β são por canal e podem ser visualizados</a:t>
             </a:r>
           </a:p>
           <a:p>
@@ -7019,7 +7715,7 @@
                   <a:srgbClr val="1F2A4E"/>
                 </a:solidFill>
               </a:rPr>
-              <a:t>4.  </a:t>
+              <a:t>Compatibilidade:  </a:t>
             </a:r>
             <a:r>
               <a:rPr sz="1600">
@@ -7027,7 +7723,7 @@
                   <a:srgbClr val="3D424E"/>
                 </a:solidFill>
               </a:rPr>
-              <a:t>Resposta à sugestão do orientador: CLIP (Contrastive Language-Image Pre-training)</a:t>
+              <a:t>Substitui parâmetros do BatchNorm — 'conditional BatchNorm'</a:t>
             </a:r>
           </a:p>
           <a:p>
@@ -7042,7 +7738,7 @@
                   <a:srgbClr val="1F2A4E"/>
                 </a:solidFill>
               </a:rPr>
-              <a:t>5.  </a:t>
+              <a:t>Compatibilidade com o estudo comparativo:  </a:t>
             </a:r>
             <a:r>
               <a:rPr sz="1600">
@@ -7050,7 +7746,7 @@
                   <a:srgbClr val="3D424E"/>
                 </a:solidFill>
               </a:rPr>
-              <a:t>FiLM em fairness: lacuna na literatura como contribuição original</a:t>
+              <a:t>Ablation limpa — liga ou desliga o FiLM mantendo o backbone fixo</a:t>
             </a:r>
           </a:p>
           <a:p>
@@ -7065,15 +7761,7 @@
                   <a:srgbClr val="1F2A4E"/>
                 </a:solidFill>
               </a:rPr>
-              <a:t>6.  </a:t>
-            </a:r>
-            <a:r>
-              <a:rPr sz="1600">
-                <a:solidFill>
-                  <a:srgbClr val="3D424E"/>
-                </a:solidFill>
-              </a:rPr>
-              <a:t>Proposta: estudo comparativo de mecanismos de conditioning</a:t>
+              <a:t>  </a:t>
             </a:r>
           </a:p>
           <a:p>
@@ -7088,7 +7776,7 @@
                   <a:srgbClr val="1F2A4E"/>
                 </a:solidFill>
               </a:rPr>
-              <a:t>7.  </a:t>
+              <a:t>Argumento de originalidade:  </a:t>
             </a:r>
             <a:r>
               <a:rPr sz="1600">
@@ -7096,7 +7784,42 @@
                   <a:srgbClr val="3D424E"/>
                 </a:solidFill>
               </a:rPr>
-              <a:t>Plano de escrita e decisões a alinhar</a:t>
+              <a:t>FiLM em fairness é direção pouco explorada — vira contribuição</a:t>
+            </a:r>
+          </a:p>
+        </p:txBody>
+      </p:sp>
+      <p:sp>
+        <p:nvSpPr>
+          <p:cNvPr id="5" name="TextBox 4"/>
+          <p:cNvSpPr txBox="1"/>
+          <p:nvPr/>
+        </p:nvSpPr>
+        <p:spPr>
+          <a:xfrm>
+            <a:off x="457200" y="6446520"/>
+            <a:ext cx="11430000" cy="365760"/>
+          </a:xfrm>
+          <a:prstGeom prst="rect">
+            <a:avLst/>
+          </a:prstGeom>
+          <a:noFill/>
+        </p:spPr>
+        <p:txBody>
+          <a:bodyPr wrap="none">
+            <a:spAutoFit/>
+          </a:bodyPr>
+          <a:lstStyle/>
+          <a:p>
+            <a:pPr>
+              <a:defRPr sz="1000" i="1">
+                <a:solidFill>
+                  <a:srgbClr val="707682"/>
+                </a:solidFill>
+              </a:defRPr>
+            </a:pPr>
+            <a:r>
+              <a:t>Perez et al. (AAAI 2018) + Schumann (2023, MST) + Pereira (2026, SkinToneNet) — ancoragem direta</a:t>
             </a:r>
           </a:p>
         </p:txBody>
@@ -7109,8 +7832,8 @@
 </p:sld>
 </file>
 
-<file path=ppt/slides/slide20.xml><?xml version="1.0" encoding="utf-8"?>
-<p:sld xmlns:a="http://schemas.openxmlformats.org/drawingml/2006/main" xmlns:p="http://schemas.openxmlformats.org/presentationml/2006/main" xmlns:r="http://schemas.openxmlformats.org/officeDocument/2006/relationships">
+<file path=ppt/slides/slide22.xml><?xml version="1.0" encoding="utf-8"?>
+<p:sld xmlns:a="http://schemas.openxmlformats.org/drawingml/2006/main" xmlns:r="http://schemas.openxmlformats.org/officeDocument/2006/relationships" xmlns:p="http://schemas.openxmlformats.org/presentationml/2006/main">
   <p:cSld>
     <p:spTree>
       <p:nvGrpSpPr>
@@ -7118,7 +7841,14 @@
         <p:cNvGrpSpPr/>
         <p:nvPr/>
       </p:nvGrpSpPr>
-      <p:grpSpPr/>
+      <p:grpSpPr>
+        <a:xfrm>
+          <a:off x="0" y="0"/>
+          <a:ext cx="0" cy="0"/>
+          <a:chOff x="0" y="0"/>
+          <a:chExt cx="0" cy="0"/>
+        </a:xfrm>
+      </p:grpSpPr>
       <p:sp>
         <p:nvSpPr>
           <p:cNvPr id="2" name="Rectangle 1"/>
@@ -7159,6 +7889,7 @@
           <a:lstStyle/>
           <a:p>
             <a:pPr algn="ctr"/>
+            <a:endParaRPr/>
           </a:p>
         </p:txBody>
       </p:sp>
@@ -7252,8 +7983,8 @@
 </p:sld>
 </file>
 
-<file path=ppt/slides/slide21.xml><?xml version="1.0" encoding="utf-8"?>
-<p:sld xmlns:a="http://schemas.openxmlformats.org/drawingml/2006/main" xmlns:p="http://schemas.openxmlformats.org/presentationml/2006/main" xmlns:r="http://schemas.openxmlformats.org/officeDocument/2006/relationships">
+<file path=ppt/slides/slide23.xml><?xml version="1.0" encoding="utf-8"?>
+<p:sld xmlns:a="http://schemas.openxmlformats.org/drawingml/2006/main" xmlns:r="http://schemas.openxmlformats.org/officeDocument/2006/relationships" xmlns:p="http://schemas.openxmlformats.org/presentationml/2006/main">
   <p:cSld>
     <p:spTree>
       <p:nvGrpSpPr>
@@ -7261,7 +7992,14 @@
         <p:cNvGrpSpPr/>
         <p:nvPr/>
       </p:nvGrpSpPr>
-      <p:grpSpPr/>
+      <p:grpSpPr>
+        <a:xfrm>
+          <a:off x="0" y="0"/>
+          <a:ext cx="0" cy="0"/>
+          <a:chOff x="0" y="0"/>
+          <a:chExt cx="0" cy="0"/>
+        </a:xfrm>
+      </p:grpSpPr>
       <p:sp>
         <p:nvSpPr>
           <p:cNvPr id="2" name="TextBox 1"/>
@@ -7337,6 +8075,7 @@
           <a:lstStyle/>
           <a:p>
             <a:pPr algn="ctr"/>
+            <a:endParaRPr/>
           </a:p>
         </p:txBody>
       </p:sp>
@@ -7359,10 +8098,34 @@
                 <a:tableStyleId>{5C22544A-7EE6-4342-B048-85BDC9FD1C3A}</a:tableStyleId>
               </a:tblPr>
               <a:tblGrid>
-                <a:gridCol w="914400"/>
-                <a:gridCol w="2194560"/>
-                <a:gridCol w="4572000"/>
-                <a:gridCol w="4206240"/>
+                <a:gridCol w="914400">
+                  <a:extLst>
+                    <a:ext uri="{9D8B030D-6E8A-4147-A177-3AD203B41FA5}">
+                      <a16:colId xmlns:a16="http://schemas.microsoft.com/office/drawing/2014/main" val="20000"/>
+                    </a:ext>
+                  </a:extLst>
+                </a:gridCol>
+                <a:gridCol w="2194560">
+                  <a:extLst>
+                    <a:ext uri="{9D8B030D-6E8A-4147-A177-3AD203B41FA5}">
+                      <a16:colId xmlns:a16="http://schemas.microsoft.com/office/drawing/2014/main" val="20001"/>
+                    </a:ext>
+                  </a:extLst>
+                </a:gridCol>
+                <a:gridCol w="4572000">
+                  <a:extLst>
+                    <a:ext uri="{9D8B030D-6E8A-4147-A177-3AD203B41FA5}">
+                      <a16:colId xmlns:a16="http://schemas.microsoft.com/office/drawing/2014/main" val="20002"/>
+                    </a:ext>
+                  </a:extLst>
+                </a:gridCol>
+                <a:gridCol w="4206240">
+                  <a:extLst>
+                    <a:ext uri="{9D8B030D-6E8A-4147-A177-3AD203B41FA5}">
+                      <a16:colId xmlns:a16="http://schemas.microsoft.com/office/drawing/2014/main" val="20003"/>
+                    </a:ext>
+                  </a:extLst>
+                </a:gridCol>
               </a:tblGrid>
               <a:tr h="792480">
                 <a:tc>
@@ -7449,6 +8212,11 @@
                     </a:solidFill>
                   </a:tcPr>
                 </a:tc>
+                <a:extLst>
+                  <a:ext uri="{0D108BD9-81ED-4DB2-BD59-A6C34878D82A}">
+                    <a16:rowId xmlns:a16="http://schemas.microsoft.com/office/drawing/2014/main" val="10000"/>
+                  </a:ext>
+                </a:extLst>
               </a:tr>
               <a:tr h="792480">
                 <a:tc>
@@ -7535,6 +8303,11 @@
                     </a:solidFill>
                   </a:tcPr>
                 </a:tc>
+                <a:extLst>
+                  <a:ext uri="{0D108BD9-81ED-4DB2-BD59-A6C34878D82A}">
+                    <a16:rowId xmlns:a16="http://schemas.microsoft.com/office/drawing/2014/main" val="10001"/>
+                  </a:ext>
+                </a:extLst>
               </a:tr>
               <a:tr h="792480">
                 <a:tc>
@@ -7577,12 +8350,36 @@
                     <a:lstStyle/>
                     <a:p>
                       <a:r>
-                        <a:rPr sz="1100">
-                          <a:solidFill>
-                            <a:srgbClr val="3D424E"/>
-                          </a:solidFill>
-                        </a:rPr>
-                        <a:t>Capítulo 2 (Revisão — 11 tracks)</a:t>
+                        <a:rPr sz="1100" dirty="0" err="1">
+                          <a:solidFill>
+                            <a:srgbClr val="3D424E"/>
+                          </a:solidFill>
+                        </a:rPr>
+                        <a:t>Capítulo</a:t>
+                      </a:r>
+                      <a:r>
+                        <a:rPr sz="1100" dirty="0">
+                          <a:solidFill>
+                            <a:srgbClr val="3D424E"/>
+                          </a:solidFill>
+                        </a:rPr>
+                        <a:t> 2 (</a:t>
+                      </a:r>
+                      <a:r>
+                        <a:rPr sz="1100" dirty="0" err="1">
+                          <a:solidFill>
+                            <a:srgbClr val="3D424E"/>
+                          </a:solidFill>
+                        </a:rPr>
+                        <a:t>Revisão</a:t>
+                      </a:r>
+                      <a:r>
+                        <a:rPr sz="1100" dirty="0">
+                          <a:solidFill>
+                            <a:srgbClr val="3D424E"/>
+                          </a:solidFill>
+                        </a:rPr>
+                        <a:t> — 11 tracks)</a:t>
                       </a:r>
                     </a:p>
                   </a:txBody>
@@ -7605,6 +8402,11 @@
                   </a:txBody>
                   <a:tcPr/>
                 </a:tc>
+                <a:extLst>
+                  <a:ext uri="{0D108BD9-81ED-4DB2-BD59-A6C34878D82A}">
+                    <a16:rowId xmlns:a16="http://schemas.microsoft.com/office/drawing/2014/main" val="10002"/>
+                  </a:ext>
+                </a:extLst>
               </a:tr>
               <a:tr h="792480">
                 <a:tc>
@@ -7647,12 +8449,116 @@
                     <a:lstStyle/>
                     <a:p>
                       <a:r>
-                        <a:rPr sz="1100">
-                          <a:solidFill>
-                            <a:srgbClr val="3D424E"/>
-                          </a:solidFill>
-                        </a:rPr>
-                        <a:t>Capítulo 3 (Objetivos) e Capítulo 4 (Ampliação e busca de novas técnicas)</a:t>
+                        <a:rPr sz="1100" dirty="0" err="1">
+                          <a:solidFill>
+                            <a:srgbClr val="3D424E"/>
+                          </a:solidFill>
+                        </a:rPr>
+                        <a:t>Capítulo</a:t>
+                      </a:r>
+                      <a:r>
+                        <a:rPr sz="1100" dirty="0">
+                          <a:solidFill>
+                            <a:srgbClr val="3D424E"/>
+                          </a:solidFill>
+                        </a:rPr>
+                        <a:t> 3 (</a:t>
+                      </a:r>
+                      <a:r>
+                        <a:rPr sz="1100" dirty="0" err="1">
+                          <a:solidFill>
+                            <a:srgbClr val="3D424E"/>
+                          </a:solidFill>
+                        </a:rPr>
+                        <a:t>Objetivos</a:t>
+                      </a:r>
+                      <a:r>
+                        <a:rPr sz="1100" dirty="0">
+                          <a:solidFill>
+                            <a:srgbClr val="3D424E"/>
+                          </a:solidFill>
+                        </a:rPr>
+                        <a:t>) e </a:t>
+                      </a:r>
+                      <a:r>
+                        <a:rPr sz="1100" dirty="0" err="1">
+                          <a:solidFill>
+                            <a:srgbClr val="3D424E"/>
+                          </a:solidFill>
+                        </a:rPr>
+                        <a:t>Capítulo</a:t>
+                      </a:r>
+                      <a:r>
+                        <a:rPr sz="1100" dirty="0">
+                          <a:solidFill>
+                            <a:srgbClr val="3D424E"/>
+                          </a:solidFill>
+                        </a:rPr>
+                        <a:t> 4 (</a:t>
+                      </a:r>
+                      <a:r>
+                        <a:rPr sz="1100" dirty="0" err="1">
+                          <a:solidFill>
+                            <a:srgbClr val="3D424E"/>
+                          </a:solidFill>
+                        </a:rPr>
+                        <a:t>Ampliação</a:t>
+                      </a:r>
+                      <a:r>
+                        <a:rPr sz="1100" dirty="0">
+                          <a:solidFill>
+                            <a:srgbClr val="3D424E"/>
+                          </a:solidFill>
+                        </a:rPr>
+                        <a:t> e </a:t>
+                      </a:r>
+                      <a:r>
+                        <a:rPr sz="1100" dirty="0" err="1">
+                          <a:solidFill>
+                            <a:srgbClr val="3D424E"/>
+                          </a:solidFill>
+                        </a:rPr>
+                        <a:t>busca</a:t>
+                      </a:r>
+                      <a:r>
+                        <a:rPr sz="1100" dirty="0">
+                          <a:solidFill>
+                            <a:srgbClr val="3D424E"/>
+                          </a:solidFill>
+                        </a:rPr>
+                        <a:t> de </a:t>
+                      </a:r>
+                      <a:r>
+                        <a:rPr sz="1100" dirty="0" err="1">
+                          <a:solidFill>
+                            <a:srgbClr val="3D424E"/>
+                          </a:solidFill>
+                        </a:rPr>
+                        <a:t>novas</a:t>
+                      </a:r>
+                      <a:r>
+                        <a:rPr sz="1100" dirty="0">
+                          <a:solidFill>
+                            <a:srgbClr val="3D424E"/>
+                          </a:solidFill>
+                        </a:rPr>
+                        <a:t> </a:t>
+                      </a:r>
+                      <a:r>
+                        <a:rPr sz="1100" dirty="0" err="1">
+                          <a:solidFill>
+                            <a:srgbClr val="3D424E"/>
+                          </a:solidFill>
+                        </a:rPr>
+                        <a:t>técnicas</a:t>
+                      </a:r>
+                      <a:r>
+                        <a:rPr sz="1100" dirty="0">
+                          <a:solidFill>
+                            <a:srgbClr val="3D424E"/>
+                          </a:solidFill>
+                        </a:rPr>
+                        <a:t>)</a:t>
                       </a:r>
                     </a:p>
                   </a:txBody>
@@ -7675,6 +8581,11 @@
                   </a:txBody>
                   <a:tcPr/>
                 </a:tc>
+                <a:extLst>
+                  <a:ext uri="{0D108BD9-81ED-4DB2-BD59-A6C34878D82A}">
+                    <a16:rowId xmlns:a16="http://schemas.microsoft.com/office/drawing/2014/main" val="10003"/>
+                  </a:ext>
+                </a:extLst>
               </a:tr>
               <a:tr h="792480">
                 <a:tc>
@@ -7745,6 +8656,11 @@
                   </a:txBody>
                   <a:tcPr/>
                 </a:tc>
+                <a:extLst>
+                  <a:ext uri="{0D108BD9-81ED-4DB2-BD59-A6C34878D82A}">
+                    <a16:rowId xmlns:a16="http://schemas.microsoft.com/office/drawing/2014/main" val="10004"/>
+                  </a:ext>
+                </a:extLst>
               </a:tr>
               <a:tr h="792480">
                 <a:tc>
@@ -7804,17 +8720,43 @@
                     <a:lstStyle/>
                     <a:p>
                       <a:r>
-                        <a:rPr sz="1100">
-                          <a:solidFill>
-                            <a:srgbClr val="3D424E"/>
-                          </a:solidFill>
-                        </a:rPr>
-                        <a:t>Primeira revisão</a:t>
-                      </a:r>
-                    </a:p>
-                  </a:txBody>
-                  <a:tcPr/>
-                </a:tc>
+                        <a:rPr sz="1100" dirty="0" err="1">
+                          <a:solidFill>
+                            <a:srgbClr val="3D424E"/>
+                          </a:solidFill>
+                        </a:rPr>
+                        <a:t>Primeira</a:t>
+                      </a:r>
+                      <a:r>
+                        <a:rPr sz="1100" dirty="0">
+                          <a:solidFill>
+                            <a:srgbClr val="3D424E"/>
+                          </a:solidFill>
+                        </a:rPr>
+                        <a:t> </a:t>
+                      </a:r>
+                      <a:r>
+                        <a:rPr sz="1100" dirty="0" err="1">
+                          <a:solidFill>
+                            <a:srgbClr val="3D424E"/>
+                          </a:solidFill>
+                        </a:rPr>
+                        <a:t>revisão</a:t>
+                      </a:r>
+                      <a:endParaRPr sz="1100" dirty="0">
+                        <a:solidFill>
+                          <a:srgbClr val="3D424E"/>
+                        </a:solidFill>
+                      </a:endParaRPr>
+                    </a:p>
+                  </a:txBody>
+                  <a:tcPr/>
+                </a:tc>
+                <a:extLst>
+                  <a:ext uri="{0D108BD9-81ED-4DB2-BD59-A6C34878D82A}">
+                    <a16:rowId xmlns:a16="http://schemas.microsoft.com/office/drawing/2014/main" val="10005"/>
+                  </a:ext>
+                </a:extLst>
               </a:tr>
             </a:tbl>
           </a:graphicData>
@@ -7863,8 +8805,8 @@
 </p:sld>
 </file>
 
-<file path=ppt/slides/slide22.xml><?xml version="1.0" encoding="utf-8"?>
-<p:sld xmlns:a="http://schemas.openxmlformats.org/drawingml/2006/main" xmlns:p="http://schemas.openxmlformats.org/presentationml/2006/main" xmlns:r="http://schemas.openxmlformats.org/officeDocument/2006/relationships">
+<file path=ppt/slides/slide24.xml><?xml version="1.0" encoding="utf-8"?>
+<p:sld xmlns:a="http://schemas.openxmlformats.org/drawingml/2006/main" xmlns:r="http://schemas.openxmlformats.org/officeDocument/2006/relationships" xmlns:p="http://schemas.openxmlformats.org/presentationml/2006/main">
   <p:cSld>
     <p:spTree>
       <p:nvGrpSpPr>
@@ -7872,7 +8814,14 @@
         <p:cNvGrpSpPr/>
         <p:nvPr/>
       </p:nvGrpSpPr>
-      <p:grpSpPr/>
+      <p:grpSpPr>
+        <a:xfrm>
+          <a:off x="0" y="0"/>
+          <a:ext cx="0" cy="0"/>
+          <a:chOff x="0" y="0"/>
+          <a:chExt cx="0" cy="0"/>
+        </a:xfrm>
+      </p:grpSpPr>
       <p:sp>
         <p:nvSpPr>
           <p:cNvPr id="2" name="TextBox 1"/>
@@ -7948,6 +8897,7 @@
           <a:lstStyle/>
           <a:p>
             <a:pPr algn="ctr"/>
+            <a:endParaRPr/>
           </a:p>
         </p:txBody>
       </p:sp>
@@ -8097,8 +9047,8 @@
 </p:sld>
 </file>
 
-<file path=ppt/slides/slide23.xml><?xml version="1.0" encoding="utf-8"?>
-<p:sld xmlns:a="http://schemas.openxmlformats.org/drawingml/2006/main" xmlns:p="http://schemas.openxmlformats.org/presentationml/2006/main" xmlns:r="http://schemas.openxmlformats.org/officeDocument/2006/relationships">
+<file path=ppt/slides/slide25.xml><?xml version="1.0" encoding="utf-8"?>
+<p:sld xmlns:a="http://schemas.openxmlformats.org/drawingml/2006/main" xmlns:r="http://schemas.openxmlformats.org/officeDocument/2006/relationships" xmlns:p="http://schemas.openxmlformats.org/presentationml/2006/main">
   <p:cSld>
     <p:spTree>
       <p:nvGrpSpPr>
@@ -8106,7 +9056,14 @@
         <p:cNvGrpSpPr/>
         <p:nvPr/>
       </p:nvGrpSpPr>
-      <p:grpSpPr/>
+      <p:grpSpPr>
+        <a:xfrm>
+          <a:off x="0" y="0"/>
+          <a:ext cx="0" cy="0"/>
+          <a:chOff x="0" y="0"/>
+          <a:chExt cx="0" cy="0"/>
+        </a:xfrm>
+      </p:grpSpPr>
       <p:sp>
         <p:nvSpPr>
           <p:cNvPr id="2" name="TextBox 1"/>
@@ -8182,6 +9139,7 @@
           <a:lstStyle/>
           <a:p>
             <a:pPr algn="ctr"/>
+            <a:endParaRPr/>
           </a:p>
         </p:txBody>
       </p:sp>
@@ -8358,14 +9316,6 @@
               </a:rPr>
               <a:t>  </a:t>
             </a:r>
-            <a:r>
-              <a:rPr sz="1600">
-                <a:solidFill>
-                  <a:srgbClr val="3D424E"/>
-                </a:solidFill>
-              </a:rPr>
-              <a:t/>
-            </a:r>
           </a:p>
           <a:p>
             <a:pPr>
@@ -8400,8 +9350,8 @@
 </p:sld>
 </file>
 
-<file path=ppt/slides/slide24.xml><?xml version="1.0" encoding="utf-8"?>
-<p:sld xmlns:a="http://schemas.openxmlformats.org/drawingml/2006/main" xmlns:p="http://schemas.openxmlformats.org/presentationml/2006/main" xmlns:r="http://schemas.openxmlformats.org/officeDocument/2006/relationships">
+<file path=ppt/slides/slide26.xml><?xml version="1.0" encoding="utf-8"?>
+<p:sld xmlns:a="http://schemas.openxmlformats.org/drawingml/2006/main" xmlns:r="http://schemas.openxmlformats.org/officeDocument/2006/relationships" xmlns:p="http://schemas.openxmlformats.org/presentationml/2006/main">
   <p:cSld>
     <p:spTree>
       <p:nvGrpSpPr>
@@ -8409,7 +9359,14 @@
         <p:cNvGrpSpPr/>
         <p:nvPr/>
       </p:nvGrpSpPr>
-      <p:grpSpPr/>
+      <p:grpSpPr>
+        <a:xfrm>
+          <a:off x="0" y="0"/>
+          <a:ext cx="0" cy="0"/>
+          <a:chOff x="0" y="0"/>
+          <a:chExt cx="0" cy="0"/>
+        </a:xfrm>
+      </p:grpSpPr>
       <p:sp>
         <p:nvSpPr>
           <p:cNvPr id="2" name="Rectangle 1"/>
@@ -8450,6 +9407,7 @@
           <a:lstStyle/>
           <a:p>
             <a:pPr algn="ctr"/>
+            <a:endParaRPr/>
           </a:p>
         </p:txBody>
       </p:sp>
@@ -8482,6 +9440,7 @@
                 </a:solidFill>
               </a:defRPr>
             </a:pPr>
+            <a:endParaRPr/>
           </a:p>
         </p:txBody>
       </p:sp>
@@ -8541,7 +9500,7 @@
 </file>
 
 <file path=ppt/slides/slide3.xml><?xml version="1.0" encoding="utf-8"?>
-<p:sld xmlns:a="http://schemas.openxmlformats.org/drawingml/2006/main" xmlns:p="http://schemas.openxmlformats.org/presentationml/2006/main" xmlns:r="http://schemas.openxmlformats.org/officeDocument/2006/relationships">
+<p:sld xmlns:a="http://schemas.openxmlformats.org/drawingml/2006/main" xmlns:r="http://schemas.openxmlformats.org/officeDocument/2006/relationships" xmlns:p="http://schemas.openxmlformats.org/presentationml/2006/main">
   <p:cSld>
     <p:spTree>
       <p:nvGrpSpPr>
@@ -8549,7 +9508,14 @@
         <p:cNvGrpSpPr/>
         <p:nvPr/>
       </p:nvGrpSpPr>
-      <p:grpSpPr/>
+      <p:grpSpPr>
+        <a:xfrm>
+          <a:off x="0" y="0"/>
+          <a:ext cx="0" cy="0"/>
+          <a:chOff x="0" y="0"/>
+          <a:chExt cx="0" cy="0"/>
+        </a:xfrm>
+      </p:grpSpPr>
       <p:sp>
         <p:nvSpPr>
           <p:cNvPr id="2" name="Rectangle 1"/>
@@ -8590,6 +9556,7 @@
           <a:lstStyle/>
           <a:p>
             <a:pPr algn="ctr"/>
+            <a:endParaRPr/>
           </a:p>
         </p:txBody>
       </p:sp>
@@ -8684,7 +9651,7 @@
 </file>
 
 <file path=ppt/slides/slide4.xml><?xml version="1.0" encoding="utf-8"?>
-<p:sld xmlns:a="http://schemas.openxmlformats.org/drawingml/2006/main" xmlns:p="http://schemas.openxmlformats.org/presentationml/2006/main" xmlns:r="http://schemas.openxmlformats.org/officeDocument/2006/relationships">
+<p:sld xmlns:a="http://schemas.openxmlformats.org/drawingml/2006/main" xmlns:r="http://schemas.openxmlformats.org/officeDocument/2006/relationships" xmlns:p="http://schemas.openxmlformats.org/presentationml/2006/main">
   <p:cSld>
     <p:spTree>
       <p:nvGrpSpPr>
@@ -8692,7 +9659,14 @@
         <p:cNvGrpSpPr/>
         <p:nvPr/>
       </p:nvGrpSpPr>
-      <p:grpSpPr/>
+      <p:grpSpPr>
+        <a:xfrm>
+          <a:off x="0" y="0"/>
+          <a:ext cx="0" cy="0"/>
+          <a:chOff x="0" y="0"/>
+          <a:chExt cx="0" cy="0"/>
+        </a:xfrm>
+      </p:grpSpPr>
       <p:sp>
         <p:nvSpPr>
           <p:cNvPr id="2" name="TextBox 1"/>
@@ -8768,6 +9742,7 @@
           <a:lstStyle/>
           <a:p>
             <a:pPr algn="ctr"/>
+            <a:endParaRPr/>
           </a:p>
         </p:txBody>
       </p:sp>
@@ -8790,10 +9765,34 @@
                 <a:tableStyleId>{5C22544A-7EE6-4342-B048-85BDC9FD1C3A}</a:tableStyleId>
               </a:tblPr>
               <a:tblGrid>
-                <a:gridCol w="457200"/>
-                <a:gridCol w="4206240"/>
-                <a:gridCol w="1828800"/>
-                <a:gridCol w="4937760"/>
+                <a:gridCol w="457200">
+                  <a:extLst>
+                    <a:ext uri="{9D8B030D-6E8A-4147-A177-3AD203B41FA5}">
+                      <a16:colId xmlns:a16="http://schemas.microsoft.com/office/drawing/2014/main" val="20000"/>
+                    </a:ext>
+                  </a:extLst>
+                </a:gridCol>
+                <a:gridCol w="4206240">
+                  <a:extLst>
+                    <a:ext uri="{9D8B030D-6E8A-4147-A177-3AD203B41FA5}">
+                      <a16:colId xmlns:a16="http://schemas.microsoft.com/office/drawing/2014/main" val="20001"/>
+                    </a:ext>
+                  </a:extLst>
+                </a:gridCol>
+                <a:gridCol w="1828800">
+                  <a:extLst>
+                    <a:ext uri="{9D8B030D-6E8A-4147-A177-3AD203B41FA5}">
+                      <a16:colId xmlns:a16="http://schemas.microsoft.com/office/drawing/2014/main" val="20002"/>
+                    </a:ext>
+                  </a:extLst>
+                </a:gridCol>
+                <a:gridCol w="4937760">
+                  <a:extLst>
+                    <a:ext uri="{9D8B030D-6E8A-4147-A177-3AD203B41FA5}">
+                      <a16:colId xmlns:a16="http://schemas.microsoft.com/office/drawing/2014/main" val="20003"/>
+                    </a:ext>
+                  </a:extLst>
+                </a:gridCol>
               </a:tblGrid>
               <a:tr h="679268">
                 <a:tc>
@@ -8880,6 +9879,11 @@
                     </a:solidFill>
                   </a:tcPr>
                 </a:tc>
+                <a:extLst>
+                  <a:ext uri="{0D108BD9-81ED-4DB2-BD59-A6C34878D82A}">
+                    <a16:rowId xmlns:a16="http://schemas.microsoft.com/office/drawing/2014/main" val="10000"/>
+                  </a:ext>
+                </a:extLst>
               </a:tr>
               <a:tr h="679268">
                 <a:tc>
@@ -8950,6 +9954,11 @@
                   </a:txBody>
                   <a:tcPr/>
                 </a:tc>
+                <a:extLst>
+                  <a:ext uri="{0D108BD9-81ED-4DB2-BD59-A6C34878D82A}">
+                    <a16:rowId xmlns:a16="http://schemas.microsoft.com/office/drawing/2014/main" val="10001"/>
+                  </a:ext>
+                </a:extLst>
               </a:tr>
               <a:tr h="679268">
                 <a:tc>
@@ -8975,13 +9984,34 @@
                     <a:lstStyle/>
                     <a:p>
                       <a:r>
-                        <a:rPr sz="1100">
-                          <a:solidFill>
-                            <a:srgbClr val="3D424E"/>
-                          </a:solidFill>
-                        </a:rPr>
-                        <a:t>SkinToneNet pré-treinado</a:t>
-                      </a:r>
+                        <a:rPr sz="1100" dirty="0" err="1">
+                          <a:solidFill>
+                            <a:srgbClr val="3D424E"/>
+                          </a:solidFill>
+                        </a:rPr>
+                        <a:t>SkinToneNet</a:t>
+                      </a:r>
+                      <a:r>
+                        <a:rPr sz="1100" dirty="0">
+                          <a:solidFill>
+                            <a:srgbClr val="3D424E"/>
+                          </a:solidFill>
+                        </a:rPr>
+                        <a:t> </a:t>
+                      </a:r>
+                      <a:r>
+                        <a:rPr sz="1100" dirty="0" err="1">
+                          <a:solidFill>
+                            <a:srgbClr val="3D424E"/>
+                          </a:solidFill>
+                        </a:rPr>
+                        <a:t>pré-treinado</a:t>
+                      </a:r>
+                      <a:endParaRPr sz="1100" dirty="0">
+                        <a:solidFill>
+                          <a:srgbClr val="3D424E"/>
+                        </a:solidFill>
+                      </a:endParaRPr>
                     </a:p>
                   </a:txBody>
                   <a:tcPr/>
@@ -9020,6 +10050,11 @@
                   </a:txBody>
                   <a:tcPr/>
                 </a:tc>
+                <a:extLst>
+                  <a:ext uri="{0D108BD9-81ED-4DB2-BD59-A6C34878D82A}">
+                    <a16:rowId xmlns:a16="http://schemas.microsoft.com/office/drawing/2014/main" val="10002"/>
+                  </a:ext>
+                </a:extLst>
               </a:tr>
               <a:tr h="679268">
                 <a:tc>
@@ -9090,6 +10125,11 @@
                   </a:txBody>
                   <a:tcPr/>
                 </a:tc>
+                <a:extLst>
+                  <a:ext uri="{0D108BD9-81ED-4DB2-BD59-A6C34878D82A}">
+                    <a16:rowId xmlns:a16="http://schemas.microsoft.com/office/drawing/2014/main" val="10003"/>
+                  </a:ext>
+                </a:extLst>
               </a:tr>
               <a:tr h="679268">
                 <a:tc>
@@ -9160,6 +10200,11 @@
                   </a:txBody>
                   <a:tcPr/>
                 </a:tc>
+                <a:extLst>
+                  <a:ext uri="{0D108BD9-81ED-4DB2-BD59-A6C34878D82A}">
+                    <a16:rowId xmlns:a16="http://schemas.microsoft.com/office/drawing/2014/main" val="10004"/>
+                  </a:ext>
+                </a:extLst>
               </a:tr>
               <a:tr h="679268">
                 <a:tc>
@@ -9230,6 +10275,11 @@
                   </a:txBody>
                   <a:tcPr/>
                 </a:tc>
+                <a:extLst>
+                  <a:ext uri="{0D108BD9-81ED-4DB2-BD59-A6C34878D82A}">
+                    <a16:rowId xmlns:a16="http://schemas.microsoft.com/office/drawing/2014/main" val="10005"/>
+                  </a:ext>
+                </a:extLst>
               </a:tr>
               <a:tr h="679272">
                 <a:tc>
@@ -9301,13 +10351,98 @@
                     <a:lstStyle/>
                     <a:p>
                       <a:r>
-                        <a:rPr sz="1100">
-                          <a:solidFill>
-                            <a:srgbClr val="3D424E"/>
-                          </a:solidFill>
-                        </a:rPr>
-                        <a:t>Estrutura sendo organizada — LaTeX ainda não iniciado</a:t>
-                      </a:r>
+                        <a:rPr sz="1100" dirty="0" err="1">
+                          <a:solidFill>
+                            <a:srgbClr val="3D424E"/>
+                          </a:solidFill>
+                        </a:rPr>
+                        <a:t>Estrutura</a:t>
+                      </a:r>
+                      <a:r>
+                        <a:rPr sz="1100" dirty="0">
+                          <a:solidFill>
+                            <a:srgbClr val="3D424E"/>
+                          </a:solidFill>
+                        </a:rPr>
+                        <a:t> </a:t>
+                      </a:r>
+                      <a:r>
+                        <a:rPr sz="1100" dirty="0" err="1">
+                          <a:solidFill>
+                            <a:srgbClr val="3D424E"/>
+                          </a:solidFill>
+                        </a:rPr>
+                        <a:t>sendo</a:t>
+                      </a:r>
+                      <a:r>
+                        <a:rPr sz="1100" dirty="0">
+                          <a:solidFill>
+                            <a:srgbClr val="3D424E"/>
+                          </a:solidFill>
+                        </a:rPr>
+                        <a:t> </a:t>
+                      </a:r>
+                      <a:r>
+                        <a:rPr sz="1100" dirty="0" err="1">
+                          <a:solidFill>
+                            <a:srgbClr val="3D424E"/>
+                          </a:solidFill>
+                        </a:rPr>
+                        <a:t>organizada</a:t>
+                      </a:r>
+                      <a:r>
+                        <a:rPr sz="1100" dirty="0">
+                          <a:solidFill>
+                            <a:srgbClr val="3D424E"/>
+                          </a:solidFill>
+                        </a:rPr>
+                        <a:t> — LaTeX </a:t>
+                      </a:r>
+                      <a:r>
+                        <a:rPr sz="1100" dirty="0" err="1">
+                          <a:solidFill>
+                            <a:srgbClr val="3D424E"/>
+                          </a:solidFill>
+                        </a:rPr>
+                        <a:t>ainda</a:t>
+                      </a:r>
+                      <a:r>
+                        <a:rPr sz="1100" dirty="0">
+                          <a:solidFill>
+                            <a:srgbClr val="3D424E"/>
+                          </a:solidFill>
+                        </a:rPr>
+                        <a:t> </a:t>
+                      </a:r>
+                      <a:r>
+                        <a:rPr sz="1100" dirty="0" err="1">
+                          <a:solidFill>
+                            <a:srgbClr val="3D424E"/>
+                          </a:solidFill>
+                        </a:rPr>
+                        <a:t>não</a:t>
+                      </a:r>
+                      <a:r>
+                        <a:rPr sz="1100" dirty="0">
+                          <a:solidFill>
+                            <a:srgbClr val="3D424E"/>
+                          </a:solidFill>
+                        </a:rPr>
+                        <a:t> </a:t>
+                      </a:r>
+                      <a:r>
+                        <a:rPr sz="1100" dirty="0" err="1">
+                          <a:solidFill>
+                            <a:srgbClr val="3D424E"/>
+                          </a:solidFill>
+                        </a:rPr>
+                        <a:t>iniciado</a:t>
+                      </a:r>
+                      <a:endParaRPr sz="1100" dirty="0">
+                        <a:solidFill>
+                          <a:srgbClr val="3D424E"/>
+                        </a:solidFill>
+                      </a:endParaRPr>
                     </a:p>
                   </a:txBody>
                   <a:tcPr>
@@ -9316,6 +10451,11 @@
                     </a:solidFill>
                   </a:tcPr>
                 </a:tc>
+                <a:extLst>
+                  <a:ext uri="{0D108BD9-81ED-4DB2-BD59-A6C34878D82A}">
+                    <a16:rowId xmlns:a16="http://schemas.microsoft.com/office/drawing/2014/main" val="10006"/>
+                  </a:ext>
+                </a:extLst>
               </a:tr>
             </a:tbl>
           </a:graphicData>
@@ -9351,8 +10491,54 @@
               </a:defRPr>
             </a:pPr>
             <a:r>
-              <a:t>5 itens concluídos e 1 em andamento conforme planejado</a:t>
-            </a:r>
+              <a:rPr dirty="0"/>
+              <a:t>5 </a:t>
+            </a:r>
+            <a:r>
+              <a:rPr dirty="0" err="1"/>
+              <a:t>itens</a:t>
+            </a:r>
+            <a:r>
+              <a:rPr dirty="0"/>
+              <a:t> </a:t>
+            </a:r>
+            <a:r>
+              <a:rPr dirty="0" err="1"/>
+              <a:t>concluídos</a:t>
+            </a:r>
+            <a:r>
+              <a:rPr dirty="0"/>
+              <a:t> e 1 </a:t>
+            </a:r>
+            <a:r>
+              <a:rPr dirty="0" err="1"/>
+              <a:t>em</a:t>
+            </a:r>
+            <a:r>
+              <a:rPr dirty="0"/>
+              <a:t> </a:t>
+            </a:r>
+            <a:r>
+              <a:rPr dirty="0" err="1"/>
+              <a:t>andamento</a:t>
+            </a:r>
+            <a:r>
+              <a:rPr dirty="0"/>
+              <a:t> </a:t>
+            </a:r>
+            <a:r>
+              <a:rPr dirty="0" err="1"/>
+              <a:t>conforme</a:t>
+            </a:r>
+            <a:r>
+              <a:rPr dirty="0"/>
+              <a:t> </a:t>
+            </a:r>
+            <a:r>
+              <a:rPr dirty="0" err="1"/>
+              <a:t>planejado</a:t>
+            </a:r>
+            <a:endParaRPr dirty="0"/>
           </a:p>
         </p:txBody>
       </p:sp>
@@ -9365,7 +10551,7 @@
 </file>
 
 <file path=ppt/slides/slide5.xml><?xml version="1.0" encoding="utf-8"?>
-<p:sld xmlns:a="http://schemas.openxmlformats.org/drawingml/2006/main" xmlns:p="http://schemas.openxmlformats.org/presentationml/2006/main" xmlns:r="http://schemas.openxmlformats.org/officeDocument/2006/relationships">
+<p:sld xmlns:a="http://schemas.openxmlformats.org/drawingml/2006/main" xmlns:r="http://schemas.openxmlformats.org/officeDocument/2006/relationships" xmlns:p="http://schemas.openxmlformats.org/presentationml/2006/main">
   <p:cSld>
     <p:spTree>
       <p:nvGrpSpPr>
@@ -9373,7 +10559,14 @@
         <p:cNvGrpSpPr/>
         <p:nvPr/>
       </p:nvGrpSpPr>
-      <p:grpSpPr/>
+      <p:grpSpPr>
+        <a:xfrm>
+          <a:off x="0" y="0"/>
+          <a:ext cx="0" cy="0"/>
+          <a:chOff x="0" y="0"/>
+          <a:chExt cx="0" cy="0"/>
+        </a:xfrm>
+      </p:grpSpPr>
       <p:sp>
         <p:nvSpPr>
           <p:cNvPr id="2" name="Rectangle 1"/>
@@ -9414,6 +10607,7 @@
           <a:lstStyle/>
           <a:p>
             <a:pPr algn="ctr"/>
+            <a:endParaRPr/>
           </a:p>
         </p:txBody>
       </p:sp>
@@ -9508,7 +10702,7 @@
 </file>
 
 <file path=ppt/slides/slide6.xml><?xml version="1.0" encoding="utf-8"?>
-<p:sld xmlns:a="http://schemas.openxmlformats.org/drawingml/2006/main" xmlns:p="http://schemas.openxmlformats.org/presentationml/2006/main" xmlns:r="http://schemas.openxmlformats.org/officeDocument/2006/relationships">
+<p:sld xmlns:a="http://schemas.openxmlformats.org/drawingml/2006/main" xmlns:r="http://schemas.openxmlformats.org/officeDocument/2006/relationships" xmlns:p="http://schemas.openxmlformats.org/presentationml/2006/main">
   <p:cSld>
     <p:spTree>
       <p:nvGrpSpPr>
@@ -9516,7 +10710,14 @@
         <p:cNvGrpSpPr/>
         <p:nvPr/>
       </p:nvGrpSpPr>
-      <p:grpSpPr/>
+      <p:grpSpPr>
+        <a:xfrm>
+          <a:off x="0" y="0"/>
+          <a:ext cx="0" cy="0"/>
+          <a:chOff x="0" y="0"/>
+          <a:chExt cx="0" cy="0"/>
+        </a:xfrm>
+      </p:grpSpPr>
       <p:sp>
         <p:nvSpPr>
           <p:cNvPr id="2" name="TextBox 1"/>
@@ -9592,6 +10793,7 @@
           <a:lstStyle/>
           <a:p>
             <a:pPr algn="ctr"/>
+            <a:endParaRPr/>
           </a:p>
         </p:txBody>
       </p:sp>
@@ -9745,14 +10947,6 @@
               </a:rPr>
               <a:t>  </a:t>
             </a:r>
-            <a:r>
-              <a:rPr sz="1600">
-                <a:solidFill>
-                  <a:srgbClr val="3D424E"/>
-                </a:solidFill>
-              </a:rPr>
-              <a:t/>
-            </a:r>
           </a:p>
           <a:p>
             <a:pPr>
@@ -9788,7 +10982,7 @@
 </file>
 
 <file path=ppt/slides/slide7.xml><?xml version="1.0" encoding="utf-8"?>
-<p:sld xmlns:a="http://schemas.openxmlformats.org/drawingml/2006/main" xmlns:p="http://schemas.openxmlformats.org/presentationml/2006/main" xmlns:r="http://schemas.openxmlformats.org/officeDocument/2006/relationships">
+<p:sld xmlns:a="http://schemas.openxmlformats.org/drawingml/2006/main" xmlns:r="http://schemas.openxmlformats.org/officeDocument/2006/relationships" xmlns:p="http://schemas.openxmlformats.org/presentationml/2006/main">
   <p:cSld>
     <p:spTree>
       <p:nvGrpSpPr>
@@ -9796,7 +10990,14 @@
         <p:cNvGrpSpPr/>
         <p:nvPr/>
       </p:nvGrpSpPr>
-      <p:grpSpPr/>
+      <p:grpSpPr>
+        <a:xfrm>
+          <a:off x="0" y="0"/>
+          <a:ext cx="0" cy="0"/>
+          <a:chOff x="0" y="0"/>
+          <a:chExt cx="0" cy="0"/>
+        </a:xfrm>
+      </p:grpSpPr>
       <p:sp>
         <p:nvSpPr>
           <p:cNvPr id="2" name="TextBox 1"/>
@@ -9872,6 +11073,7 @@
           <a:lstStyle/>
           <a:p>
             <a:pPr algn="ctr"/>
+            <a:endParaRPr/>
           </a:p>
         </p:txBody>
       </p:sp>
@@ -9881,11 +11083,17 @@
           <p:cNvGraphicFramePr>
             <a:graphicFrameLocks noGrp="1"/>
           </p:cNvGraphicFramePr>
-          <p:nvPr/>
+          <p:nvPr>
+            <p:extLst>
+              <p:ext uri="{D42A27DB-BD31-4B8C-83A1-F6EECF244321}">
+                <p14:modId xmlns:p14="http://schemas.microsoft.com/office/powerpoint/2010/main" val="2817735809"/>
+              </p:ext>
+            </p:extLst>
+          </p:nvPr>
         </p:nvGraphicFramePr>
         <p:xfrm>
           <a:off x="457200" y="1371600"/>
-          <a:ext cx="11430000" cy="4754880"/>
+          <a:ext cx="11430000" cy="4968240"/>
         </p:xfrm>
         <a:graphic>
           <a:graphicData uri="http://schemas.openxmlformats.org/drawingml/2006/table">
@@ -9894,11 +11102,41 @@
                 <a:tableStyleId>{5C22544A-7EE6-4342-B048-85BDC9FD1C3A}</a:tableStyleId>
               </a:tblPr>
               <a:tblGrid>
-                <a:gridCol w="640080"/>
-                <a:gridCol w="1920240"/>
-                <a:gridCol w="3108960"/>
-                <a:gridCol w="5120640"/>
-                <a:gridCol w="640080"/>
+                <a:gridCol w="640080">
+                  <a:extLst>
+                    <a:ext uri="{9D8B030D-6E8A-4147-A177-3AD203B41FA5}">
+                      <a16:colId xmlns:a16="http://schemas.microsoft.com/office/drawing/2014/main" val="20000"/>
+                    </a:ext>
+                  </a:extLst>
+                </a:gridCol>
+                <a:gridCol w="1920240">
+                  <a:extLst>
+                    <a:ext uri="{9D8B030D-6E8A-4147-A177-3AD203B41FA5}">
+                      <a16:colId xmlns:a16="http://schemas.microsoft.com/office/drawing/2014/main" val="20001"/>
+                    </a:ext>
+                  </a:extLst>
+                </a:gridCol>
+                <a:gridCol w="3108960">
+                  <a:extLst>
+                    <a:ext uri="{9D8B030D-6E8A-4147-A177-3AD203B41FA5}">
+                      <a16:colId xmlns:a16="http://schemas.microsoft.com/office/drawing/2014/main" val="20002"/>
+                    </a:ext>
+                  </a:extLst>
+                </a:gridCol>
+                <a:gridCol w="5120640">
+                  <a:extLst>
+                    <a:ext uri="{9D8B030D-6E8A-4147-A177-3AD203B41FA5}">
+                      <a16:colId xmlns:a16="http://schemas.microsoft.com/office/drawing/2014/main" val="20003"/>
+                    </a:ext>
+                  </a:extLst>
+                </a:gridCol>
+                <a:gridCol w="640080">
+                  <a:extLst>
+                    <a:ext uri="{9D8B030D-6E8A-4147-A177-3AD203B41FA5}">
+                      <a16:colId xmlns:a16="http://schemas.microsoft.com/office/drawing/2014/main" val="20004"/>
+                    </a:ext>
+                  </a:extLst>
+                </a:gridCol>
               </a:tblGrid>
               <a:tr h="396240">
                 <a:tc>
@@ -10006,6 +11244,11 @@
                     </a:solidFill>
                   </a:tcPr>
                 </a:tc>
+                <a:extLst>
+                  <a:ext uri="{0D108BD9-81ED-4DB2-BD59-A6C34878D82A}">
+                    <a16:rowId xmlns:a16="http://schemas.microsoft.com/office/drawing/2014/main" val="10000"/>
+                  </a:ext>
+                </a:extLst>
               </a:tr>
               <a:tr h="396240">
                 <a:tc>
@@ -10031,7 +11274,7 @@
                     <a:lstStyle/>
                     <a:p>
                       <a:r>
-                        <a:rPr sz="1100">
+                        <a:rPr sz="1100" dirty="0">
                           <a:solidFill>
                             <a:srgbClr val="3D424E"/>
                           </a:solidFill>
@@ -10065,24 +11308,71 @@
                     <a:lstStyle/>
                     <a:p>
                       <a:r>
-                        <a:rPr sz="1100">
-                          <a:solidFill>
-                            <a:srgbClr val="3D424E"/>
-                          </a:solidFill>
-                        </a:rPr>
-                        <a:t>Kärkkäinen &amp; Joo 2021, AlDahoul 2024, Lin (FairGRAPE) 2022</a:t>
-                      </a:r>
-                    </a:p>
-                  </a:txBody>
-                  <a:tcPr/>
-                </a:tc>
-                <a:tc>
-                  <a:txBody>
-                    <a:bodyPr/>
-                    <a:lstStyle/>
-                    <a:p>
-                      <a:r>
-                        <a:rPr sz="1100">
+                        <a:rPr sz="1100" dirty="0">
+                          <a:solidFill>
+                            <a:srgbClr val="3D424E"/>
+                          </a:solidFill>
+                          <a:highlight>
+                            <a:srgbClr val="00FF00"/>
+                          </a:highlight>
+                        </a:rPr>
+                        <a:t>Kärkkäinen &amp; Joo 2021, </a:t>
+                      </a:r>
+                      <a:r>
+                        <a:rPr sz="1100" dirty="0" err="1">
+                          <a:solidFill>
+                            <a:srgbClr val="3D424E"/>
+                          </a:solidFill>
+                          <a:highlight>
+                            <a:srgbClr val="00FF00"/>
+                          </a:highlight>
+                        </a:rPr>
+                        <a:t>AlDahoul</a:t>
+                      </a:r>
+                      <a:r>
+                        <a:rPr sz="1100" dirty="0">
+                          <a:solidFill>
+                            <a:srgbClr val="3D424E"/>
+                          </a:solidFill>
+                          <a:highlight>
+                            <a:srgbClr val="00FF00"/>
+                          </a:highlight>
+                        </a:rPr>
+                        <a:t> 2024, Lin (</a:t>
+                      </a:r>
+                      <a:r>
+                        <a:rPr sz="1100" dirty="0" err="1">
+                          <a:solidFill>
+                            <a:srgbClr val="3D424E"/>
+                          </a:solidFill>
+                          <a:highlight>
+                            <a:srgbClr val="00FF00"/>
+                          </a:highlight>
+                        </a:rPr>
+                        <a:t>FairGRAPE</a:t>
+                      </a:r>
+                      <a:r>
+                        <a:rPr sz="1100" dirty="0">
+                          <a:solidFill>
+                            <a:srgbClr val="3D424E"/>
+                          </a:solidFill>
+                          <a:highlight>
+                            <a:srgbClr val="00FF00"/>
+                          </a:highlight>
+                        </a:rPr>
+                        <a:t>) 2022</a:t>
+                      </a:r>
+                    </a:p>
+                  </a:txBody>
+                  <a:tcPr/>
+                </a:tc>
+                <a:tc>
+                  <a:txBody>
+                    <a:bodyPr/>
+                    <a:lstStyle/>
+                    <a:p>
+                      <a:r>
+                        <a:rPr sz="1100" dirty="0">
                           <a:solidFill>
                             <a:srgbClr val="3D424E"/>
                           </a:solidFill>
@@ -10093,6 +11383,11 @@
                   </a:txBody>
                   <a:tcPr/>
                 </a:tc>
+                <a:extLst>
+                  <a:ext uri="{0D108BD9-81ED-4DB2-BD59-A6C34878D82A}">
+                    <a16:rowId xmlns:a16="http://schemas.microsoft.com/office/drawing/2014/main" val="10001"/>
+                  </a:ext>
+                </a:extLst>
               </a:tr>
               <a:tr h="396240">
                 <a:tc>
@@ -10152,24 +11447,49 @@
                     <a:lstStyle/>
                     <a:p>
                       <a:r>
-                        <a:rPr sz="1100">
-                          <a:solidFill>
-                            <a:srgbClr val="3D424E"/>
-                          </a:solidFill>
-                        </a:rPr>
-                        <a:t>Buolamwini 2018, Grother (NIST) 2019, Wang (RFW) 2019</a:t>
-                      </a:r>
-                    </a:p>
-                  </a:txBody>
-                  <a:tcPr/>
-                </a:tc>
-                <a:tc>
-                  <a:txBody>
-                    <a:bodyPr/>
-                    <a:lstStyle/>
-                    <a:p>
-                      <a:r>
-                        <a:rPr sz="1100">
+                        <a:rPr sz="1100" dirty="0" err="1">
+                          <a:solidFill>
+                            <a:srgbClr val="3D424E"/>
+                          </a:solidFill>
+                          <a:highlight>
+                            <a:srgbClr val="00FF00"/>
+                          </a:highlight>
+                        </a:rPr>
+                        <a:t>Buolamwini</a:t>
+                      </a:r>
+                      <a:r>
+                        <a:rPr sz="1100" dirty="0">
+                          <a:solidFill>
+                            <a:srgbClr val="3D424E"/>
+                          </a:solidFill>
+                          <a:highlight>
+                            <a:srgbClr val="00FF00"/>
+                          </a:highlight>
+                        </a:rPr>
+                        <a:t> 2018</a:t>
+                      </a:r>
+                      <a:r>
+                        <a:rPr sz="1100" dirty="0">
+                          <a:solidFill>
+                            <a:srgbClr val="3D424E"/>
+                          </a:solidFill>
+                          <a:highlight>
+                            <a:srgbClr val="FFFF00"/>
+                          </a:highlight>
+                        </a:rPr>
+                        <a:t>, Grother (NIST) 2019, Wang (RFW) 2019</a:t>
+                      </a:r>
+                    </a:p>
+                  </a:txBody>
+                  <a:tcPr/>
+                </a:tc>
+                <a:tc>
+                  <a:txBody>
+                    <a:bodyPr/>
+                    <a:lstStyle/>
+                    <a:p>
+                      <a:r>
+                        <a:rPr sz="1100" dirty="0">
                           <a:solidFill>
                             <a:srgbClr val="3D424E"/>
                           </a:solidFill>
@@ -10180,6 +11500,11 @@
                   </a:txBody>
                   <a:tcPr/>
                 </a:tc>
+                <a:extLst>
+                  <a:ext uri="{0D108BD9-81ED-4DB2-BD59-A6C34878D82A}">
+                    <a16:rowId xmlns:a16="http://schemas.microsoft.com/office/drawing/2014/main" val="10002"/>
+                  </a:ext>
+                </a:extLst>
               </a:tr>
               <a:tr h="396240">
                 <a:tc>
@@ -10239,24 +11564,49 @@
                     <a:lstStyle/>
                     <a:p>
                       <a:r>
-                        <a:rPr sz="1100">
-                          <a:solidFill>
-                            <a:srgbClr val="3D424E"/>
-                          </a:solidFill>
-                        </a:rPr>
-                        <a:t>Fitzpatrick 1988, Schumann 2023, Pereira (SkinToneNet) 2026</a:t>
-                      </a:r>
-                    </a:p>
-                  </a:txBody>
-                  <a:tcPr/>
-                </a:tc>
-                <a:tc>
-                  <a:txBody>
-                    <a:bodyPr/>
-                    <a:lstStyle/>
-                    <a:p>
-                      <a:r>
-                        <a:rPr sz="1100">
+                        <a:rPr sz="1100" dirty="0">
+                          <a:solidFill>
+                            <a:srgbClr val="3D424E"/>
+                          </a:solidFill>
+                          <a:highlight>
+                            <a:srgbClr val="00FF00"/>
+                          </a:highlight>
+                        </a:rPr>
+                        <a:t>Fitzpatrick 1988, Schumann 2023, Pereira (</a:t>
+                      </a:r>
+                      <a:r>
+                        <a:rPr sz="1100" dirty="0" err="1">
+                          <a:solidFill>
+                            <a:srgbClr val="3D424E"/>
+                          </a:solidFill>
+                          <a:highlight>
+                            <a:srgbClr val="00FF00"/>
+                          </a:highlight>
+                        </a:rPr>
+                        <a:t>SkinToneNet</a:t>
+                      </a:r>
+                      <a:r>
+                        <a:rPr sz="1100" dirty="0">
+                          <a:solidFill>
+                            <a:srgbClr val="3D424E"/>
+                          </a:solidFill>
+                          <a:highlight>
+                            <a:srgbClr val="00FF00"/>
+                          </a:highlight>
+                        </a:rPr>
+                        <a:t>) 2026</a:t>
+                      </a:r>
+                    </a:p>
+                  </a:txBody>
+                  <a:tcPr/>
+                </a:tc>
+                <a:tc>
+                  <a:txBody>
+                    <a:bodyPr/>
+                    <a:lstStyle/>
+                    <a:p>
+                      <a:r>
+                        <a:rPr sz="1100" dirty="0">
                           <a:solidFill>
                             <a:srgbClr val="3D424E"/>
                           </a:solidFill>
@@ -10267,6 +11617,11 @@
                   </a:txBody>
                   <a:tcPr/>
                 </a:tc>
+                <a:extLst>
+                  <a:ext uri="{0D108BD9-81ED-4DB2-BD59-A6C34878D82A}">
+                    <a16:rowId xmlns:a16="http://schemas.microsoft.com/office/drawing/2014/main" val="10003"/>
+                  </a:ext>
+                </a:extLst>
               </a:tr>
               <a:tr h="396240">
                 <a:tc>
@@ -10326,24 +11681,71 @@
                     <a:lstStyle/>
                     <a:p>
                       <a:r>
-                        <a:rPr sz="1100">
-                          <a:solidFill>
-                            <a:srgbClr val="3D424E"/>
-                          </a:solidFill>
-                        </a:rPr>
-                        <a:t>Park (FSCL+) 2022, Sagawa (Group DRO) 2020, Manzoor 2024</a:t>
-                      </a:r>
-                    </a:p>
-                  </a:txBody>
-                  <a:tcPr/>
-                </a:tc>
-                <a:tc>
-                  <a:txBody>
-                    <a:bodyPr/>
-                    <a:lstStyle/>
-                    <a:p>
-                      <a:r>
-                        <a:rPr sz="1100">
+                        <a:rPr sz="1100" dirty="0">
+                          <a:solidFill>
+                            <a:srgbClr val="3D424E"/>
+                          </a:solidFill>
+                          <a:highlight>
+                            <a:srgbClr val="00FF00"/>
+                          </a:highlight>
+                        </a:rPr>
+                        <a:t>Park (FSCL+) 2022, Sagawa (Group DRO) 2020, Manzoor </a:t>
+                      </a:r>
+                      <a:r>
+                        <a:rPr lang="pt-BR" sz="1100" dirty="0">
+                          <a:solidFill>
+                            <a:srgbClr val="3D424E"/>
+                          </a:solidFill>
+                          <a:highlight>
+                            <a:srgbClr val="00FF00"/>
+                          </a:highlight>
+                        </a:rPr>
+                        <a:t>(</a:t>
+                      </a:r>
+                      <a:r>
+                        <a:rPr lang="pt-BR" sz="1100" dirty="0" err="1">
+                          <a:solidFill>
+                            <a:srgbClr val="3D424E"/>
+                          </a:solidFill>
+                          <a:highlight>
+                            <a:srgbClr val="00FF00"/>
+                          </a:highlight>
+                        </a:rPr>
+                        <a:t>FineFace</a:t>
+                      </a:r>
+                      <a:r>
+                        <a:rPr lang="pt-BR" sz="1100" dirty="0">
+                          <a:solidFill>
+                            <a:srgbClr val="3D424E"/>
+                          </a:solidFill>
+                          <a:highlight>
+                            <a:srgbClr val="00FF00"/>
+                          </a:highlight>
+                        </a:rPr>
+                        <a:t>) </a:t>
+                      </a:r>
+                      <a:r>
+                        <a:rPr sz="1100" dirty="0">
+                          <a:solidFill>
+                            <a:srgbClr val="3D424E"/>
+                          </a:solidFill>
+                          <a:highlight>
+                            <a:srgbClr val="00FF00"/>
+                          </a:highlight>
+                        </a:rPr>
+                        <a:t>2024</a:t>
+                      </a:r>
+                    </a:p>
+                  </a:txBody>
+                  <a:tcPr/>
+                </a:tc>
+                <a:tc>
+                  <a:txBody>
+                    <a:bodyPr/>
+                    <a:lstStyle/>
+                    <a:p>
+                      <a:r>
+                        <a:rPr sz="1100" dirty="0">
                           <a:solidFill>
                             <a:srgbClr val="3D424E"/>
                           </a:solidFill>
@@ -10354,6 +11756,11 @@
                   </a:txBody>
                   <a:tcPr/>
                 </a:tc>
+                <a:extLst>
+                  <a:ext uri="{0D108BD9-81ED-4DB2-BD59-A6C34878D82A}">
+                    <a16:rowId xmlns:a16="http://schemas.microsoft.com/office/drawing/2014/main" val="10004"/>
+                  </a:ext>
+                </a:extLst>
               </a:tr>
               <a:tr h="396240">
                 <a:tc>
@@ -10413,12 +11820,48 @@
                     <a:lstStyle/>
                     <a:p>
                       <a:r>
-                        <a:rPr sz="1100">
-                          <a:solidFill>
-                            <a:srgbClr val="3D424E"/>
-                          </a:solidFill>
-                        </a:rPr>
-                        <a:t>Mehrabi 2021, Dominguez (DSAP) 2024, Buolamwini 2018</a:t>
+                        <a:rPr sz="1100" dirty="0">
+                          <a:solidFill>
+                            <a:srgbClr val="3D424E"/>
+                          </a:solidFill>
+                          <a:highlight>
+                            <a:srgbClr val="00FF00"/>
+                          </a:highlight>
+                        </a:rPr>
+                        <a:t>Mehrabi 2021, </a:t>
+                      </a:r>
+                      <a:r>
+                        <a:rPr sz="1100" dirty="0">
+                          <a:solidFill>
+                            <a:srgbClr val="3D424E"/>
+                          </a:solidFill>
+                          <a:highlight>
+                            <a:srgbClr val="FFFF00"/>
+                          </a:highlight>
+                        </a:rPr>
+                        <a:t>Dominguez (DSAP) 2024, </a:t>
+                      </a:r>
+                      <a:r>
+                        <a:rPr sz="1100" dirty="0" err="1">
+                          <a:solidFill>
+                            <a:srgbClr val="3D424E"/>
+                          </a:solidFill>
+                          <a:highlight>
+                            <a:srgbClr val="00FF00"/>
+                          </a:highlight>
+                        </a:rPr>
+                        <a:t>Buolamwini</a:t>
+                      </a:r>
+                      <a:r>
+                        <a:rPr sz="1100" dirty="0">
+                          <a:solidFill>
+                            <a:srgbClr val="3D424E"/>
+                          </a:solidFill>
+                          <a:highlight>
+                            <a:srgbClr val="00FF00"/>
+                          </a:highlight>
+                        </a:rPr>
+                        <a:t> 2018</a:t>
                       </a:r>
                     </a:p>
                   </a:txBody>
@@ -10441,6 +11884,11 @@
                   </a:txBody>
                   <a:tcPr/>
                 </a:tc>
+                <a:extLst>
+                  <a:ext uri="{0D108BD9-81ED-4DB2-BD59-A6C34878D82A}">
+                    <a16:rowId xmlns:a16="http://schemas.microsoft.com/office/drawing/2014/main" val="10005"/>
+                  </a:ext>
+                </a:extLst>
               </a:tr>
               <a:tr h="396240">
                 <a:tc>
@@ -10504,6 +11952,9 @@
                           <a:solidFill>
                             <a:srgbClr val="3D424E"/>
                           </a:solidFill>
+                          <a:highlight>
+                            <a:srgbClr val="00FF00"/>
+                          </a:highlight>
                         </a:rPr>
                         <a:t>Lewontin 1972, Fuentes 2019, Neto 2025</a:t>
                       </a:r>
@@ -10517,7 +11968,7 @@
                     <a:lstStyle/>
                     <a:p>
                       <a:r>
-                        <a:rPr sz="1100">
+                        <a:rPr sz="1100" dirty="0">
                           <a:solidFill>
                             <a:srgbClr val="3D424E"/>
                           </a:solidFill>
@@ -10528,6 +11979,11 @@
                   </a:txBody>
                   <a:tcPr/>
                 </a:tc>
+                <a:extLst>
+                  <a:ext uri="{0D108BD9-81ED-4DB2-BD59-A6C34878D82A}">
+                    <a16:rowId xmlns:a16="http://schemas.microsoft.com/office/drawing/2014/main" val="10006"/>
+                  </a:ext>
+                </a:extLst>
               </a:tr>
               <a:tr h="396240">
                 <a:tc>
@@ -10587,24 +12043,60 @@
                     <a:lstStyle/>
                     <a:p>
                       <a:r>
-                        <a:rPr sz="1100">
-                          <a:solidFill>
-                            <a:srgbClr val="3D424E"/>
-                          </a:solidFill>
-                        </a:rPr>
-                        <a:t>Hardt 2016, Perez (FiLM) 2018, Kleinberg 2017</a:t>
-                      </a:r>
-                    </a:p>
-                  </a:txBody>
-                  <a:tcPr/>
-                </a:tc>
-                <a:tc>
-                  <a:txBody>
-                    <a:bodyPr/>
-                    <a:lstStyle/>
-                    <a:p>
-                      <a:r>
-                        <a:rPr sz="1100">
+                        <a:rPr sz="1100" dirty="0">
+                          <a:solidFill>
+                            <a:srgbClr val="3D424E"/>
+                          </a:solidFill>
+                          <a:highlight>
+                            <a:srgbClr val="00FF00"/>
+                          </a:highlight>
+                        </a:rPr>
+                        <a:t>Hardt 2016, Perez (</a:t>
+                      </a:r>
+                      <a:r>
+                        <a:rPr sz="1100" dirty="0" err="1">
+                          <a:solidFill>
+                            <a:srgbClr val="3D424E"/>
+                          </a:solidFill>
+                          <a:highlight>
+                            <a:srgbClr val="00FF00"/>
+                          </a:highlight>
+                        </a:rPr>
+                        <a:t>FiLM</a:t>
+                      </a:r>
+                      <a:r>
+                        <a:rPr sz="1100" dirty="0">
+                          <a:solidFill>
+                            <a:srgbClr val="3D424E"/>
+                          </a:solidFill>
+                          <a:highlight>
+                            <a:srgbClr val="00FF00"/>
+                          </a:highlight>
+                        </a:rPr>
+                        <a:t>) 2018</a:t>
+                      </a:r>
+                      <a:r>
+                        <a:rPr sz="1100" dirty="0">
+                          <a:solidFill>
+                            <a:srgbClr val="3D424E"/>
+                          </a:solidFill>
+                          <a:highlight>
+                            <a:srgbClr val="FF0000"/>
+                          </a:highlight>
+                        </a:rPr>
+                        <a:t>, Kleinberg 2017</a:t>
+                      </a:r>
+                    </a:p>
+                  </a:txBody>
+                  <a:tcPr/>
+                </a:tc>
+                <a:tc>
+                  <a:txBody>
+                    <a:bodyPr/>
+                    <a:lstStyle/>
+                    <a:p>
+                      <a:r>
+                        <a:rPr sz="1100" dirty="0">
                           <a:solidFill>
                             <a:srgbClr val="3D424E"/>
                           </a:solidFill>
@@ -10615,6 +12107,11 @@
                   </a:txBody>
                   <a:tcPr/>
                 </a:tc>
+                <a:extLst>
+                  <a:ext uri="{0D108BD9-81ED-4DB2-BD59-A6C34878D82A}">
+                    <a16:rowId xmlns:a16="http://schemas.microsoft.com/office/drawing/2014/main" val="10007"/>
+                  </a:ext>
+                </a:extLst>
               </a:tr>
               <a:tr h="396240">
                 <a:tc>
@@ -10657,29 +12154,163 @@
                     <a:lstStyle/>
                     <a:p>
                       <a:r>
-                        <a:rPr sz="1100">
-                          <a:solidFill>
-                            <a:srgbClr val="3D424E"/>
-                          </a:solidFill>
-                        </a:rPr>
-                        <a:t>Fairness em modelos vision-language (CLIP, BLIP)</a:t>
-                      </a:r>
-                    </a:p>
-                  </a:txBody>
-                  <a:tcPr/>
-                </a:tc>
-                <a:tc>
-                  <a:txBody>
-                    <a:bodyPr/>
-                    <a:lstStyle/>
-                    <a:p>
-                      <a:r>
-                        <a:rPr sz="1100">
-                          <a:solidFill>
-                            <a:srgbClr val="3D424E"/>
-                          </a:solidFill>
-                        </a:rPr>
-                        <a:t>Luo (FairCLIP) 2024, Dehdashtian (FairerCLIP) 2024, BendVLM 2024</a:t>
+                        <a:rPr sz="1100" dirty="0">
+                          <a:solidFill>
+                            <a:srgbClr val="3D424E"/>
+                          </a:solidFill>
+                        </a:rPr>
+                        <a:t>Fairness </a:t>
+                      </a:r>
+                      <a:r>
+                        <a:rPr sz="1100" dirty="0" err="1">
+                          <a:solidFill>
+                            <a:srgbClr val="3D424E"/>
+                          </a:solidFill>
+                        </a:rPr>
+                        <a:t>em</a:t>
+                      </a:r>
+                      <a:r>
+                        <a:rPr sz="1100" dirty="0">
+                          <a:solidFill>
+                            <a:srgbClr val="3D424E"/>
+                          </a:solidFill>
+                        </a:rPr>
+                        <a:t> </a:t>
+                      </a:r>
+                      <a:r>
+                        <a:rPr sz="1100" dirty="0" err="1">
+                          <a:solidFill>
+                            <a:srgbClr val="3D424E"/>
+                          </a:solidFill>
+                        </a:rPr>
+                        <a:t>modelos</a:t>
+                      </a:r>
+                      <a:r>
+                        <a:rPr sz="1100" dirty="0">
+                          <a:solidFill>
+                            <a:srgbClr val="3D424E"/>
+                          </a:solidFill>
+                        </a:rPr>
+                        <a:t> vision-language (CLIP)</a:t>
+                      </a:r>
+                    </a:p>
+                  </a:txBody>
+                  <a:tcPr/>
+                </a:tc>
+                <a:tc>
+                  <a:txBody>
+                    <a:bodyPr/>
+                    <a:lstStyle/>
+                    <a:p>
+                      <a:r>
+                        <a:rPr sz="1100" dirty="0">
+                          <a:solidFill>
+                            <a:srgbClr val="3D424E"/>
+                          </a:solidFill>
+                          <a:highlight>
+                            <a:srgbClr val="00FF00"/>
+                          </a:highlight>
+                        </a:rPr>
+                        <a:t>Luo (</a:t>
+                      </a:r>
+                      <a:r>
+                        <a:rPr sz="1100" dirty="0" err="1">
+                          <a:solidFill>
+                            <a:srgbClr val="3D424E"/>
+                          </a:solidFill>
+                          <a:highlight>
+                            <a:srgbClr val="00FF00"/>
+                          </a:highlight>
+                        </a:rPr>
+                        <a:t>FairCLIP</a:t>
+                      </a:r>
+                      <a:r>
+                        <a:rPr sz="1100" dirty="0">
+                          <a:solidFill>
+                            <a:srgbClr val="3D424E"/>
+                          </a:solidFill>
+                          <a:highlight>
+                            <a:srgbClr val="00FF00"/>
+                          </a:highlight>
+                        </a:rPr>
+                        <a:t>) 2024</a:t>
+                      </a:r>
+                      <a:r>
+                        <a:rPr sz="1100" dirty="0">
+                          <a:solidFill>
+                            <a:srgbClr val="3D424E"/>
+                          </a:solidFill>
+                          <a:highlight>
+                            <a:srgbClr val="FFFF00"/>
+                          </a:highlight>
+                        </a:rPr>
+                        <a:t>, </a:t>
+                      </a:r>
+                      <a:r>
+                        <a:rPr sz="1100" dirty="0" err="1">
+                          <a:solidFill>
+                            <a:srgbClr val="3D424E"/>
+                          </a:solidFill>
+                          <a:highlight>
+                            <a:srgbClr val="FFFF00"/>
+                          </a:highlight>
+                        </a:rPr>
+                        <a:t>Dehdashtian</a:t>
+                      </a:r>
+                      <a:r>
+                        <a:rPr sz="1100" dirty="0">
+                          <a:solidFill>
+                            <a:srgbClr val="3D424E"/>
+                          </a:solidFill>
+                          <a:highlight>
+                            <a:srgbClr val="FFFF00"/>
+                          </a:highlight>
+                        </a:rPr>
+                        <a:t> (</a:t>
+                      </a:r>
+                      <a:r>
+                        <a:rPr sz="1100" dirty="0" err="1">
+                          <a:solidFill>
+                            <a:srgbClr val="3D424E"/>
+                          </a:solidFill>
+                          <a:highlight>
+                            <a:srgbClr val="FFFF00"/>
+                          </a:highlight>
+                        </a:rPr>
+                        <a:t>FairerCLIP</a:t>
+                      </a:r>
+                      <a:r>
+                        <a:rPr sz="1100" dirty="0">
+                          <a:solidFill>
+                            <a:srgbClr val="3D424E"/>
+                          </a:solidFill>
+                          <a:highlight>
+                            <a:srgbClr val="FFFF00"/>
+                          </a:highlight>
+                        </a:rPr>
+                        <a:t>) 2024, </a:t>
+                      </a:r>
+                      <a:r>
+                        <a:rPr sz="1100" dirty="0" err="1">
+                          <a:solidFill>
+                            <a:srgbClr val="3D424E"/>
+                          </a:solidFill>
+                          <a:highlight>
+                            <a:srgbClr val="FFFF00"/>
+                          </a:highlight>
+                        </a:rPr>
+                        <a:t>BendVLM</a:t>
+                      </a:r>
+                      <a:r>
+                        <a:rPr sz="1100" dirty="0">
+                          <a:solidFill>
+                            <a:srgbClr val="3D424E"/>
+                          </a:solidFill>
+                          <a:highlight>
+                            <a:srgbClr val="FFFF00"/>
+                          </a:highlight>
+                        </a:rPr>
+                        <a:t> 2024</a:t>
                       </a:r>
                     </a:p>
                   </a:txBody>
@@ -10702,6 +12333,11 @@
                   </a:txBody>
                   <a:tcPr/>
                 </a:tc>
+                <a:extLst>
+                  <a:ext uri="{0D108BD9-81ED-4DB2-BD59-A6C34878D82A}">
+                    <a16:rowId xmlns:a16="http://schemas.microsoft.com/office/drawing/2014/main" val="10008"/>
+                  </a:ext>
+                </a:extLst>
               </a:tr>
               <a:tr h="396240">
                 <a:tc>
@@ -10761,12 +12397,70 @@
                     <a:lstStyle/>
                     <a:p>
                       <a:r>
-                        <a:rPr sz="1100">
-                          <a:solidFill>
-                            <a:srgbClr val="3D424E"/>
-                          </a:solidFill>
-                        </a:rPr>
-                        <a:t>Bian (LoRA-FAIR) 2025, Tian (FairViT) 2024, Zhao (AIM-Fair) 2025</a:t>
+                        <a:rPr sz="1100" dirty="0">
+                          <a:solidFill>
+                            <a:srgbClr val="3D424E"/>
+                          </a:solidFill>
+                          <a:highlight>
+                            <a:srgbClr val="FFFF00"/>
+                          </a:highlight>
+                        </a:rPr>
+                        <a:t>Bian (</a:t>
+                      </a:r>
+                      <a:r>
+                        <a:rPr sz="1100" dirty="0" err="1">
+                          <a:solidFill>
+                            <a:srgbClr val="3D424E"/>
+                          </a:solidFill>
+                          <a:highlight>
+                            <a:srgbClr val="FFFF00"/>
+                          </a:highlight>
+                        </a:rPr>
+                        <a:t>LoRA</a:t>
+                      </a:r>
+                      <a:r>
+                        <a:rPr sz="1100" dirty="0">
+                          <a:solidFill>
+                            <a:srgbClr val="3D424E"/>
+                          </a:solidFill>
+                          <a:highlight>
+                            <a:srgbClr val="FFFF00"/>
+                          </a:highlight>
+                        </a:rPr>
+                        <a:t>-FAIR) 2025, </a:t>
+                      </a:r>
+                      <a:r>
+                        <a:rPr sz="1100" dirty="0">
+                          <a:solidFill>
+                            <a:srgbClr val="3D424E"/>
+                          </a:solidFill>
+                          <a:highlight>
+                            <a:srgbClr val="00FF00"/>
+                          </a:highlight>
+                        </a:rPr>
+                        <a:t>Tian (</a:t>
+                      </a:r>
+                      <a:r>
+                        <a:rPr sz="1100" dirty="0" err="1">
+                          <a:solidFill>
+                            <a:srgbClr val="3D424E"/>
+                          </a:solidFill>
+                          <a:highlight>
+                            <a:srgbClr val="00FF00"/>
+                          </a:highlight>
+                        </a:rPr>
+                        <a:t>FairViT</a:t>
+                      </a:r>
+                      <a:r>
+                        <a:rPr sz="1100" dirty="0">
+                          <a:solidFill>
+                            <a:srgbClr val="3D424E"/>
+                          </a:solidFill>
+                          <a:highlight>
+                            <a:srgbClr val="00FF00"/>
+                          </a:highlight>
+                        </a:rPr>
+                        <a:t>) 2024, Zhao (AIM-Fair) 2025</a:t>
                       </a:r>
                     </a:p>
                   </a:txBody>
@@ -10789,6 +12483,11 @@
                   </a:txBody>
                   <a:tcPr/>
                 </a:tc>
+                <a:extLst>
+                  <a:ext uri="{0D108BD9-81ED-4DB2-BD59-A6C34878D82A}">
+                    <a16:rowId xmlns:a16="http://schemas.microsoft.com/office/drawing/2014/main" val="10009"/>
+                  </a:ext>
+                </a:extLst>
               </a:tr>
               <a:tr h="396240">
                 <a:tc>
@@ -10848,24 +12547,93 @@
                     <a:lstStyle/>
                     <a:p>
                       <a:r>
-                        <a:rPr sz="1100">
-                          <a:solidFill>
-                            <a:srgbClr val="3D424E"/>
-                          </a:solidFill>
-                        </a:rPr>
-                        <a:t>Schroff (FaceNet) 2015, Deng (ArcFace) 2019, Kim (AdaFace) 2022</a:t>
-                      </a:r>
-                    </a:p>
-                  </a:txBody>
-                  <a:tcPr/>
-                </a:tc>
-                <a:tc>
-                  <a:txBody>
-                    <a:bodyPr/>
-                    <a:lstStyle/>
-                    <a:p>
-                      <a:r>
-                        <a:rPr sz="1100">
+                        <a:rPr sz="1100" dirty="0">
+                          <a:solidFill>
+                            <a:srgbClr val="3D424E"/>
+                          </a:solidFill>
+                          <a:highlight>
+                            <a:srgbClr val="00FF00"/>
+                          </a:highlight>
+                        </a:rPr>
+                        <a:t>Schroff (</a:t>
+                      </a:r>
+                      <a:r>
+                        <a:rPr sz="1100" dirty="0" err="1">
+                          <a:solidFill>
+                            <a:srgbClr val="3D424E"/>
+                          </a:solidFill>
+                          <a:highlight>
+                            <a:srgbClr val="00FF00"/>
+                          </a:highlight>
+                        </a:rPr>
+                        <a:t>FaceNet</a:t>
+                      </a:r>
+                      <a:r>
+                        <a:rPr sz="1100" dirty="0">
+                          <a:solidFill>
+                            <a:srgbClr val="3D424E"/>
+                          </a:solidFill>
+                          <a:highlight>
+                            <a:srgbClr val="00FF00"/>
+                          </a:highlight>
+                        </a:rPr>
+                        <a:t>) 2015, Deng (</a:t>
+                      </a:r>
+                      <a:r>
+                        <a:rPr sz="1100" dirty="0" err="1">
+                          <a:solidFill>
+                            <a:srgbClr val="3D424E"/>
+                          </a:solidFill>
+                          <a:highlight>
+                            <a:srgbClr val="00FF00"/>
+                          </a:highlight>
+                        </a:rPr>
+                        <a:t>ArcFace</a:t>
+                      </a:r>
+                      <a:r>
+                        <a:rPr sz="1100" dirty="0">
+                          <a:solidFill>
+                            <a:srgbClr val="3D424E"/>
+                          </a:solidFill>
+                          <a:highlight>
+                            <a:srgbClr val="00FF00"/>
+                          </a:highlight>
+                        </a:rPr>
+                        <a:t>) 2019, Kim (</a:t>
+                      </a:r>
+                      <a:r>
+                        <a:rPr sz="1100" dirty="0" err="1">
+                          <a:solidFill>
+                            <a:srgbClr val="3D424E"/>
+                          </a:solidFill>
+                          <a:highlight>
+                            <a:srgbClr val="00FF00"/>
+                          </a:highlight>
+                        </a:rPr>
+                        <a:t>AdaFace</a:t>
+                      </a:r>
+                      <a:r>
+                        <a:rPr sz="1100" dirty="0">
+                          <a:solidFill>
+                            <a:srgbClr val="3D424E"/>
+                          </a:solidFill>
+                          <a:highlight>
+                            <a:srgbClr val="00FF00"/>
+                          </a:highlight>
+                        </a:rPr>
+                        <a:t>) 2022</a:t>
+                      </a:r>
+                    </a:p>
+                  </a:txBody>
+                  <a:tcPr/>
+                </a:tc>
+                <a:tc>
+                  <a:txBody>
+                    <a:bodyPr/>
+                    <a:lstStyle/>
+                    <a:p>
+                      <a:r>
+                        <a:rPr sz="1100" dirty="0">
                           <a:solidFill>
                             <a:srgbClr val="3D424E"/>
                           </a:solidFill>
@@ -10876,6 +12644,11 @@
                   </a:txBody>
                   <a:tcPr/>
                 </a:tc>
+                <a:extLst>
+                  <a:ext uri="{0D108BD9-81ED-4DB2-BD59-A6C34878D82A}">
+                    <a16:rowId xmlns:a16="http://schemas.microsoft.com/office/drawing/2014/main" val="10010"/>
+                  </a:ext>
+                </a:extLst>
               </a:tr>
               <a:tr h="396240">
                 <a:tc>
@@ -10918,41 +12691,134 @@
                     <a:lstStyle/>
                     <a:p>
                       <a:r>
-                        <a:rPr sz="1100">
-                          <a:solidFill>
-                            <a:srgbClr val="3D424E"/>
-                          </a:solidFill>
-                        </a:rPr>
-                        <a:t>Direções adjacentes (federated, synthetic, post-hoc)</a:t>
-                      </a:r>
-                    </a:p>
-                  </a:txBody>
-                  <a:tcPr/>
-                </a:tc>
-                <a:tc>
-                  <a:txBody>
-                    <a:bodyPr/>
-                    <a:lstStyle/>
-                    <a:p>
-                      <a:r>
-                        <a:rPr sz="1100">
-                          <a:solidFill>
-                            <a:srgbClr val="3D424E"/>
-                          </a:solidFill>
-                        </a:rPr>
-                        <a:t>Salvador (FairCal) 2021, FairImagen 2025, VoIDFace 2025</a:t>
-                      </a:r>
-                    </a:p>
-                  </a:txBody>
-                  <a:tcPr/>
-                </a:tc>
-                <a:tc>
-                  <a:txBody>
-                    <a:bodyPr/>
-                    <a:lstStyle/>
-                    <a:p>
-                      <a:r>
-                        <a:rPr sz="1100">
+                        <a:rPr sz="1100" dirty="0" err="1">
+                          <a:solidFill>
+                            <a:srgbClr val="3D424E"/>
+                          </a:solidFill>
+                        </a:rPr>
+                        <a:t>Direções</a:t>
+                      </a:r>
+                      <a:r>
+                        <a:rPr sz="1100" dirty="0">
+                          <a:solidFill>
+                            <a:srgbClr val="3D424E"/>
+                          </a:solidFill>
+                        </a:rPr>
+                        <a:t> </a:t>
+                      </a:r>
+                      <a:r>
+                        <a:rPr sz="1100" dirty="0" err="1">
+                          <a:solidFill>
+                            <a:srgbClr val="3D424E"/>
+                          </a:solidFill>
+                        </a:rPr>
+                        <a:t>adjacentes</a:t>
+                      </a:r>
+                      <a:r>
+                        <a:rPr sz="1100" dirty="0">
+                          <a:solidFill>
+                            <a:srgbClr val="3D424E"/>
+                          </a:solidFill>
+                        </a:rPr>
+                        <a:t> (federated, synthetic, post-hoc)</a:t>
+                      </a:r>
+                    </a:p>
+                  </a:txBody>
+                  <a:tcPr/>
+                </a:tc>
+                <a:tc>
+                  <a:txBody>
+                    <a:bodyPr/>
+                    <a:lstStyle/>
+                    <a:p>
+                      <a:r>
+                        <a:rPr sz="1100" dirty="0">
+                          <a:solidFill>
+                            <a:srgbClr val="3D424E"/>
+                          </a:solidFill>
+                          <a:highlight>
+                            <a:srgbClr val="FF0000"/>
+                          </a:highlight>
+                        </a:rPr>
+                        <a:t>Salvador (</a:t>
+                      </a:r>
+                      <a:r>
+                        <a:rPr sz="1100" dirty="0" err="1">
+                          <a:solidFill>
+                            <a:srgbClr val="3D424E"/>
+                          </a:solidFill>
+                          <a:highlight>
+                            <a:srgbClr val="FF0000"/>
+                          </a:highlight>
+                        </a:rPr>
+                        <a:t>FairCal</a:t>
+                      </a:r>
+                      <a:r>
+                        <a:rPr sz="1100" dirty="0">
+                          <a:solidFill>
+                            <a:srgbClr val="3D424E"/>
+                          </a:solidFill>
+                          <a:highlight>
+                            <a:srgbClr val="FF0000"/>
+                          </a:highlight>
+                        </a:rPr>
+                        <a:t>) 2021, </a:t>
+                      </a:r>
+                      <a:r>
+                        <a:rPr sz="1100" dirty="0" err="1">
+                          <a:solidFill>
+                            <a:srgbClr val="3D424E"/>
+                          </a:solidFill>
+                          <a:highlight>
+                            <a:srgbClr val="FF0000"/>
+                          </a:highlight>
+                        </a:rPr>
+                        <a:t>FairImagen</a:t>
+                      </a:r>
+                      <a:r>
+                        <a:rPr sz="1100" dirty="0">
+                          <a:solidFill>
+                            <a:srgbClr val="3D424E"/>
+                          </a:solidFill>
+                          <a:highlight>
+                            <a:srgbClr val="FF0000"/>
+                          </a:highlight>
+                        </a:rPr>
+                        <a:t> 2025, </a:t>
+                      </a:r>
+                      <a:r>
+                        <a:rPr sz="1100" dirty="0" err="1">
+                          <a:solidFill>
+                            <a:srgbClr val="3D424E"/>
+                          </a:solidFill>
+                          <a:highlight>
+                            <a:srgbClr val="FF0000"/>
+                          </a:highlight>
+                        </a:rPr>
+                        <a:t>VoIDFace</a:t>
+                      </a:r>
+                      <a:r>
+                        <a:rPr sz="1100" dirty="0">
+                          <a:solidFill>
+                            <a:srgbClr val="3D424E"/>
+                          </a:solidFill>
+                          <a:highlight>
+                            <a:srgbClr val="FF0000"/>
+                          </a:highlight>
+                        </a:rPr>
+                        <a:t> 2025</a:t>
+                      </a:r>
+                    </a:p>
+                  </a:txBody>
+                  <a:tcPr/>
+                </a:tc>
+                <a:tc>
+                  <a:txBody>
+                    <a:bodyPr/>
+                    <a:lstStyle/>
+                    <a:p>
+                      <a:r>
+                        <a:rPr sz="1100" dirty="0">
                           <a:solidFill>
                             <a:srgbClr val="3D424E"/>
                           </a:solidFill>
@@ -10963,6 +12829,11 @@
                   </a:txBody>
                   <a:tcPr/>
                 </a:tc>
+                <a:extLst>
+                  <a:ext uri="{0D108BD9-81ED-4DB2-BD59-A6C34878D82A}">
+                    <a16:rowId xmlns:a16="http://schemas.microsoft.com/office/drawing/2014/main" val="10011"/>
+                  </a:ext>
+                </a:extLst>
               </a:tr>
             </a:tbl>
           </a:graphicData>
@@ -11012,7 +12883,7 @@
 </file>
 
 <file path=ppt/slides/slide8.xml><?xml version="1.0" encoding="utf-8"?>
-<p:sld xmlns:a="http://schemas.openxmlformats.org/drawingml/2006/main" xmlns:p="http://schemas.openxmlformats.org/presentationml/2006/main" xmlns:r="http://schemas.openxmlformats.org/officeDocument/2006/relationships">
+<p:sld xmlns:a="http://schemas.openxmlformats.org/drawingml/2006/main" xmlns:r="http://schemas.openxmlformats.org/officeDocument/2006/relationships" xmlns:p="http://schemas.openxmlformats.org/presentationml/2006/main">
   <p:cSld>
     <p:spTree>
       <p:nvGrpSpPr>
@@ -11020,7 +12891,14 @@
         <p:cNvGrpSpPr/>
         <p:nvPr/>
       </p:nvGrpSpPr>
-      <p:grpSpPr/>
+      <p:grpSpPr>
+        <a:xfrm>
+          <a:off x="0" y="0"/>
+          <a:ext cx="0" cy="0"/>
+          <a:chOff x="0" y="0"/>
+          <a:chExt cx="0" cy="0"/>
+        </a:xfrm>
+      </p:grpSpPr>
       <p:sp>
         <p:nvSpPr>
           <p:cNvPr id="2" name="Rectangle 1"/>
@@ -11061,6 +12939,7 @@
           <a:lstStyle/>
           <a:p>
             <a:pPr algn="ctr"/>
+            <a:endParaRPr/>
           </a:p>
         </p:txBody>
       </p:sp>
@@ -11155,7 +13034,7 @@
 </file>
 
 <file path=ppt/slides/slide9.xml><?xml version="1.0" encoding="utf-8"?>
-<p:sld xmlns:a="http://schemas.openxmlformats.org/drawingml/2006/main" xmlns:p="http://schemas.openxmlformats.org/presentationml/2006/main" xmlns:r="http://schemas.openxmlformats.org/officeDocument/2006/relationships">
+<p:sld xmlns:a="http://schemas.openxmlformats.org/drawingml/2006/main" xmlns:r="http://schemas.openxmlformats.org/officeDocument/2006/relationships" xmlns:p="http://schemas.openxmlformats.org/presentationml/2006/main">
   <p:cSld>
     <p:spTree>
       <p:nvGrpSpPr>
@@ -11163,7 +13042,14 @@
         <p:cNvGrpSpPr/>
         <p:nvPr/>
       </p:nvGrpSpPr>
-      <p:grpSpPr/>
+      <p:grpSpPr>
+        <a:xfrm>
+          <a:off x="0" y="0"/>
+          <a:ext cx="0" cy="0"/>
+          <a:chOff x="0" y="0"/>
+          <a:chExt cx="0" cy="0"/>
+        </a:xfrm>
+      </p:grpSpPr>
       <p:sp>
         <p:nvSpPr>
           <p:cNvPr id="2" name="TextBox 1"/>
@@ -11239,6 +13125,7 @@
           <a:lstStyle/>
           <a:p>
             <a:pPr algn="ctr"/>
+            <a:endParaRPr/>
           </a:p>
         </p:txBody>
       </p:sp>
@@ -11261,10 +13148,34 @@
                 <a:tableStyleId>{5C22544A-7EE6-4342-B048-85BDC9FD1C3A}</a:tableStyleId>
               </a:tblPr>
               <a:tblGrid>
-                <a:gridCol w="2926080"/>
-                <a:gridCol w="914400"/>
-                <a:gridCol w="914400"/>
-                <a:gridCol w="6675120"/>
+                <a:gridCol w="2926080">
+                  <a:extLst>
+                    <a:ext uri="{9D8B030D-6E8A-4147-A177-3AD203B41FA5}">
+                      <a16:colId xmlns:a16="http://schemas.microsoft.com/office/drawing/2014/main" val="20000"/>
+                    </a:ext>
+                  </a:extLst>
+                </a:gridCol>
+                <a:gridCol w="914400">
+                  <a:extLst>
+                    <a:ext uri="{9D8B030D-6E8A-4147-A177-3AD203B41FA5}">
+                      <a16:colId xmlns:a16="http://schemas.microsoft.com/office/drawing/2014/main" val="20001"/>
+                    </a:ext>
+                  </a:extLst>
+                </a:gridCol>
+                <a:gridCol w="914400">
+                  <a:extLst>
+                    <a:ext uri="{9D8B030D-6E8A-4147-A177-3AD203B41FA5}">
+                      <a16:colId xmlns:a16="http://schemas.microsoft.com/office/drawing/2014/main" val="20002"/>
+                    </a:ext>
+                  </a:extLst>
+                </a:gridCol>
+                <a:gridCol w="6675120">
+                  <a:extLst>
+                    <a:ext uri="{9D8B030D-6E8A-4147-A177-3AD203B41FA5}">
+                      <a16:colId xmlns:a16="http://schemas.microsoft.com/office/drawing/2014/main" val="20003"/>
+                    </a:ext>
+                  </a:extLst>
+                </a:gridCol>
               </a:tblGrid>
               <a:tr h="679268">
                 <a:tc>
@@ -11351,6 +13262,11 @@
                     </a:solidFill>
                   </a:tcPr>
                 </a:tc>
+                <a:extLst>
+                  <a:ext uri="{0D108BD9-81ED-4DB2-BD59-A6C34878D82A}">
+                    <a16:rowId xmlns:a16="http://schemas.microsoft.com/office/drawing/2014/main" val="10000"/>
+                  </a:ext>
+                </a:extLst>
               </a:tr>
               <a:tr h="679268">
                 <a:tc>
@@ -11437,6 +13353,11 @@
                     </a:solidFill>
                   </a:tcPr>
                 </a:tc>
+                <a:extLst>
+                  <a:ext uri="{0D108BD9-81ED-4DB2-BD59-A6C34878D82A}">
+                    <a16:rowId xmlns:a16="http://schemas.microsoft.com/office/drawing/2014/main" val="10001"/>
+                  </a:ext>
+                </a:extLst>
               </a:tr>
               <a:tr h="679268">
                 <a:tc>
@@ -11507,6 +13428,11 @@
                   </a:txBody>
                   <a:tcPr/>
                 </a:tc>
+                <a:extLst>
+                  <a:ext uri="{0D108BD9-81ED-4DB2-BD59-A6C34878D82A}">
+                    <a16:rowId xmlns:a16="http://schemas.microsoft.com/office/drawing/2014/main" val="10002"/>
+                  </a:ext>
+                </a:extLst>
               </a:tr>
               <a:tr h="679268">
                 <a:tc>
@@ -11577,6 +13503,11 @@
                   </a:txBody>
                   <a:tcPr/>
                 </a:tc>
+                <a:extLst>
+                  <a:ext uri="{0D108BD9-81ED-4DB2-BD59-A6C34878D82A}">
+                    <a16:rowId xmlns:a16="http://schemas.microsoft.com/office/drawing/2014/main" val="10003"/>
+                  </a:ext>
+                </a:extLst>
               </a:tr>
               <a:tr h="679268">
                 <a:tc>
@@ -11647,6 +13578,11 @@
                   </a:txBody>
                   <a:tcPr/>
                 </a:tc>
+                <a:extLst>
+                  <a:ext uri="{0D108BD9-81ED-4DB2-BD59-A6C34878D82A}">
+                    <a16:rowId xmlns:a16="http://schemas.microsoft.com/office/drawing/2014/main" val="10004"/>
+                  </a:ext>
+                </a:extLst>
               </a:tr>
               <a:tr h="679268">
                 <a:tc>
@@ -11717,6 +13653,11 @@
                   </a:txBody>
                   <a:tcPr/>
                 </a:tc>
+                <a:extLst>
+                  <a:ext uri="{0D108BD9-81ED-4DB2-BD59-A6C34878D82A}">
+                    <a16:rowId xmlns:a16="http://schemas.microsoft.com/office/drawing/2014/main" val="10005"/>
+                  </a:ext>
+                </a:extLst>
               </a:tr>
               <a:tr h="679272">
                 <a:tc>
@@ -11803,6 +13744,11 @@
                     </a:solidFill>
                   </a:tcPr>
                 </a:tc>
+                <a:extLst>
+                  <a:ext uri="{0D108BD9-81ED-4DB2-BD59-A6C34878D82A}">
+                    <a16:rowId xmlns:a16="http://schemas.microsoft.com/office/drawing/2014/main" val="10006"/>
+                  </a:ext>
+                </a:extLst>
               </a:tr>
             </a:tbl>
           </a:graphicData>

--- a/docs/ativo/material_reuniao_orientador_2026-06-15.pptx
+++ b/docs/ativo/material_reuniao_orientador_2026-06-15.pptx
@@ -5,34 +5,33 @@
     <p:sldMasterId id="2147483648" r:id="rId1"/>
   </p:sldMasterIdLst>
   <p:sldIdLst>
-    <p:sldId id="256" r:id="rId2"/>
-    <p:sldId id="257" r:id="rId3"/>
-    <p:sldId id="258" r:id="rId4"/>
-    <p:sldId id="259" r:id="rId5"/>
-    <p:sldId id="260" r:id="rId6"/>
-    <p:sldId id="261" r:id="rId7"/>
-    <p:sldId id="262" r:id="rId8"/>
-    <p:sldId id="263" r:id="rId9"/>
-    <p:sldId id="264" r:id="rId10"/>
-    <p:sldId id="280" r:id="rId11"/>
-    <p:sldId id="281" r:id="rId12"/>
-    <p:sldId id="265" r:id="rId13"/>
-    <p:sldId id="266" r:id="rId14"/>
-    <p:sldId id="267" r:id="rId15"/>
-    <p:sldId id="268" r:id="rId16"/>
-    <p:sldId id="269" r:id="rId17"/>
-    <p:sldId id="270" r:id="rId18"/>
-    <p:sldId id="271" r:id="rId19"/>
-    <p:sldId id="272" r:id="rId20"/>
-    <p:sldId id="273" r:id="rId21"/>
-    <p:sldId id="274" r:id="rId22"/>
-    <p:sldId id="275" r:id="rId23"/>
-    <p:sldId id="276" r:id="rId24"/>
-    <p:sldId id="277" r:id="rId25"/>
-    <p:sldId id="278" r:id="rId26"/>
-    <p:sldId id="279" r:id="rId27"/>
+    <p:sldId id="256" r:id="rId7"/>
+    <p:sldId id="257" r:id="rId8"/>
+    <p:sldId id="258" r:id="rId9"/>
+    <p:sldId id="259" r:id="rId10"/>
+    <p:sldId id="260" r:id="rId11"/>
+    <p:sldId id="261" r:id="rId12"/>
+    <p:sldId id="262" r:id="rId13"/>
+    <p:sldId id="263" r:id="rId14"/>
+    <p:sldId id="264" r:id="rId15"/>
+    <p:sldId id="265" r:id="rId16"/>
+    <p:sldId id="266" r:id="rId17"/>
+    <p:sldId id="267" r:id="rId18"/>
+    <p:sldId id="268" r:id="rId19"/>
+    <p:sldId id="269" r:id="rId20"/>
+    <p:sldId id="270" r:id="rId21"/>
+    <p:sldId id="271" r:id="rId22"/>
+    <p:sldId id="272" r:id="rId23"/>
+    <p:sldId id="273" r:id="rId24"/>
+    <p:sldId id="274" r:id="rId25"/>
+    <p:sldId id="275" r:id="rId26"/>
+    <p:sldId id="276" r:id="rId27"/>
+    <p:sldId id="277" r:id="rId28"/>
+    <p:sldId id="278" r:id="rId29"/>
+    <p:sldId id="279" r:id="rId30"/>
+    <p:sldId id="280" r:id="rId31"/>
   </p:sldIdLst>
-  <p:sldSz cx="12188825" cy="6858000"/>
+  <p:sldSz cx="12188952" cy="6858000" type="screen4x3"/>
   <p:notesSz cx="6858000" cy="9144000"/>
   <p:defaultTextStyle>
     <a:defPPr>
@@ -129,22 +128,6 @@
       </a:defRPr>
     </a:lvl9pPr>
   </p:defaultTextStyle>
-  <p:extLst>
-    <p:ext uri="{EFAFB233-063F-42B5-8137-9DF3F51BA10A}">
-      <p15:sldGuideLst xmlns:p15="http://schemas.microsoft.com/office/powerpoint/2012/main">
-        <p15:guide id="1" orient="horz" pos="2160">
-          <p15:clr>
-            <a:srgbClr val="A4A3A4"/>
-          </p15:clr>
-        </p15:guide>
-        <p15:guide id="2" pos="2880">
-          <p15:clr>
-            <a:srgbClr val="A4A3A4"/>
-          </p15:clr>
-        </p15:guide>
-      </p15:sldGuideLst>
-    </p:ext>
-  </p:extLst>
 </p:presentation>
 </file>
 
@@ -186,9 +169,10 @@
           <a:lstStyle/>
           <a:p>
             <a:r>
-              <a:rPr lang="en-US"/>
+              <a:rPr lang="en-US" smtClean="0"/>
               <a:t>Click to edit Master title style</a:t>
             </a:r>
+            <a:endParaRPr lang="en-US"/>
           </a:p>
         </p:txBody>
       </p:sp>
@@ -304,9 +288,10 @@
           </a:lstStyle>
           <a:p>
             <a:r>
-              <a:rPr lang="en-US"/>
+              <a:rPr lang="en-US" smtClean="0"/>
               <a:t>Click to edit Master subtitle style</a:t>
             </a:r>
+            <a:endParaRPr lang="en-US"/>
           </a:p>
         </p:txBody>
       </p:sp>
@@ -327,7 +312,7 @@
           <a:p>
             <a:fld id="{5BCAD085-E8A6-8845-BD4E-CB4CCA059FC4}" type="datetimeFigureOut">
               <a:rPr lang="en-US" smtClean="0"/>
-              <a:t>6/15/2026</a:t>
+              <a:t>1/27/13</a:t>
             </a:fld>
             <a:endParaRPr lang="en-US"/>
           </a:p>
@@ -369,7 +354,7 @@
           <a:p>
             <a:fld id="{C1FF6DA9-008F-8B48-92A6-B652298478BF}" type="slidenum">
               <a:rPr lang="en-US" smtClean="0"/>
-              <a:t>‹nº›</a:t>
+              <a:t>‹#›</a:t>
             </a:fld>
             <a:endParaRPr lang="en-US"/>
           </a:p>
@@ -421,9 +406,10 @@
           <a:lstStyle/>
           <a:p>
             <a:r>
-              <a:rPr lang="en-US"/>
+              <a:rPr lang="en-US" smtClean="0"/>
               <a:t>Click to edit Master title style</a:t>
             </a:r>
+            <a:endParaRPr lang="en-US"/>
           </a:p>
         </p:txBody>
       </p:sp>
@@ -444,37 +430,38 @@
           <a:p>
             <a:pPr lvl="0"/>
             <a:r>
-              <a:rPr lang="en-US"/>
+              <a:rPr lang="en-US" smtClean="0"/>
               <a:t>Click to edit Master text styles</a:t>
             </a:r>
           </a:p>
           <a:p>
             <a:pPr lvl="1"/>
             <a:r>
-              <a:rPr lang="en-US"/>
+              <a:rPr lang="en-US" smtClean="0"/>
               <a:t>Second level</a:t>
             </a:r>
           </a:p>
           <a:p>
             <a:pPr lvl="2"/>
             <a:r>
-              <a:rPr lang="en-US"/>
+              <a:rPr lang="en-US" smtClean="0"/>
               <a:t>Third level</a:t>
             </a:r>
           </a:p>
           <a:p>
             <a:pPr lvl="3"/>
             <a:r>
-              <a:rPr lang="en-US"/>
+              <a:rPr lang="en-US" smtClean="0"/>
               <a:t>Fourth level</a:t>
             </a:r>
           </a:p>
           <a:p>
             <a:pPr lvl="4"/>
             <a:r>
-              <a:rPr lang="en-US"/>
+              <a:rPr lang="en-US" smtClean="0"/>
               <a:t>Fifth level</a:t>
             </a:r>
+            <a:endParaRPr lang="en-US"/>
           </a:p>
         </p:txBody>
       </p:sp>
@@ -495,7 +482,7 @@
           <a:p>
             <a:fld id="{5BCAD085-E8A6-8845-BD4E-CB4CCA059FC4}" type="datetimeFigureOut">
               <a:rPr lang="en-US" smtClean="0"/>
-              <a:t>6/15/2026</a:t>
+              <a:t>1/27/13</a:t>
             </a:fld>
             <a:endParaRPr lang="en-US"/>
           </a:p>
@@ -537,7 +524,7 @@
           <a:p>
             <a:fld id="{C1FF6DA9-008F-8B48-92A6-B652298478BF}" type="slidenum">
               <a:rPr lang="en-US" smtClean="0"/>
-              <a:t>‹nº›</a:t>
+              <a:t>‹#›</a:t>
             </a:fld>
             <a:endParaRPr lang="en-US"/>
           </a:p>
@@ -594,9 +581,10 @@
           <a:lstStyle/>
           <a:p>
             <a:r>
-              <a:rPr lang="en-US"/>
+              <a:rPr lang="en-US" smtClean="0"/>
               <a:t>Click to edit Master title style</a:t>
             </a:r>
+            <a:endParaRPr lang="en-US"/>
           </a:p>
         </p:txBody>
       </p:sp>
@@ -622,37 +610,38 @@
           <a:p>
             <a:pPr lvl="0"/>
             <a:r>
-              <a:rPr lang="en-US"/>
+              <a:rPr lang="en-US" smtClean="0"/>
               <a:t>Click to edit Master text styles</a:t>
             </a:r>
           </a:p>
           <a:p>
             <a:pPr lvl="1"/>
             <a:r>
-              <a:rPr lang="en-US"/>
+              <a:rPr lang="en-US" smtClean="0"/>
               <a:t>Second level</a:t>
             </a:r>
           </a:p>
           <a:p>
             <a:pPr lvl="2"/>
             <a:r>
-              <a:rPr lang="en-US"/>
+              <a:rPr lang="en-US" smtClean="0"/>
               <a:t>Third level</a:t>
             </a:r>
           </a:p>
           <a:p>
             <a:pPr lvl="3"/>
             <a:r>
-              <a:rPr lang="en-US"/>
+              <a:rPr lang="en-US" smtClean="0"/>
               <a:t>Fourth level</a:t>
             </a:r>
           </a:p>
           <a:p>
             <a:pPr lvl="4"/>
             <a:r>
-              <a:rPr lang="en-US"/>
+              <a:rPr lang="en-US" smtClean="0"/>
               <a:t>Fifth level</a:t>
             </a:r>
+            <a:endParaRPr lang="en-US"/>
           </a:p>
         </p:txBody>
       </p:sp>
@@ -673,7 +662,7 @@
           <a:p>
             <a:fld id="{5BCAD085-E8A6-8845-BD4E-CB4CCA059FC4}" type="datetimeFigureOut">
               <a:rPr lang="en-US" smtClean="0"/>
-              <a:t>6/15/2026</a:t>
+              <a:t>1/27/13</a:t>
             </a:fld>
             <a:endParaRPr lang="en-US"/>
           </a:p>
@@ -715,7 +704,7 @@
           <a:p>
             <a:fld id="{C1FF6DA9-008F-8B48-92A6-B652298478BF}" type="slidenum">
               <a:rPr lang="en-US" smtClean="0"/>
-              <a:t>‹nº›</a:t>
+              <a:t>‹#›</a:t>
             </a:fld>
             <a:endParaRPr lang="en-US"/>
           </a:p>
@@ -767,9 +756,10 @@
           <a:lstStyle/>
           <a:p>
             <a:r>
-              <a:rPr lang="en-US"/>
+              <a:rPr lang="en-US" smtClean="0"/>
               <a:t>Click to edit Master title style</a:t>
             </a:r>
+            <a:endParaRPr lang="en-US"/>
           </a:p>
         </p:txBody>
       </p:sp>
@@ -790,37 +780,38 @@
           <a:p>
             <a:pPr lvl="0"/>
             <a:r>
-              <a:rPr lang="en-US"/>
+              <a:rPr lang="en-US" smtClean="0"/>
               <a:t>Click to edit Master text styles</a:t>
             </a:r>
           </a:p>
           <a:p>
             <a:pPr lvl="1"/>
             <a:r>
-              <a:rPr lang="en-US"/>
+              <a:rPr lang="en-US" smtClean="0"/>
               <a:t>Second level</a:t>
             </a:r>
           </a:p>
           <a:p>
             <a:pPr lvl="2"/>
             <a:r>
-              <a:rPr lang="en-US"/>
+              <a:rPr lang="en-US" smtClean="0"/>
               <a:t>Third level</a:t>
             </a:r>
           </a:p>
           <a:p>
             <a:pPr lvl="3"/>
             <a:r>
-              <a:rPr lang="en-US"/>
+              <a:rPr lang="en-US" smtClean="0"/>
               <a:t>Fourth level</a:t>
             </a:r>
           </a:p>
           <a:p>
             <a:pPr lvl="4"/>
             <a:r>
-              <a:rPr lang="en-US"/>
+              <a:rPr lang="en-US" smtClean="0"/>
               <a:t>Fifth level</a:t>
             </a:r>
+            <a:endParaRPr lang="en-US"/>
           </a:p>
         </p:txBody>
       </p:sp>
@@ -841,7 +832,7 @@
           <a:p>
             <a:fld id="{5BCAD085-E8A6-8845-BD4E-CB4CCA059FC4}" type="datetimeFigureOut">
               <a:rPr lang="en-US" smtClean="0"/>
-              <a:t>6/15/2026</a:t>
+              <a:t>1/27/13</a:t>
             </a:fld>
             <a:endParaRPr lang="en-US"/>
           </a:p>
@@ -883,7 +874,7 @@
           <a:p>
             <a:fld id="{C1FF6DA9-008F-8B48-92A6-B652298478BF}" type="slidenum">
               <a:rPr lang="en-US" smtClean="0"/>
-              <a:t>‹nº›</a:t>
+              <a:t>‹#›</a:t>
             </a:fld>
             <a:endParaRPr lang="en-US"/>
           </a:p>
@@ -944,9 +935,10 @@
           </a:lstStyle>
           <a:p>
             <a:r>
-              <a:rPr lang="en-US"/>
+              <a:rPr lang="en-US" smtClean="0"/>
               <a:t>Click to edit Master title style</a:t>
             </a:r>
+            <a:endParaRPr lang="en-US"/>
           </a:p>
         </p:txBody>
       </p:sp>
@@ -1063,7 +1055,7 @@
           <a:p>
             <a:pPr lvl="0"/>
             <a:r>
-              <a:rPr lang="en-US"/>
+              <a:rPr lang="en-US" smtClean="0"/>
               <a:t>Click to edit Master text styles</a:t>
             </a:r>
           </a:p>
@@ -1086,7 +1078,7 @@
           <a:p>
             <a:fld id="{5BCAD085-E8A6-8845-BD4E-CB4CCA059FC4}" type="datetimeFigureOut">
               <a:rPr lang="en-US" smtClean="0"/>
-              <a:t>6/15/2026</a:t>
+              <a:t>1/27/13</a:t>
             </a:fld>
             <a:endParaRPr lang="en-US"/>
           </a:p>
@@ -1128,7 +1120,7 @@
           <a:p>
             <a:fld id="{C1FF6DA9-008F-8B48-92A6-B652298478BF}" type="slidenum">
               <a:rPr lang="en-US" smtClean="0"/>
-              <a:t>‹nº›</a:t>
+              <a:t>‹#›</a:t>
             </a:fld>
             <a:endParaRPr lang="en-US"/>
           </a:p>
@@ -1180,9 +1172,10 @@
           <a:lstStyle/>
           <a:p>
             <a:r>
-              <a:rPr lang="en-US"/>
+              <a:rPr lang="en-US" smtClean="0"/>
               <a:t>Click to edit Master title style</a:t>
             </a:r>
+            <a:endParaRPr lang="en-US"/>
           </a:p>
         </p:txBody>
       </p:sp>
@@ -1236,37 +1229,38 @@
           <a:p>
             <a:pPr lvl="0"/>
             <a:r>
-              <a:rPr lang="en-US"/>
+              <a:rPr lang="en-US" smtClean="0"/>
               <a:t>Click to edit Master text styles</a:t>
             </a:r>
           </a:p>
           <a:p>
             <a:pPr lvl="1"/>
             <a:r>
-              <a:rPr lang="en-US"/>
+              <a:rPr lang="en-US" smtClean="0"/>
               <a:t>Second level</a:t>
             </a:r>
           </a:p>
           <a:p>
             <a:pPr lvl="2"/>
             <a:r>
-              <a:rPr lang="en-US"/>
+              <a:rPr lang="en-US" smtClean="0"/>
               <a:t>Third level</a:t>
             </a:r>
           </a:p>
           <a:p>
             <a:pPr lvl="3"/>
             <a:r>
-              <a:rPr lang="en-US"/>
+              <a:rPr lang="en-US" smtClean="0"/>
               <a:t>Fourth level</a:t>
             </a:r>
           </a:p>
           <a:p>
             <a:pPr lvl="4"/>
             <a:r>
-              <a:rPr lang="en-US"/>
+              <a:rPr lang="en-US" smtClean="0"/>
               <a:t>Fifth level</a:t>
             </a:r>
+            <a:endParaRPr lang="en-US"/>
           </a:p>
         </p:txBody>
       </p:sp>
@@ -1320,37 +1314,38 @@
           <a:p>
             <a:pPr lvl="0"/>
             <a:r>
-              <a:rPr lang="en-US"/>
+              <a:rPr lang="en-US" smtClean="0"/>
               <a:t>Click to edit Master text styles</a:t>
             </a:r>
           </a:p>
           <a:p>
             <a:pPr lvl="1"/>
             <a:r>
-              <a:rPr lang="en-US"/>
+              <a:rPr lang="en-US" smtClean="0"/>
               <a:t>Second level</a:t>
             </a:r>
           </a:p>
           <a:p>
             <a:pPr lvl="2"/>
             <a:r>
-              <a:rPr lang="en-US"/>
+              <a:rPr lang="en-US" smtClean="0"/>
               <a:t>Third level</a:t>
             </a:r>
           </a:p>
           <a:p>
             <a:pPr lvl="3"/>
             <a:r>
-              <a:rPr lang="en-US"/>
+              <a:rPr lang="en-US" smtClean="0"/>
               <a:t>Fourth level</a:t>
             </a:r>
           </a:p>
           <a:p>
             <a:pPr lvl="4"/>
             <a:r>
-              <a:rPr lang="en-US"/>
+              <a:rPr lang="en-US" smtClean="0"/>
               <a:t>Fifth level</a:t>
             </a:r>
+            <a:endParaRPr lang="en-US"/>
           </a:p>
         </p:txBody>
       </p:sp>
@@ -1371,7 +1366,7 @@
           <a:p>
             <a:fld id="{5BCAD085-E8A6-8845-BD4E-CB4CCA059FC4}" type="datetimeFigureOut">
               <a:rPr lang="en-US" smtClean="0"/>
-              <a:t>6/15/2026</a:t>
+              <a:t>1/27/13</a:t>
             </a:fld>
             <a:endParaRPr lang="en-US"/>
           </a:p>
@@ -1413,7 +1408,7 @@
           <a:p>
             <a:fld id="{C1FF6DA9-008F-8B48-92A6-B652298478BF}" type="slidenum">
               <a:rPr lang="en-US" smtClean="0"/>
-              <a:t>‹nº›</a:t>
+              <a:t>‹#›</a:t>
             </a:fld>
             <a:endParaRPr lang="en-US"/>
           </a:p>
@@ -1469,9 +1464,10 @@
           </a:lstStyle>
           <a:p>
             <a:r>
-              <a:rPr lang="en-US"/>
+              <a:rPr lang="en-US" smtClean="0"/>
               <a:t>Click to edit Master title style</a:t>
             </a:r>
+            <a:endParaRPr lang="en-US"/>
           </a:p>
         </p:txBody>
       </p:sp>
@@ -1534,7 +1530,7 @@
           <a:p>
             <a:pPr lvl="0"/>
             <a:r>
-              <a:rPr lang="en-US"/>
+              <a:rPr lang="en-US" smtClean="0"/>
               <a:t>Click to edit Master text styles</a:t>
             </a:r>
           </a:p>
@@ -1590,37 +1586,38 @@
           <a:p>
             <a:pPr lvl="0"/>
             <a:r>
-              <a:rPr lang="en-US"/>
+              <a:rPr lang="en-US" smtClean="0"/>
               <a:t>Click to edit Master text styles</a:t>
             </a:r>
           </a:p>
           <a:p>
             <a:pPr lvl="1"/>
             <a:r>
-              <a:rPr lang="en-US"/>
+              <a:rPr lang="en-US" smtClean="0"/>
               <a:t>Second level</a:t>
             </a:r>
           </a:p>
           <a:p>
             <a:pPr lvl="2"/>
             <a:r>
-              <a:rPr lang="en-US"/>
+              <a:rPr lang="en-US" smtClean="0"/>
               <a:t>Third level</a:t>
             </a:r>
           </a:p>
           <a:p>
             <a:pPr lvl="3"/>
             <a:r>
-              <a:rPr lang="en-US"/>
+              <a:rPr lang="en-US" smtClean="0"/>
               <a:t>Fourth level</a:t>
             </a:r>
           </a:p>
           <a:p>
             <a:pPr lvl="4"/>
             <a:r>
-              <a:rPr lang="en-US"/>
+              <a:rPr lang="en-US" smtClean="0"/>
               <a:t>Fifth level</a:t>
             </a:r>
+            <a:endParaRPr lang="en-US"/>
           </a:p>
         </p:txBody>
       </p:sp>
@@ -1683,7 +1680,7 @@
           <a:p>
             <a:pPr lvl="0"/>
             <a:r>
-              <a:rPr lang="en-US"/>
+              <a:rPr lang="en-US" smtClean="0"/>
               <a:t>Click to edit Master text styles</a:t>
             </a:r>
           </a:p>
@@ -1739,37 +1736,38 @@
           <a:p>
             <a:pPr lvl="0"/>
             <a:r>
-              <a:rPr lang="en-US"/>
+              <a:rPr lang="en-US" smtClean="0"/>
               <a:t>Click to edit Master text styles</a:t>
             </a:r>
           </a:p>
           <a:p>
             <a:pPr lvl="1"/>
             <a:r>
-              <a:rPr lang="en-US"/>
+              <a:rPr lang="en-US" smtClean="0"/>
               <a:t>Second level</a:t>
             </a:r>
           </a:p>
           <a:p>
             <a:pPr lvl="2"/>
             <a:r>
-              <a:rPr lang="en-US"/>
+              <a:rPr lang="en-US" smtClean="0"/>
               <a:t>Third level</a:t>
             </a:r>
           </a:p>
           <a:p>
             <a:pPr lvl="3"/>
             <a:r>
-              <a:rPr lang="en-US"/>
+              <a:rPr lang="en-US" smtClean="0"/>
               <a:t>Fourth level</a:t>
             </a:r>
           </a:p>
           <a:p>
             <a:pPr lvl="4"/>
             <a:r>
-              <a:rPr lang="en-US"/>
+              <a:rPr lang="en-US" smtClean="0"/>
               <a:t>Fifth level</a:t>
             </a:r>
+            <a:endParaRPr lang="en-US"/>
           </a:p>
         </p:txBody>
       </p:sp>
@@ -1790,7 +1788,7 @@
           <a:p>
             <a:fld id="{5BCAD085-E8A6-8845-BD4E-CB4CCA059FC4}" type="datetimeFigureOut">
               <a:rPr lang="en-US" smtClean="0"/>
-              <a:t>6/15/2026</a:t>
+              <a:t>1/27/13</a:t>
             </a:fld>
             <a:endParaRPr lang="en-US"/>
           </a:p>
@@ -1832,7 +1830,7 @@
           <a:p>
             <a:fld id="{C1FF6DA9-008F-8B48-92A6-B652298478BF}" type="slidenum">
               <a:rPr lang="en-US" smtClean="0"/>
-              <a:t>‹nº›</a:t>
+              <a:t>‹#›</a:t>
             </a:fld>
             <a:endParaRPr lang="en-US"/>
           </a:p>
@@ -1884,9 +1882,10 @@
           <a:lstStyle/>
           <a:p>
             <a:r>
-              <a:rPr lang="en-US"/>
+              <a:rPr lang="en-US" smtClean="0"/>
               <a:t>Click to edit Master title style</a:t>
             </a:r>
+            <a:endParaRPr lang="en-US"/>
           </a:p>
         </p:txBody>
       </p:sp>
@@ -1907,7 +1906,7 @@
           <a:p>
             <a:fld id="{5BCAD085-E8A6-8845-BD4E-CB4CCA059FC4}" type="datetimeFigureOut">
               <a:rPr lang="en-US" smtClean="0"/>
-              <a:t>6/15/2026</a:t>
+              <a:t>1/27/13</a:t>
             </a:fld>
             <a:endParaRPr lang="en-US"/>
           </a:p>
@@ -1949,7 +1948,7 @@
           <a:p>
             <a:fld id="{C1FF6DA9-008F-8B48-92A6-B652298478BF}" type="slidenum">
               <a:rPr lang="en-US" smtClean="0"/>
-              <a:t>‹nº›</a:t>
+              <a:t>‹#›</a:t>
             </a:fld>
             <a:endParaRPr lang="en-US"/>
           </a:p>
@@ -2002,7 +2001,7 @@
           <a:p>
             <a:fld id="{5BCAD085-E8A6-8845-BD4E-CB4CCA059FC4}" type="datetimeFigureOut">
               <a:rPr lang="en-US" smtClean="0"/>
-              <a:t>6/15/2026</a:t>
+              <a:t>1/27/13</a:t>
             </a:fld>
             <a:endParaRPr lang="en-US"/>
           </a:p>
@@ -2044,7 +2043,7 @@
           <a:p>
             <a:fld id="{C1FF6DA9-008F-8B48-92A6-B652298478BF}" type="slidenum">
               <a:rPr lang="en-US" smtClean="0"/>
-              <a:t>‹nº›</a:t>
+              <a:t>‹#›</a:t>
             </a:fld>
             <a:endParaRPr lang="en-US"/>
           </a:p>
@@ -2105,9 +2104,10 @@
           </a:lstStyle>
           <a:p>
             <a:r>
-              <a:rPr lang="en-US"/>
+              <a:rPr lang="en-US" smtClean="0"/>
               <a:t>Click to edit Master title style</a:t>
             </a:r>
+            <a:endParaRPr lang="en-US"/>
           </a:p>
         </p:txBody>
       </p:sp>
@@ -2161,37 +2161,38 @@
           <a:p>
             <a:pPr lvl="0"/>
             <a:r>
-              <a:rPr lang="en-US"/>
+              <a:rPr lang="en-US" smtClean="0"/>
               <a:t>Click to edit Master text styles</a:t>
             </a:r>
           </a:p>
           <a:p>
             <a:pPr lvl="1"/>
             <a:r>
-              <a:rPr lang="en-US"/>
+              <a:rPr lang="en-US" smtClean="0"/>
               <a:t>Second level</a:t>
             </a:r>
           </a:p>
           <a:p>
             <a:pPr lvl="2"/>
             <a:r>
-              <a:rPr lang="en-US"/>
+              <a:rPr lang="en-US" smtClean="0"/>
               <a:t>Third level</a:t>
             </a:r>
           </a:p>
           <a:p>
             <a:pPr lvl="3"/>
             <a:r>
-              <a:rPr lang="en-US"/>
+              <a:rPr lang="en-US" smtClean="0"/>
               <a:t>Fourth level</a:t>
             </a:r>
           </a:p>
           <a:p>
             <a:pPr lvl="4"/>
             <a:r>
-              <a:rPr lang="en-US"/>
+              <a:rPr lang="en-US" smtClean="0"/>
               <a:t>Fifth level</a:t>
             </a:r>
+            <a:endParaRPr lang="en-US"/>
           </a:p>
         </p:txBody>
       </p:sp>
@@ -2254,7 +2255,7 @@
           <a:p>
             <a:pPr lvl="0"/>
             <a:r>
-              <a:rPr lang="en-US"/>
+              <a:rPr lang="en-US" smtClean="0"/>
               <a:t>Click to edit Master text styles</a:t>
             </a:r>
           </a:p>
@@ -2277,7 +2278,7 @@
           <a:p>
             <a:fld id="{5BCAD085-E8A6-8845-BD4E-CB4CCA059FC4}" type="datetimeFigureOut">
               <a:rPr lang="en-US" smtClean="0"/>
-              <a:t>6/15/2026</a:t>
+              <a:t>1/27/13</a:t>
             </a:fld>
             <a:endParaRPr lang="en-US"/>
           </a:p>
@@ -2319,7 +2320,7 @@
           <a:p>
             <a:fld id="{C1FF6DA9-008F-8B48-92A6-B652298478BF}" type="slidenum">
               <a:rPr lang="en-US" smtClean="0"/>
-              <a:t>‹nº›</a:t>
+              <a:t>‹#›</a:t>
             </a:fld>
             <a:endParaRPr lang="en-US"/>
           </a:p>
@@ -2380,9 +2381,10 @@
           </a:lstStyle>
           <a:p>
             <a:r>
-              <a:rPr lang="en-US"/>
+              <a:rPr lang="en-US" smtClean="0"/>
               <a:t>Click to edit Master title style</a:t>
             </a:r>
+            <a:endParaRPr lang="en-US"/>
           </a:p>
         </p:txBody>
       </p:sp>
@@ -2506,7 +2508,7 @@
           <a:p>
             <a:pPr lvl="0"/>
             <a:r>
-              <a:rPr lang="en-US"/>
+              <a:rPr lang="en-US" smtClean="0"/>
               <a:t>Click to edit Master text styles</a:t>
             </a:r>
           </a:p>
@@ -2529,7 +2531,7 @@
           <a:p>
             <a:fld id="{5BCAD085-E8A6-8845-BD4E-CB4CCA059FC4}" type="datetimeFigureOut">
               <a:rPr lang="en-US" smtClean="0"/>
-              <a:t>6/15/2026</a:t>
+              <a:t>1/27/13</a:t>
             </a:fld>
             <a:endParaRPr lang="en-US"/>
           </a:p>
@@ -2571,7 +2573,7 @@
           <a:p>
             <a:fld id="{C1FF6DA9-008F-8B48-92A6-B652298478BF}" type="slidenum">
               <a:rPr lang="en-US" smtClean="0"/>
-              <a:t>‹nº›</a:t>
+              <a:t>‹#›</a:t>
             </a:fld>
             <a:endParaRPr lang="en-US"/>
           </a:p>
@@ -2638,9 +2640,10 @@
           <a:lstStyle/>
           <a:p>
             <a:r>
-              <a:rPr lang="en-US"/>
+              <a:rPr lang="en-US" smtClean="0"/>
               <a:t>Click to edit Master title style</a:t>
             </a:r>
+            <a:endParaRPr lang="en-US"/>
           </a:p>
         </p:txBody>
       </p:sp>
@@ -2671,37 +2674,38 @@
           <a:p>
             <a:pPr lvl="0"/>
             <a:r>
-              <a:rPr lang="en-US"/>
+              <a:rPr lang="en-US" smtClean="0"/>
               <a:t>Click to edit Master text styles</a:t>
             </a:r>
           </a:p>
           <a:p>
             <a:pPr lvl="1"/>
             <a:r>
-              <a:rPr lang="en-US"/>
+              <a:rPr lang="en-US" smtClean="0"/>
               <a:t>Second level</a:t>
             </a:r>
           </a:p>
           <a:p>
             <a:pPr lvl="2"/>
             <a:r>
-              <a:rPr lang="en-US"/>
+              <a:rPr lang="en-US" smtClean="0"/>
               <a:t>Third level</a:t>
             </a:r>
           </a:p>
           <a:p>
             <a:pPr lvl="3"/>
             <a:r>
-              <a:rPr lang="en-US"/>
+              <a:rPr lang="en-US" smtClean="0"/>
               <a:t>Fourth level</a:t>
             </a:r>
           </a:p>
           <a:p>
             <a:pPr lvl="4"/>
             <a:r>
-              <a:rPr lang="en-US"/>
+              <a:rPr lang="en-US" smtClean="0"/>
               <a:t>Fifth level</a:t>
             </a:r>
+            <a:endParaRPr lang="en-US"/>
           </a:p>
         </p:txBody>
       </p:sp>
@@ -2740,7 +2744,7 @@
           <a:p>
             <a:fld id="{5BCAD085-E8A6-8845-BD4E-CB4CCA059FC4}" type="datetimeFigureOut">
               <a:rPr lang="en-US" smtClean="0"/>
-              <a:t>6/15/2026</a:t>
+              <a:t>1/27/13</a:t>
             </a:fld>
             <a:endParaRPr lang="en-US"/>
           </a:p>
@@ -2818,7 +2822,7 @@
           <a:p>
             <a:fld id="{C1FF6DA9-008F-8B48-92A6-B652298478BF}" type="slidenum">
               <a:rPr lang="en-US" smtClean="0"/>
-              <a:t>‹nº›</a:t>
+              <a:t>‹#›</a:t>
             </a:fld>
             <a:endParaRPr lang="en-US"/>
           </a:p>
@@ -3099,7 +3103,7 @@
 </file>
 
 <file path=ppt/slides/slide1.xml><?xml version="1.0" encoding="utf-8"?>
-<p:sld xmlns:a="http://schemas.openxmlformats.org/drawingml/2006/main" xmlns:r="http://schemas.openxmlformats.org/officeDocument/2006/relationships" xmlns:p="http://schemas.openxmlformats.org/presentationml/2006/main">
+<p:sld xmlns:a="http://schemas.openxmlformats.org/drawingml/2006/main" xmlns:p="http://schemas.openxmlformats.org/presentationml/2006/main" xmlns:r="http://schemas.openxmlformats.org/officeDocument/2006/relationships">
   <p:cSld>
     <p:spTree>
       <p:nvGrpSpPr>
@@ -3107,14 +3111,7 @@
         <p:cNvGrpSpPr/>
         <p:nvPr/>
       </p:nvGrpSpPr>
-      <p:grpSpPr>
-        <a:xfrm>
-          <a:off x="0" y="0"/>
-          <a:ext cx="0" cy="0"/>
-          <a:chOff x="0" y="0"/>
-          <a:chExt cx="0" cy="0"/>
-        </a:xfrm>
-      </p:grpSpPr>
+      <p:grpSpPr/>
       <p:sp>
         <p:nvSpPr>
           <p:cNvPr id="2" name="Rectangle 1"/>
@@ -3155,7 +3152,6 @@
           <a:lstStyle/>
           <a:p>
             <a:pPr algn="ctr"/>
-            <a:endParaRPr/>
           </a:p>
         </p:txBody>
       </p:sp>
@@ -3298,7 +3294,7 @@
 </file>
 
 <file path=ppt/slides/slide10.xml><?xml version="1.0" encoding="utf-8"?>
-<p:sld xmlns:a="http://schemas.openxmlformats.org/drawingml/2006/main" xmlns:r="http://schemas.openxmlformats.org/officeDocument/2006/relationships" xmlns:p="http://schemas.openxmlformats.org/presentationml/2006/main">
+<p:sld xmlns:a="http://schemas.openxmlformats.org/drawingml/2006/main" xmlns:p="http://schemas.openxmlformats.org/presentationml/2006/main" xmlns:r="http://schemas.openxmlformats.org/officeDocument/2006/relationships">
   <p:cSld>
     <p:spTree>
       <p:nvGrpSpPr>
@@ -3306,112 +3302,7 @@
         <p:cNvGrpSpPr/>
         <p:nvPr/>
       </p:nvGrpSpPr>
-      <p:grpSpPr>
-        <a:xfrm>
-          <a:off x="0" y="0"/>
-          <a:ext cx="0" cy="0"/>
-          <a:chOff x="0" y="0"/>
-          <a:chExt cx="0" cy="0"/>
-        </a:xfrm>
-      </p:grpSpPr>
-      <p:pic>
-        <p:nvPicPr>
-          <p:cNvPr id="2" name="Picture 2"/>
-          <p:cNvPicPr>
-            <a:picLocks noChangeAspect="1"/>
-          </p:cNvPicPr>
-          <p:nvPr/>
-        </p:nvPicPr>
-        <p:blipFill>
-          <a:blip r:embed="rId2"/>
-          <a:stretch>
-            <a:fillRect/>
-          </a:stretch>
-        </p:blipFill>
-        <p:spPr>
-          <a:xfrm>
-            <a:off x="-1" y="29461"/>
-            <a:ext cx="12188825" cy="6799079"/>
-          </a:xfrm>
-          <a:prstGeom prst="rect">
-            <a:avLst/>
-          </a:prstGeom>
-        </p:spPr>
-      </p:pic>
-    </p:spTree>
-  </p:cSld>
-  <p:clrMapOvr>
-    <a:masterClrMapping/>
-  </p:clrMapOvr>
-</p:sld>
-</file>
-
-<file path=ppt/slides/slide11.xml><?xml version="1.0" encoding="utf-8"?>
-<p:sld xmlns:a="http://schemas.openxmlformats.org/drawingml/2006/main" xmlns:r="http://schemas.openxmlformats.org/officeDocument/2006/relationships" xmlns:p="http://schemas.openxmlformats.org/presentationml/2006/main">
-  <p:cSld>
-    <p:spTree>
-      <p:nvGrpSpPr>
-        <p:cNvPr id="1" name=""/>
-        <p:cNvGrpSpPr/>
-        <p:nvPr/>
-      </p:nvGrpSpPr>
-      <p:grpSpPr>
-        <a:xfrm>
-          <a:off x="0" y="0"/>
-          <a:ext cx="0" cy="0"/>
-          <a:chOff x="0" y="0"/>
-          <a:chExt cx="0" cy="0"/>
-        </a:xfrm>
-      </p:grpSpPr>
-      <p:pic>
-        <p:nvPicPr>
-          <p:cNvPr id="2" name="Picture 2"/>
-          <p:cNvPicPr>
-            <a:picLocks noChangeAspect="1"/>
-          </p:cNvPicPr>
-          <p:nvPr/>
-        </p:nvPicPr>
-        <p:blipFill>
-          <a:blip r:embed="rId2"/>
-          <a:stretch>
-            <a:fillRect/>
-          </a:stretch>
-        </p:blipFill>
-        <p:spPr>
-          <a:xfrm>
-            <a:off x="-1" y="29461"/>
-            <a:ext cx="12188825" cy="6799079"/>
-          </a:xfrm>
-          <a:prstGeom prst="rect">
-            <a:avLst/>
-          </a:prstGeom>
-        </p:spPr>
-      </p:pic>
-    </p:spTree>
-  </p:cSld>
-  <p:clrMapOvr>
-    <a:masterClrMapping/>
-  </p:clrMapOvr>
-</p:sld>
-</file>
-
-<file path=ppt/slides/slide12.xml><?xml version="1.0" encoding="utf-8"?>
-<p:sld xmlns:a="http://schemas.openxmlformats.org/drawingml/2006/main" xmlns:r="http://schemas.openxmlformats.org/officeDocument/2006/relationships" xmlns:p="http://schemas.openxmlformats.org/presentationml/2006/main" show="0">
-  <p:cSld>
-    <p:spTree>
-      <p:nvGrpSpPr>
-        <p:cNvPr id="1" name=""/>
-        <p:cNvGrpSpPr/>
-        <p:nvPr/>
-      </p:nvGrpSpPr>
-      <p:grpSpPr>
-        <a:xfrm>
-          <a:off x="0" y="0"/>
-          <a:ext cx="0" cy="0"/>
-          <a:chOff x="0" y="0"/>
-          <a:chExt cx="0" cy="0"/>
-        </a:xfrm>
-      </p:grpSpPr>
+      <p:grpSpPr/>
       <p:sp>
         <p:nvSpPr>
           <p:cNvPr id="2" name="TextBox 1"/>
@@ -3487,7 +3378,6 @@
           <a:lstStyle/>
           <a:p>
             <a:pPr algn="ctr"/>
-            <a:endParaRPr/>
           </a:p>
         </p:txBody>
       </p:sp>
@@ -3555,7 +3445,7 @@
                   <a:srgbClr val="3D424E"/>
                 </a:solidFill>
               </a:rPr>
-              <a:t>Pangelinan 2023 — 'pixel info' explica disparidades, endereçado pela Hipótese H6</a:t>
+              <a:t>Pangelinan 2023 — leitura integral confirmou: skin tone isolado não causa o gap; pixel info explica parcialmente o FNMR → endossa nossa Hipótese H6</a:t>
             </a:r>
           </a:p>
           <a:p>
@@ -3640,6 +3530,14 @@
                 </a:solidFill>
               </a:rPr>
               <a:t>  </a:t>
+            </a:r>
+            <a:r>
+              <a:rPr sz="1600">
+                <a:solidFill>
+                  <a:srgbClr val="3D424E"/>
+                </a:solidFill>
+              </a:rPr>
+              <a:t/>
             </a:r>
           </a:p>
           <a:p>
@@ -3675,8 +3573,8 @@
 </p:sld>
 </file>
 
-<file path=ppt/slides/slide13.xml><?xml version="1.0" encoding="utf-8"?>
-<p:sld xmlns:a="http://schemas.openxmlformats.org/drawingml/2006/main" xmlns:r="http://schemas.openxmlformats.org/officeDocument/2006/relationships" xmlns:p="http://schemas.openxmlformats.org/presentationml/2006/main">
+<file path=ppt/slides/slide11.xml><?xml version="1.0" encoding="utf-8"?>
+<p:sld xmlns:a="http://schemas.openxmlformats.org/drawingml/2006/main" xmlns:p="http://schemas.openxmlformats.org/presentationml/2006/main" xmlns:r="http://schemas.openxmlformats.org/officeDocument/2006/relationships">
   <p:cSld>
     <p:spTree>
       <p:nvGrpSpPr>
@@ -3684,14 +3582,264 @@
         <p:cNvGrpSpPr/>
         <p:nvPr/>
       </p:nvGrpSpPr>
-      <p:grpSpPr>
-        <a:xfrm>
-          <a:off x="0" y="0"/>
-          <a:ext cx="0" cy="0"/>
-          <a:chOff x="0" y="0"/>
-          <a:chExt cx="0" cy="0"/>
-        </a:xfrm>
-      </p:grpSpPr>
+      <p:grpSpPr/>
+      <p:sp>
+        <p:nvSpPr>
+          <p:cNvPr id="2" name="TextBox 1"/>
+          <p:cNvSpPr txBox="1"/>
+          <p:nvPr/>
+        </p:nvSpPr>
+        <p:spPr>
+          <a:xfrm>
+            <a:off x="457200" y="365760"/>
+            <a:ext cx="11430000" cy="822960"/>
+          </a:xfrm>
+          <a:prstGeom prst="rect">
+            <a:avLst/>
+          </a:prstGeom>
+          <a:noFill/>
+        </p:spPr>
+        <p:txBody>
+          <a:bodyPr wrap="square">
+            <a:spAutoFit/>
+          </a:bodyPr>
+          <a:lstStyle/>
+          <a:p>
+            <a:pPr>
+              <a:defRPr sz="2600" b="1">
+                <a:solidFill>
+                  <a:srgbClr val="1F2A4E"/>
+                </a:solidFill>
+              </a:defRPr>
+            </a:pPr>
+            <a:r>
+              <a:t>Status das leituras críticas</a:t>
+            </a:r>
+          </a:p>
+        </p:txBody>
+      </p:sp>
+      <p:sp>
+        <p:nvSpPr>
+          <p:cNvPr id="3" name="Rectangle 2"/>
+          <p:cNvSpPr/>
+          <p:nvPr/>
+        </p:nvSpPr>
+        <p:spPr>
+          <a:xfrm>
+            <a:off x="457200" y="1143000"/>
+            <a:ext cx="11430000" cy="36576"/>
+          </a:xfrm>
+          <a:prstGeom prst="rect">
+            <a:avLst/>
+          </a:prstGeom>
+          <a:solidFill>
+            <a:srgbClr val="1F2A4E"/>
+          </a:solidFill>
+          <a:ln>
+            <a:noFill/>
+          </a:ln>
+        </p:spPr>
+        <p:style>
+          <a:lnRef idx="1">
+            <a:schemeClr val="accent1"/>
+          </a:lnRef>
+          <a:fillRef idx="3">
+            <a:schemeClr val="accent1"/>
+          </a:fillRef>
+          <a:effectRef idx="2">
+            <a:schemeClr val="accent1"/>
+          </a:effectRef>
+          <a:fontRef idx="minor">
+            <a:schemeClr val="lt1"/>
+          </a:fontRef>
+        </p:style>
+        <p:txBody>
+          <a:bodyPr rtlCol="0" anchor="ctr"/>
+          <a:lstStyle/>
+          <a:p>
+            <a:pPr algn="ctr"/>
+          </a:p>
+        </p:txBody>
+      </p:sp>
+      <p:sp>
+        <p:nvSpPr>
+          <p:cNvPr id="4" name="TextBox 3"/>
+          <p:cNvSpPr txBox="1"/>
+          <p:nvPr/>
+        </p:nvSpPr>
+        <p:spPr>
+          <a:xfrm>
+            <a:off x="457200" y="1371600"/>
+            <a:ext cx="11430000" cy="4937760"/>
+          </a:xfrm>
+          <a:prstGeom prst="rect">
+            <a:avLst/>
+          </a:prstGeom>
+          <a:noFill/>
+        </p:spPr>
+        <p:txBody>
+          <a:bodyPr wrap="square">
+            <a:spAutoFit/>
+          </a:bodyPr>
+          <a:lstStyle/>
+          <a:p>
+            <a:pPr>
+              <a:spcAft>
+                <a:spcPts val="800"/>
+              </a:spcAft>
+            </a:pPr>
+            <a:r>
+              <a:rPr sz="1600" b="1">
+                <a:solidFill>
+                  <a:srgbClr val="1F2A4E"/>
+                </a:solidFill>
+              </a:rPr>
+              <a:t>Cobertura de PDFs:  </a:t>
+            </a:r>
+            <a:r>
+              <a:rPr sz="1600">
+                <a:solidFill>
+                  <a:srgbClr val="3D424E"/>
+                </a:solidFill>
+              </a:rPr>
+              <a:t>92 de 101 fichas (91 %) com PDF no repositório — 9 restantes em paywall institucional ou fontes históricas</a:t>
+            </a:r>
+          </a:p>
+          <a:p>
+            <a:pPr>
+              <a:spcAft>
+                <a:spcPts val="800"/>
+              </a:spcAft>
+            </a:pPr>
+            <a:r>
+              <a:rPr sz="1600" b="1">
+                <a:solidFill>
+                  <a:srgbClr val="1F2A4E"/>
+                </a:solidFill>
+              </a:rPr>
+              <a:t>Camada 1 (críticas):  </a:t>
+            </a:r>
+            <a:r>
+              <a:rPr sz="1600">
+                <a:solidFill>
+                  <a:srgbClr val="3D424E"/>
+                </a:solidFill>
+              </a:rPr>
+              <a:t>14 fichas — todas com leitura integral concluída e fichas em estado VERIFIED</a:t>
+            </a:r>
+          </a:p>
+          <a:p>
+            <a:pPr>
+              <a:spcAft>
+                <a:spcPts val="800"/>
+              </a:spcAft>
+            </a:pPr>
+            <a:r>
+              <a:rPr sz="1600" b="1">
+                <a:solidFill>
+                  <a:srgbClr val="1F2A4E"/>
+                </a:solidFill>
+              </a:rPr>
+              <a:t>Inclui:  </a:t>
+            </a:r>
+            <a:r>
+              <a:rPr sz="1600">
+                <a:solidFill>
+                  <a:srgbClr val="3D424E"/>
+                </a:solidFill>
+              </a:rPr>
+              <a:t>Pereira (SkinToneNet), Luo (FairCLIP), Pangelinan (refutação central), Hardt, Perez (FiLM), Madras (LAFTR), Schumann (MST), Karkkainen (FairFace), AlDahoul (SOTA)</a:t>
+            </a:r>
+          </a:p>
+          <a:p>
+            <a:pPr>
+              <a:spcAft>
+                <a:spcPts val="800"/>
+              </a:spcAft>
+            </a:pPr>
+            <a:r>
+              <a:rPr sz="1600" b="1">
+                <a:solidFill>
+                  <a:srgbClr val="1F2A4E"/>
+                </a:solidFill>
+              </a:rPr>
+              <a:t>Próximas leituras:  </a:t>
+            </a:r>
+            <a:r>
+              <a:rPr sz="1600">
+                <a:solidFill>
+                  <a:srgbClr val="3D424E"/>
+                </a:solidFill>
+              </a:rPr>
+              <a:t>Camada 2 — 38 fichas favoráveis para aprofundamento durante a escrita do Capítulo 2</a:t>
+            </a:r>
+          </a:p>
+          <a:p>
+            <a:pPr>
+              <a:spcAft>
+                <a:spcPts val="800"/>
+              </a:spcAft>
+            </a:pPr>
+            <a:r>
+              <a:rPr sz="1600" b="1">
+                <a:solidFill>
+                  <a:srgbClr val="1F2A4E"/>
+                </a:solidFill>
+              </a:rPr>
+              <a:t>  </a:t>
+            </a:r>
+            <a:r>
+              <a:rPr sz="1600">
+                <a:solidFill>
+                  <a:srgbClr val="3D424E"/>
+                </a:solidFill>
+              </a:rPr>
+              <a:t/>
+            </a:r>
+          </a:p>
+          <a:p>
+            <a:pPr>
+              <a:spcAft>
+                <a:spcPts val="800"/>
+              </a:spcAft>
+            </a:pPr>
+            <a:r>
+              <a:rPr sz="1600" b="1">
+                <a:solidFill>
+                  <a:srgbClr val="1F2A4E"/>
+                </a:solidFill>
+              </a:rPr>
+              <a:t>Achado novo (Pangelinan):  </a:t>
+            </a:r>
+            <a:r>
+              <a:rPr sz="1600">
+                <a:solidFill>
+                  <a:srgbClr val="3D424E"/>
+                </a:solidFill>
+              </a:rPr>
+              <a:t>imagens de pessoas do mesmo gênero são intrinsecamente mais similares — possível análogo intra-racial a investigar</a:t>
+            </a:r>
+          </a:p>
+        </p:txBody>
+      </p:sp>
+    </p:spTree>
+  </p:cSld>
+  <p:clrMapOvr>
+    <a:masterClrMapping/>
+  </p:clrMapOvr>
+</p:sld>
+</file>
+
+<file path=ppt/slides/slide12.xml><?xml version="1.0" encoding="utf-8"?>
+<p:sld xmlns:a="http://schemas.openxmlformats.org/drawingml/2006/main" xmlns:p="http://schemas.openxmlformats.org/presentationml/2006/main" xmlns:r="http://schemas.openxmlformats.org/officeDocument/2006/relationships">
+  <p:cSld>
+    <p:spTree>
+      <p:nvGrpSpPr>
+        <p:cNvPr id="1" name=""/>
+        <p:cNvGrpSpPr/>
+        <p:nvPr/>
+      </p:nvGrpSpPr>
+      <p:grpSpPr/>
       <p:sp>
         <p:nvSpPr>
           <p:cNvPr id="2" name="Rectangle 1"/>
@@ -3732,7 +3880,6 @@
           <a:lstStyle/>
           <a:p>
             <a:pPr algn="ctr"/>
-            <a:endParaRPr/>
           </a:p>
         </p:txBody>
       </p:sp>
@@ -3780,7 +3927,7 @@
         <p:spPr>
           <a:xfrm>
             <a:off x="3931920" y="2286000"/>
-            <a:ext cx="7772400" cy="954107"/>
+            <a:ext cx="7772400" cy="1828800"/>
           </a:xfrm>
           <a:prstGeom prst="rect">
             <a:avLst/>
@@ -3801,8 +3948,7 @@
               </a:defRPr>
             </a:pPr>
             <a:r>
-              <a:rPr lang="pt-BR" dirty="0"/>
-              <a:t>Resposta à sugestão do orientador</a:t>
+              <a:t>Resposta ao orientador</a:t>
             </a:r>
           </a:p>
           <a:p>
@@ -3814,40 +3960,7 @@
               </a:defRPr>
             </a:pPr>
             <a:r>
-              <a:rPr lang="pt-BR" dirty="0"/>
-              <a:t>CLIP = </a:t>
-            </a:r>
-            <a:r>
-              <a:rPr lang="pt-BR" dirty="0" err="1"/>
-              <a:t>Contrastive</a:t>
-            </a:r>
-            <a:r>
-              <a:rPr lang="pt-BR" dirty="0"/>
-              <a:t> </a:t>
-            </a:r>
-            <a:r>
-              <a:rPr lang="pt-BR" dirty="0" err="1"/>
-              <a:t>Language-Image</a:t>
-            </a:r>
-            <a:r>
-              <a:rPr lang="pt-BR" dirty="0"/>
-              <a:t> </a:t>
-            </a:r>
-            <a:r>
-              <a:rPr lang="pt-BR" dirty="0" err="1"/>
-              <a:t>Pre</a:t>
-            </a:r>
-            <a:r>
-              <a:rPr lang="pt-BR" dirty="0"/>
-              <a:t>-training (</a:t>
-            </a:r>
-            <a:r>
-              <a:rPr lang="pt-BR" dirty="0" err="1"/>
-              <a:t>Radford</a:t>
-            </a:r>
-            <a:r>
-              <a:rPr lang="pt-BR" dirty="0"/>
-              <a:t> et al., ICML 2021)</a:t>
+              <a:t>CLIP = Contrastive Language-Image Pre-training (Radford et al., ICML 2021)</a:t>
             </a:r>
           </a:p>
         </p:txBody>
@@ -3860,8 +3973,8 @@
 </p:sld>
 </file>
 
-<file path=ppt/slides/slide14.xml><?xml version="1.0" encoding="utf-8"?>
-<p:sld xmlns:a="http://schemas.openxmlformats.org/drawingml/2006/main" xmlns:r="http://schemas.openxmlformats.org/officeDocument/2006/relationships" xmlns:p="http://schemas.openxmlformats.org/presentationml/2006/main">
+<file path=ppt/slides/slide13.xml><?xml version="1.0" encoding="utf-8"?>
+<p:sld xmlns:a="http://schemas.openxmlformats.org/drawingml/2006/main" xmlns:p="http://schemas.openxmlformats.org/presentationml/2006/main" xmlns:r="http://schemas.openxmlformats.org/officeDocument/2006/relationships">
   <p:cSld>
     <p:spTree>
       <p:nvGrpSpPr>
@@ -3869,14 +3982,7 @@
         <p:cNvGrpSpPr/>
         <p:nvPr/>
       </p:nvGrpSpPr>
-      <p:grpSpPr>
-        <a:xfrm>
-          <a:off x="0" y="0"/>
-          <a:ext cx="0" cy="0"/>
-          <a:chOff x="0" y="0"/>
-          <a:chExt cx="0" cy="0"/>
-        </a:xfrm>
-      </p:grpSpPr>
+      <p:grpSpPr/>
       <p:sp>
         <p:nvSpPr>
           <p:cNvPr id="2" name="TextBox 1"/>
@@ -3952,7 +4058,6 @@
           <a:lstStyle/>
           <a:p>
             <a:pPr algn="ctr"/>
-            <a:endParaRPr/>
           </a:p>
         </p:txBody>
       </p:sp>
@@ -4106,6 +4211,14 @@
               </a:rPr>
               <a:t>  </a:t>
             </a:r>
+            <a:r>
+              <a:rPr sz="1600">
+                <a:solidFill>
+                  <a:srgbClr val="3D424E"/>
+                </a:solidFill>
+              </a:rPr>
+              <a:t/>
+            </a:r>
           </a:p>
           <a:p>
             <a:pPr>
@@ -4175,8 +4288,8 @@
 </p:sld>
 </file>
 
-<file path=ppt/slides/slide15.xml><?xml version="1.0" encoding="utf-8"?>
-<p:sld xmlns:a="http://schemas.openxmlformats.org/drawingml/2006/main" xmlns:r="http://schemas.openxmlformats.org/officeDocument/2006/relationships" xmlns:p="http://schemas.openxmlformats.org/presentationml/2006/main">
+<file path=ppt/slides/slide14.xml><?xml version="1.0" encoding="utf-8"?>
+<p:sld xmlns:a="http://schemas.openxmlformats.org/drawingml/2006/main" xmlns:p="http://schemas.openxmlformats.org/presentationml/2006/main" xmlns:r="http://schemas.openxmlformats.org/officeDocument/2006/relationships">
   <p:cSld>
     <p:spTree>
       <p:nvGrpSpPr>
@@ -4184,14 +4297,7 @@
         <p:cNvGrpSpPr/>
         <p:nvPr/>
       </p:nvGrpSpPr>
-      <p:grpSpPr>
-        <a:xfrm>
-          <a:off x="0" y="0"/>
-          <a:ext cx="0" cy="0"/>
-          <a:chOff x="0" y="0"/>
-          <a:chExt cx="0" cy="0"/>
-        </a:xfrm>
-      </p:grpSpPr>
+      <p:grpSpPr/>
       <p:sp>
         <p:nvSpPr>
           <p:cNvPr id="2" name="TextBox 1"/>
@@ -4267,7 +4373,6 @@
           <a:lstStyle/>
           <a:p>
             <a:pPr algn="ctr"/>
-            <a:endParaRPr/>
           </a:p>
         </p:txBody>
       </p:sp>
@@ -4290,34 +4395,10 @@
                 <a:tableStyleId>{5C22544A-7EE6-4342-B048-85BDC9FD1C3A}</a:tableStyleId>
               </a:tblPr>
               <a:tblGrid>
-                <a:gridCol w="3017520">
-                  <a:extLst>
-                    <a:ext uri="{9D8B030D-6E8A-4147-A177-3AD203B41FA5}">
-                      <a16:colId xmlns:a16="http://schemas.microsoft.com/office/drawing/2014/main" val="20000"/>
-                    </a:ext>
-                  </a:extLst>
-                </a:gridCol>
-                <a:gridCol w="1645920">
-                  <a:extLst>
-                    <a:ext uri="{9D8B030D-6E8A-4147-A177-3AD203B41FA5}">
-                      <a16:colId xmlns:a16="http://schemas.microsoft.com/office/drawing/2014/main" val="20001"/>
-                    </a:ext>
-                  </a:extLst>
-                </a:gridCol>
-                <a:gridCol w="2926080">
-                  <a:extLst>
-                    <a:ext uri="{9D8B030D-6E8A-4147-A177-3AD203B41FA5}">
-                      <a16:colId xmlns:a16="http://schemas.microsoft.com/office/drawing/2014/main" val="20002"/>
-                    </a:ext>
-                  </a:extLst>
-                </a:gridCol>
-                <a:gridCol w="3840480">
-                  <a:extLst>
-                    <a:ext uri="{9D8B030D-6E8A-4147-A177-3AD203B41FA5}">
-                      <a16:colId xmlns:a16="http://schemas.microsoft.com/office/drawing/2014/main" val="20003"/>
-                    </a:ext>
-                  </a:extLst>
-                </a:gridCol>
+                <a:gridCol w="3017520"/>
+                <a:gridCol w="1645920"/>
+                <a:gridCol w="2926080"/>
+                <a:gridCol w="3840480"/>
               </a:tblGrid>
               <a:tr h="475488">
                 <a:tc>
@@ -4404,11 +4485,6 @@
                     </a:solidFill>
                   </a:tcPr>
                 </a:tc>
-                <a:extLst>
-                  <a:ext uri="{0D108BD9-81ED-4DB2-BD59-A6C34878D82A}">
-                    <a16:rowId xmlns:a16="http://schemas.microsoft.com/office/drawing/2014/main" val="10000"/>
-                  </a:ext>
-                </a:extLst>
               </a:tr>
               <a:tr h="475488">
                 <a:tc>
@@ -4495,11 +4571,6 @@
                     </a:solidFill>
                   </a:tcPr>
                 </a:tc>
-                <a:extLst>
-                  <a:ext uri="{0D108BD9-81ED-4DB2-BD59-A6C34878D82A}">
-                    <a16:rowId xmlns:a16="http://schemas.microsoft.com/office/drawing/2014/main" val="10001"/>
-                  </a:ext>
-                </a:extLst>
               </a:tr>
               <a:tr h="475488">
                 <a:tc>
@@ -4586,11 +4657,6 @@
                     </a:solidFill>
                   </a:tcPr>
                 </a:tc>
-                <a:extLst>
-                  <a:ext uri="{0D108BD9-81ED-4DB2-BD59-A6C34878D82A}">
-                    <a16:rowId xmlns:a16="http://schemas.microsoft.com/office/drawing/2014/main" val="10002"/>
-                  </a:ext>
-                </a:extLst>
               </a:tr>
               <a:tr h="475488">
                 <a:tc>
@@ -4661,11 +4727,6 @@
                   </a:txBody>
                   <a:tcPr/>
                 </a:tc>
-                <a:extLst>
-                  <a:ext uri="{0D108BD9-81ED-4DB2-BD59-A6C34878D82A}">
-                    <a16:rowId xmlns:a16="http://schemas.microsoft.com/office/drawing/2014/main" val="10003"/>
-                  </a:ext>
-                </a:extLst>
               </a:tr>
               <a:tr h="475488">
                 <a:tc>
@@ -4736,11 +4797,6 @@
                   </a:txBody>
                   <a:tcPr/>
                 </a:tc>
-                <a:extLst>
-                  <a:ext uri="{0D108BD9-81ED-4DB2-BD59-A6C34878D82A}">
-                    <a16:rowId xmlns:a16="http://schemas.microsoft.com/office/drawing/2014/main" val="10004"/>
-                  </a:ext>
-                </a:extLst>
               </a:tr>
               <a:tr h="475488">
                 <a:tc>
@@ -4827,11 +4883,6 @@
                     </a:solidFill>
                   </a:tcPr>
                 </a:tc>
-                <a:extLst>
-                  <a:ext uri="{0D108BD9-81ED-4DB2-BD59-A6C34878D82A}">
-                    <a16:rowId xmlns:a16="http://schemas.microsoft.com/office/drawing/2014/main" val="10005"/>
-                  </a:ext>
-                </a:extLst>
               </a:tr>
               <a:tr h="475488">
                 <a:tc>
@@ -4902,11 +4953,6 @@
                   </a:txBody>
                   <a:tcPr/>
                 </a:tc>
-                <a:extLst>
-                  <a:ext uri="{0D108BD9-81ED-4DB2-BD59-A6C34878D82A}">
-                    <a16:rowId xmlns:a16="http://schemas.microsoft.com/office/drawing/2014/main" val="10006"/>
-                  </a:ext>
-                </a:extLst>
               </a:tr>
               <a:tr h="475488">
                 <a:tc>
@@ -4977,11 +5023,6 @@
                   </a:txBody>
                   <a:tcPr/>
                 </a:tc>
-                <a:extLst>
-                  <a:ext uri="{0D108BD9-81ED-4DB2-BD59-A6C34878D82A}">
-                    <a16:rowId xmlns:a16="http://schemas.microsoft.com/office/drawing/2014/main" val="10007"/>
-                  </a:ext>
-                </a:extLst>
               </a:tr>
               <a:tr h="475488">
                 <a:tc>
@@ -5052,11 +5093,6 @@
                   </a:txBody>
                   <a:tcPr/>
                 </a:tc>
-                <a:extLst>
-                  <a:ext uri="{0D108BD9-81ED-4DB2-BD59-A6C34878D82A}">
-                    <a16:rowId xmlns:a16="http://schemas.microsoft.com/office/drawing/2014/main" val="10008"/>
-                  </a:ext>
-                </a:extLst>
               </a:tr>
               <a:tr h="475488">
                 <a:tc>
@@ -5127,11 +5163,6 @@
                   </a:txBody>
                   <a:tcPr/>
                 </a:tc>
-                <a:extLst>
-                  <a:ext uri="{0D108BD9-81ED-4DB2-BD59-A6C34878D82A}">
-                    <a16:rowId xmlns:a16="http://schemas.microsoft.com/office/drawing/2014/main" val="10009"/>
-                  </a:ext>
-                </a:extLst>
               </a:tr>
             </a:tbl>
           </a:graphicData>
@@ -5180,8 +5211,8 @@
 </p:sld>
 </file>
 
-<file path=ppt/slides/slide16.xml><?xml version="1.0" encoding="utf-8"?>
-<p:sld xmlns:a="http://schemas.openxmlformats.org/drawingml/2006/main" xmlns:r="http://schemas.openxmlformats.org/officeDocument/2006/relationships" xmlns:p="http://schemas.openxmlformats.org/presentationml/2006/main">
+<file path=ppt/slides/slide15.xml><?xml version="1.0" encoding="utf-8"?>
+<p:sld xmlns:a="http://schemas.openxmlformats.org/drawingml/2006/main" xmlns:p="http://schemas.openxmlformats.org/presentationml/2006/main" xmlns:r="http://schemas.openxmlformats.org/officeDocument/2006/relationships">
   <p:cSld>
     <p:spTree>
       <p:nvGrpSpPr>
@@ -5189,14 +5220,7 @@
         <p:cNvGrpSpPr/>
         <p:nvPr/>
       </p:nvGrpSpPr>
-      <p:grpSpPr>
-        <a:xfrm>
-          <a:off x="0" y="0"/>
-          <a:ext cx="0" cy="0"/>
-          <a:chOff x="0" y="0"/>
-          <a:chExt cx="0" cy="0"/>
-        </a:xfrm>
-      </p:grpSpPr>
+      <p:grpSpPr/>
       <p:sp>
         <p:nvSpPr>
           <p:cNvPr id="2" name="Rectangle 1"/>
@@ -5237,7 +5261,6 @@
           <a:lstStyle/>
           <a:p>
             <a:pPr algn="ctr"/>
-            <a:endParaRPr/>
           </a:p>
         </p:txBody>
       </p:sp>
@@ -5331,8 +5354,8 @@
 </p:sld>
 </file>
 
-<file path=ppt/slides/slide17.xml><?xml version="1.0" encoding="utf-8"?>
-<p:sld xmlns:a="http://schemas.openxmlformats.org/drawingml/2006/main" xmlns:r="http://schemas.openxmlformats.org/officeDocument/2006/relationships" xmlns:p="http://schemas.openxmlformats.org/presentationml/2006/main">
+<file path=ppt/slides/slide16.xml><?xml version="1.0" encoding="utf-8"?>
+<p:sld xmlns:a="http://schemas.openxmlformats.org/drawingml/2006/main" xmlns:p="http://schemas.openxmlformats.org/presentationml/2006/main" xmlns:r="http://schemas.openxmlformats.org/officeDocument/2006/relationships">
   <p:cSld>
     <p:spTree>
       <p:nvGrpSpPr>
@@ -5340,14 +5363,7 @@
         <p:cNvGrpSpPr/>
         <p:nvPr/>
       </p:nvGrpSpPr>
-      <p:grpSpPr>
-        <a:xfrm>
-          <a:off x="0" y="0"/>
-          <a:ext cx="0" cy="0"/>
-          <a:chOff x="0" y="0"/>
-          <a:chExt cx="0" cy="0"/>
-        </a:xfrm>
-      </p:grpSpPr>
+      <p:grpSpPr/>
       <p:sp>
         <p:nvSpPr>
           <p:cNvPr id="2" name="TextBox 1"/>
@@ -5423,7 +5439,6 @@
           <a:lstStyle/>
           <a:p>
             <a:pPr algn="ctr"/>
-            <a:endParaRPr/>
           </a:p>
         </p:txBody>
       </p:sp>
@@ -5531,6 +5546,14 @@
               </a:rPr>
               <a:t>Mecanismos análogos no corpus:  </a:t>
             </a:r>
+            <a:r>
+              <a:rPr sz="1600">
+                <a:solidFill>
+                  <a:srgbClr val="3D424E"/>
+                </a:solidFill>
+              </a:rPr>
+              <a:t/>
+            </a:r>
           </a:p>
           <a:p>
             <a:pPr>
@@ -5614,6 +5637,14 @@
                 </a:solidFill>
               </a:rPr>
               <a:t>  </a:t>
+            </a:r>
+            <a:r>
+              <a:rPr sz="1600">
+                <a:solidFill>
+                  <a:srgbClr val="3D424E"/>
+                </a:solidFill>
+              </a:rPr>
+              <a:t/>
             </a:r>
           </a:p>
           <a:p>
@@ -5684,8 +5715,8 @@
 </p:sld>
 </file>
 
-<file path=ppt/slides/slide18.xml><?xml version="1.0" encoding="utf-8"?>
-<p:sld xmlns:a="http://schemas.openxmlformats.org/drawingml/2006/main" xmlns:r="http://schemas.openxmlformats.org/officeDocument/2006/relationships" xmlns:p="http://schemas.openxmlformats.org/presentationml/2006/main">
+<file path=ppt/slides/slide17.xml><?xml version="1.0" encoding="utf-8"?>
+<p:sld xmlns:a="http://schemas.openxmlformats.org/drawingml/2006/main" xmlns:p="http://schemas.openxmlformats.org/presentationml/2006/main" xmlns:r="http://schemas.openxmlformats.org/officeDocument/2006/relationships">
   <p:cSld>
     <p:spTree>
       <p:nvGrpSpPr>
@@ -5693,14 +5724,7 @@
         <p:cNvGrpSpPr/>
         <p:nvPr/>
       </p:nvGrpSpPr>
-      <p:grpSpPr>
-        <a:xfrm>
-          <a:off x="0" y="0"/>
-          <a:ext cx="0" cy="0"/>
-          <a:chOff x="0" y="0"/>
-          <a:chExt cx="0" cy="0"/>
-        </a:xfrm>
-      </p:grpSpPr>
+      <p:grpSpPr/>
       <p:sp>
         <p:nvSpPr>
           <p:cNvPr id="2" name="TextBox 1"/>
@@ -5776,7 +5800,6 @@
           <a:lstStyle/>
           <a:p>
             <a:pPr algn="ctr"/>
-            <a:endParaRPr/>
           </a:p>
         </p:txBody>
       </p:sp>
@@ -5953,6 +5976,14 @@
               </a:rPr>
               <a:t>  </a:t>
             </a:r>
+            <a:r>
+              <a:rPr sz="1600">
+                <a:solidFill>
+                  <a:srgbClr val="3D424E"/>
+                </a:solidFill>
+              </a:rPr>
+              <a:t/>
+            </a:r>
           </a:p>
           <a:p>
             <a:pPr>
@@ -5987,8 +6018,8 @@
 </p:sld>
 </file>
 
-<file path=ppt/slides/slide19.xml><?xml version="1.0" encoding="utf-8"?>
-<p:sld xmlns:a="http://schemas.openxmlformats.org/drawingml/2006/main" xmlns:r="http://schemas.openxmlformats.org/officeDocument/2006/relationships" xmlns:p="http://schemas.openxmlformats.org/presentationml/2006/main">
+<file path=ppt/slides/slide18.xml><?xml version="1.0" encoding="utf-8"?>
+<p:sld xmlns:a="http://schemas.openxmlformats.org/drawingml/2006/main" xmlns:p="http://schemas.openxmlformats.org/presentationml/2006/main" xmlns:r="http://schemas.openxmlformats.org/officeDocument/2006/relationships">
   <p:cSld>
     <p:spTree>
       <p:nvGrpSpPr>
@@ -5996,14 +6027,7 @@
         <p:cNvGrpSpPr/>
         <p:nvPr/>
       </p:nvGrpSpPr>
-      <p:grpSpPr>
-        <a:xfrm>
-          <a:off x="0" y="0"/>
-          <a:ext cx="0" cy="0"/>
-          <a:chOff x="0" y="0"/>
-          <a:chExt cx="0" cy="0"/>
-        </a:xfrm>
-      </p:grpSpPr>
+      <p:grpSpPr/>
       <p:sp>
         <p:nvSpPr>
           <p:cNvPr id="2" name="Rectangle 1"/>
@@ -6044,7 +6068,6 @@
           <a:lstStyle/>
           <a:p>
             <a:pPr algn="ctr"/>
-            <a:endParaRPr/>
           </a:p>
         </p:txBody>
       </p:sp>
@@ -6138,8 +6161,8 @@
 </p:sld>
 </file>
 
-<file path=ppt/slides/slide2.xml><?xml version="1.0" encoding="utf-8"?>
-<p:sld xmlns:a="http://schemas.openxmlformats.org/drawingml/2006/main" xmlns:r="http://schemas.openxmlformats.org/officeDocument/2006/relationships" xmlns:p="http://schemas.openxmlformats.org/presentationml/2006/main">
+<file path=ppt/slides/slide19.xml><?xml version="1.0" encoding="utf-8"?>
+<p:sld xmlns:a="http://schemas.openxmlformats.org/drawingml/2006/main" xmlns:p="http://schemas.openxmlformats.org/presentationml/2006/main" xmlns:r="http://schemas.openxmlformats.org/officeDocument/2006/relationships">
   <p:cSld>
     <p:spTree>
       <p:nvGrpSpPr>
@@ -6147,14 +6170,7 @@
         <p:cNvGrpSpPr/>
         <p:nvPr/>
       </p:nvGrpSpPr>
-      <p:grpSpPr>
-        <a:xfrm>
-          <a:off x="0" y="0"/>
-          <a:ext cx="0" cy="0"/>
-          <a:chOff x="0" y="0"/>
-          <a:chExt cx="0" cy="0"/>
-        </a:xfrm>
-      </p:grpSpPr>
+      <p:grpSpPr/>
       <p:sp>
         <p:nvSpPr>
           <p:cNvPr id="2" name="TextBox 1"/>
@@ -6185,7 +6201,7 @@
               </a:defRPr>
             </a:pPr>
             <a:r>
-              <a:t>Agenda da reunião</a:t>
+              <a:t>5 configurações de conditioning comparadas</a:t>
             </a:r>
           </a:p>
         </p:txBody>
@@ -6230,20 +6246,499 @@
           <a:lstStyle/>
           <a:p>
             <a:pPr algn="ctr"/>
-            <a:endParaRPr/>
-          </a:p>
-        </p:txBody>
-      </p:sp>
-      <p:sp>
-        <p:nvSpPr>
-          <p:cNvPr id="4" name="TextBox 3"/>
+          </a:p>
+        </p:txBody>
+      </p:sp>
+      <p:graphicFrame>
+        <p:nvGraphicFramePr>
+          <p:cNvPr id="4" name="Table 3"/>
+          <p:cNvGraphicFramePr>
+            <a:graphicFrameLocks noGrp="1"/>
+          </p:cNvGraphicFramePr>
+          <p:nvPr/>
+        </p:nvGraphicFramePr>
+        <p:xfrm>
+          <a:off x="457200" y="1371600"/>
+          <a:ext cx="11887200" cy="4754880"/>
+        </p:xfrm>
+        <a:graphic>
+          <a:graphicData uri="http://schemas.openxmlformats.org/drawingml/2006/table">
+            <a:tbl>
+              <a:tblPr firstRow="1" bandRow="1">
+                <a:tableStyleId>{5C22544A-7EE6-4342-B048-85BDC9FD1C3A}</a:tableStyleId>
+              </a:tblPr>
+              <a:tblGrid>
+                <a:gridCol w="914400"/>
+                <a:gridCol w="2743200"/>
+                <a:gridCol w="4114800"/>
+                <a:gridCol w="4114800"/>
+              </a:tblGrid>
+              <a:tr h="792480">
+                <a:tc>
+                  <a:txBody>
+                    <a:bodyPr/>
+                    <a:lstStyle/>
+                    <a:p>
+                      <a:r>
+                        <a:rPr sz="1300" b="1">
+                          <a:solidFill>
+                            <a:srgbClr val="FFFFFF"/>
+                          </a:solidFill>
+                        </a:rPr>
+                        <a:t>Config</a:t>
+                      </a:r>
+                    </a:p>
+                  </a:txBody>
+                  <a:tcPr>
+                    <a:solidFill>
+                      <a:srgbClr val="1F2A4E"/>
+                    </a:solidFill>
+                  </a:tcPr>
+                </a:tc>
+                <a:tc>
+                  <a:txBody>
+                    <a:bodyPr/>
+                    <a:lstStyle/>
+                    <a:p>
+                      <a:r>
+                        <a:rPr sz="1300" b="1">
+                          <a:solidFill>
+                            <a:srgbClr val="FFFFFF"/>
+                          </a:solidFill>
+                        </a:rPr>
+                        <a:t>Arquitetura</a:t>
+                      </a:r>
+                    </a:p>
+                  </a:txBody>
+                  <a:tcPr>
+                    <a:solidFill>
+                      <a:srgbClr val="1F2A4E"/>
+                    </a:solidFill>
+                  </a:tcPr>
+                </a:tc>
+                <a:tc>
+                  <a:txBody>
+                    <a:bodyPr/>
+                    <a:lstStyle/>
+                    <a:p>
+                      <a:r>
+                        <a:rPr sz="1300" b="1">
+                          <a:solidFill>
+                            <a:srgbClr val="FFFFFF"/>
+                          </a:solidFill>
+                        </a:rPr>
+                        <a:t>Mecanismo de conditioning</a:t>
+                      </a:r>
+                    </a:p>
+                  </a:txBody>
+                  <a:tcPr>
+                    <a:solidFill>
+                      <a:srgbClr val="1F2A4E"/>
+                    </a:solidFill>
+                  </a:tcPr>
+                </a:tc>
+                <a:tc>
+                  <a:txBody>
+                    <a:bodyPr/>
+                    <a:lstStyle/>
+                    <a:p>
+                      <a:r>
+                        <a:rPr sz="1300" b="1">
+                          <a:solidFill>
+                            <a:srgbClr val="FFFFFF"/>
+                          </a:solidFill>
+                        </a:rPr>
+                        <a:t>Origem</a:t>
+                      </a:r>
+                    </a:p>
+                  </a:txBody>
+                  <a:tcPr>
+                    <a:solidFill>
+                      <a:srgbClr val="1F2A4E"/>
+                    </a:solidFill>
+                  </a:tcPr>
+                </a:tc>
+              </a:tr>
+              <a:tr h="792480">
+                <a:tc>
+                  <a:txBody>
+                    <a:bodyPr/>
+                    <a:lstStyle/>
+                    <a:p>
+                      <a:r>
+                        <a:rPr sz="1100">
+                          <a:solidFill>
+                            <a:srgbClr val="3D424E"/>
+                          </a:solidFill>
+                        </a:rPr>
+                        <a:t>A</a:t>
+                      </a:r>
+                    </a:p>
+                  </a:txBody>
+                  <a:tcPr/>
+                </a:tc>
+                <a:tc>
+                  <a:txBody>
+                    <a:bodyPr/>
+                    <a:lstStyle/>
+                    <a:p>
+                      <a:r>
+                        <a:rPr sz="1100">
+                          <a:solidFill>
+                            <a:srgbClr val="3D424E"/>
+                          </a:solidFill>
+                        </a:rPr>
+                        <a:t>ConvNeXt-T baseline</a:t>
+                      </a:r>
+                    </a:p>
+                  </a:txBody>
+                  <a:tcPr/>
+                </a:tc>
+                <a:tc>
+                  <a:txBody>
+                    <a:bodyPr/>
+                    <a:lstStyle/>
+                    <a:p>
+                      <a:r>
+                        <a:rPr sz="1100">
+                          <a:solidFill>
+                            <a:srgbClr val="3D424E"/>
+                          </a:solidFill>
+                        </a:rPr>
+                        <a:t>Sem conditioning</a:t>
+                      </a:r>
+                    </a:p>
+                  </a:txBody>
+                  <a:tcPr/>
+                </a:tc>
+                <a:tc>
+                  <a:txBody>
+                    <a:bodyPr/>
+                    <a:lstStyle/>
+                    <a:p>
+                      <a:r>
+                        <a:rPr sz="1100">
+                          <a:solidFill>
+                            <a:srgbClr val="3D424E"/>
+                          </a:solidFill>
+                        </a:rPr>
+                        <a:t>Controle</a:t>
+                      </a:r>
+                    </a:p>
+                  </a:txBody>
+                  <a:tcPr/>
+                </a:tc>
+              </a:tr>
+              <a:tr h="792480">
+                <a:tc>
+                  <a:txBody>
+                    <a:bodyPr/>
+                    <a:lstStyle/>
+                    <a:p>
+                      <a:r>
+                        <a:rPr sz="1100">
+                          <a:solidFill>
+                            <a:srgbClr val="3D424E"/>
+                          </a:solidFill>
+                        </a:rPr>
+                        <a:t>B (proposta)</a:t>
+                      </a:r>
+                    </a:p>
+                  </a:txBody>
+                  <a:tcPr>
+                    <a:solidFill>
+                      <a:srgbClr val="E8EAED"/>
+                    </a:solidFill>
+                  </a:tcPr>
+                </a:tc>
+                <a:tc>
+                  <a:txBody>
+                    <a:bodyPr/>
+                    <a:lstStyle/>
+                    <a:p>
+                      <a:r>
+                        <a:rPr sz="1100">
+                          <a:solidFill>
+                            <a:srgbClr val="3D424E"/>
+                          </a:solidFill>
+                        </a:rPr>
+                        <a:t>ConvNeXt-T + FiLM</a:t>
+                      </a:r>
+                    </a:p>
+                  </a:txBody>
+                  <a:tcPr>
+                    <a:solidFill>
+                      <a:srgbClr val="E8EAED"/>
+                    </a:solidFill>
+                  </a:tcPr>
+                </a:tc>
+                <a:tc>
+                  <a:txBody>
+                    <a:bodyPr/>
+                    <a:lstStyle/>
+                    <a:p>
+                      <a:r>
+                        <a:rPr sz="1100">
+                          <a:solidFill>
+                            <a:srgbClr val="3D424E"/>
+                          </a:solidFill>
+                        </a:rPr>
+                        <a:t>MST 10-dim → γ, β</a:t>
+                      </a:r>
+                    </a:p>
+                  </a:txBody>
+                  <a:tcPr>
+                    <a:solidFill>
+                      <a:srgbClr val="E8EAED"/>
+                    </a:solidFill>
+                  </a:tcPr>
+                </a:tc>
+                <a:tc>
+                  <a:txBody>
+                    <a:bodyPr/>
+                    <a:lstStyle/>
+                    <a:p>
+                      <a:r>
+                        <a:rPr sz="1100">
+                          <a:solidFill>
+                            <a:srgbClr val="3D424E"/>
+                          </a:solidFill>
+                        </a:rPr>
+                        <a:t>Nossa contribuição central</a:t>
+                      </a:r>
+                    </a:p>
+                  </a:txBody>
+                  <a:tcPr>
+                    <a:solidFill>
+                      <a:srgbClr val="E8EAED"/>
+                    </a:solidFill>
+                  </a:tcPr>
+                </a:tc>
+              </a:tr>
+              <a:tr h="792480">
+                <a:tc>
+                  <a:txBody>
+                    <a:bodyPr/>
+                    <a:lstStyle/>
+                    <a:p>
+                      <a:r>
+                        <a:rPr sz="1100">
+                          <a:solidFill>
+                            <a:srgbClr val="3D424E"/>
+                          </a:solidFill>
+                        </a:rPr>
+                        <a:t>C</a:t>
+                      </a:r>
+                    </a:p>
+                  </a:txBody>
+                  <a:tcPr/>
+                </a:tc>
+                <a:tc>
+                  <a:txBody>
+                    <a:bodyPr/>
+                    <a:lstStyle/>
+                    <a:p>
+                      <a:r>
+                        <a:rPr sz="1100">
+                          <a:solidFill>
+                            <a:srgbClr val="3D424E"/>
+                          </a:solidFill>
+                        </a:rPr>
+                        <a:t>ConvNeXt-T + FiLM</a:t>
+                      </a:r>
+                    </a:p>
+                  </a:txBody>
+                  <a:tcPr/>
+                </a:tc>
+                <a:tc>
+                  <a:txBody>
+                    <a:bodyPr/>
+                    <a:lstStyle/>
+                    <a:p>
+                      <a:r>
+                        <a:rPr sz="1100">
+                          <a:solidFill>
+                            <a:srgbClr val="3D424E"/>
+                          </a:solidFill>
+                        </a:rPr>
+                        <a:t>Embedding CLIP-text → γ, β</a:t>
+                      </a:r>
+                    </a:p>
+                  </a:txBody>
+                  <a:tcPr/>
+                </a:tc>
+                <a:tc>
+                  <a:txBody>
+                    <a:bodyPr/>
+                    <a:lstStyle/>
+                    <a:p>
+                      <a:r>
+                        <a:rPr sz="1100">
+                          <a:solidFill>
+                            <a:srgbClr val="3D424E"/>
+                          </a:solidFill>
+                        </a:rPr>
+                        <a:t>Híbrido CLIP + FiLM</a:t>
+                      </a:r>
+                    </a:p>
+                  </a:txBody>
+                  <a:tcPr/>
+                </a:tc>
+              </a:tr>
+              <a:tr h="792480">
+                <a:tc>
+                  <a:txBody>
+                    <a:bodyPr/>
+                    <a:lstStyle/>
+                    <a:p>
+                      <a:r>
+                        <a:rPr sz="1100">
+                          <a:solidFill>
+                            <a:srgbClr val="3D424E"/>
+                          </a:solidFill>
+                        </a:rPr>
+                        <a:t>D</a:t>
+                      </a:r>
+                    </a:p>
+                  </a:txBody>
+                  <a:tcPr/>
+                </a:tc>
+                <a:tc>
+                  <a:txBody>
+                    <a:bodyPr/>
+                    <a:lstStyle/>
+                    <a:p>
+                      <a:r>
+                        <a:rPr sz="1100">
+                          <a:solidFill>
+                            <a:srgbClr val="3D424E"/>
+                          </a:solidFill>
+                        </a:rPr>
+                        <a:t>ConvNeXt-T + cross-attention</a:t>
+                      </a:r>
+                    </a:p>
+                  </a:txBody>
+                  <a:tcPr/>
+                </a:tc>
+                <a:tc>
+                  <a:txBody>
+                    <a:bodyPr/>
+                    <a:lstStyle/>
+                    <a:p>
+                      <a:r>
+                        <a:rPr sz="1100">
+                          <a:solidFill>
+                            <a:srgbClr val="3D424E"/>
+                          </a:solidFill>
+                        </a:rPr>
+                        <a:t>Embedding CLIP-text via attention</a:t>
+                      </a:r>
+                    </a:p>
+                  </a:txBody>
+                  <a:tcPr/>
+                </a:tc>
+                <a:tc>
+                  <a:txBody>
+                    <a:bodyPr/>
+                    <a:lstStyle/>
+                    <a:p>
+                      <a:r>
+                        <a:rPr sz="1100">
+                          <a:solidFill>
+                            <a:srgbClr val="3D424E"/>
+                          </a:solidFill>
+                        </a:rPr>
+                        <a:t>Estilo FairCLIP</a:t>
+                      </a:r>
+                    </a:p>
+                  </a:txBody>
+                  <a:tcPr/>
+                </a:tc>
+              </a:tr>
+              <a:tr h="792480">
+                <a:tc>
+                  <a:txBody>
+                    <a:bodyPr/>
+                    <a:lstStyle/>
+                    <a:p>
+                      <a:r>
+                        <a:rPr sz="1100">
+                          <a:solidFill>
+                            <a:srgbClr val="3D424E"/>
+                          </a:solidFill>
+                        </a:rPr>
+                        <a:t>E</a:t>
+                      </a:r>
+                    </a:p>
+                  </a:txBody>
+                  <a:tcPr/>
+                </a:tc>
+                <a:tc>
+                  <a:txBody>
+                    <a:bodyPr/>
+                    <a:lstStyle/>
+                    <a:p>
+                      <a:r>
+                        <a:rPr sz="1100">
+                          <a:solidFill>
+                            <a:srgbClr val="3D424E"/>
+                          </a:solidFill>
+                        </a:rPr>
+                        <a:t>ConvNeXt-T + LoRA-FAIR</a:t>
+                      </a:r>
+                    </a:p>
+                  </a:txBody>
+                  <a:tcPr/>
+                </a:tc>
+                <a:tc>
+                  <a:txBody>
+                    <a:bodyPr/>
+                    <a:lstStyle/>
+                    <a:p>
+                      <a:r>
+                        <a:rPr sz="1100">
+                          <a:solidFill>
+                            <a:srgbClr val="3D424E"/>
+                          </a:solidFill>
+                        </a:rPr>
+                        <a:t>Low-rank weight modulation</a:t>
+                      </a:r>
+                    </a:p>
+                  </a:txBody>
+                  <a:tcPr/>
+                </a:tc>
+                <a:tc>
+                  <a:txBody>
+                    <a:bodyPr/>
+                    <a:lstStyle/>
+                    <a:p>
+                      <a:r>
+                        <a:rPr sz="1100">
+                          <a:solidFill>
+                            <a:srgbClr val="3D424E"/>
+                          </a:solidFill>
+                        </a:rPr>
+                        <a:t>LoRA-FAIR (Bian, 2025)</a:t>
+                      </a:r>
+                    </a:p>
+                  </a:txBody>
+                  <a:tcPr/>
+                </a:tc>
+              </a:tr>
+            </a:tbl>
+          </a:graphicData>
+        </a:graphic>
+      </p:graphicFrame>
+      <p:sp>
+        <p:nvSpPr>
+          <p:cNvPr id="5" name="TextBox 4"/>
           <p:cNvSpPr txBox="1"/>
           <p:nvPr/>
         </p:nvSpPr>
         <p:spPr>
           <a:xfrm>
-            <a:off x="457200" y="1371600"/>
-            <a:ext cx="11430000" cy="4937760"/>
+            <a:off x="457200" y="6446520"/>
+            <a:ext cx="11430000" cy="365760"/>
           </a:xfrm>
           <a:prstGeom prst="rect">
             <a:avLst/>
@@ -6251,588 +6746,21 @@
           <a:noFill/>
         </p:spPr>
         <p:txBody>
-          <a:bodyPr wrap="square">
+          <a:bodyPr wrap="none">
             <a:spAutoFit/>
           </a:bodyPr>
           <a:lstStyle/>
           <a:p>
             <a:pPr>
-              <a:spcAft>
-                <a:spcPts val="800"/>
-              </a:spcAft>
-            </a:pPr>
-            <a:r>
-              <a:rPr sz="1600" b="1" dirty="0">
-                <a:solidFill>
-                  <a:srgbClr val="1F2A4E"/>
-                </a:solidFill>
-              </a:rPr>
-              <a:t>1.  </a:t>
-            </a:r>
-            <a:r>
-              <a:rPr sz="1600" dirty="0">
-                <a:solidFill>
-                  <a:srgbClr val="3D424E"/>
-                </a:solidFill>
-              </a:rPr>
-              <a:t>Status das </a:t>
-            </a:r>
-            <a:r>
-              <a:rPr sz="1600" dirty="0" err="1">
-                <a:solidFill>
-                  <a:srgbClr val="3D424E"/>
-                </a:solidFill>
-              </a:rPr>
-              <a:t>decisões</a:t>
-            </a:r>
-            <a:r>
-              <a:rPr sz="1600" dirty="0">
-                <a:solidFill>
-                  <a:srgbClr val="3D424E"/>
-                </a:solidFill>
-              </a:rPr>
-              <a:t> da </a:t>
-            </a:r>
-            <a:r>
-              <a:rPr sz="1600" dirty="0" err="1">
-                <a:solidFill>
-                  <a:srgbClr val="3D424E"/>
-                </a:solidFill>
-              </a:rPr>
-              <a:t>reunião</a:t>
-            </a:r>
-            <a:r>
-              <a:rPr sz="1600" dirty="0">
-                <a:solidFill>
-                  <a:srgbClr val="3D424E"/>
-                </a:solidFill>
-              </a:rPr>
-              <a:t> anterior (08/</a:t>
-            </a:r>
-            <a:r>
-              <a:rPr sz="1600" dirty="0" err="1">
-                <a:solidFill>
-                  <a:srgbClr val="3D424E"/>
-                </a:solidFill>
-              </a:rPr>
-              <a:t>jun</a:t>
-            </a:r>
-            <a:r>
-              <a:rPr sz="1600" dirty="0">
-                <a:solidFill>
-                  <a:srgbClr val="3D424E"/>
-                </a:solidFill>
-              </a:rPr>
-              <a:t>)</a:t>
-            </a:r>
-          </a:p>
-          <a:p>
-            <a:pPr>
-              <a:spcAft>
-                <a:spcPts val="800"/>
-              </a:spcAft>
-            </a:pPr>
-            <a:r>
-              <a:rPr sz="1600" b="1" dirty="0">
-                <a:solidFill>
-                  <a:srgbClr val="1F2A4E"/>
-                </a:solidFill>
-              </a:rPr>
-              <a:t>2.  </a:t>
-            </a:r>
-            <a:r>
-              <a:rPr sz="1600" dirty="0">
-                <a:solidFill>
-                  <a:srgbClr val="3D424E"/>
-                </a:solidFill>
-              </a:rPr>
-              <a:t>Corpus </a:t>
-            </a:r>
-            <a:r>
-              <a:rPr sz="1600" dirty="0" err="1">
-                <a:solidFill>
-                  <a:srgbClr val="3D424E"/>
-                </a:solidFill>
-              </a:rPr>
-              <a:t>consolidado</a:t>
-            </a:r>
-            <a:r>
-              <a:rPr sz="1600" dirty="0">
-                <a:solidFill>
-                  <a:srgbClr val="3D424E"/>
-                </a:solidFill>
-              </a:rPr>
-              <a:t>: 101 </a:t>
-            </a:r>
-            <a:r>
-              <a:rPr sz="1600" dirty="0" err="1">
-                <a:solidFill>
-                  <a:srgbClr val="3D424E"/>
-                </a:solidFill>
-              </a:rPr>
-              <a:t>fichas</a:t>
-            </a:r>
-            <a:r>
-              <a:rPr sz="1600" dirty="0">
-                <a:solidFill>
-                  <a:srgbClr val="3D424E"/>
-                </a:solidFill>
-              </a:rPr>
-              <a:t> </a:t>
-            </a:r>
-            <a:r>
-              <a:rPr sz="1600" dirty="0" err="1">
-                <a:solidFill>
-                  <a:srgbClr val="3D424E"/>
-                </a:solidFill>
-              </a:rPr>
-              <a:t>em</a:t>
-            </a:r>
-            <a:r>
-              <a:rPr sz="1600" dirty="0">
-                <a:solidFill>
-                  <a:srgbClr val="3D424E"/>
-                </a:solidFill>
-              </a:rPr>
-              <a:t> 11 tracks </a:t>
-            </a:r>
-            <a:r>
-              <a:rPr sz="1600" dirty="0" err="1">
-                <a:solidFill>
-                  <a:srgbClr val="3D424E"/>
-                </a:solidFill>
-              </a:rPr>
-              <a:t>temáticos</a:t>
-            </a:r>
-            <a:endParaRPr sz="1600" dirty="0">
-              <a:solidFill>
-                <a:srgbClr val="3D424E"/>
-              </a:solidFill>
-            </a:endParaRPr>
-          </a:p>
-          <a:p>
-            <a:pPr>
-              <a:spcAft>
-                <a:spcPts val="800"/>
-              </a:spcAft>
-            </a:pPr>
-            <a:r>
-              <a:rPr sz="1600" b="1" dirty="0">
-                <a:solidFill>
-                  <a:srgbClr val="1F2A4E"/>
-                </a:solidFill>
-              </a:rPr>
-              <a:t>3.  </a:t>
-            </a:r>
-            <a:r>
-              <a:rPr sz="1600" dirty="0">
-                <a:solidFill>
-                  <a:srgbClr val="3D424E"/>
-                </a:solidFill>
-              </a:rPr>
-              <a:t>Pente </a:t>
-            </a:r>
-            <a:r>
-              <a:rPr sz="1600" dirty="0" err="1">
-                <a:solidFill>
-                  <a:srgbClr val="3D424E"/>
-                </a:solidFill>
-              </a:rPr>
-              <a:t>fino</a:t>
-            </a:r>
-            <a:r>
-              <a:rPr sz="1600" dirty="0">
-                <a:solidFill>
-                  <a:srgbClr val="3D424E"/>
-                </a:solidFill>
-              </a:rPr>
-              <a:t> </a:t>
-            </a:r>
-            <a:r>
-              <a:rPr sz="1600" dirty="0" err="1">
-                <a:solidFill>
-                  <a:srgbClr val="3D424E"/>
-                </a:solidFill>
-              </a:rPr>
-              <a:t>crítico</a:t>
-            </a:r>
-            <a:r>
-              <a:rPr sz="1600" dirty="0">
-                <a:solidFill>
-                  <a:srgbClr val="3D424E"/>
-                </a:solidFill>
-              </a:rPr>
-              <a:t> do corpus (</a:t>
-            </a:r>
-            <a:r>
-              <a:rPr sz="1600" dirty="0" err="1">
-                <a:solidFill>
-                  <a:srgbClr val="3D424E"/>
-                </a:solidFill>
-              </a:rPr>
-              <a:t>classificação</a:t>
-            </a:r>
-            <a:r>
-              <a:rPr sz="1600" dirty="0">
-                <a:solidFill>
-                  <a:srgbClr val="3D424E"/>
-                </a:solidFill>
-              </a:rPr>
-              <a:t> </a:t>
-            </a:r>
-            <a:r>
-              <a:rPr sz="1600" dirty="0" err="1">
-                <a:solidFill>
-                  <a:srgbClr val="3D424E"/>
-                </a:solidFill>
-              </a:rPr>
-              <a:t>por</a:t>
-            </a:r>
-            <a:r>
-              <a:rPr sz="1600" dirty="0">
-                <a:solidFill>
-                  <a:srgbClr val="3D424E"/>
-                </a:solidFill>
-              </a:rPr>
-              <a:t> </a:t>
-            </a:r>
-            <a:r>
-              <a:rPr sz="1600" dirty="0" err="1">
-                <a:solidFill>
-                  <a:srgbClr val="3D424E"/>
-                </a:solidFill>
-              </a:rPr>
-              <a:t>impacto</a:t>
-            </a:r>
-            <a:r>
-              <a:rPr sz="1600" dirty="0">
-                <a:solidFill>
-                  <a:srgbClr val="3D424E"/>
-                </a:solidFill>
-              </a:rPr>
-              <a:t>)</a:t>
-            </a:r>
-          </a:p>
-          <a:p>
-            <a:pPr>
-              <a:spcAft>
-                <a:spcPts val="800"/>
-              </a:spcAft>
-            </a:pPr>
-            <a:r>
-              <a:rPr sz="1600" b="1" dirty="0">
-                <a:solidFill>
-                  <a:srgbClr val="1F2A4E"/>
-                </a:solidFill>
-              </a:rPr>
-              <a:t>4.  </a:t>
-            </a:r>
-            <a:r>
-              <a:rPr sz="1600" dirty="0" err="1">
-                <a:solidFill>
-                  <a:srgbClr val="3D424E"/>
-                </a:solidFill>
-              </a:rPr>
-              <a:t>Resposta</a:t>
-            </a:r>
-            <a:r>
-              <a:rPr sz="1600" dirty="0">
-                <a:solidFill>
-                  <a:srgbClr val="3D424E"/>
-                </a:solidFill>
-              </a:rPr>
-              <a:t> à </a:t>
-            </a:r>
-            <a:r>
-              <a:rPr sz="1600" dirty="0" err="1">
-                <a:solidFill>
-                  <a:srgbClr val="3D424E"/>
-                </a:solidFill>
-              </a:rPr>
-              <a:t>sugestão</a:t>
-            </a:r>
-            <a:r>
-              <a:rPr sz="1600" dirty="0">
-                <a:solidFill>
-                  <a:srgbClr val="3D424E"/>
-                </a:solidFill>
-              </a:rPr>
-              <a:t> do </a:t>
-            </a:r>
-            <a:r>
-              <a:rPr sz="1600" dirty="0" err="1">
-                <a:solidFill>
-                  <a:srgbClr val="3D424E"/>
-                </a:solidFill>
-              </a:rPr>
-              <a:t>orientador</a:t>
-            </a:r>
-            <a:r>
-              <a:rPr sz="1600" dirty="0">
-                <a:solidFill>
-                  <a:srgbClr val="3D424E"/>
-                </a:solidFill>
-              </a:rPr>
-              <a:t>: CLIP (Contrastive Language-Image Pre-training)</a:t>
-            </a:r>
-          </a:p>
-          <a:p>
-            <a:pPr>
-              <a:spcAft>
-                <a:spcPts val="800"/>
-              </a:spcAft>
-            </a:pPr>
-            <a:r>
-              <a:rPr sz="1600" b="1" dirty="0">
-                <a:solidFill>
-                  <a:srgbClr val="1F2A4E"/>
-                </a:solidFill>
-              </a:rPr>
-              <a:t>5.  </a:t>
-            </a:r>
-            <a:r>
-              <a:rPr sz="1600" dirty="0" err="1">
-                <a:solidFill>
-                  <a:srgbClr val="3D424E"/>
-                </a:solidFill>
-              </a:rPr>
-              <a:t>FiLM</a:t>
-            </a:r>
-            <a:r>
-              <a:rPr sz="1600" dirty="0">
-                <a:solidFill>
-                  <a:srgbClr val="3D424E"/>
-                </a:solidFill>
-              </a:rPr>
-              <a:t> </a:t>
-            </a:r>
-            <a:r>
-              <a:rPr sz="1600" dirty="0" err="1">
-                <a:solidFill>
-                  <a:srgbClr val="3D424E"/>
-                </a:solidFill>
-              </a:rPr>
-              <a:t>em</a:t>
-            </a:r>
-            <a:r>
-              <a:rPr sz="1600" dirty="0">
-                <a:solidFill>
-                  <a:srgbClr val="3D424E"/>
-                </a:solidFill>
-              </a:rPr>
-              <a:t> fairness: lacuna </a:t>
-            </a:r>
-            <a:r>
-              <a:rPr sz="1600" dirty="0" err="1">
-                <a:solidFill>
-                  <a:srgbClr val="3D424E"/>
-                </a:solidFill>
-              </a:rPr>
-              <a:t>na</a:t>
-            </a:r>
-            <a:r>
-              <a:rPr sz="1600" dirty="0">
-                <a:solidFill>
-                  <a:srgbClr val="3D424E"/>
-                </a:solidFill>
-              </a:rPr>
-              <a:t> </a:t>
-            </a:r>
-            <a:r>
-              <a:rPr sz="1600" dirty="0" err="1">
-                <a:solidFill>
-                  <a:srgbClr val="3D424E"/>
-                </a:solidFill>
-              </a:rPr>
-              <a:t>literatura</a:t>
-            </a:r>
-            <a:r>
-              <a:rPr sz="1600" dirty="0">
-                <a:solidFill>
-                  <a:srgbClr val="3D424E"/>
-                </a:solidFill>
-              </a:rPr>
-              <a:t> </a:t>
-            </a:r>
-            <a:r>
-              <a:rPr sz="1600" dirty="0" err="1">
-                <a:solidFill>
-                  <a:srgbClr val="3D424E"/>
-                </a:solidFill>
-              </a:rPr>
-              <a:t>como</a:t>
-            </a:r>
-            <a:r>
-              <a:rPr sz="1600" dirty="0">
-                <a:solidFill>
-                  <a:srgbClr val="3D424E"/>
-                </a:solidFill>
-              </a:rPr>
-              <a:t> </a:t>
-            </a:r>
-            <a:r>
-              <a:rPr sz="1600" dirty="0" err="1">
-                <a:solidFill>
-                  <a:srgbClr val="3D424E"/>
-                </a:solidFill>
-              </a:rPr>
-              <a:t>contribuição</a:t>
-            </a:r>
-            <a:r>
-              <a:rPr sz="1600" dirty="0">
-                <a:solidFill>
-                  <a:srgbClr val="3D424E"/>
-                </a:solidFill>
-              </a:rPr>
-              <a:t> original</a:t>
-            </a:r>
-          </a:p>
-          <a:p>
-            <a:pPr>
-              <a:spcAft>
-                <a:spcPts val="800"/>
-              </a:spcAft>
-            </a:pPr>
-            <a:r>
-              <a:rPr sz="1600" b="1" dirty="0">
-                <a:solidFill>
-                  <a:srgbClr val="1F2A4E"/>
-                </a:solidFill>
-              </a:rPr>
-              <a:t>6.  </a:t>
-            </a:r>
-            <a:r>
-              <a:rPr sz="1600" dirty="0" err="1">
-                <a:solidFill>
-                  <a:srgbClr val="3D424E"/>
-                </a:solidFill>
-              </a:rPr>
-              <a:t>Proposta</a:t>
-            </a:r>
-            <a:r>
-              <a:rPr sz="1600" dirty="0">
-                <a:solidFill>
-                  <a:srgbClr val="3D424E"/>
-                </a:solidFill>
-              </a:rPr>
-              <a:t>: </a:t>
-            </a:r>
-            <a:r>
-              <a:rPr sz="1600" dirty="0" err="1">
-                <a:solidFill>
-                  <a:srgbClr val="3D424E"/>
-                </a:solidFill>
-              </a:rPr>
-              <a:t>estudo</a:t>
-            </a:r>
-            <a:r>
-              <a:rPr sz="1600" dirty="0">
-                <a:solidFill>
-                  <a:srgbClr val="3D424E"/>
-                </a:solidFill>
-              </a:rPr>
-              <a:t> </a:t>
-            </a:r>
-            <a:r>
-              <a:rPr sz="1600" dirty="0" err="1">
-                <a:solidFill>
-                  <a:srgbClr val="3D424E"/>
-                </a:solidFill>
-              </a:rPr>
-              <a:t>comparativo</a:t>
-            </a:r>
-            <a:r>
-              <a:rPr sz="1600" dirty="0">
-                <a:solidFill>
-                  <a:srgbClr val="3D424E"/>
-                </a:solidFill>
-              </a:rPr>
-              <a:t> de </a:t>
-            </a:r>
-            <a:r>
-              <a:rPr sz="1600" dirty="0" err="1">
-                <a:solidFill>
-                  <a:srgbClr val="3D424E"/>
-                </a:solidFill>
-              </a:rPr>
-              <a:t>mecanismos</a:t>
-            </a:r>
-            <a:r>
-              <a:rPr sz="1600" dirty="0">
-                <a:solidFill>
-                  <a:srgbClr val="3D424E"/>
-                </a:solidFill>
-              </a:rPr>
-              <a:t> de conditioning</a:t>
-            </a:r>
-          </a:p>
-          <a:p>
-            <a:pPr>
-              <a:spcAft>
-                <a:spcPts val="800"/>
-              </a:spcAft>
-            </a:pPr>
-            <a:r>
-              <a:rPr sz="1600" b="1" dirty="0">
-                <a:solidFill>
-                  <a:srgbClr val="1F2A4E"/>
-                </a:solidFill>
-              </a:rPr>
-              <a:t>7.  </a:t>
-            </a:r>
-            <a:r>
-              <a:rPr sz="1600" dirty="0">
-                <a:solidFill>
-                  <a:srgbClr val="3D424E"/>
-                </a:solidFill>
-              </a:rPr>
-              <a:t>Plano de </a:t>
-            </a:r>
-            <a:r>
-              <a:rPr sz="1600" dirty="0" err="1">
-                <a:solidFill>
-                  <a:srgbClr val="3D424E"/>
-                </a:solidFill>
-              </a:rPr>
-              <a:t>escrita</a:t>
-            </a:r>
-            <a:r>
-              <a:rPr sz="1600" dirty="0">
-                <a:solidFill>
-                  <a:srgbClr val="3D424E"/>
-                </a:solidFill>
-              </a:rPr>
-              <a:t> e </a:t>
-            </a:r>
-            <a:r>
-              <a:rPr sz="1600" dirty="0" err="1">
-                <a:solidFill>
-                  <a:srgbClr val="3D424E"/>
-                </a:solidFill>
-              </a:rPr>
-              <a:t>decisões</a:t>
-            </a:r>
-            <a:r>
-              <a:rPr sz="1600" dirty="0">
-                <a:solidFill>
-                  <a:srgbClr val="3D424E"/>
-                </a:solidFill>
-              </a:rPr>
-              <a:t> a </a:t>
-            </a:r>
-            <a:r>
-              <a:rPr sz="1600" dirty="0" err="1">
-                <a:solidFill>
-                  <a:srgbClr val="3D424E"/>
-                </a:solidFill>
-              </a:rPr>
-              <a:t>alinhar</a:t>
-            </a:r>
-            <a:endParaRPr sz="1600" dirty="0">
-              <a:solidFill>
-                <a:srgbClr val="3D424E"/>
-              </a:solidFill>
-            </a:endParaRPr>
+              <a:defRPr sz="1000" i="1">
+                <a:solidFill>
+                  <a:srgbClr val="707682"/>
+                </a:solidFill>
+              </a:defRPr>
+            </a:pPr>
+            <a:r>
+              <a:t>Se CLIP superar FiLM, reportamos como informação útil — não como invalidação. Honra a recomendação do orientador.</a:t>
+            </a:r>
           </a:p>
         </p:txBody>
       </p:sp>
@@ -6844,8 +6772,8 @@
 </p:sld>
 </file>
 
-<file path=ppt/slides/slide20.xml><?xml version="1.0" encoding="utf-8"?>
-<p:sld xmlns:a="http://schemas.openxmlformats.org/drawingml/2006/main" xmlns:r="http://schemas.openxmlformats.org/officeDocument/2006/relationships" xmlns:p="http://schemas.openxmlformats.org/presentationml/2006/main">
+<file path=ppt/slides/slide2.xml><?xml version="1.0" encoding="utf-8"?>
+<p:sld xmlns:a="http://schemas.openxmlformats.org/drawingml/2006/main" xmlns:p="http://schemas.openxmlformats.org/presentationml/2006/main" xmlns:r="http://schemas.openxmlformats.org/officeDocument/2006/relationships">
   <p:cSld>
     <p:spTree>
       <p:nvGrpSpPr>
@@ -6853,14 +6781,7 @@
         <p:cNvGrpSpPr/>
         <p:nvPr/>
       </p:nvGrpSpPr>
-      <p:grpSpPr>
-        <a:xfrm>
-          <a:off x="0" y="0"/>
-          <a:ext cx="0" cy="0"/>
-          <a:chOff x="0" y="0"/>
-          <a:chExt cx="0" cy="0"/>
-        </a:xfrm>
-      </p:grpSpPr>
+      <p:grpSpPr/>
       <p:sp>
         <p:nvSpPr>
           <p:cNvPr id="2" name="TextBox 1"/>
@@ -6891,7 +6812,7 @@
               </a:defRPr>
             </a:pPr>
             <a:r>
-              <a:t>5 configurações de conditioning comparadas</a:t>
+              <a:t>Agenda da reunião</a:t>
             </a:r>
           </a:p>
         </p:txBody>
@@ -6936,554 +6857,19 @@
           <a:lstStyle/>
           <a:p>
             <a:pPr algn="ctr"/>
-            <a:endParaRPr/>
-          </a:p>
-        </p:txBody>
-      </p:sp>
-      <p:graphicFrame>
-        <p:nvGraphicFramePr>
-          <p:cNvPr id="4" name="Table 3"/>
-          <p:cNvGraphicFramePr>
-            <a:graphicFrameLocks noGrp="1"/>
-          </p:cNvGraphicFramePr>
-          <p:nvPr/>
-        </p:nvGraphicFramePr>
-        <p:xfrm>
-          <a:off x="457200" y="1371600"/>
-          <a:ext cx="11887200" cy="4754880"/>
-        </p:xfrm>
-        <a:graphic>
-          <a:graphicData uri="http://schemas.openxmlformats.org/drawingml/2006/table">
-            <a:tbl>
-              <a:tblPr firstRow="1" bandRow="1">
-                <a:tableStyleId>{5C22544A-7EE6-4342-B048-85BDC9FD1C3A}</a:tableStyleId>
-              </a:tblPr>
-              <a:tblGrid>
-                <a:gridCol w="914400">
-                  <a:extLst>
-                    <a:ext uri="{9D8B030D-6E8A-4147-A177-3AD203B41FA5}">
-                      <a16:colId xmlns:a16="http://schemas.microsoft.com/office/drawing/2014/main" val="20000"/>
-                    </a:ext>
-                  </a:extLst>
-                </a:gridCol>
-                <a:gridCol w="2743200">
-                  <a:extLst>
-                    <a:ext uri="{9D8B030D-6E8A-4147-A177-3AD203B41FA5}">
-                      <a16:colId xmlns:a16="http://schemas.microsoft.com/office/drawing/2014/main" val="20001"/>
-                    </a:ext>
-                  </a:extLst>
-                </a:gridCol>
-                <a:gridCol w="4114800">
-                  <a:extLst>
-                    <a:ext uri="{9D8B030D-6E8A-4147-A177-3AD203B41FA5}">
-                      <a16:colId xmlns:a16="http://schemas.microsoft.com/office/drawing/2014/main" val="20002"/>
-                    </a:ext>
-                  </a:extLst>
-                </a:gridCol>
-                <a:gridCol w="4114800">
-                  <a:extLst>
-                    <a:ext uri="{9D8B030D-6E8A-4147-A177-3AD203B41FA5}">
-                      <a16:colId xmlns:a16="http://schemas.microsoft.com/office/drawing/2014/main" val="20003"/>
-                    </a:ext>
-                  </a:extLst>
-                </a:gridCol>
-              </a:tblGrid>
-              <a:tr h="792480">
-                <a:tc>
-                  <a:txBody>
-                    <a:bodyPr/>
-                    <a:lstStyle/>
-                    <a:p>
-                      <a:r>
-                        <a:rPr sz="1300" b="1">
-                          <a:solidFill>
-                            <a:srgbClr val="FFFFFF"/>
-                          </a:solidFill>
-                        </a:rPr>
-                        <a:t>Config</a:t>
-                      </a:r>
-                    </a:p>
-                  </a:txBody>
-                  <a:tcPr>
-                    <a:solidFill>
-                      <a:srgbClr val="1F2A4E"/>
-                    </a:solidFill>
-                  </a:tcPr>
-                </a:tc>
-                <a:tc>
-                  <a:txBody>
-                    <a:bodyPr/>
-                    <a:lstStyle/>
-                    <a:p>
-                      <a:r>
-                        <a:rPr sz="1300" b="1">
-                          <a:solidFill>
-                            <a:srgbClr val="FFFFFF"/>
-                          </a:solidFill>
-                        </a:rPr>
-                        <a:t>Arquitetura</a:t>
-                      </a:r>
-                    </a:p>
-                  </a:txBody>
-                  <a:tcPr>
-                    <a:solidFill>
-                      <a:srgbClr val="1F2A4E"/>
-                    </a:solidFill>
-                  </a:tcPr>
-                </a:tc>
-                <a:tc>
-                  <a:txBody>
-                    <a:bodyPr/>
-                    <a:lstStyle/>
-                    <a:p>
-                      <a:r>
-                        <a:rPr sz="1300" b="1">
-                          <a:solidFill>
-                            <a:srgbClr val="FFFFFF"/>
-                          </a:solidFill>
-                        </a:rPr>
-                        <a:t>Mecanismo de conditioning</a:t>
-                      </a:r>
-                    </a:p>
-                  </a:txBody>
-                  <a:tcPr>
-                    <a:solidFill>
-                      <a:srgbClr val="1F2A4E"/>
-                    </a:solidFill>
-                  </a:tcPr>
-                </a:tc>
-                <a:tc>
-                  <a:txBody>
-                    <a:bodyPr/>
-                    <a:lstStyle/>
-                    <a:p>
-                      <a:r>
-                        <a:rPr sz="1300" b="1">
-                          <a:solidFill>
-                            <a:srgbClr val="FFFFFF"/>
-                          </a:solidFill>
-                        </a:rPr>
-                        <a:t>Origem</a:t>
-                      </a:r>
-                    </a:p>
-                  </a:txBody>
-                  <a:tcPr>
-                    <a:solidFill>
-                      <a:srgbClr val="1F2A4E"/>
-                    </a:solidFill>
-                  </a:tcPr>
-                </a:tc>
-                <a:extLst>
-                  <a:ext uri="{0D108BD9-81ED-4DB2-BD59-A6C34878D82A}">
-                    <a16:rowId xmlns:a16="http://schemas.microsoft.com/office/drawing/2014/main" val="10000"/>
-                  </a:ext>
-                </a:extLst>
-              </a:tr>
-              <a:tr h="792480">
-                <a:tc>
-                  <a:txBody>
-                    <a:bodyPr/>
-                    <a:lstStyle/>
-                    <a:p>
-                      <a:r>
-                        <a:rPr sz="1100">
-                          <a:solidFill>
-                            <a:srgbClr val="3D424E"/>
-                          </a:solidFill>
-                        </a:rPr>
-                        <a:t>A</a:t>
-                      </a:r>
-                    </a:p>
-                  </a:txBody>
-                  <a:tcPr/>
-                </a:tc>
-                <a:tc>
-                  <a:txBody>
-                    <a:bodyPr/>
-                    <a:lstStyle/>
-                    <a:p>
-                      <a:r>
-                        <a:rPr sz="1100">
-                          <a:solidFill>
-                            <a:srgbClr val="3D424E"/>
-                          </a:solidFill>
-                        </a:rPr>
-                        <a:t>ConvNeXt-T baseline</a:t>
-                      </a:r>
-                    </a:p>
-                  </a:txBody>
-                  <a:tcPr/>
-                </a:tc>
-                <a:tc>
-                  <a:txBody>
-                    <a:bodyPr/>
-                    <a:lstStyle/>
-                    <a:p>
-                      <a:r>
-                        <a:rPr sz="1100">
-                          <a:solidFill>
-                            <a:srgbClr val="3D424E"/>
-                          </a:solidFill>
-                        </a:rPr>
-                        <a:t>Sem conditioning</a:t>
-                      </a:r>
-                    </a:p>
-                  </a:txBody>
-                  <a:tcPr/>
-                </a:tc>
-                <a:tc>
-                  <a:txBody>
-                    <a:bodyPr/>
-                    <a:lstStyle/>
-                    <a:p>
-                      <a:r>
-                        <a:rPr sz="1100">
-                          <a:solidFill>
-                            <a:srgbClr val="3D424E"/>
-                          </a:solidFill>
-                        </a:rPr>
-                        <a:t>Controle</a:t>
-                      </a:r>
-                    </a:p>
-                  </a:txBody>
-                  <a:tcPr/>
-                </a:tc>
-                <a:extLst>
-                  <a:ext uri="{0D108BD9-81ED-4DB2-BD59-A6C34878D82A}">
-                    <a16:rowId xmlns:a16="http://schemas.microsoft.com/office/drawing/2014/main" val="10001"/>
-                  </a:ext>
-                </a:extLst>
-              </a:tr>
-              <a:tr h="792480">
-                <a:tc>
-                  <a:txBody>
-                    <a:bodyPr/>
-                    <a:lstStyle/>
-                    <a:p>
-                      <a:r>
-                        <a:rPr sz="1100">
-                          <a:solidFill>
-                            <a:srgbClr val="3D424E"/>
-                          </a:solidFill>
-                        </a:rPr>
-                        <a:t>B (proposta)</a:t>
-                      </a:r>
-                    </a:p>
-                  </a:txBody>
-                  <a:tcPr>
-                    <a:solidFill>
-                      <a:srgbClr val="E8EAED"/>
-                    </a:solidFill>
-                  </a:tcPr>
-                </a:tc>
-                <a:tc>
-                  <a:txBody>
-                    <a:bodyPr/>
-                    <a:lstStyle/>
-                    <a:p>
-                      <a:r>
-                        <a:rPr sz="1100">
-                          <a:solidFill>
-                            <a:srgbClr val="3D424E"/>
-                          </a:solidFill>
-                        </a:rPr>
-                        <a:t>ConvNeXt-T + FiLM</a:t>
-                      </a:r>
-                    </a:p>
-                  </a:txBody>
-                  <a:tcPr>
-                    <a:solidFill>
-                      <a:srgbClr val="E8EAED"/>
-                    </a:solidFill>
-                  </a:tcPr>
-                </a:tc>
-                <a:tc>
-                  <a:txBody>
-                    <a:bodyPr/>
-                    <a:lstStyle/>
-                    <a:p>
-                      <a:r>
-                        <a:rPr sz="1100">
-                          <a:solidFill>
-                            <a:srgbClr val="3D424E"/>
-                          </a:solidFill>
-                        </a:rPr>
-                        <a:t>MST 10-dim → γ, β</a:t>
-                      </a:r>
-                    </a:p>
-                  </a:txBody>
-                  <a:tcPr>
-                    <a:solidFill>
-                      <a:srgbClr val="E8EAED"/>
-                    </a:solidFill>
-                  </a:tcPr>
-                </a:tc>
-                <a:tc>
-                  <a:txBody>
-                    <a:bodyPr/>
-                    <a:lstStyle/>
-                    <a:p>
-                      <a:r>
-                        <a:rPr sz="1100">
-                          <a:solidFill>
-                            <a:srgbClr val="3D424E"/>
-                          </a:solidFill>
-                        </a:rPr>
-                        <a:t>Nossa contribuição central</a:t>
-                      </a:r>
-                    </a:p>
-                  </a:txBody>
-                  <a:tcPr>
-                    <a:solidFill>
-                      <a:srgbClr val="E8EAED"/>
-                    </a:solidFill>
-                  </a:tcPr>
-                </a:tc>
-                <a:extLst>
-                  <a:ext uri="{0D108BD9-81ED-4DB2-BD59-A6C34878D82A}">
-                    <a16:rowId xmlns:a16="http://schemas.microsoft.com/office/drawing/2014/main" val="10002"/>
-                  </a:ext>
-                </a:extLst>
-              </a:tr>
-              <a:tr h="792480">
-                <a:tc>
-                  <a:txBody>
-                    <a:bodyPr/>
-                    <a:lstStyle/>
-                    <a:p>
-                      <a:r>
-                        <a:rPr sz="1100">
-                          <a:solidFill>
-                            <a:srgbClr val="3D424E"/>
-                          </a:solidFill>
-                        </a:rPr>
-                        <a:t>C</a:t>
-                      </a:r>
-                    </a:p>
-                  </a:txBody>
-                  <a:tcPr/>
-                </a:tc>
-                <a:tc>
-                  <a:txBody>
-                    <a:bodyPr/>
-                    <a:lstStyle/>
-                    <a:p>
-                      <a:r>
-                        <a:rPr sz="1100">
-                          <a:solidFill>
-                            <a:srgbClr val="3D424E"/>
-                          </a:solidFill>
-                        </a:rPr>
-                        <a:t>ConvNeXt-T + FiLM</a:t>
-                      </a:r>
-                    </a:p>
-                  </a:txBody>
-                  <a:tcPr/>
-                </a:tc>
-                <a:tc>
-                  <a:txBody>
-                    <a:bodyPr/>
-                    <a:lstStyle/>
-                    <a:p>
-                      <a:r>
-                        <a:rPr sz="1100">
-                          <a:solidFill>
-                            <a:srgbClr val="3D424E"/>
-                          </a:solidFill>
-                        </a:rPr>
-                        <a:t>Embedding CLIP-text → γ, β</a:t>
-                      </a:r>
-                    </a:p>
-                  </a:txBody>
-                  <a:tcPr/>
-                </a:tc>
-                <a:tc>
-                  <a:txBody>
-                    <a:bodyPr/>
-                    <a:lstStyle/>
-                    <a:p>
-                      <a:r>
-                        <a:rPr sz="1100">
-                          <a:solidFill>
-                            <a:srgbClr val="3D424E"/>
-                          </a:solidFill>
-                        </a:rPr>
-                        <a:t>Híbrido CLIP + FiLM</a:t>
-                      </a:r>
-                    </a:p>
-                  </a:txBody>
-                  <a:tcPr/>
-                </a:tc>
-                <a:extLst>
-                  <a:ext uri="{0D108BD9-81ED-4DB2-BD59-A6C34878D82A}">
-                    <a16:rowId xmlns:a16="http://schemas.microsoft.com/office/drawing/2014/main" val="10003"/>
-                  </a:ext>
-                </a:extLst>
-              </a:tr>
-              <a:tr h="792480">
-                <a:tc>
-                  <a:txBody>
-                    <a:bodyPr/>
-                    <a:lstStyle/>
-                    <a:p>
-                      <a:r>
-                        <a:rPr sz="1100">
-                          <a:solidFill>
-                            <a:srgbClr val="3D424E"/>
-                          </a:solidFill>
-                        </a:rPr>
-                        <a:t>D</a:t>
-                      </a:r>
-                    </a:p>
-                  </a:txBody>
-                  <a:tcPr/>
-                </a:tc>
-                <a:tc>
-                  <a:txBody>
-                    <a:bodyPr/>
-                    <a:lstStyle/>
-                    <a:p>
-                      <a:r>
-                        <a:rPr sz="1100">
-                          <a:solidFill>
-                            <a:srgbClr val="3D424E"/>
-                          </a:solidFill>
-                        </a:rPr>
-                        <a:t>ConvNeXt-T + cross-attention</a:t>
-                      </a:r>
-                    </a:p>
-                  </a:txBody>
-                  <a:tcPr/>
-                </a:tc>
-                <a:tc>
-                  <a:txBody>
-                    <a:bodyPr/>
-                    <a:lstStyle/>
-                    <a:p>
-                      <a:r>
-                        <a:rPr sz="1100">
-                          <a:solidFill>
-                            <a:srgbClr val="3D424E"/>
-                          </a:solidFill>
-                        </a:rPr>
-                        <a:t>Embedding CLIP-text via attention</a:t>
-                      </a:r>
-                    </a:p>
-                  </a:txBody>
-                  <a:tcPr/>
-                </a:tc>
-                <a:tc>
-                  <a:txBody>
-                    <a:bodyPr/>
-                    <a:lstStyle/>
-                    <a:p>
-                      <a:r>
-                        <a:rPr sz="1100">
-                          <a:solidFill>
-                            <a:srgbClr val="3D424E"/>
-                          </a:solidFill>
-                        </a:rPr>
-                        <a:t>Estilo FairCLIP</a:t>
-                      </a:r>
-                    </a:p>
-                  </a:txBody>
-                  <a:tcPr/>
-                </a:tc>
-                <a:extLst>
-                  <a:ext uri="{0D108BD9-81ED-4DB2-BD59-A6C34878D82A}">
-                    <a16:rowId xmlns:a16="http://schemas.microsoft.com/office/drawing/2014/main" val="10004"/>
-                  </a:ext>
-                </a:extLst>
-              </a:tr>
-              <a:tr h="792480">
-                <a:tc>
-                  <a:txBody>
-                    <a:bodyPr/>
-                    <a:lstStyle/>
-                    <a:p>
-                      <a:r>
-                        <a:rPr sz="1100">
-                          <a:solidFill>
-                            <a:srgbClr val="3D424E"/>
-                          </a:solidFill>
-                        </a:rPr>
-                        <a:t>E</a:t>
-                      </a:r>
-                    </a:p>
-                  </a:txBody>
-                  <a:tcPr/>
-                </a:tc>
-                <a:tc>
-                  <a:txBody>
-                    <a:bodyPr/>
-                    <a:lstStyle/>
-                    <a:p>
-                      <a:r>
-                        <a:rPr sz="1100">
-                          <a:solidFill>
-                            <a:srgbClr val="3D424E"/>
-                          </a:solidFill>
-                        </a:rPr>
-                        <a:t>ConvNeXt-T + LoRA-FAIR</a:t>
-                      </a:r>
-                    </a:p>
-                  </a:txBody>
-                  <a:tcPr/>
-                </a:tc>
-                <a:tc>
-                  <a:txBody>
-                    <a:bodyPr/>
-                    <a:lstStyle/>
-                    <a:p>
-                      <a:r>
-                        <a:rPr sz="1100">
-                          <a:solidFill>
-                            <a:srgbClr val="3D424E"/>
-                          </a:solidFill>
-                        </a:rPr>
-                        <a:t>Low-rank weight modulation</a:t>
-                      </a:r>
-                    </a:p>
-                  </a:txBody>
-                  <a:tcPr/>
-                </a:tc>
-                <a:tc>
-                  <a:txBody>
-                    <a:bodyPr/>
-                    <a:lstStyle/>
-                    <a:p>
-                      <a:r>
-                        <a:rPr sz="1100">
-                          <a:solidFill>
-                            <a:srgbClr val="3D424E"/>
-                          </a:solidFill>
-                        </a:rPr>
-                        <a:t>LoRA-FAIR (Bian, 2025)</a:t>
-                      </a:r>
-                    </a:p>
-                  </a:txBody>
-                  <a:tcPr/>
-                </a:tc>
-                <a:extLst>
-                  <a:ext uri="{0D108BD9-81ED-4DB2-BD59-A6C34878D82A}">
-                    <a16:rowId xmlns:a16="http://schemas.microsoft.com/office/drawing/2014/main" val="10005"/>
-                  </a:ext>
-                </a:extLst>
-              </a:tr>
-            </a:tbl>
-          </a:graphicData>
-        </a:graphic>
-      </p:graphicFrame>
-      <p:sp>
-        <p:nvSpPr>
-          <p:cNvPr id="5" name="TextBox 4"/>
+          </a:p>
+        </p:txBody>
+      </p:sp>
+      <p:sp>
+        <p:nvSpPr>
+          <p:cNvPr id="4" name="TextBox 3"/>
           <p:cNvSpPr txBox="1"/>
           <p:nvPr/>
         </p:nvSpPr>
         <p:spPr>
           <a:xfrm>
-            <a:off x="457200" y="6446520"/>
-            <a:ext cx="11430000" cy="365760"/>
+            <a:off x="457200" y="1371600"/>
+            <a:ext cx="11430000" cy="4937760"/>
           </a:xfrm>
           <a:prstGeom prst="rect">
             <a:avLst/>
@@ -7491,20 +6877,169 @@
           <a:noFill/>
         </p:spPr>
         <p:txBody>
-          <a:bodyPr wrap="none">
+          <a:bodyPr wrap="square">
             <a:spAutoFit/>
           </a:bodyPr>
           <a:lstStyle/>
           <a:p>
             <a:pPr>
-              <a:defRPr sz="1000" i="1">
-                <a:solidFill>
-                  <a:srgbClr val="707682"/>
-                </a:solidFill>
-              </a:defRPr>
-            </a:pPr>
-            <a:r>
-              <a:t>Se CLIP superar FiLM, reportamos como informação útil — não como invalidação. Honra a recomendação do orientador.</a:t>
+              <a:spcAft>
+                <a:spcPts val="800"/>
+              </a:spcAft>
+            </a:pPr>
+            <a:r>
+              <a:rPr sz="1600" b="1">
+                <a:solidFill>
+                  <a:srgbClr val="1F2A4E"/>
+                </a:solidFill>
+              </a:rPr>
+              <a:t>1.  </a:t>
+            </a:r>
+            <a:r>
+              <a:rPr sz="1600">
+                <a:solidFill>
+                  <a:srgbClr val="3D424E"/>
+                </a:solidFill>
+              </a:rPr>
+              <a:t>Status das decisões da reunião anterior (08/jun)</a:t>
+            </a:r>
+          </a:p>
+          <a:p>
+            <a:pPr>
+              <a:spcAft>
+                <a:spcPts val="800"/>
+              </a:spcAft>
+            </a:pPr>
+            <a:r>
+              <a:rPr sz="1600" b="1">
+                <a:solidFill>
+                  <a:srgbClr val="1F2A4E"/>
+                </a:solidFill>
+              </a:rPr>
+              <a:t>2.  </a:t>
+            </a:r>
+            <a:r>
+              <a:rPr sz="1600">
+                <a:solidFill>
+                  <a:srgbClr val="3D424E"/>
+                </a:solidFill>
+              </a:rPr>
+              <a:t>Corpus consolidado: 101 fichas em 11 tracks temáticos</a:t>
+            </a:r>
+          </a:p>
+          <a:p>
+            <a:pPr>
+              <a:spcAft>
+                <a:spcPts val="800"/>
+              </a:spcAft>
+            </a:pPr>
+            <a:r>
+              <a:rPr sz="1600" b="1">
+                <a:solidFill>
+                  <a:srgbClr val="1F2A4E"/>
+                </a:solidFill>
+              </a:rPr>
+              <a:t>3.  </a:t>
+            </a:r>
+            <a:r>
+              <a:rPr sz="1600">
+                <a:solidFill>
+                  <a:srgbClr val="3D424E"/>
+                </a:solidFill>
+              </a:rPr>
+              <a:t>Pente fino crítico do corpus (classificação por impacto)</a:t>
+            </a:r>
+          </a:p>
+          <a:p>
+            <a:pPr>
+              <a:spcAft>
+                <a:spcPts val="800"/>
+              </a:spcAft>
+            </a:pPr>
+            <a:r>
+              <a:rPr sz="1600" b="1">
+                <a:solidFill>
+                  <a:srgbClr val="1F2A4E"/>
+                </a:solidFill>
+              </a:rPr>
+              <a:t>4.  </a:t>
+            </a:r>
+            <a:r>
+              <a:rPr sz="1600">
+                <a:solidFill>
+                  <a:srgbClr val="3D424E"/>
+                </a:solidFill>
+              </a:rPr>
+              <a:t>Resposta à sugestão do orientador: CLIP (Contrastive Language-Image Pre-training)</a:t>
+            </a:r>
+          </a:p>
+          <a:p>
+            <a:pPr>
+              <a:spcAft>
+                <a:spcPts val="800"/>
+              </a:spcAft>
+            </a:pPr>
+            <a:r>
+              <a:rPr sz="1600" b="1">
+                <a:solidFill>
+                  <a:srgbClr val="1F2A4E"/>
+                </a:solidFill>
+              </a:rPr>
+              <a:t>5.  </a:t>
+            </a:r>
+            <a:r>
+              <a:rPr sz="1600">
+                <a:solidFill>
+                  <a:srgbClr val="3D424E"/>
+                </a:solidFill>
+              </a:rPr>
+              <a:t>FiLM em fairness: lacuna na literatura como contribuição original</a:t>
+            </a:r>
+          </a:p>
+          <a:p>
+            <a:pPr>
+              <a:spcAft>
+                <a:spcPts val="800"/>
+              </a:spcAft>
+            </a:pPr>
+            <a:r>
+              <a:rPr sz="1600" b="1">
+                <a:solidFill>
+                  <a:srgbClr val="1F2A4E"/>
+                </a:solidFill>
+              </a:rPr>
+              <a:t>6.  </a:t>
+            </a:r>
+            <a:r>
+              <a:rPr sz="1600">
+                <a:solidFill>
+                  <a:srgbClr val="3D424E"/>
+                </a:solidFill>
+              </a:rPr>
+              <a:t>Proposta: estudo comparativo de mecanismos de conditioning</a:t>
+            </a:r>
+          </a:p>
+          <a:p>
+            <a:pPr>
+              <a:spcAft>
+                <a:spcPts val="800"/>
+              </a:spcAft>
+            </a:pPr>
+            <a:r>
+              <a:rPr sz="1600" b="1">
+                <a:solidFill>
+                  <a:srgbClr val="1F2A4E"/>
+                </a:solidFill>
+              </a:rPr>
+              <a:t>7.  </a:t>
+            </a:r>
+            <a:r>
+              <a:rPr sz="1600">
+                <a:solidFill>
+                  <a:srgbClr val="3D424E"/>
+                </a:solidFill>
+              </a:rPr>
+              <a:t>Plano de escrita e decisões a alinhar</a:t>
             </a:r>
           </a:p>
         </p:txBody>
@@ -7517,8 +7052,8 @@
 </p:sld>
 </file>
 
-<file path=ppt/slides/slide21.xml><?xml version="1.0" encoding="utf-8"?>
-<p:sld xmlns:a="http://schemas.openxmlformats.org/drawingml/2006/main" xmlns:r="http://schemas.openxmlformats.org/officeDocument/2006/relationships" xmlns:p="http://schemas.openxmlformats.org/presentationml/2006/main">
+<file path=ppt/slides/slide20.xml><?xml version="1.0" encoding="utf-8"?>
+<p:sld xmlns:a="http://schemas.openxmlformats.org/drawingml/2006/main" xmlns:p="http://schemas.openxmlformats.org/presentationml/2006/main" xmlns:r="http://schemas.openxmlformats.org/officeDocument/2006/relationships">
   <p:cSld>
     <p:spTree>
       <p:nvGrpSpPr>
@@ -7526,14 +7061,7 @@
         <p:cNvGrpSpPr/>
         <p:nvPr/>
       </p:nvGrpSpPr>
-      <p:grpSpPr>
-        <a:xfrm>
-          <a:off x="0" y="0"/>
-          <a:ext cx="0" cy="0"/>
-          <a:chOff x="0" y="0"/>
-          <a:chExt cx="0" cy="0"/>
-        </a:xfrm>
-      </p:grpSpPr>
+      <p:grpSpPr/>
       <p:sp>
         <p:nvSpPr>
           <p:cNvPr id="2" name="TextBox 1"/>
@@ -7609,7 +7137,6 @@
           <a:lstStyle/>
           <a:p>
             <a:pPr algn="ctr"/>
-            <a:endParaRPr/>
           </a:p>
         </p:txBody>
       </p:sp>
@@ -7763,6 +7290,14 @@
               </a:rPr>
               <a:t>  </a:t>
             </a:r>
+            <a:r>
+              <a:rPr sz="1600">
+                <a:solidFill>
+                  <a:srgbClr val="3D424E"/>
+                </a:solidFill>
+              </a:rPr>
+              <a:t/>
+            </a:r>
           </a:p>
           <a:p>
             <a:pPr>
@@ -7832,8 +7367,8 @@
 </p:sld>
 </file>
 
-<file path=ppt/slides/slide22.xml><?xml version="1.0" encoding="utf-8"?>
-<p:sld xmlns:a="http://schemas.openxmlformats.org/drawingml/2006/main" xmlns:r="http://schemas.openxmlformats.org/officeDocument/2006/relationships" xmlns:p="http://schemas.openxmlformats.org/presentationml/2006/main">
+<file path=ppt/slides/slide21.xml><?xml version="1.0" encoding="utf-8"?>
+<p:sld xmlns:a="http://schemas.openxmlformats.org/drawingml/2006/main" xmlns:p="http://schemas.openxmlformats.org/presentationml/2006/main" xmlns:r="http://schemas.openxmlformats.org/officeDocument/2006/relationships">
   <p:cSld>
     <p:spTree>
       <p:nvGrpSpPr>
@@ -7841,14 +7376,7 @@
         <p:cNvGrpSpPr/>
         <p:nvPr/>
       </p:nvGrpSpPr>
-      <p:grpSpPr>
-        <a:xfrm>
-          <a:off x="0" y="0"/>
-          <a:ext cx="0" cy="0"/>
-          <a:chOff x="0" y="0"/>
-          <a:chExt cx="0" cy="0"/>
-        </a:xfrm>
-      </p:grpSpPr>
+      <p:grpSpPr/>
       <p:sp>
         <p:nvSpPr>
           <p:cNvPr id="2" name="Rectangle 1"/>
@@ -7889,7 +7417,6 @@
           <a:lstStyle/>
           <a:p>
             <a:pPr algn="ctr"/>
-            <a:endParaRPr/>
           </a:p>
         </p:txBody>
       </p:sp>
@@ -7983,8 +7510,8 @@
 </p:sld>
 </file>
 
-<file path=ppt/slides/slide23.xml><?xml version="1.0" encoding="utf-8"?>
-<p:sld xmlns:a="http://schemas.openxmlformats.org/drawingml/2006/main" xmlns:r="http://schemas.openxmlformats.org/officeDocument/2006/relationships" xmlns:p="http://schemas.openxmlformats.org/presentationml/2006/main">
+<file path=ppt/slides/slide22.xml><?xml version="1.0" encoding="utf-8"?>
+<p:sld xmlns:a="http://schemas.openxmlformats.org/drawingml/2006/main" xmlns:p="http://schemas.openxmlformats.org/presentationml/2006/main" xmlns:r="http://schemas.openxmlformats.org/officeDocument/2006/relationships">
   <p:cSld>
     <p:spTree>
       <p:nvGrpSpPr>
@@ -7992,14 +7519,7 @@
         <p:cNvGrpSpPr/>
         <p:nvPr/>
       </p:nvGrpSpPr>
-      <p:grpSpPr>
-        <a:xfrm>
-          <a:off x="0" y="0"/>
-          <a:ext cx="0" cy="0"/>
-          <a:chOff x="0" y="0"/>
-          <a:chExt cx="0" cy="0"/>
-        </a:xfrm>
-      </p:grpSpPr>
+      <p:grpSpPr/>
       <p:sp>
         <p:nvSpPr>
           <p:cNvPr id="2" name="TextBox 1"/>
@@ -8075,7 +7595,6 @@
           <a:lstStyle/>
           <a:p>
             <a:pPr algn="ctr"/>
-            <a:endParaRPr/>
           </a:p>
         </p:txBody>
       </p:sp>
@@ -8098,34 +7617,10 @@
                 <a:tableStyleId>{5C22544A-7EE6-4342-B048-85BDC9FD1C3A}</a:tableStyleId>
               </a:tblPr>
               <a:tblGrid>
-                <a:gridCol w="914400">
-                  <a:extLst>
-                    <a:ext uri="{9D8B030D-6E8A-4147-A177-3AD203B41FA5}">
-                      <a16:colId xmlns:a16="http://schemas.microsoft.com/office/drawing/2014/main" val="20000"/>
-                    </a:ext>
-                  </a:extLst>
-                </a:gridCol>
-                <a:gridCol w="2194560">
-                  <a:extLst>
-                    <a:ext uri="{9D8B030D-6E8A-4147-A177-3AD203B41FA5}">
-                      <a16:colId xmlns:a16="http://schemas.microsoft.com/office/drawing/2014/main" val="20001"/>
-                    </a:ext>
-                  </a:extLst>
-                </a:gridCol>
-                <a:gridCol w="4572000">
-                  <a:extLst>
-                    <a:ext uri="{9D8B030D-6E8A-4147-A177-3AD203B41FA5}">
-                      <a16:colId xmlns:a16="http://schemas.microsoft.com/office/drawing/2014/main" val="20002"/>
-                    </a:ext>
-                  </a:extLst>
-                </a:gridCol>
-                <a:gridCol w="4206240">
-                  <a:extLst>
-                    <a:ext uri="{9D8B030D-6E8A-4147-A177-3AD203B41FA5}">
-                      <a16:colId xmlns:a16="http://schemas.microsoft.com/office/drawing/2014/main" val="20003"/>
-                    </a:ext>
-                  </a:extLst>
-                </a:gridCol>
+                <a:gridCol w="914400"/>
+                <a:gridCol w="2194560"/>
+                <a:gridCol w="4572000"/>
+                <a:gridCol w="4206240"/>
               </a:tblGrid>
               <a:tr h="792480">
                 <a:tc>
@@ -8212,11 +7707,6 @@
                     </a:solidFill>
                   </a:tcPr>
                 </a:tc>
-                <a:extLst>
-                  <a:ext uri="{0D108BD9-81ED-4DB2-BD59-A6C34878D82A}">
-                    <a16:rowId xmlns:a16="http://schemas.microsoft.com/office/drawing/2014/main" val="10000"/>
-                  </a:ext>
-                </a:extLst>
               </a:tr>
               <a:tr h="792480">
                 <a:tc>
@@ -8303,11 +7793,6 @@
                     </a:solidFill>
                   </a:tcPr>
                 </a:tc>
-                <a:extLst>
-                  <a:ext uri="{0D108BD9-81ED-4DB2-BD59-A6C34878D82A}">
-                    <a16:rowId xmlns:a16="http://schemas.microsoft.com/office/drawing/2014/main" val="10001"/>
-                  </a:ext>
-                </a:extLst>
               </a:tr>
               <a:tr h="792480">
                 <a:tc>
@@ -8350,36 +7835,12 @@
                     <a:lstStyle/>
                     <a:p>
                       <a:r>
-                        <a:rPr sz="1100" dirty="0" err="1">
-                          <a:solidFill>
-                            <a:srgbClr val="3D424E"/>
-                          </a:solidFill>
-                        </a:rPr>
-                        <a:t>Capítulo</a:t>
-                      </a:r>
-                      <a:r>
-                        <a:rPr sz="1100" dirty="0">
-                          <a:solidFill>
-                            <a:srgbClr val="3D424E"/>
-                          </a:solidFill>
-                        </a:rPr>
-                        <a:t> 2 (</a:t>
-                      </a:r>
-                      <a:r>
-                        <a:rPr sz="1100" dirty="0" err="1">
-                          <a:solidFill>
-                            <a:srgbClr val="3D424E"/>
-                          </a:solidFill>
-                        </a:rPr>
-                        <a:t>Revisão</a:t>
-                      </a:r>
-                      <a:r>
-                        <a:rPr sz="1100" dirty="0">
-                          <a:solidFill>
-                            <a:srgbClr val="3D424E"/>
-                          </a:solidFill>
-                        </a:rPr>
-                        <a:t> — 11 tracks)</a:t>
+                        <a:rPr sz="1100">
+                          <a:solidFill>
+                            <a:srgbClr val="3D424E"/>
+                          </a:solidFill>
+                        </a:rPr>
+                        <a:t>Capítulo 2 (Revisão — 11 tracks)</a:t>
                       </a:r>
                     </a:p>
                   </a:txBody>
@@ -8402,11 +7863,6 @@
                   </a:txBody>
                   <a:tcPr/>
                 </a:tc>
-                <a:extLst>
-                  <a:ext uri="{0D108BD9-81ED-4DB2-BD59-A6C34878D82A}">
-                    <a16:rowId xmlns:a16="http://schemas.microsoft.com/office/drawing/2014/main" val="10002"/>
-                  </a:ext>
-                </a:extLst>
               </a:tr>
               <a:tr h="792480">
                 <a:tc>
@@ -8449,116 +7905,12 @@
                     <a:lstStyle/>
                     <a:p>
                       <a:r>
-                        <a:rPr sz="1100" dirty="0" err="1">
-                          <a:solidFill>
-                            <a:srgbClr val="3D424E"/>
-                          </a:solidFill>
-                        </a:rPr>
-                        <a:t>Capítulo</a:t>
-                      </a:r>
-                      <a:r>
-                        <a:rPr sz="1100" dirty="0">
-                          <a:solidFill>
-                            <a:srgbClr val="3D424E"/>
-                          </a:solidFill>
-                        </a:rPr>
-                        <a:t> 3 (</a:t>
-                      </a:r>
-                      <a:r>
-                        <a:rPr sz="1100" dirty="0" err="1">
-                          <a:solidFill>
-                            <a:srgbClr val="3D424E"/>
-                          </a:solidFill>
-                        </a:rPr>
-                        <a:t>Objetivos</a:t>
-                      </a:r>
-                      <a:r>
-                        <a:rPr sz="1100" dirty="0">
-                          <a:solidFill>
-                            <a:srgbClr val="3D424E"/>
-                          </a:solidFill>
-                        </a:rPr>
-                        <a:t>) e </a:t>
-                      </a:r>
-                      <a:r>
-                        <a:rPr sz="1100" dirty="0" err="1">
-                          <a:solidFill>
-                            <a:srgbClr val="3D424E"/>
-                          </a:solidFill>
-                        </a:rPr>
-                        <a:t>Capítulo</a:t>
-                      </a:r>
-                      <a:r>
-                        <a:rPr sz="1100" dirty="0">
-                          <a:solidFill>
-                            <a:srgbClr val="3D424E"/>
-                          </a:solidFill>
-                        </a:rPr>
-                        <a:t> 4 (</a:t>
-                      </a:r>
-                      <a:r>
-                        <a:rPr sz="1100" dirty="0" err="1">
-                          <a:solidFill>
-                            <a:srgbClr val="3D424E"/>
-                          </a:solidFill>
-                        </a:rPr>
-                        <a:t>Ampliação</a:t>
-                      </a:r>
-                      <a:r>
-                        <a:rPr sz="1100" dirty="0">
-                          <a:solidFill>
-                            <a:srgbClr val="3D424E"/>
-                          </a:solidFill>
-                        </a:rPr>
-                        <a:t> e </a:t>
-                      </a:r>
-                      <a:r>
-                        <a:rPr sz="1100" dirty="0" err="1">
-                          <a:solidFill>
-                            <a:srgbClr val="3D424E"/>
-                          </a:solidFill>
-                        </a:rPr>
-                        <a:t>busca</a:t>
-                      </a:r>
-                      <a:r>
-                        <a:rPr sz="1100" dirty="0">
-                          <a:solidFill>
-                            <a:srgbClr val="3D424E"/>
-                          </a:solidFill>
-                        </a:rPr>
-                        <a:t> de </a:t>
-                      </a:r>
-                      <a:r>
-                        <a:rPr sz="1100" dirty="0" err="1">
-                          <a:solidFill>
-                            <a:srgbClr val="3D424E"/>
-                          </a:solidFill>
-                        </a:rPr>
-                        <a:t>novas</a:t>
-                      </a:r>
-                      <a:r>
-                        <a:rPr sz="1100" dirty="0">
-                          <a:solidFill>
-                            <a:srgbClr val="3D424E"/>
-                          </a:solidFill>
-                        </a:rPr>
-                        <a:t> </a:t>
-                      </a:r>
-                      <a:r>
-                        <a:rPr sz="1100" dirty="0" err="1">
-                          <a:solidFill>
-                            <a:srgbClr val="3D424E"/>
-                          </a:solidFill>
-                        </a:rPr>
-                        <a:t>técnicas</a:t>
-                      </a:r>
-                      <a:r>
-                        <a:rPr sz="1100" dirty="0">
-                          <a:solidFill>
-                            <a:srgbClr val="3D424E"/>
-                          </a:solidFill>
-                        </a:rPr>
-                        <a:t>)</a:t>
+                        <a:rPr sz="1100">
+                          <a:solidFill>
+                            <a:srgbClr val="3D424E"/>
+                          </a:solidFill>
+                        </a:rPr>
+                        <a:t>Capítulo 3 (Objetivos) e Capítulo 4 (Ampliação e busca de novas técnicas)</a:t>
                       </a:r>
                     </a:p>
                   </a:txBody>
@@ -8581,11 +7933,6 @@
                   </a:txBody>
                   <a:tcPr/>
                 </a:tc>
-                <a:extLst>
-                  <a:ext uri="{0D108BD9-81ED-4DB2-BD59-A6C34878D82A}">
-                    <a16:rowId xmlns:a16="http://schemas.microsoft.com/office/drawing/2014/main" val="10003"/>
-                  </a:ext>
-                </a:extLst>
               </a:tr>
               <a:tr h="792480">
                 <a:tc>
@@ -8656,11 +8003,6 @@
                   </a:txBody>
                   <a:tcPr/>
                 </a:tc>
-                <a:extLst>
-                  <a:ext uri="{0D108BD9-81ED-4DB2-BD59-A6C34878D82A}">
-                    <a16:rowId xmlns:a16="http://schemas.microsoft.com/office/drawing/2014/main" val="10004"/>
-                  </a:ext>
-                </a:extLst>
               </a:tr>
               <a:tr h="792480">
                 <a:tc>
@@ -8720,43 +8062,17 @@
                     <a:lstStyle/>
                     <a:p>
                       <a:r>
-                        <a:rPr sz="1100" dirty="0" err="1">
-                          <a:solidFill>
-                            <a:srgbClr val="3D424E"/>
-                          </a:solidFill>
-                        </a:rPr>
-                        <a:t>Primeira</a:t>
-                      </a:r>
-                      <a:r>
-                        <a:rPr sz="1100" dirty="0">
-                          <a:solidFill>
-                            <a:srgbClr val="3D424E"/>
-                          </a:solidFill>
-                        </a:rPr>
-                        <a:t> </a:t>
-                      </a:r>
-                      <a:r>
-                        <a:rPr sz="1100" dirty="0" err="1">
-                          <a:solidFill>
-                            <a:srgbClr val="3D424E"/>
-                          </a:solidFill>
-                        </a:rPr>
-                        <a:t>revisão</a:t>
-                      </a:r>
-                      <a:endParaRPr sz="1100" dirty="0">
-                        <a:solidFill>
-                          <a:srgbClr val="3D424E"/>
-                        </a:solidFill>
-                      </a:endParaRPr>
-                    </a:p>
-                  </a:txBody>
-                  <a:tcPr/>
-                </a:tc>
-                <a:extLst>
-                  <a:ext uri="{0D108BD9-81ED-4DB2-BD59-A6C34878D82A}">
-                    <a16:rowId xmlns:a16="http://schemas.microsoft.com/office/drawing/2014/main" val="10005"/>
-                  </a:ext>
-                </a:extLst>
+                        <a:rPr sz="1100">
+                          <a:solidFill>
+                            <a:srgbClr val="3D424E"/>
+                          </a:solidFill>
+                        </a:rPr>
+                        <a:t>Primeira revisão</a:t>
+                      </a:r>
+                    </a:p>
+                  </a:txBody>
+                  <a:tcPr/>
+                </a:tc>
               </a:tr>
             </a:tbl>
           </a:graphicData>
@@ -8805,8 +8121,8 @@
 </p:sld>
 </file>
 
-<file path=ppt/slides/slide24.xml><?xml version="1.0" encoding="utf-8"?>
-<p:sld xmlns:a="http://schemas.openxmlformats.org/drawingml/2006/main" xmlns:r="http://schemas.openxmlformats.org/officeDocument/2006/relationships" xmlns:p="http://schemas.openxmlformats.org/presentationml/2006/main">
+<file path=ppt/slides/slide23.xml><?xml version="1.0" encoding="utf-8"?>
+<p:sld xmlns:a="http://schemas.openxmlformats.org/drawingml/2006/main" xmlns:p="http://schemas.openxmlformats.org/presentationml/2006/main" xmlns:r="http://schemas.openxmlformats.org/officeDocument/2006/relationships">
   <p:cSld>
     <p:spTree>
       <p:nvGrpSpPr>
@@ -8814,14 +8130,7 @@
         <p:cNvGrpSpPr/>
         <p:nvPr/>
       </p:nvGrpSpPr>
-      <p:grpSpPr>
-        <a:xfrm>
-          <a:off x="0" y="0"/>
-          <a:ext cx="0" cy="0"/>
-          <a:chOff x="0" y="0"/>
-          <a:chExt cx="0" cy="0"/>
-        </a:xfrm>
-      </p:grpSpPr>
+      <p:grpSpPr/>
       <p:sp>
         <p:nvSpPr>
           <p:cNvPr id="2" name="TextBox 1"/>
@@ -8897,7 +8206,6 @@
           <a:lstStyle/>
           <a:p>
             <a:pPr algn="ctr"/>
-            <a:endParaRPr/>
           </a:p>
         </p:txBody>
       </p:sp>
@@ -9011,7 +8319,7 @@
                   <a:srgbClr val="3D424E"/>
                 </a:solidFill>
               </a:rPr>
-              <a:t>Co-orientador — já podemos formalizar?</a:t>
+              <a:t>Pixel information (achado de Pangelinan) pode ser formalizado como objetivo específico (OE-6) com hipótese H6 quantitativa?</a:t>
             </a:r>
           </a:p>
           <a:p>
@@ -9027,6 +8335,29 @@
                 </a:solidFill>
               </a:rPr>
               <a:t>5.  </a:t>
+            </a:r>
+            <a:r>
+              <a:rPr sz="1600">
+                <a:solidFill>
+                  <a:srgbClr val="3D424E"/>
+                </a:solidFill>
+              </a:rPr>
+              <a:t>Co-orientador — já podemos formalizar?</a:t>
+            </a:r>
+          </a:p>
+          <a:p>
+            <a:pPr>
+              <a:spcAft>
+                <a:spcPts val="800"/>
+              </a:spcAft>
+            </a:pPr>
+            <a:r>
+              <a:rPr sz="1600" b="1">
+                <a:solidFill>
+                  <a:srgbClr val="1F2A4E"/>
+                </a:solidFill>
+              </a:rPr>
+              <a:t>6.  </a:t>
             </a:r>
             <a:r>
               <a:rPr sz="1600">
@@ -9047,8 +8378,8 @@
 </p:sld>
 </file>
 
-<file path=ppt/slides/slide25.xml><?xml version="1.0" encoding="utf-8"?>
-<p:sld xmlns:a="http://schemas.openxmlformats.org/drawingml/2006/main" xmlns:r="http://schemas.openxmlformats.org/officeDocument/2006/relationships" xmlns:p="http://schemas.openxmlformats.org/presentationml/2006/main">
+<file path=ppt/slides/slide24.xml><?xml version="1.0" encoding="utf-8"?>
+<p:sld xmlns:a="http://schemas.openxmlformats.org/drawingml/2006/main" xmlns:p="http://schemas.openxmlformats.org/presentationml/2006/main" xmlns:r="http://schemas.openxmlformats.org/officeDocument/2006/relationships">
   <p:cSld>
     <p:spTree>
       <p:nvGrpSpPr>
@@ -9056,14 +8387,7 @@
         <p:cNvGrpSpPr/>
         <p:nvPr/>
       </p:nvGrpSpPr>
-      <p:grpSpPr>
-        <a:xfrm>
-          <a:off x="0" y="0"/>
-          <a:ext cx="0" cy="0"/>
-          <a:chOff x="0" y="0"/>
-          <a:chExt cx="0" cy="0"/>
-        </a:xfrm>
-      </p:grpSpPr>
+      <p:grpSpPr/>
       <p:sp>
         <p:nvSpPr>
           <p:cNvPr id="2" name="TextBox 1"/>
@@ -9139,7 +8463,6 @@
           <a:lstStyle/>
           <a:p>
             <a:pPr algn="ctr"/>
-            <a:endParaRPr/>
           </a:p>
         </p:txBody>
       </p:sp>
@@ -9316,6 +8639,14 @@
               </a:rPr>
               <a:t>  </a:t>
             </a:r>
+            <a:r>
+              <a:rPr sz="1600">
+                <a:solidFill>
+                  <a:srgbClr val="3D424E"/>
+                </a:solidFill>
+              </a:rPr>
+              <a:t/>
+            </a:r>
           </a:p>
           <a:p>
             <a:pPr>
@@ -9350,8 +8681,8 @@
 </p:sld>
 </file>
 
-<file path=ppt/slides/slide26.xml><?xml version="1.0" encoding="utf-8"?>
-<p:sld xmlns:a="http://schemas.openxmlformats.org/drawingml/2006/main" xmlns:r="http://schemas.openxmlformats.org/officeDocument/2006/relationships" xmlns:p="http://schemas.openxmlformats.org/presentationml/2006/main">
+<file path=ppt/slides/slide25.xml><?xml version="1.0" encoding="utf-8"?>
+<p:sld xmlns:a="http://schemas.openxmlformats.org/drawingml/2006/main" xmlns:p="http://schemas.openxmlformats.org/presentationml/2006/main" xmlns:r="http://schemas.openxmlformats.org/officeDocument/2006/relationships">
   <p:cSld>
     <p:spTree>
       <p:nvGrpSpPr>
@@ -9359,14 +8690,7 @@
         <p:cNvGrpSpPr/>
         <p:nvPr/>
       </p:nvGrpSpPr>
-      <p:grpSpPr>
-        <a:xfrm>
-          <a:off x="0" y="0"/>
-          <a:ext cx="0" cy="0"/>
-          <a:chOff x="0" y="0"/>
-          <a:chExt cx="0" cy="0"/>
-        </a:xfrm>
-      </p:grpSpPr>
+      <p:grpSpPr/>
       <p:sp>
         <p:nvSpPr>
           <p:cNvPr id="2" name="Rectangle 1"/>
@@ -9407,7 +8731,6 @@
           <a:lstStyle/>
           <a:p>
             <a:pPr algn="ctr"/>
-            <a:endParaRPr/>
           </a:p>
         </p:txBody>
       </p:sp>
@@ -9440,7 +8763,6 @@
                 </a:solidFill>
               </a:defRPr>
             </a:pPr>
-            <a:endParaRPr/>
           </a:p>
         </p:txBody>
       </p:sp>
@@ -9500,7 +8822,7 @@
 </file>
 
 <file path=ppt/slides/slide3.xml><?xml version="1.0" encoding="utf-8"?>
-<p:sld xmlns:a="http://schemas.openxmlformats.org/drawingml/2006/main" xmlns:r="http://schemas.openxmlformats.org/officeDocument/2006/relationships" xmlns:p="http://schemas.openxmlformats.org/presentationml/2006/main">
+<p:sld xmlns:a="http://schemas.openxmlformats.org/drawingml/2006/main" xmlns:p="http://schemas.openxmlformats.org/presentationml/2006/main" xmlns:r="http://schemas.openxmlformats.org/officeDocument/2006/relationships">
   <p:cSld>
     <p:spTree>
       <p:nvGrpSpPr>
@@ -9508,14 +8830,7 @@
         <p:cNvGrpSpPr/>
         <p:nvPr/>
       </p:nvGrpSpPr>
-      <p:grpSpPr>
-        <a:xfrm>
-          <a:off x="0" y="0"/>
-          <a:ext cx="0" cy="0"/>
-          <a:chOff x="0" y="0"/>
-          <a:chExt cx="0" cy="0"/>
-        </a:xfrm>
-      </p:grpSpPr>
+      <p:grpSpPr/>
       <p:sp>
         <p:nvSpPr>
           <p:cNvPr id="2" name="Rectangle 1"/>
@@ -9556,7 +8871,6 @@
           <a:lstStyle/>
           <a:p>
             <a:pPr algn="ctr"/>
-            <a:endParaRPr/>
           </a:p>
         </p:txBody>
       </p:sp>
@@ -9651,7 +8965,7 @@
 </file>
 
 <file path=ppt/slides/slide4.xml><?xml version="1.0" encoding="utf-8"?>
-<p:sld xmlns:a="http://schemas.openxmlformats.org/drawingml/2006/main" xmlns:r="http://schemas.openxmlformats.org/officeDocument/2006/relationships" xmlns:p="http://schemas.openxmlformats.org/presentationml/2006/main">
+<p:sld xmlns:a="http://schemas.openxmlformats.org/drawingml/2006/main" xmlns:p="http://schemas.openxmlformats.org/presentationml/2006/main" xmlns:r="http://schemas.openxmlformats.org/officeDocument/2006/relationships">
   <p:cSld>
     <p:spTree>
       <p:nvGrpSpPr>
@@ -9659,14 +8973,7 @@
         <p:cNvGrpSpPr/>
         <p:nvPr/>
       </p:nvGrpSpPr>
-      <p:grpSpPr>
-        <a:xfrm>
-          <a:off x="0" y="0"/>
-          <a:ext cx="0" cy="0"/>
-          <a:chOff x="0" y="0"/>
-          <a:chExt cx="0" cy="0"/>
-        </a:xfrm>
-      </p:grpSpPr>
+      <p:grpSpPr/>
       <p:sp>
         <p:nvSpPr>
           <p:cNvPr id="2" name="TextBox 1"/>
@@ -9742,7 +9049,6 @@
           <a:lstStyle/>
           <a:p>
             <a:pPr algn="ctr"/>
-            <a:endParaRPr/>
           </a:p>
         </p:txBody>
       </p:sp>
@@ -9765,34 +9071,10 @@
                 <a:tableStyleId>{5C22544A-7EE6-4342-B048-85BDC9FD1C3A}</a:tableStyleId>
               </a:tblPr>
               <a:tblGrid>
-                <a:gridCol w="457200">
-                  <a:extLst>
-                    <a:ext uri="{9D8B030D-6E8A-4147-A177-3AD203B41FA5}">
-                      <a16:colId xmlns:a16="http://schemas.microsoft.com/office/drawing/2014/main" val="20000"/>
-                    </a:ext>
-                  </a:extLst>
-                </a:gridCol>
-                <a:gridCol w="4206240">
-                  <a:extLst>
-                    <a:ext uri="{9D8B030D-6E8A-4147-A177-3AD203B41FA5}">
-                      <a16:colId xmlns:a16="http://schemas.microsoft.com/office/drawing/2014/main" val="20001"/>
-                    </a:ext>
-                  </a:extLst>
-                </a:gridCol>
-                <a:gridCol w="1828800">
-                  <a:extLst>
-                    <a:ext uri="{9D8B030D-6E8A-4147-A177-3AD203B41FA5}">
-                      <a16:colId xmlns:a16="http://schemas.microsoft.com/office/drawing/2014/main" val="20002"/>
-                    </a:ext>
-                  </a:extLst>
-                </a:gridCol>
-                <a:gridCol w="4937760">
-                  <a:extLst>
-                    <a:ext uri="{9D8B030D-6E8A-4147-A177-3AD203B41FA5}">
-                      <a16:colId xmlns:a16="http://schemas.microsoft.com/office/drawing/2014/main" val="20003"/>
-                    </a:ext>
-                  </a:extLst>
-                </a:gridCol>
+                <a:gridCol w="457200"/>
+                <a:gridCol w="4206240"/>
+                <a:gridCol w="1828800"/>
+                <a:gridCol w="4937760"/>
               </a:tblGrid>
               <a:tr h="679268">
                 <a:tc>
@@ -9879,11 +9161,6 @@
                     </a:solidFill>
                   </a:tcPr>
                 </a:tc>
-                <a:extLst>
-                  <a:ext uri="{0D108BD9-81ED-4DB2-BD59-A6C34878D82A}">
-                    <a16:rowId xmlns:a16="http://schemas.microsoft.com/office/drawing/2014/main" val="10000"/>
-                  </a:ext>
-                </a:extLst>
               </a:tr>
               <a:tr h="679268">
                 <a:tc>
@@ -9954,11 +9231,6 @@
                   </a:txBody>
                   <a:tcPr/>
                 </a:tc>
-                <a:extLst>
-                  <a:ext uri="{0D108BD9-81ED-4DB2-BD59-A6C34878D82A}">
-                    <a16:rowId xmlns:a16="http://schemas.microsoft.com/office/drawing/2014/main" val="10001"/>
-                  </a:ext>
-                </a:extLst>
               </a:tr>
               <a:tr h="679268">
                 <a:tc>
@@ -9984,34 +9256,13 @@
                     <a:lstStyle/>
                     <a:p>
                       <a:r>
-                        <a:rPr sz="1100" dirty="0" err="1">
-                          <a:solidFill>
-                            <a:srgbClr val="3D424E"/>
-                          </a:solidFill>
-                        </a:rPr>
-                        <a:t>SkinToneNet</a:t>
-                      </a:r>
-                      <a:r>
-                        <a:rPr sz="1100" dirty="0">
-                          <a:solidFill>
-                            <a:srgbClr val="3D424E"/>
-                          </a:solidFill>
-                        </a:rPr>
-                        <a:t> </a:t>
-                      </a:r>
-                      <a:r>
-                        <a:rPr sz="1100" dirty="0" err="1">
-                          <a:solidFill>
-                            <a:srgbClr val="3D424E"/>
-                          </a:solidFill>
-                        </a:rPr>
-                        <a:t>pré-treinado</a:t>
-                      </a:r>
-                      <a:endParaRPr sz="1100" dirty="0">
-                        <a:solidFill>
-                          <a:srgbClr val="3D424E"/>
-                        </a:solidFill>
-                      </a:endParaRPr>
+                        <a:rPr sz="1100">
+                          <a:solidFill>
+                            <a:srgbClr val="3D424E"/>
+                          </a:solidFill>
+                        </a:rPr>
+                        <a:t>SkinToneNet pré-treinado</a:t>
+                      </a:r>
                     </a:p>
                   </a:txBody>
                   <a:tcPr/>
@@ -10050,11 +9301,6 @@
                   </a:txBody>
                   <a:tcPr/>
                 </a:tc>
-                <a:extLst>
-                  <a:ext uri="{0D108BD9-81ED-4DB2-BD59-A6C34878D82A}">
-                    <a16:rowId xmlns:a16="http://schemas.microsoft.com/office/drawing/2014/main" val="10002"/>
-                  </a:ext>
-                </a:extLst>
               </a:tr>
               <a:tr h="679268">
                 <a:tc>
@@ -10125,11 +9371,6 @@
                   </a:txBody>
                   <a:tcPr/>
                 </a:tc>
-                <a:extLst>
-                  <a:ext uri="{0D108BD9-81ED-4DB2-BD59-A6C34878D82A}">
-                    <a16:rowId xmlns:a16="http://schemas.microsoft.com/office/drawing/2014/main" val="10003"/>
-                  </a:ext>
-                </a:extLst>
               </a:tr>
               <a:tr h="679268">
                 <a:tc>
@@ -10200,11 +9441,6 @@
                   </a:txBody>
                   <a:tcPr/>
                 </a:tc>
-                <a:extLst>
-                  <a:ext uri="{0D108BD9-81ED-4DB2-BD59-A6C34878D82A}">
-                    <a16:rowId xmlns:a16="http://schemas.microsoft.com/office/drawing/2014/main" val="10004"/>
-                  </a:ext>
-                </a:extLst>
               </a:tr>
               <a:tr h="679268">
                 <a:tc>
@@ -10275,11 +9511,6 @@
                   </a:txBody>
                   <a:tcPr/>
                 </a:tc>
-                <a:extLst>
-                  <a:ext uri="{0D108BD9-81ED-4DB2-BD59-A6C34878D82A}">
-                    <a16:rowId xmlns:a16="http://schemas.microsoft.com/office/drawing/2014/main" val="10005"/>
-                  </a:ext>
-                </a:extLst>
               </a:tr>
               <a:tr h="679272">
                 <a:tc>
@@ -10351,98 +9582,13 @@
                     <a:lstStyle/>
                     <a:p>
                       <a:r>
-                        <a:rPr sz="1100" dirty="0" err="1">
-                          <a:solidFill>
-                            <a:srgbClr val="3D424E"/>
-                          </a:solidFill>
-                        </a:rPr>
-                        <a:t>Estrutura</a:t>
-                      </a:r>
-                      <a:r>
-                        <a:rPr sz="1100" dirty="0">
-                          <a:solidFill>
-                            <a:srgbClr val="3D424E"/>
-                          </a:solidFill>
-                        </a:rPr>
-                        <a:t> </a:t>
-                      </a:r>
-                      <a:r>
-                        <a:rPr sz="1100" dirty="0" err="1">
-                          <a:solidFill>
-                            <a:srgbClr val="3D424E"/>
-                          </a:solidFill>
-                        </a:rPr>
-                        <a:t>sendo</a:t>
-                      </a:r>
-                      <a:r>
-                        <a:rPr sz="1100" dirty="0">
-                          <a:solidFill>
-                            <a:srgbClr val="3D424E"/>
-                          </a:solidFill>
-                        </a:rPr>
-                        <a:t> </a:t>
-                      </a:r>
-                      <a:r>
-                        <a:rPr sz="1100" dirty="0" err="1">
-                          <a:solidFill>
-                            <a:srgbClr val="3D424E"/>
-                          </a:solidFill>
-                        </a:rPr>
-                        <a:t>organizada</a:t>
-                      </a:r>
-                      <a:r>
-                        <a:rPr sz="1100" dirty="0">
-                          <a:solidFill>
-                            <a:srgbClr val="3D424E"/>
-                          </a:solidFill>
-                        </a:rPr>
-                        <a:t> — LaTeX </a:t>
-                      </a:r>
-                      <a:r>
-                        <a:rPr sz="1100" dirty="0" err="1">
-                          <a:solidFill>
-                            <a:srgbClr val="3D424E"/>
-                          </a:solidFill>
-                        </a:rPr>
-                        <a:t>ainda</a:t>
-                      </a:r>
-                      <a:r>
-                        <a:rPr sz="1100" dirty="0">
-                          <a:solidFill>
-                            <a:srgbClr val="3D424E"/>
-                          </a:solidFill>
-                        </a:rPr>
-                        <a:t> </a:t>
-                      </a:r>
-                      <a:r>
-                        <a:rPr sz="1100" dirty="0" err="1">
-                          <a:solidFill>
-                            <a:srgbClr val="3D424E"/>
-                          </a:solidFill>
-                        </a:rPr>
-                        <a:t>não</a:t>
-                      </a:r>
-                      <a:r>
-                        <a:rPr sz="1100" dirty="0">
-                          <a:solidFill>
-                            <a:srgbClr val="3D424E"/>
-                          </a:solidFill>
-                        </a:rPr>
-                        <a:t> </a:t>
-                      </a:r>
-                      <a:r>
-                        <a:rPr sz="1100" dirty="0" err="1">
-                          <a:solidFill>
-                            <a:srgbClr val="3D424E"/>
-                          </a:solidFill>
-                        </a:rPr>
-                        <a:t>iniciado</a:t>
-                      </a:r>
-                      <a:endParaRPr sz="1100" dirty="0">
-                        <a:solidFill>
-                          <a:srgbClr val="3D424E"/>
-                        </a:solidFill>
-                      </a:endParaRPr>
+                        <a:rPr sz="1100">
+                          <a:solidFill>
+                            <a:srgbClr val="3D424E"/>
+                          </a:solidFill>
+                        </a:rPr>
+                        <a:t>Estrutura sendo organizada — LaTeX ainda não iniciado</a:t>
+                      </a:r>
                     </a:p>
                   </a:txBody>
                   <a:tcPr>
@@ -10451,11 +9597,6 @@
                     </a:solidFill>
                   </a:tcPr>
                 </a:tc>
-                <a:extLst>
-                  <a:ext uri="{0D108BD9-81ED-4DB2-BD59-A6C34878D82A}">
-                    <a16:rowId xmlns:a16="http://schemas.microsoft.com/office/drawing/2014/main" val="10006"/>
-                  </a:ext>
-                </a:extLst>
               </a:tr>
             </a:tbl>
           </a:graphicData>
@@ -10491,54 +9632,8 @@
               </a:defRPr>
             </a:pPr>
             <a:r>
-              <a:rPr dirty="0"/>
-              <a:t>5 </a:t>
-            </a:r>
-            <a:r>
-              <a:rPr dirty="0" err="1"/>
-              <a:t>itens</a:t>
-            </a:r>
-            <a:r>
-              <a:rPr dirty="0"/>
-              <a:t> </a:t>
-            </a:r>
-            <a:r>
-              <a:rPr dirty="0" err="1"/>
-              <a:t>concluídos</a:t>
-            </a:r>
-            <a:r>
-              <a:rPr dirty="0"/>
-              <a:t> e 1 </a:t>
-            </a:r>
-            <a:r>
-              <a:rPr dirty="0" err="1"/>
-              <a:t>em</a:t>
-            </a:r>
-            <a:r>
-              <a:rPr dirty="0"/>
-              <a:t> </a:t>
-            </a:r>
-            <a:r>
-              <a:rPr dirty="0" err="1"/>
-              <a:t>andamento</a:t>
-            </a:r>
-            <a:r>
-              <a:rPr dirty="0"/>
-              <a:t> </a:t>
-            </a:r>
-            <a:r>
-              <a:rPr dirty="0" err="1"/>
-              <a:t>conforme</a:t>
-            </a:r>
-            <a:r>
-              <a:rPr dirty="0"/>
-              <a:t> </a:t>
-            </a:r>
-            <a:r>
-              <a:rPr dirty="0" err="1"/>
-              <a:t>planejado</a:t>
-            </a:r>
-            <a:endParaRPr dirty="0"/>
+              <a:t>5 itens concluídos e 1 em andamento conforme planejado</a:t>
+            </a:r>
           </a:p>
         </p:txBody>
       </p:sp>
@@ -10551,7 +9646,7 @@
 </file>
 
 <file path=ppt/slides/slide5.xml><?xml version="1.0" encoding="utf-8"?>
-<p:sld xmlns:a="http://schemas.openxmlformats.org/drawingml/2006/main" xmlns:r="http://schemas.openxmlformats.org/officeDocument/2006/relationships" xmlns:p="http://schemas.openxmlformats.org/presentationml/2006/main">
+<p:sld xmlns:a="http://schemas.openxmlformats.org/drawingml/2006/main" xmlns:p="http://schemas.openxmlformats.org/presentationml/2006/main" xmlns:r="http://schemas.openxmlformats.org/officeDocument/2006/relationships">
   <p:cSld>
     <p:spTree>
       <p:nvGrpSpPr>
@@ -10559,14 +9654,7 @@
         <p:cNvGrpSpPr/>
         <p:nvPr/>
       </p:nvGrpSpPr>
-      <p:grpSpPr>
-        <a:xfrm>
-          <a:off x="0" y="0"/>
-          <a:ext cx="0" cy="0"/>
-          <a:chOff x="0" y="0"/>
-          <a:chExt cx="0" cy="0"/>
-        </a:xfrm>
-      </p:grpSpPr>
+      <p:grpSpPr/>
       <p:sp>
         <p:nvSpPr>
           <p:cNvPr id="2" name="Rectangle 1"/>
@@ -10607,7 +9695,6 @@
           <a:lstStyle/>
           <a:p>
             <a:pPr algn="ctr"/>
-            <a:endParaRPr/>
           </a:p>
         </p:txBody>
       </p:sp>
@@ -10702,7 +9789,7 @@
 </file>
 
 <file path=ppt/slides/slide6.xml><?xml version="1.0" encoding="utf-8"?>
-<p:sld xmlns:a="http://schemas.openxmlformats.org/drawingml/2006/main" xmlns:r="http://schemas.openxmlformats.org/officeDocument/2006/relationships" xmlns:p="http://schemas.openxmlformats.org/presentationml/2006/main">
+<p:sld xmlns:a="http://schemas.openxmlformats.org/drawingml/2006/main" xmlns:p="http://schemas.openxmlformats.org/presentationml/2006/main" xmlns:r="http://schemas.openxmlformats.org/officeDocument/2006/relationships">
   <p:cSld>
     <p:spTree>
       <p:nvGrpSpPr>
@@ -10710,14 +9797,7 @@
         <p:cNvGrpSpPr/>
         <p:nvPr/>
       </p:nvGrpSpPr>
-      <p:grpSpPr>
-        <a:xfrm>
-          <a:off x="0" y="0"/>
-          <a:ext cx="0" cy="0"/>
-          <a:chOff x="0" y="0"/>
-          <a:chExt cx="0" cy="0"/>
-        </a:xfrm>
-      </p:grpSpPr>
+      <p:grpSpPr/>
       <p:sp>
         <p:nvSpPr>
           <p:cNvPr id="2" name="TextBox 1"/>
@@ -10793,7 +9873,6 @@
           <a:lstStyle/>
           <a:p>
             <a:pPr algn="ctr"/>
-            <a:endParaRPr/>
           </a:p>
         </p:txBody>
       </p:sp>
@@ -10947,6 +10026,14 @@
               </a:rPr>
               <a:t>  </a:t>
             </a:r>
+            <a:r>
+              <a:rPr sz="1600">
+                <a:solidFill>
+                  <a:srgbClr val="3D424E"/>
+                </a:solidFill>
+              </a:rPr>
+              <a:t/>
+            </a:r>
           </a:p>
           <a:p>
             <a:pPr>
@@ -10982,7 +10069,7 @@
 </file>
 
 <file path=ppt/slides/slide7.xml><?xml version="1.0" encoding="utf-8"?>
-<p:sld xmlns:a="http://schemas.openxmlformats.org/drawingml/2006/main" xmlns:r="http://schemas.openxmlformats.org/officeDocument/2006/relationships" xmlns:p="http://schemas.openxmlformats.org/presentationml/2006/main">
+<p:sld xmlns:a="http://schemas.openxmlformats.org/drawingml/2006/main" xmlns:p="http://schemas.openxmlformats.org/presentationml/2006/main" xmlns:r="http://schemas.openxmlformats.org/officeDocument/2006/relationships">
   <p:cSld>
     <p:spTree>
       <p:nvGrpSpPr>
@@ -10990,14 +10077,7 @@
         <p:cNvGrpSpPr/>
         <p:nvPr/>
       </p:nvGrpSpPr>
-      <p:grpSpPr>
-        <a:xfrm>
-          <a:off x="0" y="0"/>
-          <a:ext cx="0" cy="0"/>
-          <a:chOff x="0" y="0"/>
-          <a:chExt cx="0" cy="0"/>
-        </a:xfrm>
-      </p:grpSpPr>
+      <p:grpSpPr/>
       <p:sp>
         <p:nvSpPr>
           <p:cNvPr id="2" name="TextBox 1"/>
@@ -11073,7 +10153,6 @@
           <a:lstStyle/>
           <a:p>
             <a:pPr algn="ctr"/>
-            <a:endParaRPr/>
           </a:p>
         </p:txBody>
       </p:sp>
@@ -11083,17 +10162,11 @@
           <p:cNvGraphicFramePr>
             <a:graphicFrameLocks noGrp="1"/>
           </p:cNvGraphicFramePr>
-          <p:nvPr>
-            <p:extLst>
-              <p:ext uri="{D42A27DB-BD31-4B8C-83A1-F6EECF244321}">
-                <p14:modId xmlns:p14="http://schemas.microsoft.com/office/powerpoint/2010/main" val="2817735809"/>
-              </p:ext>
-            </p:extLst>
-          </p:nvPr>
+          <p:nvPr/>
         </p:nvGraphicFramePr>
         <p:xfrm>
           <a:off x="457200" y="1371600"/>
-          <a:ext cx="11430000" cy="4968240"/>
+          <a:ext cx="11430000" cy="4754880"/>
         </p:xfrm>
         <a:graphic>
           <a:graphicData uri="http://schemas.openxmlformats.org/drawingml/2006/table">
@@ -11102,41 +10175,11 @@
                 <a:tableStyleId>{5C22544A-7EE6-4342-B048-85BDC9FD1C3A}</a:tableStyleId>
               </a:tblPr>
               <a:tblGrid>
-                <a:gridCol w="640080">
-                  <a:extLst>
-                    <a:ext uri="{9D8B030D-6E8A-4147-A177-3AD203B41FA5}">
-                      <a16:colId xmlns:a16="http://schemas.microsoft.com/office/drawing/2014/main" val="20000"/>
-                    </a:ext>
-                  </a:extLst>
-                </a:gridCol>
-                <a:gridCol w="1920240">
-                  <a:extLst>
-                    <a:ext uri="{9D8B030D-6E8A-4147-A177-3AD203B41FA5}">
-                      <a16:colId xmlns:a16="http://schemas.microsoft.com/office/drawing/2014/main" val="20001"/>
-                    </a:ext>
-                  </a:extLst>
-                </a:gridCol>
-                <a:gridCol w="3108960">
-                  <a:extLst>
-                    <a:ext uri="{9D8B030D-6E8A-4147-A177-3AD203B41FA5}">
-                      <a16:colId xmlns:a16="http://schemas.microsoft.com/office/drawing/2014/main" val="20002"/>
-                    </a:ext>
-                  </a:extLst>
-                </a:gridCol>
-                <a:gridCol w="5120640">
-                  <a:extLst>
-                    <a:ext uri="{9D8B030D-6E8A-4147-A177-3AD203B41FA5}">
-                      <a16:colId xmlns:a16="http://schemas.microsoft.com/office/drawing/2014/main" val="20003"/>
-                    </a:ext>
-                  </a:extLst>
-                </a:gridCol>
-                <a:gridCol w="640080">
-                  <a:extLst>
-                    <a:ext uri="{9D8B030D-6E8A-4147-A177-3AD203B41FA5}">
-                      <a16:colId xmlns:a16="http://schemas.microsoft.com/office/drawing/2014/main" val="20004"/>
-                    </a:ext>
-                  </a:extLst>
-                </a:gridCol>
+                <a:gridCol w="640080"/>
+                <a:gridCol w="1920240"/>
+                <a:gridCol w="3108960"/>
+                <a:gridCol w="5120640"/>
+                <a:gridCol w="640080"/>
               </a:tblGrid>
               <a:tr h="396240">
                 <a:tc>
@@ -11244,11 +10287,6 @@
                     </a:solidFill>
                   </a:tcPr>
                 </a:tc>
-                <a:extLst>
-                  <a:ext uri="{0D108BD9-81ED-4DB2-BD59-A6C34878D82A}">
-                    <a16:rowId xmlns:a16="http://schemas.microsoft.com/office/drawing/2014/main" val="10000"/>
-                  </a:ext>
-                </a:extLst>
               </a:tr>
               <a:tr h="396240">
                 <a:tc>
@@ -11274,7 +10312,7 @@
                     <a:lstStyle/>
                     <a:p>
                       <a:r>
-                        <a:rPr sz="1100" dirty="0">
+                        <a:rPr sz="1100">
                           <a:solidFill>
                             <a:srgbClr val="3D424E"/>
                           </a:solidFill>
@@ -11308,71 +10346,24 @@
                     <a:lstStyle/>
                     <a:p>
                       <a:r>
-                        <a:rPr sz="1100" dirty="0">
-                          <a:solidFill>
-                            <a:srgbClr val="3D424E"/>
-                          </a:solidFill>
-                          <a:highlight>
-                            <a:srgbClr val="00FF00"/>
-                          </a:highlight>
-                        </a:rPr>
-                        <a:t>Kärkkäinen &amp; Joo 2021, </a:t>
-                      </a:r>
-                      <a:r>
-                        <a:rPr sz="1100" dirty="0" err="1">
-                          <a:solidFill>
-                            <a:srgbClr val="3D424E"/>
-                          </a:solidFill>
-                          <a:highlight>
-                            <a:srgbClr val="00FF00"/>
-                          </a:highlight>
-                        </a:rPr>
-                        <a:t>AlDahoul</a:t>
-                      </a:r>
-                      <a:r>
-                        <a:rPr sz="1100" dirty="0">
-                          <a:solidFill>
-                            <a:srgbClr val="3D424E"/>
-                          </a:solidFill>
-                          <a:highlight>
-                            <a:srgbClr val="00FF00"/>
-                          </a:highlight>
-                        </a:rPr>
-                        <a:t> 2024, Lin (</a:t>
-                      </a:r>
-                      <a:r>
-                        <a:rPr sz="1100" dirty="0" err="1">
-                          <a:solidFill>
-                            <a:srgbClr val="3D424E"/>
-                          </a:solidFill>
-                          <a:highlight>
-                            <a:srgbClr val="00FF00"/>
-                          </a:highlight>
-                        </a:rPr>
-                        <a:t>FairGRAPE</a:t>
-                      </a:r>
-                      <a:r>
-                        <a:rPr sz="1100" dirty="0">
-                          <a:solidFill>
-                            <a:srgbClr val="3D424E"/>
-                          </a:solidFill>
-                          <a:highlight>
-                            <a:srgbClr val="00FF00"/>
-                          </a:highlight>
-                        </a:rPr>
-                        <a:t>) 2022</a:t>
-                      </a:r>
-                    </a:p>
-                  </a:txBody>
-                  <a:tcPr/>
-                </a:tc>
-                <a:tc>
-                  <a:txBody>
-                    <a:bodyPr/>
-                    <a:lstStyle/>
-                    <a:p>
-                      <a:r>
-                        <a:rPr sz="1100" dirty="0">
+                        <a:rPr sz="1100">
+                          <a:solidFill>
+                            <a:srgbClr val="3D424E"/>
+                          </a:solidFill>
+                        </a:rPr>
+                        <a:t>Kärkkäinen &amp; Joo 2021, AlDahoul 2024, Lin (FairGRAPE) 2022</a:t>
+                      </a:r>
+                    </a:p>
+                  </a:txBody>
+                  <a:tcPr/>
+                </a:tc>
+                <a:tc>
+                  <a:txBody>
+                    <a:bodyPr/>
+                    <a:lstStyle/>
+                    <a:p>
+                      <a:r>
+                        <a:rPr sz="1100">
                           <a:solidFill>
                             <a:srgbClr val="3D424E"/>
                           </a:solidFill>
@@ -11383,11 +10374,6 @@
                   </a:txBody>
                   <a:tcPr/>
                 </a:tc>
-                <a:extLst>
-                  <a:ext uri="{0D108BD9-81ED-4DB2-BD59-A6C34878D82A}">
-                    <a16:rowId xmlns:a16="http://schemas.microsoft.com/office/drawing/2014/main" val="10001"/>
-                  </a:ext>
-                </a:extLst>
               </a:tr>
               <a:tr h="396240">
                 <a:tc>
@@ -11447,49 +10433,24 @@
                     <a:lstStyle/>
                     <a:p>
                       <a:r>
-                        <a:rPr sz="1100" dirty="0" err="1">
-                          <a:solidFill>
-                            <a:srgbClr val="3D424E"/>
-                          </a:solidFill>
-                          <a:highlight>
-                            <a:srgbClr val="00FF00"/>
-                          </a:highlight>
-                        </a:rPr>
-                        <a:t>Buolamwini</a:t>
-                      </a:r>
-                      <a:r>
-                        <a:rPr sz="1100" dirty="0">
-                          <a:solidFill>
-                            <a:srgbClr val="3D424E"/>
-                          </a:solidFill>
-                          <a:highlight>
-                            <a:srgbClr val="00FF00"/>
-                          </a:highlight>
-                        </a:rPr>
-                        <a:t> 2018</a:t>
-                      </a:r>
-                      <a:r>
-                        <a:rPr sz="1100" dirty="0">
-                          <a:solidFill>
-                            <a:srgbClr val="3D424E"/>
-                          </a:solidFill>
-                          <a:highlight>
-                            <a:srgbClr val="FFFF00"/>
-                          </a:highlight>
-                        </a:rPr>
-                        <a:t>, Grother (NIST) 2019, Wang (RFW) 2019</a:t>
-                      </a:r>
-                    </a:p>
-                  </a:txBody>
-                  <a:tcPr/>
-                </a:tc>
-                <a:tc>
-                  <a:txBody>
-                    <a:bodyPr/>
-                    <a:lstStyle/>
-                    <a:p>
-                      <a:r>
-                        <a:rPr sz="1100" dirty="0">
+                        <a:rPr sz="1100">
+                          <a:solidFill>
+                            <a:srgbClr val="3D424E"/>
+                          </a:solidFill>
+                        </a:rPr>
+                        <a:t>Buolamwini 2018, Grother (NIST) 2019, Wang (RFW) 2019</a:t>
+                      </a:r>
+                    </a:p>
+                  </a:txBody>
+                  <a:tcPr/>
+                </a:tc>
+                <a:tc>
+                  <a:txBody>
+                    <a:bodyPr/>
+                    <a:lstStyle/>
+                    <a:p>
+                      <a:r>
+                        <a:rPr sz="1100">
                           <a:solidFill>
                             <a:srgbClr val="3D424E"/>
                           </a:solidFill>
@@ -11500,11 +10461,6 @@
                   </a:txBody>
                   <a:tcPr/>
                 </a:tc>
-                <a:extLst>
-                  <a:ext uri="{0D108BD9-81ED-4DB2-BD59-A6C34878D82A}">
-                    <a16:rowId xmlns:a16="http://schemas.microsoft.com/office/drawing/2014/main" val="10002"/>
-                  </a:ext>
-                </a:extLst>
               </a:tr>
               <a:tr h="396240">
                 <a:tc>
@@ -11564,49 +10520,24 @@
                     <a:lstStyle/>
                     <a:p>
                       <a:r>
-                        <a:rPr sz="1100" dirty="0">
-                          <a:solidFill>
-                            <a:srgbClr val="3D424E"/>
-                          </a:solidFill>
-                          <a:highlight>
-                            <a:srgbClr val="00FF00"/>
-                          </a:highlight>
-                        </a:rPr>
-                        <a:t>Fitzpatrick 1988, Schumann 2023, Pereira (</a:t>
-                      </a:r>
-                      <a:r>
-                        <a:rPr sz="1100" dirty="0" err="1">
-                          <a:solidFill>
-                            <a:srgbClr val="3D424E"/>
-                          </a:solidFill>
-                          <a:highlight>
-                            <a:srgbClr val="00FF00"/>
-                          </a:highlight>
-                        </a:rPr>
-                        <a:t>SkinToneNet</a:t>
-                      </a:r>
-                      <a:r>
-                        <a:rPr sz="1100" dirty="0">
-                          <a:solidFill>
-                            <a:srgbClr val="3D424E"/>
-                          </a:solidFill>
-                          <a:highlight>
-                            <a:srgbClr val="00FF00"/>
-                          </a:highlight>
-                        </a:rPr>
-                        <a:t>) 2026</a:t>
-                      </a:r>
-                    </a:p>
-                  </a:txBody>
-                  <a:tcPr/>
-                </a:tc>
-                <a:tc>
-                  <a:txBody>
-                    <a:bodyPr/>
-                    <a:lstStyle/>
-                    <a:p>
-                      <a:r>
-                        <a:rPr sz="1100" dirty="0">
+                        <a:rPr sz="1100">
+                          <a:solidFill>
+                            <a:srgbClr val="3D424E"/>
+                          </a:solidFill>
+                        </a:rPr>
+                        <a:t>Fitzpatrick 1988, Schumann 2023, Pereira (SkinToneNet) 2026</a:t>
+                      </a:r>
+                    </a:p>
+                  </a:txBody>
+                  <a:tcPr/>
+                </a:tc>
+                <a:tc>
+                  <a:txBody>
+                    <a:bodyPr/>
+                    <a:lstStyle/>
+                    <a:p>
+                      <a:r>
+                        <a:rPr sz="1100">
                           <a:solidFill>
                             <a:srgbClr val="3D424E"/>
                           </a:solidFill>
@@ -11617,11 +10548,6 @@
                   </a:txBody>
                   <a:tcPr/>
                 </a:tc>
-                <a:extLst>
-                  <a:ext uri="{0D108BD9-81ED-4DB2-BD59-A6C34878D82A}">
-                    <a16:rowId xmlns:a16="http://schemas.microsoft.com/office/drawing/2014/main" val="10003"/>
-                  </a:ext>
-                </a:extLst>
               </a:tr>
               <a:tr h="396240">
                 <a:tc>
@@ -11681,71 +10607,24 @@
                     <a:lstStyle/>
                     <a:p>
                       <a:r>
-                        <a:rPr sz="1100" dirty="0">
-                          <a:solidFill>
-                            <a:srgbClr val="3D424E"/>
-                          </a:solidFill>
-                          <a:highlight>
-                            <a:srgbClr val="00FF00"/>
-                          </a:highlight>
-                        </a:rPr>
-                        <a:t>Park (FSCL+) 2022, Sagawa (Group DRO) 2020, Manzoor </a:t>
-                      </a:r>
-                      <a:r>
-                        <a:rPr lang="pt-BR" sz="1100" dirty="0">
-                          <a:solidFill>
-                            <a:srgbClr val="3D424E"/>
-                          </a:solidFill>
-                          <a:highlight>
-                            <a:srgbClr val="00FF00"/>
-                          </a:highlight>
-                        </a:rPr>
-                        <a:t>(</a:t>
-                      </a:r>
-                      <a:r>
-                        <a:rPr lang="pt-BR" sz="1100" dirty="0" err="1">
-                          <a:solidFill>
-                            <a:srgbClr val="3D424E"/>
-                          </a:solidFill>
-                          <a:highlight>
-                            <a:srgbClr val="00FF00"/>
-                          </a:highlight>
-                        </a:rPr>
-                        <a:t>FineFace</a:t>
-                      </a:r>
-                      <a:r>
-                        <a:rPr lang="pt-BR" sz="1100" dirty="0">
-                          <a:solidFill>
-                            <a:srgbClr val="3D424E"/>
-                          </a:solidFill>
-                          <a:highlight>
-                            <a:srgbClr val="00FF00"/>
-                          </a:highlight>
-                        </a:rPr>
-                        <a:t>) </a:t>
-                      </a:r>
-                      <a:r>
-                        <a:rPr sz="1100" dirty="0">
-                          <a:solidFill>
-                            <a:srgbClr val="3D424E"/>
-                          </a:solidFill>
-                          <a:highlight>
-                            <a:srgbClr val="00FF00"/>
-                          </a:highlight>
-                        </a:rPr>
-                        <a:t>2024</a:t>
-                      </a:r>
-                    </a:p>
-                  </a:txBody>
-                  <a:tcPr/>
-                </a:tc>
-                <a:tc>
-                  <a:txBody>
-                    <a:bodyPr/>
-                    <a:lstStyle/>
-                    <a:p>
-                      <a:r>
-                        <a:rPr sz="1100" dirty="0">
+                        <a:rPr sz="1100">
+                          <a:solidFill>
+                            <a:srgbClr val="3D424E"/>
+                          </a:solidFill>
+                        </a:rPr>
+                        <a:t>Park (FSCL+) 2022, Sagawa (Group DRO) 2020, Manzoor 2024</a:t>
+                      </a:r>
+                    </a:p>
+                  </a:txBody>
+                  <a:tcPr/>
+                </a:tc>
+                <a:tc>
+                  <a:txBody>
+                    <a:bodyPr/>
+                    <a:lstStyle/>
+                    <a:p>
+                      <a:r>
+                        <a:rPr sz="1100">
                           <a:solidFill>
                             <a:srgbClr val="3D424E"/>
                           </a:solidFill>
@@ -11756,11 +10635,6 @@
                   </a:txBody>
                   <a:tcPr/>
                 </a:tc>
-                <a:extLst>
-                  <a:ext uri="{0D108BD9-81ED-4DB2-BD59-A6C34878D82A}">
-                    <a16:rowId xmlns:a16="http://schemas.microsoft.com/office/drawing/2014/main" val="10004"/>
-                  </a:ext>
-                </a:extLst>
               </a:tr>
               <a:tr h="396240">
                 <a:tc>
@@ -11820,48 +10694,12 @@
                     <a:lstStyle/>
                     <a:p>
                       <a:r>
-                        <a:rPr sz="1100" dirty="0">
-                          <a:solidFill>
-                            <a:srgbClr val="3D424E"/>
-                          </a:solidFill>
-                          <a:highlight>
-                            <a:srgbClr val="00FF00"/>
-                          </a:highlight>
-                        </a:rPr>
-                        <a:t>Mehrabi 2021, </a:t>
-                      </a:r>
-                      <a:r>
-                        <a:rPr sz="1100" dirty="0">
-                          <a:solidFill>
-                            <a:srgbClr val="3D424E"/>
-                          </a:solidFill>
-                          <a:highlight>
-                            <a:srgbClr val="FFFF00"/>
-                          </a:highlight>
-                        </a:rPr>
-                        <a:t>Dominguez (DSAP) 2024, </a:t>
-                      </a:r>
-                      <a:r>
-                        <a:rPr sz="1100" dirty="0" err="1">
-                          <a:solidFill>
-                            <a:srgbClr val="3D424E"/>
-                          </a:solidFill>
-                          <a:highlight>
-                            <a:srgbClr val="00FF00"/>
-                          </a:highlight>
-                        </a:rPr>
-                        <a:t>Buolamwini</a:t>
-                      </a:r>
-                      <a:r>
-                        <a:rPr sz="1100" dirty="0">
-                          <a:solidFill>
-                            <a:srgbClr val="3D424E"/>
-                          </a:solidFill>
-                          <a:highlight>
-                            <a:srgbClr val="00FF00"/>
-                          </a:highlight>
-                        </a:rPr>
-                        <a:t> 2018</a:t>
+                        <a:rPr sz="1100">
+                          <a:solidFill>
+                            <a:srgbClr val="3D424E"/>
+                          </a:solidFill>
+                        </a:rPr>
+                        <a:t>Mehrabi 2021, Dominguez (DSAP) 2024, Buolamwini 2018</a:t>
                       </a:r>
                     </a:p>
                   </a:txBody>
@@ -11884,11 +10722,6 @@
                   </a:txBody>
                   <a:tcPr/>
                 </a:tc>
-                <a:extLst>
-                  <a:ext uri="{0D108BD9-81ED-4DB2-BD59-A6C34878D82A}">
-                    <a16:rowId xmlns:a16="http://schemas.microsoft.com/office/drawing/2014/main" val="10005"/>
-                  </a:ext>
-                </a:extLst>
               </a:tr>
               <a:tr h="396240">
                 <a:tc>
@@ -11952,9 +10785,6 @@
                           <a:solidFill>
                             <a:srgbClr val="3D424E"/>
                           </a:solidFill>
-                          <a:highlight>
-                            <a:srgbClr val="00FF00"/>
-                          </a:highlight>
                         </a:rPr>
                         <a:t>Lewontin 1972, Fuentes 2019, Neto 2025</a:t>
                       </a:r>
@@ -11968,7 +10798,7 @@
                     <a:lstStyle/>
                     <a:p>
                       <a:r>
-                        <a:rPr sz="1100" dirty="0">
+                        <a:rPr sz="1100">
                           <a:solidFill>
                             <a:srgbClr val="3D424E"/>
                           </a:solidFill>
@@ -11979,11 +10809,6 @@
                   </a:txBody>
                   <a:tcPr/>
                 </a:tc>
-                <a:extLst>
-                  <a:ext uri="{0D108BD9-81ED-4DB2-BD59-A6C34878D82A}">
-                    <a16:rowId xmlns:a16="http://schemas.microsoft.com/office/drawing/2014/main" val="10006"/>
-                  </a:ext>
-                </a:extLst>
               </a:tr>
               <a:tr h="396240">
                 <a:tc>
@@ -12043,60 +10868,24 @@
                     <a:lstStyle/>
                     <a:p>
                       <a:r>
-                        <a:rPr sz="1100" dirty="0">
-                          <a:solidFill>
-                            <a:srgbClr val="3D424E"/>
-                          </a:solidFill>
-                          <a:highlight>
-                            <a:srgbClr val="00FF00"/>
-                          </a:highlight>
-                        </a:rPr>
-                        <a:t>Hardt 2016, Perez (</a:t>
-                      </a:r>
-                      <a:r>
-                        <a:rPr sz="1100" dirty="0" err="1">
-                          <a:solidFill>
-                            <a:srgbClr val="3D424E"/>
-                          </a:solidFill>
-                          <a:highlight>
-                            <a:srgbClr val="00FF00"/>
-                          </a:highlight>
-                        </a:rPr>
-                        <a:t>FiLM</a:t>
-                      </a:r>
-                      <a:r>
-                        <a:rPr sz="1100" dirty="0">
-                          <a:solidFill>
-                            <a:srgbClr val="3D424E"/>
-                          </a:solidFill>
-                          <a:highlight>
-                            <a:srgbClr val="00FF00"/>
-                          </a:highlight>
-                        </a:rPr>
-                        <a:t>) 2018</a:t>
-                      </a:r>
-                      <a:r>
-                        <a:rPr sz="1100" dirty="0">
-                          <a:solidFill>
-                            <a:srgbClr val="3D424E"/>
-                          </a:solidFill>
-                          <a:highlight>
-                            <a:srgbClr val="FF0000"/>
-                          </a:highlight>
-                        </a:rPr>
-                        <a:t>, Kleinberg 2017</a:t>
-                      </a:r>
-                    </a:p>
-                  </a:txBody>
-                  <a:tcPr/>
-                </a:tc>
-                <a:tc>
-                  <a:txBody>
-                    <a:bodyPr/>
-                    <a:lstStyle/>
-                    <a:p>
-                      <a:r>
-                        <a:rPr sz="1100" dirty="0">
+                        <a:rPr sz="1100">
+                          <a:solidFill>
+                            <a:srgbClr val="3D424E"/>
+                          </a:solidFill>
+                        </a:rPr>
+                        <a:t>Hardt 2016, Perez (FiLM) 2018, Kleinberg 2017</a:t>
+                      </a:r>
+                    </a:p>
+                  </a:txBody>
+                  <a:tcPr/>
+                </a:tc>
+                <a:tc>
+                  <a:txBody>
+                    <a:bodyPr/>
+                    <a:lstStyle/>
+                    <a:p>
+                      <a:r>
+                        <a:rPr sz="1100">
                           <a:solidFill>
                             <a:srgbClr val="3D424E"/>
                           </a:solidFill>
@@ -12107,11 +10896,6 @@
                   </a:txBody>
                   <a:tcPr/>
                 </a:tc>
-                <a:extLst>
-                  <a:ext uri="{0D108BD9-81ED-4DB2-BD59-A6C34878D82A}">
-                    <a16:rowId xmlns:a16="http://schemas.microsoft.com/office/drawing/2014/main" val="10007"/>
-                  </a:ext>
-                </a:extLst>
               </a:tr>
               <a:tr h="396240">
                 <a:tc>
@@ -12154,163 +10938,29 @@
                     <a:lstStyle/>
                     <a:p>
                       <a:r>
-                        <a:rPr sz="1100" dirty="0">
-                          <a:solidFill>
-                            <a:srgbClr val="3D424E"/>
-                          </a:solidFill>
-                        </a:rPr>
-                        <a:t>Fairness </a:t>
-                      </a:r>
-                      <a:r>
-                        <a:rPr sz="1100" dirty="0" err="1">
-                          <a:solidFill>
-                            <a:srgbClr val="3D424E"/>
-                          </a:solidFill>
-                        </a:rPr>
-                        <a:t>em</a:t>
-                      </a:r>
-                      <a:r>
-                        <a:rPr sz="1100" dirty="0">
-                          <a:solidFill>
-                            <a:srgbClr val="3D424E"/>
-                          </a:solidFill>
-                        </a:rPr>
-                        <a:t> </a:t>
-                      </a:r>
-                      <a:r>
-                        <a:rPr sz="1100" dirty="0" err="1">
-                          <a:solidFill>
-                            <a:srgbClr val="3D424E"/>
-                          </a:solidFill>
-                        </a:rPr>
-                        <a:t>modelos</a:t>
-                      </a:r>
-                      <a:r>
-                        <a:rPr sz="1100" dirty="0">
-                          <a:solidFill>
-                            <a:srgbClr val="3D424E"/>
-                          </a:solidFill>
-                        </a:rPr>
-                        <a:t> vision-language (CLIP)</a:t>
-                      </a:r>
-                    </a:p>
-                  </a:txBody>
-                  <a:tcPr/>
-                </a:tc>
-                <a:tc>
-                  <a:txBody>
-                    <a:bodyPr/>
-                    <a:lstStyle/>
-                    <a:p>
-                      <a:r>
-                        <a:rPr sz="1100" dirty="0">
-                          <a:solidFill>
-                            <a:srgbClr val="3D424E"/>
-                          </a:solidFill>
-                          <a:highlight>
-                            <a:srgbClr val="00FF00"/>
-                          </a:highlight>
-                        </a:rPr>
-                        <a:t>Luo (</a:t>
-                      </a:r>
-                      <a:r>
-                        <a:rPr sz="1100" dirty="0" err="1">
-                          <a:solidFill>
-                            <a:srgbClr val="3D424E"/>
-                          </a:solidFill>
-                          <a:highlight>
-                            <a:srgbClr val="00FF00"/>
-                          </a:highlight>
-                        </a:rPr>
-                        <a:t>FairCLIP</a:t>
-                      </a:r>
-                      <a:r>
-                        <a:rPr sz="1100" dirty="0">
-                          <a:solidFill>
-                            <a:srgbClr val="3D424E"/>
-                          </a:solidFill>
-                          <a:highlight>
-                            <a:srgbClr val="00FF00"/>
-                          </a:highlight>
-                        </a:rPr>
-                        <a:t>) 2024</a:t>
-                      </a:r>
-                      <a:r>
-                        <a:rPr sz="1100" dirty="0">
-                          <a:solidFill>
-                            <a:srgbClr val="3D424E"/>
-                          </a:solidFill>
-                          <a:highlight>
-                            <a:srgbClr val="FFFF00"/>
-                          </a:highlight>
-                        </a:rPr>
-                        <a:t>, </a:t>
-                      </a:r>
-                      <a:r>
-                        <a:rPr sz="1100" dirty="0" err="1">
-                          <a:solidFill>
-                            <a:srgbClr val="3D424E"/>
-                          </a:solidFill>
-                          <a:highlight>
-                            <a:srgbClr val="FFFF00"/>
-                          </a:highlight>
-                        </a:rPr>
-                        <a:t>Dehdashtian</a:t>
-                      </a:r>
-                      <a:r>
-                        <a:rPr sz="1100" dirty="0">
-                          <a:solidFill>
-                            <a:srgbClr val="3D424E"/>
-                          </a:solidFill>
-                          <a:highlight>
-                            <a:srgbClr val="FFFF00"/>
-                          </a:highlight>
-                        </a:rPr>
-                        <a:t> (</a:t>
-                      </a:r>
-                      <a:r>
-                        <a:rPr sz="1100" dirty="0" err="1">
-                          <a:solidFill>
-                            <a:srgbClr val="3D424E"/>
-                          </a:solidFill>
-                          <a:highlight>
-                            <a:srgbClr val="FFFF00"/>
-                          </a:highlight>
-                        </a:rPr>
-                        <a:t>FairerCLIP</a:t>
-                      </a:r>
-                      <a:r>
-                        <a:rPr sz="1100" dirty="0">
-                          <a:solidFill>
-                            <a:srgbClr val="3D424E"/>
-                          </a:solidFill>
-                          <a:highlight>
-                            <a:srgbClr val="FFFF00"/>
-                          </a:highlight>
-                        </a:rPr>
-                        <a:t>) 2024, </a:t>
-                      </a:r>
-                      <a:r>
-                        <a:rPr sz="1100" dirty="0" err="1">
-                          <a:solidFill>
-                            <a:srgbClr val="3D424E"/>
-                          </a:solidFill>
-                          <a:highlight>
-                            <a:srgbClr val="FFFF00"/>
-                          </a:highlight>
-                        </a:rPr>
-                        <a:t>BendVLM</a:t>
-                      </a:r>
-                      <a:r>
-                        <a:rPr sz="1100" dirty="0">
-                          <a:solidFill>
-                            <a:srgbClr val="3D424E"/>
-                          </a:solidFill>
-                          <a:highlight>
-                            <a:srgbClr val="FFFF00"/>
-                          </a:highlight>
-                        </a:rPr>
-                        <a:t> 2024</a:t>
+                        <a:rPr sz="1100">
+                          <a:solidFill>
+                            <a:srgbClr val="3D424E"/>
+                          </a:solidFill>
+                        </a:rPr>
+                        <a:t>Fairness em modelos vision-language (CLIP, BLIP)</a:t>
+                      </a:r>
+                    </a:p>
+                  </a:txBody>
+                  <a:tcPr/>
+                </a:tc>
+                <a:tc>
+                  <a:txBody>
+                    <a:bodyPr/>
+                    <a:lstStyle/>
+                    <a:p>
+                      <a:r>
+                        <a:rPr sz="1100">
+                          <a:solidFill>
+                            <a:srgbClr val="3D424E"/>
+                          </a:solidFill>
+                        </a:rPr>
+                        <a:t>Luo (FairCLIP) 2024, Dehdashtian (FairerCLIP) 2024, BendVLM 2024</a:t>
                       </a:r>
                     </a:p>
                   </a:txBody>
@@ -12333,11 +10983,6 @@
                   </a:txBody>
                   <a:tcPr/>
                 </a:tc>
-                <a:extLst>
-                  <a:ext uri="{0D108BD9-81ED-4DB2-BD59-A6C34878D82A}">
-                    <a16:rowId xmlns:a16="http://schemas.microsoft.com/office/drawing/2014/main" val="10008"/>
-                  </a:ext>
-                </a:extLst>
               </a:tr>
               <a:tr h="396240">
                 <a:tc>
@@ -12397,70 +11042,12 @@
                     <a:lstStyle/>
                     <a:p>
                       <a:r>
-                        <a:rPr sz="1100" dirty="0">
-                          <a:solidFill>
-                            <a:srgbClr val="3D424E"/>
-                          </a:solidFill>
-                          <a:highlight>
-                            <a:srgbClr val="FFFF00"/>
-                          </a:highlight>
-                        </a:rPr>
-                        <a:t>Bian (</a:t>
-                      </a:r>
-                      <a:r>
-                        <a:rPr sz="1100" dirty="0" err="1">
-                          <a:solidFill>
-                            <a:srgbClr val="3D424E"/>
-                          </a:solidFill>
-                          <a:highlight>
-                            <a:srgbClr val="FFFF00"/>
-                          </a:highlight>
-                        </a:rPr>
-                        <a:t>LoRA</a:t>
-                      </a:r>
-                      <a:r>
-                        <a:rPr sz="1100" dirty="0">
-                          <a:solidFill>
-                            <a:srgbClr val="3D424E"/>
-                          </a:solidFill>
-                          <a:highlight>
-                            <a:srgbClr val="FFFF00"/>
-                          </a:highlight>
-                        </a:rPr>
-                        <a:t>-FAIR) 2025, </a:t>
-                      </a:r>
-                      <a:r>
-                        <a:rPr sz="1100" dirty="0">
-                          <a:solidFill>
-                            <a:srgbClr val="3D424E"/>
-                          </a:solidFill>
-                          <a:highlight>
-                            <a:srgbClr val="00FF00"/>
-                          </a:highlight>
-                        </a:rPr>
-                        <a:t>Tian (</a:t>
-                      </a:r>
-                      <a:r>
-                        <a:rPr sz="1100" dirty="0" err="1">
-                          <a:solidFill>
-                            <a:srgbClr val="3D424E"/>
-                          </a:solidFill>
-                          <a:highlight>
-                            <a:srgbClr val="00FF00"/>
-                          </a:highlight>
-                        </a:rPr>
-                        <a:t>FairViT</a:t>
-                      </a:r>
-                      <a:r>
-                        <a:rPr sz="1100" dirty="0">
-                          <a:solidFill>
-                            <a:srgbClr val="3D424E"/>
-                          </a:solidFill>
-                          <a:highlight>
-                            <a:srgbClr val="00FF00"/>
-                          </a:highlight>
-                        </a:rPr>
-                        <a:t>) 2024, Zhao (AIM-Fair) 2025</a:t>
+                        <a:rPr sz="1100">
+                          <a:solidFill>
+                            <a:srgbClr val="3D424E"/>
+                          </a:solidFill>
+                        </a:rPr>
+                        <a:t>Bian (LoRA-FAIR) 2025, Tian (FairViT) 2024, Zhao (AIM-Fair) 2025</a:t>
                       </a:r>
                     </a:p>
                   </a:txBody>
@@ -12483,11 +11070,6 @@
                   </a:txBody>
                   <a:tcPr/>
                 </a:tc>
-                <a:extLst>
-                  <a:ext uri="{0D108BD9-81ED-4DB2-BD59-A6C34878D82A}">
-                    <a16:rowId xmlns:a16="http://schemas.microsoft.com/office/drawing/2014/main" val="10009"/>
-                  </a:ext>
-                </a:extLst>
               </a:tr>
               <a:tr h="396240">
                 <a:tc>
@@ -12547,93 +11129,24 @@
                     <a:lstStyle/>
                     <a:p>
                       <a:r>
-                        <a:rPr sz="1100" dirty="0">
-                          <a:solidFill>
-                            <a:srgbClr val="3D424E"/>
-                          </a:solidFill>
-                          <a:highlight>
-                            <a:srgbClr val="00FF00"/>
-                          </a:highlight>
-                        </a:rPr>
-                        <a:t>Schroff (</a:t>
-                      </a:r>
-                      <a:r>
-                        <a:rPr sz="1100" dirty="0" err="1">
-                          <a:solidFill>
-                            <a:srgbClr val="3D424E"/>
-                          </a:solidFill>
-                          <a:highlight>
-                            <a:srgbClr val="00FF00"/>
-                          </a:highlight>
-                        </a:rPr>
-                        <a:t>FaceNet</a:t>
-                      </a:r>
-                      <a:r>
-                        <a:rPr sz="1100" dirty="0">
-                          <a:solidFill>
-                            <a:srgbClr val="3D424E"/>
-                          </a:solidFill>
-                          <a:highlight>
-                            <a:srgbClr val="00FF00"/>
-                          </a:highlight>
-                        </a:rPr>
-                        <a:t>) 2015, Deng (</a:t>
-                      </a:r>
-                      <a:r>
-                        <a:rPr sz="1100" dirty="0" err="1">
-                          <a:solidFill>
-                            <a:srgbClr val="3D424E"/>
-                          </a:solidFill>
-                          <a:highlight>
-                            <a:srgbClr val="00FF00"/>
-                          </a:highlight>
-                        </a:rPr>
-                        <a:t>ArcFace</a:t>
-                      </a:r>
-                      <a:r>
-                        <a:rPr sz="1100" dirty="0">
-                          <a:solidFill>
-                            <a:srgbClr val="3D424E"/>
-                          </a:solidFill>
-                          <a:highlight>
-                            <a:srgbClr val="00FF00"/>
-                          </a:highlight>
-                        </a:rPr>
-                        <a:t>) 2019, Kim (</a:t>
-                      </a:r>
-                      <a:r>
-                        <a:rPr sz="1100" dirty="0" err="1">
-                          <a:solidFill>
-                            <a:srgbClr val="3D424E"/>
-                          </a:solidFill>
-                          <a:highlight>
-                            <a:srgbClr val="00FF00"/>
-                          </a:highlight>
-                        </a:rPr>
-                        <a:t>AdaFace</a:t>
-                      </a:r>
-                      <a:r>
-                        <a:rPr sz="1100" dirty="0">
-                          <a:solidFill>
-                            <a:srgbClr val="3D424E"/>
-                          </a:solidFill>
-                          <a:highlight>
-                            <a:srgbClr val="00FF00"/>
-                          </a:highlight>
-                        </a:rPr>
-                        <a:t>) 2022</a:t>
-                      </a:r>
-                    </a:p>
-                  </a:txBody>
-                  <a:tcPr/>
-                </a:tc>
-                <a:tc>
-                  <a:txBody>
-                    <a:bodyPr/>
-                    <a:lstStyle/>
-                    <a:p>
-                      <a:r>
-                        <a:rPr sz="1100" dirty="0">
+                        <a:rPr sz="1100">
+                          <a:solidFill>
+                            <a:srgbClr val="3D424E"/>
+                          </a:solidFill>
+                        </a:rPr>
+                        <a:t>Schroff (FaceNet) 2015, Deng (ArcFace) 2019, Kim (AdaFace) 2022</a:t>
+                      </a:r>
+                    </a:p>
+                  </a:txBody>
+                  <a:tcPr/>
+                </a:tc>
+                <a:tc>
+                  <a:txBody>
+                    <a:bodyPr/>
+                    <a:lstStyle/>
+                    <a:p>
+                      <a:r>
+                        <a:rPr sz="1100">
                           <a:solidFill>
                             <a:srgbClr val="3D424E"/>
                           </a:solidFill>
@@ -12644,11 +11157,6 @@
                   </a:txBody>
                   <a:tcPr/>
                 </a:tc>
-                <a:extLst>
-                  <a:ext uri="{0D108BD9-81ED-4DB2-BD59-A6C34878D82A}">
-                    <a16:rowId xmlns:a16="http://schemas.microsoft.com/office/drawing/2014/main" val="10010"/>
-                  </a:ext>
-                </a:extLst>
               </a:tr>
               <a:tr h="396240">
                 <a:tc>
@@ -12691,134 +11199,41 @@
                     <a:lstStyle/>
                     <a:p>
                       <a:r>
-                        <a:rPr sz="1100" dirty="0" err="1">
-                          <a:solidFill>
-                            <a:srgbClr val="3D424E"/>
-                          </a:solidFill>
-                        </a:rPr>
-                        <a:t>Direções</a:t>
-                      </a:r>
-                      <a:r>
-                        <a:rPr sz="1100" dirty="0">
-                          <a:solidFill>
-                            <a:srgbClr val="3D424E"/>
-                          </a:solidFill>
-                        </a:rPr>
-                        <a:t> </a:t>
-                      </a:r>
-                      <a:r>
-                        <a:rPr sz="1100" dirty="0" err="1">
-                          <a:solidFill>
-                            <a:srgbClr val="3D424E"/>
-                          </a:solidFill>
-                        </a:rPr>
-                        <a:t>adjacentes</a:t>
-                      </a:r>
-                      <a:r>
-                        <a:rPr sz="1100" dirty="0">
-                          <a:solidFill>
-                            <a:srgbClr val="3D424E"/>
-                          </a:solidFill>
-                        </a:rPr>
-                        <a:t> (federated, synthetic, post-hoc)</a:t>
-                      </a:r>
-                    </a:p>
-                  </a:txBody>
-                  <a:tcPr/>
-                </a:tc>
-                <a:tc>
-                  <a:txBody>
-                    <a:bodyPr/>
-                    <a:lstStyle/>
-                    <a:p>
-                      <a:r>
-                        <a:rPr sz="1100" dirty="0">
-                          <a:solidFill>
-                            <a:srgbClr val="3D424E"/>
-                          </a:solidFill>
-                          <a:highlight>
-                            <a:srgbClr val="FF0000"/>
-                          </a:highlight>
-                        </a:rPr>
-                        <a:t>Salvador (</a:t>
-                      </a:r>
-                      <a:r>
-                        <a:rPr sz="1100" dirty="0" err="1">
-                          <a:solidFill>
-                            <a:srgbClr val="3D424E"/>
-                          </a:solidFill>
-                          <a:highlight>
-                            <a:srgbClr val="FF0000"/>
-                          </a:highlight>
-                        </a:rPr>
-                        <a:t>FairCal</a:t>
-                      </a:r>
-                      <a:r>
-                        <a:rPr sz="1100" dirty="0">
-                          <a:solidFill>
-                            <a:srgbClr val="3D424E"/>
-                          </a:solidFill>
-                          <a:highlight>
-                            <a:srgbClr val="FF0000"/>
-                          </a:highlight>
-                        </a:rPr>
-                        <a:t>) 2021, </a:t>
-                      </a:r>
-                      <a:r>
-                        <a:rPr sz="1100" dirty="0" err="1">
-                          <a:solidFill>
-                            <a:srgbClr val="3D424E"/>
-                          </a:solidFill>
-                          <a:highlight>
-                            <a:srgbClr val="FF0000"/>
-                          </a:highlight>
-                        </a:rPr>
-                        <a:t>FairImagen</a:t>
-                      </a:r>
-                      <a:r>
-                        <a:rPr sz="1100" dirty="0">
-                          <a:solidFill>
-                            <a:srgbClr val="3D424E"/>
-                          </a:solidFill>
-                          <a:highlight>
-                            <a:srgbClr val="FF0000"/>
-                          </a:highlight>
-                        </a:rPr>
-                        <a:t> 2025, </a:t>
-                      </a:r>
-                      <a:r>
-                        <a:rPr sz="1100" dirty="0" err="1">
-                          <a:solidFill>
-                            <a:srgbClr val="3D424E"/>
-                          </a:solidFill>
-                          <a:highlight>
-                            <a:srgbClr val="FF0000"/>
-                          </a:highlight>
-                        </a:rPr>
-                        <a:t>VoIDFace</a:t>
-                      </a:r>
-                      <a:r>
-                        <a:rPr sz="1100" dirty="0">
-                          <a:solidFill>
-                            <a:srgbClr val="3D424E"/>
-                          </a:solidFill>
-                          <a:highlight>
-                            <a:srgbClr val="FF0000"/>
-                          </a:highlight>
-                        </a:rPr>
-                        <a:t> 2025</a:t>
-                      </a:r>
-                    </a:p>
-                  </a:txBody>
-                  <a:tcPr/>
-                </a:tc>
-                <a:tc>
-                  <a:txBody>
-                    <a:bodyPr/>
-                    <a:lstStyle/>
-                    <a:p>
-                      <a:r>
-                        <a:rPr sz="1100" dirty="0">
+                        <a:rPr sz="1100">
+                          <a:solidFill>
+                            <a:srgbClr val="3D424E"/>
+                          </a:solidFill>
+                        </a:rPr>
+                        <a:t>Direções adjacentes (federated, synthetic, post-hoc)</a:t>
+                      </a:r>
+                    </a:p>
+                  </a:txBody>
+                  <a:tcPr/>
+                </a:tc>
+                <a:tc>
+                  <a:txBody>
+                    <a:bodyPr/>
+                    <a:lstStyle/>
+                    <a:p>
+                      <a:r>
+                        <a:rPr sz="1100">
+                          <a:solidFill>
+                            <a:srgbClr val="3D424E"/>
+                          </a:solidFill>
+                        </a:rPr>
+                        <a:t>Salvador (FairCal) 2021, FairImagen 2025, VoIDFace 2025</a:t>
+                      </a:r>
+                    </a:p>
+                  </a:txBody>
+                  <a:tcPr/>
+                </a:tc>
+                <a:tc>
+                  <a:txBody>
+                    <a:bodyPr/>
+                    <a:lstStyle/>
+                    <a:p>
+                      <a:r>
+                        <a:rPr sz="1100">
                           <a:solidFill>
                             <a:srgbClr val="3D424E"/>
                           </a:solidFill>
@@ -12829,11 +11244,6 @@
                   </a:txBody>
                   <a:tcPr/>
                 </a:tc>
-                <a:extLst>
-                  <a:ext uri="{0D108BD9-81ED-4DB2-BD59-A6C34878D82A}">
-                    <a16:rowId xmlns:a16="http://schemas.microsoft.com/office/drawing/2014/main" val="10011"/>
-                  </a:ext>
-                </a:extLst>
               </a:tr>
             </a:tbl>
           </a:graphicData>
@@ -12883,7 +11293,7 @@
 </file>
 
 <file path=ppt/slides/slide8.xml><?xml version="1.0" encoding="utf-8"?>
-<p:sld xmlns:a="http://schemas.openxmlformats.org/drawingml/2006/main" xmlns:r="http://schemas.openxmlformats.org/officeDocument/2006/relationships" xmlns:p="http://schemas.openxmlformats.org/presentationml/2006/main">
+<p:sld xmlns:a="http://schemas.openxmlformats.org/drawingml/2006/main" xmlns:p="http://schemas.openxmlformats.org/presentationml/2006/main" xmlns:r="http://schemas.openxmlformats.org/officeDocument/2006/relationships">
   <p:cSld>
     <p:spTree>
       <p:nvGrpSpPr>
@@ -12891,14 +11301,7 @@
         <p:cNvGrpSpPr/>
         <p:nvPr/>
       </p:nvGrpSpPr>
-      <p:grpSpPr>
-        <a:xfrm>
-          <a:off x="0" y="0"/>
-          <a:ext cx="0" cy="0"/>
-          <a:chOff x="0" y="0"/>
-          <a:chExt cx="0" cy="0"/>
-        </a:xfrm>
-      </p:grpSpPr>
+      <p:grpSpPr/>
       <p:sp>
         <p:nvSpPr>
           <p:cNvPr id="2" name="Rectangle 1"/>
@@ -12939,7 +11342,6 @@
           <a:lstStyle/>
           <a:p>
             <a:pPr algn="ctr"/>
-            <a:endParaRPr/>
           </a:p>
         </p:txBody>
       </p:sp>
@@ -13034,7 +11436,7 @@
 </file>
 
 <file path=ppt/slides/slide9.xml><?xml version="1.0" encoding="utf-8"?>
-<p:sld xmlns:a="http://schemas.openxmlformats.org/drawingml/2006/main" xmlns:r="http://schemas.openxmlformats.org/officeDocument/2006/relationships" xmlns:p="http://schemas.openxmlformats.org/presentationml/2006/main">
+<p:sld xmlns:a="http://schemas.openxmlformats.org/drawingml/2006/main" xmlns:p="http://schemas.openxmlformats.org/presentationml/2006/main" xmlns:r="http://schemas.openxmlformats.org/officeDocument/2006/relationships">
   <p:cSld>
     <p:spTree>
       <p:nvGrpSpPr>
@@ -13042,14 +11444,7 @@
         <p:cNvGrpSpPr/>
         <p:nvPr/>
       </p:nvGrpSpPr>
-      <p:grpSpPr>
-        <a:xfrm>
-          <a:off x="0" y="0"/>
-          <a:ext cx="0" cy="0"/>
-          <a:chOff x="0" y="0"/>
-          <a:chExt cx="0" cy="0"/>
-        </a:xfrm>
-      </p:grpSpPr>
+      <p:grpSpPr/>
       <p:sp>
         <p:nvSpPr>
           <p:cNvPr id="2" name="TextBox 1"/>
@@ -13125,7 +11520,6 @@
           <a:lstStyle/>
           <a:p>
             <a:pPr algn="ctr"/>
-            <a:endParaRPr/>
           </a:p>
         </p:txBody>
       </p:sp>
@@ -13148,34 +11542,10 @@
                 <a:tableStyleId>{5C22544A-7EE6-4342-B048-85BDC9FD1C3A}</a:tableStyleId>
               </a:tblPr>
               <a:tblGrid>
-                <a:gridCol w="2926080">
-                  <a:extLst>
-                    <a:ext uri="{9D8B030D-6E8A-4147-A177-3AD203B41FA5}">
-                      <a16:colId xmlns:a16="http://schemas.microsoft.com/office/drawing/2014/main" val="20000"/>
-                    </a:ext>
-                  </a:extLst>
-                </a:gridCol>
-                <a:gridCol w="914400">
-                  <a:extLst>
-                    <a:ext uri="{9D8B030D-6E8A-4147-A177-3AD203B41FA5}">
-                      <a16:colId xmlns:a16="http://schemas.microsoft.com/office/drawing/2014/main" val="20001"/>
-                    </a:ext>
-                  </a:extLst>
-                </a:gridCol>
-                <a:gridCol w="914400">
-                  <a:extLst>
-                    <a:ext uri="{9D8B030D-6E8A-4147-A177-3AD203B41FA5}">
-                      <a16:colId xmlns:a16="http://schemas.microsoft.com/office/drawing/2014/main" val="20002"/>
-                    </a:ext>
-                  </a:extLst>
-                </a:gridCol>
-                <a:gridCol w="6675120">
-                  <a:extLst>
-                    <a:ext uri="{9D8B030D-6E8A-4147-A177-3AD203B41FA5}">
-                      <a16:colId xmlns:a16="http://schemas.microsoft.com/office/drawing/2014/main" val="20003"/>
-                    </a:ext>
-                  </a:extLst>
-                </a:gridCol>
+                <a:gridCol w="2926080"/>
+                <a:gridCol w="914400"/>
+                <a:gridCol w="914400"/>
+                <a:gridCol w="6675120"/>
               </a:tblGrid>
               <a:tr h="679268">
                 <a:tc>
@@ -13262,11 +11632,6 @@
                     </a:solidFill>
                   </a:tcPr>
                 </a:tc>
-                <a:extLst>
-                  <a:ext uri="{0D108BD9-81ED-4DB2-BD59-A6C34878D82A}">
-                    <a16:rowId xmlns:a16="http://schemas.microsoft.com/office/drawing/2014/main" val="10000"/>
-                  </a:ext>
-                </a:extLst>
               </a:tr>
               <a:tr h="679268">
                 <a:tc>
@@ -13353,11 +11718,6 @@
                     </a:solidFill>
                   </a:tcPr>
                 </a:tc>
-                <a:extLst>
-                  <a:ext uri="{0D108BD9-81ED-4DB2-BD59-A6C34878D82A}">
-                    <a16:rowId xmlns:a16="http://schemas.microsoft.com/office/drawing/2014/main" val="10001"/>
-                  </a:ext>
-                </a:extLst>
               </a:tr>
               <a:tr h="679268">
                 <a:tc>
@@ -13428,11 +11788,6 @@
                   </a:txBody>
                   <a:tcPr/>
                 </a:tc>
-                <a:extLst>
-                  <a:ext uri="{0D108BD9-81ED-4DB2-BD59-A6C34878D82A}">
-                    <a16:rowId xmlns:a16="http://schemas.microsoft.com/office/drawing/2014/main" val="10002"/>
-                  </a:ext>
-                </a:extLst>
               </a:tr>
               <a:tr h="679268">
                 <a:tc>
@@ -13503,11 +11858,6 @@
                   </a:txBody>
                   <a:tcPr/>
                 </a:tc>
-                <a:extLst>
-                  <a:ext uri="{0D108BD9-81ED-4DB2-BD59-A6C34878D82A}">
-                    <a16:rowId xmlns:a16="http://schemas.microsoft.com/office/drawing/2014/main" val="10003"/>
-                  </a:ext>
-                </a:extLst>
               </a:tr>
               <a:tr h="679268">
                 <a:tc>
@@ -13578,11 +11928,6 @@
                   </a:txBody>
                   <a:tcPr/>
                 </a:tc>
-                <a:extLst>
-                  <a:ext uri="{0D108BD9-81ED-4DB2-BD59-A6C34878D82A}">
-                    <a16:rowId xmlns:a16="http://schemas.microsoft.com/office/drawing/2014/main" val="10004"/>
-                  </a:ext>
-                </a:extLst>
               </a:tr>
               <a:tr h="679268">
                 <a:tc>
@@ -13653,11 +11998,6 @@
                   </a:txBody>
                   <a:tcPr/>
                 </a:tc>
-                <a:extLst>
-                  <a:ext uri="{0D108BD9-81ED-4DB2-BD59-A6C34878D82A}">
-                    <a16:rowId xmlns:a16="http://schemas.microsoft.com/office/drawing/2014/main" val="10005"/>
-                  </a:ext>
-                </a:extLst>
               </a:tr>
               <a:tr h="679272">
                 <a:tc>
@@ -13744,11 +12084,6 @@
                     </a:solidFill>
                   </a:tcPr>
                 </a:tc>
-                <a:extLst>
-                  <a:ext uri="{0D108BD9-81ED-4DB2-BD59-A6C34878D82A}">
-                    <a16:rowId xmlns:a16="http://schemas.microsoft.com/office/drawing/2014/main" val="10006"/>
-                  </a:ext>
-                </a:extLst>
               </a:tr>
             </a:tbl>
           </a:graphicData>
